--- a/Curso Gas B/09 - UNE 60670 - Generalidades y terminologia/09 - UNE 60670 - Generalidades y terminologia - Vídeo 3.pptx
+++ b/Curso Gas B/09 - UNE 60670 - Generalidades y terminologia/09 - UNE 60670 - Generalidades y terminologia - Vídeo 3.pptx
@@ -25,6 +25,7 @@
     <p:sldId id="273" r:id="rId25"/>
     <p:sldId id="274" r:id="rId26"/>
     <p:sldId id="275" r:id="rId27"/>
+    <p:sldId id="276" r:id="rId28"/>
   </p:sldIdLst>
   <p:sldSz cx="12191695" cy="6858000" type="screen4x3"/>
   <p:notesSz cx="6858000" cy="9144000"/>
@@ -596,12 +597,12 @@
           <a:lstStyle/>
           <a:p>
             <a:r>
-              <a:t>N1: ¿La potencia útil es lo mismo que el consumo del aparato?</a:t>
-            </a:r>
-          </a:p>
-          <a:p>
-            <a:r>
-              <a:t>N2: No, y no conviene mezclarlos. El consumo calorífico, que vimos antes, es la energía que el aparato coge del gas. La potencia útil, P, es la energía que de verdad transmite al agua o al aire que calienta; es lo que sale aprovechable, en kilovatios. Entre una y otra está el rendimiento: nunca aprovechas el cien por cien. La potencia útil nominal, Pn, es el valor máximo de esa potencia útil que declara el fabricante. Regla: el consumo es lo que entra; la útil es lo que sale al fluido. Y esto no es un capricho: la potencia útil conjunta es la que luego decide, por ejemplo, si un local es sala de máquinas.</a:t>
+              <a:t>N1: ¿Por qué hay dos poderes caloríficos, superior e inferior?</a:t>
+            </a:r>
+          </a:p>
+          <a:p>
+            <a:r>
+              <a:t>N2: Todo depende de una cosa: qué haces con el vapor de agua que sale al quemar. Cuando el gas arde produce, entre otras cosas, vapor de agua. Si en el cálculo supones que ese vapor se condensa y sueltas el calor que llevaba dentro, tienes el poder calorífico superior, Hs. Si supones que ese vapor se va por la chimenea sin recuperarlo, tienes el inferior, Hi. La diferencia es ese calor del agua. Por eso las calderas de condensación rinden más: están hechas para condensar ese vapor y aprovechar hacia el Hs. Los fabricantes suelen dar el consumo referido al Hi. Ejemplo de avería: una caldera de condensación mal montada, sin salida de condensados o con el retorno demasiado caliente, no condensa y pierde justo esa ventaja.</a:t>
             </a:r>
           </a:p>
         </p:txBody>
@@ -671,12 +672,12 @@
           <a:lstStyle/>
           <a:p>
             <a:r>
-              <a:t>N1: Estas siglas de presiones me abruman. ¿Hay forma de ordenarlas?</a:t>
-            </a:r>
-          </a:p>
-          <a:p>
-            <a:r>
-              <a:t>N2: Sí, y es el bloque estrella del examen, así que lo dejamos clavado con truco de letra inicial. La MOP es la presión máxima de operación: la más alta a la que la instalación puede estar sometida de forma continuada, en condiciones normales; piensa la eme de mantenida. La MIP es la máxima en caso de incidente: la que se admite durante un breve periodo, todavía limitada por las seguridades; la i de incidente. La TOP es la temporal de operación: la máxima a la que puede operar de forma temporal bajo control de la regulación; la te de temporal. Y la OP, a secas, es la presión de operación: la que hay en un momento dado, ahora mismo. Resumen: MOP mantenida, MIP incidente, TOP temporal, OP actual. Por qué importa: confundirlas es dimensionar mal y acabar reventando o ahogando la instalación.</a:t>
+              <a:t>N1: ¿La potencia útil es lo mismo que el consumo del aparato?</a:t>
+            </a:r>
+          </a:p>
+          <a:p>
+            <a:r>
+              <a:t>N2: No, y no conviene mezclarlos. El consumo calorífico, que vimos antes, es la energía que el aparato coge del gas. La potencia útil, P, es la energía que de verdad transmite al agua o al aire que calienta; es lo que sale aprovechable, en kilovatios. Entre una y otra está el rendimiento: nunca aprovechas el cien por cien. La potencia útil nominal, Pn, es el valor máximo de esa potencia útil que declara el fabricante. Regla: el consumo es lo que entra; la útil es lo que sale al fluido. Y esto no es un capricho: la potencia útil conjunta es la que luego decide, por ejemplo, si un local es sala de máquinas.</a:t>
             </a:r>
           </a:p>
         </p:txBody>
@@ -746,12 +747,12 @@
           <a:lstStyle/>
           <a:p>
             <a:r>
-              <a:t>N1: ¿Y las presiones de diseño y de prueba?</a:t>
-            </a:r>
-          </a:p>
-          <a:p>
-            <a:r>
-              <a:t>N2: Estas son las de trabajo del proyectista y del que prueba. La presión de diseño, DP, es la máxima a la que técnicamente puede funcionar la instalación, y se usa para calcular la resistencia mecánica: con ella eliges tubos y accesorios que aguanten. La presión de garantía es distinta: es la mínima que la compañía te asegura al inicio de la instalación, justo a la salida de la llave de acometida; es el número con el que arrancas el cálculo, porque si te garantizan poco, tendrás que poner tubos más generosos para que llegue caudal. Y las de prueba, que usas para entregar la instalación: la STP es la presión de la prueba de resistencia mecánica; la CTP es la de la prueba conjunta de resistencia y estanquidad. Aviso de obra: probar a menos presión de la que toca deja pasar la fuga que no ves.</a:t>
+              <a:t>N1: Estas siglas de presiones me abruman. ¿Hay forma de ordenarlas?</a:t>
+            </a:r>
+          </a:p>
+          <a:p>
+            <a:r>
+              <a:t>N2: Sí, y es el bloque estrella del examen, así que lo dejamos clavado con truco de letra inicial. La MOP es la presión máxima de operación: la más alta a la que la instalación puede estar sometida de forma continuada, en condiciones normales; piensa la eme de mantenida. La MIP es la máxima en caso de incidente: la que se admite durante un breve periodo, todavía limitada por las seguridades; la i de incidente. La TOP es la temporal de operación: la máxima a la que puede operar de forma temporal bajo control de la regulación; la te de temporal. Y la OP, a secas, es la presión de operación: la que hay en un momento dado, ahora mismo. Resumen: MOP mantenida, MIP incidente, TOP temporal, OP actual. Por qué importa: confundirlas es dimensionar mal y acabar reventando o ahogando la instalación.</a:t>
             </a:r>
           </a:p>
         </p:txBody>
@@ -821,12 +822,12 @@
           <a:lstStyle/>
           <a:p>
             <a:r>
-              <a:t>N1: Cuando la norma dice una presión, ¿es presión total o qué?</a:t>
-            </a:r>
-          </a:p>
-          <a:p>
-            <a:r>
-              <a:t>N2: Muy buena pregunta, y es un detalle que cae. Todas las presiones de la norma son relativas, también llamadas manométricas. Quiere decir que se miden por encima de la presión atmosférica, tomando la atmósfera como cero, no en valor absoluto. Es lo natural, porque el manómetro que enchufas a la instalación ya marca así: en reposo, con la instalación abierta al aire, marca cero, aunque la atmósfera esté empujando. Este matiz aparece como nota al pie en la presión de diseño, pero aplica a todas las presiones de la UNE sesenta mil seiscientos setenta. Grábate la frase: en el gas, salvo que se diga lo contrario, la presión es relativa.</a:t>
+              <a:t>N1: ¿Y las presiones de diseño y de prueba?</a:t>
+            </a:r>
+          </a:p>
+          <a:p>
+            <a:r>
+              <a:t>N2: Estas son las de trabajo del proyectista y del que prueba. La presión de diseño, DP, es la máxima a la que técnicamente puede funcionar la instalación, y se usa para calcular la resistencia mecánica: con ella eliges tubos y accesorios que aguanten. La presión de garantía es distinta: es la mínima que la compañía te asegura al inicio de la instalación, justo a la salida de la llave de acometida; es el número con el que arrancas el cálculo, porque si te garantizan poco, tendrás que poner tubos más generosos para que llegue caudal. Y las de prueba, que usas para entregar la instalación: la STP es la presión de la prueba de resistencia mecánica; la CTP es la de la prueba conjunta de resistencia y estanquidad. Aviso de obra: probar a menos presión de la que toca deja pasar la fuga que no ves.</a:t>
             </a:r>
           </a:p>
         </p:txBody>
@@ -896,12 +897,12 @@
           <a:lstStyle/>
           <a:p>
             <a:r>
-              <a:t>N1: ¿Qué hace exactamente un regulador y qué es su tarado?</a:t>
-            </a:r>
-          </a:p>
-          <a:p>
-            <a:r>
-              <a:t>N2: El regulador de presión es la pieza que reduce la presión aguas abajo, es decir, después de él, y la mantiene dentro de unos límites aunque cambie el caudal; gracias a él, del alta que viene de la calle sale la baja que necesita el aparato. La presión de tarado es la predeterminada a la que se ajusta cada función de un dispositivo de regulación o de seguridad; tarar es afinar ese punto de disparo. No la confundas con la de garantía, que era la mínima de partida. Y aprovecho términos cercanos: los productos de la combustión son el conjunto de gases y vapor de agua que salen al quemar, los humos, que llevan monóxido si la combustión es mala; el quemador de encendido, o piloto, es un quemador pequeño cuya llama enciende el principal; y una puerta o registro estanco es la que, siendo ciega, cierra en todo su perímetro con una junta, para que no pase ni aire ni gas.</a:t>
+              <a:t>N1: Cuando la norma dice una presión, ¿es presión total o qué?</a:t>
+            </a:r>
+          </a:p>
+          <a:p>
+            <a:r>
+              <a:t>N2: Muy buena pregunta, y es un detalle que cae. Todas las presiones de la norma son relativas, también llamadas manométricas. Quiere decir que se miden por encima de la presión atmosférica, tomando la atmósfera como cero, no en valor absoluto. Es lo natural, porque el manómetro que enchufas a la instalación ya marca así: en reposo, con la instalación abierta al aire, marca cero, aunque la atmósfera esté empujando. Este matiz aparece como nota al pie en la presión de diseño, pero aplica a todas las presiones de la UNE sesenta mil seiscientos setenta. Grábate la frase: en el gas, salvo que se diga lo contrario, la presión es relativa.</a:t>
             </a:r>
           </a:p>
         </p:txBody>
@@ -971,12 +972,12 @@
           <a:lstStyle/>
           <a:p>
             <a:r>
-              <a:t>N1: Tiro y revoco, ¿son cosas distintas o lo mismo visto al revés?</a:t>
-            </a:r>
-          </a:p>
-          <a:p>
-            <a:r>
-              <a:t>N2: Son las dos caras del mismo conducto, una buena y una mala. El tiro es lo que debe pasar: una depresión, una succión suave que se genera entre los extremos del conducto y que empuja los humos hacia fuera; el aire caliente pesa menos y sube, y arrastra los humos. El revoco es el fallo: cuando el tiro no funciona, por un conducto obstruido, mal rematado o sin aire de aporte, parte de los humos se vuelven al local por el cortatiro. Y ahí es donde hay intoxicaciones por monóxido; puede ser puntual o continuado. El terminal, o deflector, es la pieza de arriba del todo, en el exterior, que protege el tiro del viento para que una racha no empuje los humos hacia dentro. Resumen: tiro bueno, humos fuera; revoco, humos dentro, peligro. En el control periódico esto es de lo primero que compruebas.</a:t>
+              <a:t>N1: ¿Qué hace exactamente un regulador y qué es su tarado?</a:t>
+            </a:r>
+          </a:p>
+          <a:p>
+            <a:r>
+              <a:t>N2: El regulador de presión es la pieza que reduce la presión aguas abajo, es decir, después de él, y la mantiene dentro de unos límites aunque cambie el caudal; gracias a él, del alta que viene de la calle sale la baja que necesita el aparato. La presión de tarado es la predeterminada a la que se ajusta cada función de un dispositivo de regulación o de seguridad; tarar es afinar ese punto de disparo. No la confundas con la de garantía, que era la mínima de partida. Y aprovecho términos cercanos: los productos de la combustión son el conjunto de gases y vapor de agua que salen al quemar, los humos, que llevan monóxido si la combustión es mala; el quemador de encendido, o piloto, es un quemador pequeño cuya llama enciende el principal; y una puerta o registro estanco es la que, siendo ciega, cierra en todo su perímetro con una junta, para que no pase ni aire ni gas.</a:t>
             </a:r>
           </a:p>
         </p:txBody>
@@ -1046,12 +1047,12 @@
           <a:lstStyle/>
           <a:p>
             <a:r>
-              <a:t>N1: Un shunt y un shunt invertido, ¿en qué se diferencian?</a:t>
-            </a:r>
-          </a:p>
-          <a:p>
-            <a:r>
-              <a:t>N2: En el sentido: uno saca y el otro mete. El shunt es un conducto de evacuación vertical, compartido, diseñado para sacar los humos de aparatos tipo B de varias plantas; cada planta no se une directamente al conducto general, sino a un conducto auxiliar que sube una planta antes de desembocar en el principal, y este termina por encima del tejado. El shunt invertido tiene la misma forma, vertical ascendente con conducto auxiliar de una planta, pero hace lo contrario: en vez de sacar humos, mete aire; toma aire limpio del exterior por su base y lo reparte a los locales de cada planta. Truco para no fallar: invertido igual a al revés igual a trae aire. Uno evacúa, el otro aporta.</a:t>
+              <a:t>N1: Tiro y revoco, ¿son cosas distintas o lo mismo visto al revés?</a:t>
+            </a:r>
+          </a:p>
+          <a:p>
+            <a:r>
+              <a:t>N2: Son las dos caras del mismo conducto, una buena y una mala. El tiro es lo que debe pasar: una depresión, una succión suave que se genera entre los extremos del conducto y que empuja los humos hacia fuera; el aire caliente pesa menos y sube, y arrastra los humos. El revoco es el fallo: cuando el tiro no funciona, por un conducto obstruido, mal rematado o sin aire de aporte, parte de los humos se vuelven al local por el cortatiro. Y ahí es donde hay intoxicaciones por monóxido; puede ser puntual o continuado. El terminal, o deflector, es la pieza de arriba del todo, en el exterior, que protege el tiro del viento para que una racha no empuje los humos hacia dentro. Resumen: tiro bueno, humos fuera; revoco, humos dentro, peligro. En el control periódico esto es de lo primero que compruebas.</a:t>
             </a:r>
           </a:p>
         </p:txBody>
@@ -1121,12 +1122,12 @@
           <a:lstStyle/>
           <a:p>
             <a:r>
-              <a:t>N1: ¿Cuándo un cuarto de calderas es sala de máquinas?</a:t>
-            </a:r>
-          </a:p>
-          <a:p>
-            <a:r>
-              <a:t>N2: El número mágico es setenta kilovatios. Si los equipos de producción de calor o frío que alberga el local suman una potencia útil nominal conjunta superior a setenta kilovatios, ese local es sala de máquinas, con exigencias reforzadas de ventilación y seguridad. Por debajo o igual a setenta kilovatios no lo es; tampoco lo son los equipos autónomos de cualquier potencia, ni los locales de solo cocción, iluminación o lavandería. O sea, no basta con que haya una caldera: manda la potencia conjunta. Y el semisótano: una planta es semisótano cuando su suelo queda, en todo su contorno, más de sesenta centímetros por debajo del nivel exterior o del patio de ventilación contiguo. El número clave son sesenta centímetros. Dato de examen: en esta edición desaparece el primer sótano; para el gas solo manejas semisótano.</a:t>
+              <a:t>N1: Un shunt y un shunt invertido, ¿en qué se diferencian?</a:t>
+            </a:r>
+          </a:p>
+          <a:p>
+            <a:r>
+              <a:t>N2: En el sentido: uno saca y el otro mete. El shunt es un conducto de evacuación vertical, compartido, diseñado para sacar los humos de aparatos tipo B de varias plantas; cada planta no se une directamente al conducto general, sino a un conducto auxiliar que sube una planta antes de desembocar en el principal, y este termina por encima del tejado. El shunt invertido tiene la misma forma, vertical ascendente con conducto auxiliar de una planta, pero hace lo contrario: en vez de sacar humos, mete aire; toma aire limpio del exterior por su base y lo reparte a los locales de cada planta. Truco para no fallar: invertido igual a al revés igual a trae aire. Uno evacúa, el otro aporta.</a:t>
             </a:r>
           </a:p>
         </p:txBody>
@@ -1196,12 +1197,12 @@
           <a:lstStyle/>
           <a:p>
             <a:r>
-              <a:t>N1: ¿Qué diferencia hay entre soldadura blanda y fuerte?</a:t>
-            </a:r>
-          </a:p>
-          <a:p>
-            <a:r>
-              <a:t>N2: Un solo número lo decide: cuatrocientos cincuenta grados, la temperatura a la que funde el material de aportación, el metal que rellena la unión. Si ese material funde por debajo de cuatrocientos cincuenta grados, y a partir de doscientos veinte, la soldadura es blanda. Si funde a cuatrocientos cincuenta grados o más, es fuerte. La fuerte aguanta más y se exige en los tramos más comprometidos. Por qué importa tanto: elegir mal la unión es, directamente, una fuga esperando. Y aprovecho un término cercano: el tallo es la pieza de transición que permite pasar de la parte enterrada a la parte aérea de la instalación, o al revés; ese cambio tierra-aire siempre se hace con una pieza pensada para ello.</a:t>
+              <a:t>N1: ¿Cuándo un cuarto de calderas es sala de máquinas?</a:t>
+            </a:r>
+          </a:p>
+          <a:p>
+            <a:r>
+              <a:t>N2: El número mágico es setenta kilovatios. Si los equipos de producción de calor o frío que alberga el local suman una potencia útil nominal conjunta superior a setenta kilovatios, ese local es sala de máquinas, con exigencias reforzadas de ventilación y seguridad. Por debajo o igual a setenta kilovatios no lo es; tampoco lo son los equipos autónomos de cualquier potencia, ni los locales de solo cocción, iluminación o lavandería. O sea, no basta con que haya una caldera: manda la potencia conjunta. Y el semisótano: una planta es semisótano cuando su suelo queda, en todo su contorno, más de sesenta centímetros por debajo del nivel exterior o del patio de ventilación contiguo. El número clave son sesenta centímetros. Dato de examen: en esta edición desaparece el primer sótano; para el gas solo manejas semisótano.</a:t>
             </a:r>
           </a:p>
         </p:txBody>
@@ -1271,12 +1272,12 @@
           <a:lstStyle/>
           <a:p>
             <a:r>
-              <a:t>N1: Hay varias válvulas de seguridad, ¿hacen todas lo mismo?</a:t>
-            </a:r>
-          </a:p>
-          <a:p>
-            <a:r>
-              <a:t>N2: No, cada una tiene su papel; no las mezcles. La válvula de alivio de seguridad, o de sobrepresión, la VAS, alivia: cuando la presión pasa de un valor, suelta al exterior una pequeña cantidad de gas para bajarla, y luego sigue trabajando; respira. Las VIS, en cambio, cortan. La VISmáx, de máxima presión, corta el suministro aguas abajo cuando la presión sube demasiado. La VISmín, de mínima, corta cuando la presión baja demasiado. Y la válvula automática de corte tiene la lógica a prueba de fallos que ya conoces: abre cuando recibe energía y se cierra sola en cuanto le falta, con rearme siempre manual. Regla: la de alivio respira; las VIS cierran, una por exceso y otra por defecto. En obra, cuando algo salta y corta el gas sin motivo aparente, sospecha del tarado de estas o del regulador antes de tocar el aparato.</a:t>
+              <a:t>N1: ¿Qué diferencia hay entre soldadura blanda y fuerte?</a:t>
+            </a:r>
+          </a:p>
+          <a:p>
+            <a:r>
+              <a:t>N2: Un solo número lo decide: cuatrocientos cincuenta grados, la temperatura a la que funde el material de aportación, el metal que rellena la unión. Si ese material funde por debajo de cuatrocientos cincuenta grados, y a partir de doscientos veinte, la soldadura es blanda. Si funde a cuatrocientos cincuenta grados o más, es fuerte. La fuerte aguanta más y se exige en los tramos más comprometidos. Por qué importa tanto: elegir mal la unión es, directamente, una fuga esperando. Y aprovecho un término cercano: el tallo es la pieza de transición que permite pasar de la parte enterrada a la parte aérea de la instalación, o al revés; ese cambio tierra-aire siempre se hace con una pieza pensada para ello.</a:t>
             </a:r>
           </a:p>
         </p:txBody>
@@ -1421,6 +1422,81 @@
           <a:lstStyle/>
           <a:p>
             <a:r>
+              <a:t>N1: Hay varias válvulas de seguridad, ¿hacen todas lo mismo?</a:t>
+            </a:r>
+          </a:p>
+          <a:p>
+            <a:r>
+              <a:t>N2: No, cada una tiene su papel; no las mezcles. La válvula de alivio de seguridad, o de sobrepresión, la VAS, alivia: cuando la presión pasa de un valor, suelta al exterior una pequeña cantidad de gas para bajarla, y luego sigue trabajando; respira. Las VIS, en cambio, cortan. La VISmáx, de máxima presión, corta el suministro aguas abajo cuando la presión sube demasiado. La VISmín, de mínima, corta cuando la presión baja demasiado. Y la válvula automática de corte tiene la lógica a prueba de fallos que ya conoces: abre cuando recibe energía y se cierra sola en cuanto le falta, con rearme siempre manual. Regla: la de alivio respira; las VIS cierran, una por exceso y otra por defecto. En obra, cuando algo salta y corta el gas sin motivo aparente, sospecha del tarado de estas o del regulador antes de tocar el aparato.</a:t>
+            </a:r>
+          </a:p>
+        </p:txBody>
+      </p:sp>
+      <p:sp>
+        <p:nvSpPr>
+          <p:cNvPr id="4" name="Slide Number Placeholder 3"/>
+          <p:cNvSpPr>
+            <a:spLocks noGrp="1"/>
+          </p:cNvSpPr>
+          <p:nvPr>
+            <p:ph type="sldNum" idx="5" sz="quarter"/>
+          </p:nvPr>
+        </p:nvSpPr>
+        <p:spPr/>
+      </p:sp>
+    </p:spTree>
+  </p:cSld>
+  <p:clrMapOvr>
+    <a:masterClrMapping/>
+  </p:clrMapOvr>
+</p:notes>
+</file>
+
+<file path=ppt/notesSlides/notesSlide21.xml><?xml version="1.0" encoding="utf-8"?>
+<p:notes xmlns:a="http://schemas.openxmlformats.org/drawingml/2006/main" xmlns:p="http://schemas.openxmlformats.org/presentationml/2006/main" xmlns:r="http://schemas.openxmlformats.org/officeDocument/2006/relationships">
+  <p:cSld>
+    <p:spTree>
+      <p:nvGrpSpPr>
+        <p:cNvPr id="1" name=""/>
+        <p:cNvGrpSpPr/>
+        <p:nvPr/>
+      </p:nvGrpSpPr>
+      <p:grpSpPr>
+        <a:xfrm>
+          <a:off x="0" y="0"/>
+          <a:ext cx="0" cy="0"/>
+          <a:chOff x="0" y="0"/>
+          <a:chExt cx="0" cy="0"/>
+        </a:xfrm>
+      </p:grpSpPr>
+      <p:sp>
+        <p:nvSpPr>
+          <p:cNvPr id="2" name="Slide Image Placeholder 1"/>
+          <p:cNvSpPr>
+            <a:spLocks noGrp="1"/>
+          </p:cNvSpPr>
+          <p:nvPr>
+            <p:ph type="sldImg" idx="2"/>
+          </p:nvPr>
+        </p:nvSpPr>
+        <p:spPr/>
+      </p:sp>
+      <p:sp>
+        <p:nvSpPr>
+          <p:cNvPr id="3" name="Notes Placeholder 2"/>
+          <p:cNvSpPr>
+            <a:spLocks noGrp="1"/>
+          </p:cNvSpPr>
+          <p:nvPr>
+            <p:ph type="body" idx="3" sz="quarter"/>
+          </p:nvPr>
+        </p:nvSpPr>
+        <p:spPr/>
+        <p:txBody>
+          <a:bodyPr/>
+          <a:lstStyle/>
+          <a:p>
+            <a:r>
               <a:t>N1: Último cierre. ¿Cómo ato toda la terminología técnica?</a:t>
             </a:r>
           </a:p>
@@ -1504,16 +1580,7 @@
         <p:txBody>
           <a:bodyPr/>
           <a:lstStyle/>
-          <a:p>
-            <a:r>
-              <a:t>N1: ¿Qué son el LIE y el LSE?</a:t>
-            </a:r>
-          </a:p>
-          <a:p>
-            <a:r>
-              <a:t>N2: Marcan la franja en la que una mezcla de gas y aire puede explotar. Piénsalo como una ventana. El límite inferior de explosividad, el LIE, es la concentración a partir de la cual la mezcla ya es explosiva; por debajo hay poco gas, mezcla pobre, y no arranca. El límite superior, el LSE, es la concentración a partir de la cual deja de ser explosiva; por encima hay demasiado gas y poco aire, mezcla rica, y tampoco prende. Los dos se miden en tanto por ciento de volumen de gas en aire. Truco: entre los dos límites, boom; fuera de ellos, no. Y esto es justo lo que vigila un detector de gas, que salta mucho antes de llegar a esa franja para que nunca se alcance.</a:t>
-            </a:r>
-          </a:p>
+          <a:p/>
         </p:txBody>
       </p:sp>
       <p:sp>
@@ -1581,12 +1648,12 @@
           <a:lstStyle/>
           <a:p>
             <a:r>
-              <a:t>N1: ¿Por qué la norma distingue tantos tipos de local?</a:t>
-            </a:r>
-          </a:p>
-          <a:p>
-            <a:r>
-              <a:t>N2: Porque de dónde está el gas depende lo que se puede o no se puede hacer allí. Vamos rápido. Local de aseo: solo para higiene personal, un lavabo. Local de ducha o baño: el que tiene al menos una bañera o un plato de ducha; ese matiz importa porque en él hay restricciones para colocar aparatos de gas. Local doméstico: vivienda de personas; colectivo, comercial o industrial: el que no es vivienda. Local o edificio industrial: una construcción techada y cerrada donde se produce o se almacena. Loft: uso doméstico pero sin paredes ni divisiones entre espacios, todo diáfano. Y local técnico: el destinado en exclusiva a albergar contadores o reguladores centralizados, que se leen y mantienen desde dentro. Cierro con un término suelto que veremos: las zonas comunitarias son las de paso, vestíbulos, escaleras, rellanos, sin permanencia de personas.</a:t>
+              <a:t>N1: ¿Qué son el LIE y el LSE?</a:t>
+            </a:r>
+          </a:p>
+          <a:p>
+            <a:r>
+              <a:t>N2: Marcan la franja en la que una mezcla de gas y aire puede explotar. Piénsalo como una ventana. El límite inferior de explosividad, el LIE, es la concentración a partir de la cual la mezcla ya es explosiva; por debajo hay poco gas, mezcla pobre, y no arranca. El límite superior, el LSE, es la concentración a partir de la cual deja de ser explosiva; por encima hay demasiado gas y poco aire, mezcla rica, y tampoco prende. Los dos se miden en tanto por ciento de volumen de gas en aire. Truco: entre los dos límites, boom; fuera de ellos, no. Y esto es justo lo que vigila un detector de gas, que salta mucho antes de llegar a esa franja para que nunca se alcance.</a:t>
             </a:r>
           </a:p>
         </p:txBody>
@@ -1656,12 +1723,12 @@
           <a:lstStyle/>
           <a:p>
             <a:r>
-              <a:t>N1: Hay un montón de llaves. ¿Cómo las ordeno?</a:t>
-            </a:r>
-          </a:p>
-          <a:p>
-            <a:r>
-              <a:t>N2: Como un árbol, siguiendo el gas de la calle al aparato, y así no te pierdes. La primera es la llave de acometida, la de la compañía, accesible desde el exterior de la propiedad. Luego la llave de edificio, en el muro o cerramiento, accionable desde fuera. Después la de montante colectivo, que corta un ala o sector del edificio. Sigue la llave de usuario, la frontera entre lo común y lo individual. Dentro ya, la llave de vivienda o local privado, con la que cierras desde tu casa. Junto a los equipos, la llave de contador y la de regulador. Y la última, pegada a cada aparato, la llave de conexión de aparato. Regla de oro: cada llave corta de ahí para adentro. Por qué importa: en una fuga, saber cuál cerrar, y que sea accesible, es la diferencia entre parar el gas en segundos o tener que evacuar el edificio.</a:t>
+              <a:t>N1: ¿Por qué la norma distingue tantos tipos de local?</a:t>
+            </a:r>
+          </a:p>
+          <a:p>
+            <a:r>
+              <a:t>N2: Porque de dónde está el gas depende lo que se puede o no se puede hacer allí. Vamos rápido. Local de aseo: solo para higiene personal, un lavabo. Local de ducha o baño: el que tiene al menos una bañera o un plato de ducha; ese matiz importa porque en él hay restricciones para colocar aparatos de gas. Local doméstico: vivienda de personas; colectivo, comercial o industrial: el que no es vivienda. Local o edificio industrial: una construcción techada y cerrada donde se produce o se almacena. Loft: uso doméstico pero sin paredes ni divisiones entre espacios, todo diáfano. Y local técnico: el destinado en exclusiva a albergar contadores o reguladores centralizados, que se leen y mantienen desde dentro. Cierro con un término suelto que veremos: las zonas comunitarias son las de paso, vestíbulos, escaleras, rellanos, sin permanencia de personas.</a:t>
             </a:r>
           </a:p>
         </p:txBody>
@@ -1731,12 +1798,12 @@
           <a:lstStyle/>
           <a:p>
             <a:r>
-              <a:t>N1: ¿Cuáles son las que más se cuelan en el examen?</a:t>
-            </a:r>
-          </a:p>
-          <a:p>
-            <a:r>
-              <a:t>N2: Dos, y con truco. La llave de usuario es la que pertenece a la instalación común pero marca el límite con la individual; es la frontera, la que cierra el gas de una sola vivienda. Recuérdala como el mojón entre lo de la comunidad y lo tuyo. La segunda trampa es la llave de conexión de aparato: forma parte de la instalación individual y está lo más cerca posible del aparato para cortarle el gas. Y aquí está la trampa clásica: no se debe confundir con la llave o mando de corte que lleva incorporado el propio aparato; esa es del fabricante, va aparte. La de conexión de aparato es la tuya, de la instalación. Y una más sencilla: la llave de contador va inmediatamente a la entrada del contador.</a:t>
+              <a:t>N1: Hay un montón de llaves. ¿Cómo las ordeno?</a:t>
+            </a:r>
+          </a:p>
+          <a:p>
+            <a:r>
+              <a:t>N2: Como un árbol, siguiendo el gas de la calle al aparato, y así no te pierdes. La primera es la llave de acometida, la de la compañía, accesible desde el exterior de la propiedad. Luego la llave de edificio, en el muro o cerramiento, accionable desde fuera. Después la de montante colectivo, que corta un ala o sector del edificio. Sigue la llave de usuario, la frontera entre lo común y lo individual. Dentro ya, la llave de vivienda o local privado, con la que cierras desde tu casa. Junto a los equipos, la llave de contador y la de regulador. Y la última, pegada a cada aparato, la llave de conexión de aparato. Regla de oro: cada llave corta de ahí para adentro. Por qué importa: en una fuga, saber cuál cerrar, y que sea accesible, es la diferencia entre parar el gas en segundos o tener que evacuar el edificio.</a:t>
             </a:r>
           </a:p>
         </p:txBody>
@@ -1806,12 +1873,12 @@
           <a:lstStyle/>
           <a:p>
             <a:r>
-              <a:t>N1: Otra vez metros cúbicos con apellidos, ¿esto no lo vimos ya?</a:t>
-            </a:r>
-          </a:p>
-          <a:p>
-            <a:r>
-              <a:t>N2: Vimos las condiciones; ahora la unidad de volumen que sale de ellas, y encaja perfecto. El metro cúbico estándar, que se escribe eme tres ese, es el gas contenido en un metro cúbico a quince grados; el metro cúbico normal, eme tres ene, el mismo volumen pero a cero grados. Los dos a la misma presión, mil trece con veinticinco milibares. Es exactamente el mismo par de antes: estándar va con la referencia, quince grados; normal va con las normales, cero grados. Por qué importa: un metro cúbico de gas frío tiene más moléculas que uno caliente, así que decir el apellido evita cobrar o dimensionar de más o de menos. Y aprovecho un término fácil de aquí: mantenimiento es el conjunto de actuaciones para garantizar el buen estado y funcionamiento de la instalación y los aparatos.</a:t>
+              <a:t>N1: ¿Cuáles son las que más se cuelan en el examen?</a:t>
+            </a:r>
+          </a:p>
+          <a:p>
+            <a:r>
+              <a:t>N2: Dos, y con truco. La llave de usuario es la que pertenece a la instalación común pero marca el límite con la individual; es la frontera, la que cierra el gas de una sola vivienda. Recuérdala como el mojón entre lo de la comunidad y lo tuyo. La segunda trampa es la llave de conexión de aparato: forma parte de la instalación individual y está lo más cerca posible del aparato para cortarle el gas. Y aquí está la trampa clásica: no se debe confundir con la llave o mando de corte que lleva incorporado el propio aparato; esa es del fabricante, va aparte. La de conexión de aparato es la tuya, de la instalación. Y una más sencilla: la llave de contador va inmediatamente a la entrada del contador.</a:t>
             </a:r>
           </a:p>
         </p:txBody>
@@ -1881,12 +1948,12 @@
           <a:lstStyle/>
           <a:p>
             <a:r>
-              <a:t>N1: ¿Qué es un pasamuros y por qué se protege el tubo al cruzar una pared?</a:t>
-            </a:r>
-          </a:p>
-          <a:p>
-            <a:r>
-              <a:t>N2: Porque un tubo de gas que atraviesa un muro no debe ir en contacto directo con la obra: el roce y los movimientos lo dañarían. Por eso se mete en un pasamuros, una vaina o conducto que lo aloja y protege al cruzar el muro. Ojo al matiz: la vaina, por definición, solo puede contener una tubería de gas; una sola. Y los patios: el patio de ventilación es un hueco dentro del edificio, abierto al exterior por arriba, que sirve para ventilar los locales que dan a él; el patio inglés es ese espacio abierto entre el muro del edificio y un muro de contención del terreno, que lleva luz y aire al sótano. Cierro con un término nuevo de esta edición: la ventilación cruzada, que se consigue con dos aberturas al exterior en paredes opuestas o adyacentes de una misma estancia, para que el aire se renueve solo, de forma natural.</a:t>
+              <a:t>N1: Otra vez metros cúbicos con apellidos, ¿esto no lo vimos ya?</a:t>
+            </a:r>
+          </a:p>
+          <a:p>
+            <a:r>
+              <a:t>N2: Vimos las condiciones; ahora la unidad de volumen que sale de ellas, y encaja perfecto. El metro cúbico estándar, que se escribe eme tres ese, es el gas contenido en un metro cúbico a quince grados; el metro cúbico normal, eme tres ene, el mismo volumen pero a cero grados. Los dos a la misma presión, mil trece con veinticinco milibares. Es exactamente el mismo par de antes: estándar va con la referencia, quince grados; normal va con las normales, cero grados. Por qué importa: un metro cúbico de gas frío tiene más moléculas que uno caliente, así que decir el apellido evita cobrar o dimensionar de más o de menos. Y aprovecho un término fácil de aquí: mantenimiento es el conjunto de actuaciones para garantizar el buen estado y funcionamiento de la instalación y los aparatos.</a:t>
             </a:r>
           </a:p>
         </p:txBody>
@@ -1956,12 +2023,12 @@
           <a:lstStyle/>
           <a:p>
             <a:r>
-              <a:t>N1: ¿Por qué hay dos poderes caloríficos, superior e inferior?</a:t>
-            </a:r>
-          </a:p>
-          <a:p>
-            <a:r>
-              <a:t>N2: Todo depende de una cosa: qué haces con el vapor de agua que sale al quemar. Cuando el gas arde produce, entre otras cosas, vapor de agua. Si en el cálculo supones que ese vapor se condensa y sueltas el calor que llevaba dentro, tienes el poder calorífico superior, Hs. Si supones que ese vapor se va por la chimenea sin recuperarlo, tienes el inferior, Hi. La diferencia es ese calor del agua. Por eso las calderas de condensación rinden más: están hechas para condensar ese vapor y aprovechar hacia el Hs. Los fabricantes suelen dar el consumo referido al Hi. Ejemplo de avería: una caldera de condensación mal montada, sin salida de condensados o con el retorno demasiado caliente, no condensa y pierde justo esa ventaja.</a:t>
+              <a:t>N1: ¿Qué es un pasamuros y por qué se protege el tubo al cruzar una pared?</a:t>
+            </a:r>
+          </a:p>
+          <a:p>
+            <a:r>
+              <a:t>N2: Porque un tubo de gas que atraviesa un muro no debe ir en contacto directo con la obra: el roce y los movimientos lo dañarían. Por eso se mete en un pasamuros, una vaina o conducto que lo aloja y protege al cruzar el muro. Ojo al matiz: la vaina, por definición, solo puede contener una tubería de gas; una sola. Y los patios: el patio de ventilación es un hueco dentro del edificio, abierto al exterior por arriba, que sirve para ventilar los locales que dan a él; el patio inglés es ese espacio abierto entre el muro del edificio y un muro de contención del terreno, que lleva luz y aire al sótano. Cierro con un término nuevo de esta edición: la ventilación cruzada, que se consigue con dos aberturas al exterior en paredes opuestas o adyacentes de una misma estancia, para que el aire se renueve solo, de forma natural.</a:t>
             </a:r>
           </a:p>
         </p:txBody>
@@ -5036,7 +5103,7 @@
             <a:r>
               <a:rPr sz="1400" b="1" i="0">
                 <a:solidFill>
-                  <a:srgbClr val="CADCFC"/>
+                  <a:srgbClr val="F4A24C"/>
                 </a:solidFill>
                 <a:latin typeface="Montserrat"/>
               </a:rPr>
@@ -5047,13 +5114,57 @@
       </p:sp>
       <p:sp>
         <p:nvSpPr>
-          <p:cNvPr id="4" name="TextBox 3"/>
+          <p:cNvPr id="4" name="Rounded Rectangle 3"/>
+          <p:cNvSpPr/>
+          <p:nvPr/>
+        </p:nvSpPr>
+        <p:spPr>
+          <a:xfrm>
+            <a:off x="868680" y="2057400"/>
+            <a:ext cx="1463040" cy="82296"/>
+          </a:xfrm>
+          <a:prstGeom prst="roundRect">
+            <a:avLst/>
+          </a:prstGeom>
+          <a:solidFill>
+            <a:srgbClr val="E8801A"/>
+          </a:solidFill>
+          <a:ln>
+            <a:noFill/>
+          </a:ln>
+          <a:effectLst/>
+        </p:spPr>
+        <p:style>
+          <a:lnRef idx="1">
+            <a:schemeClr val="accent1"/>
+          </a:lnRef>
+          <a:fillRef idx="3">
+            <a:schemeClr val="accent1"/>
+          </a:fillRef>
+          <a:effectRef idx="2">
+            <a:schemeClr val="accent1"/>
+          </a:effectRef>
+          <a:fontRef idx="minor">
+            <a:schemeClr val="lt1"/>
+          </a:fontRef>
+        </p:style>
+        <p:txBody>
+          <a:bodyPr rtlCol="0" anchor="ctr"/>
+          <a:lstStyle/>
+          <a:p>
+            <a:pPr algn="ctr"/>
+          </a:p>
+        </p:txBody>
+      </p:sp>
+      <p:sp>
+        <p:nvSpPr>
+          <p:cNvPr id="5" name="TextBox 4"/>
           <p:cNvSpPr txBox="1"/>
           <p:nvPr/>
         </p:nvSpPr>
         <p:spPr>
           <a:xfrm>
-            <a:off x="822960" y="2194560"/>
+            <a:off x="822960" y="2286000"/>
             <a:ext cx="10515600" cy="2011680"/>
           </a:xfrm>
           <a:prstGeom prst="rect">
@@ -5092,7 +5203,7 @@
       </p:sp>
       <p:sp>
         <p:nvSpPr>
-          <p:cNvPr id="5" name="TextBox 4"/>
+          <p:cNvPr id="6" name="TextBox 5"/>
           <p:cNvSpPr txBox="1"/>
           <p:nvPr/>
         </p:nvSpPr>
@@ -5216,7 +5327,7 @@
                 </a:solidFill>
                 <a:latin typeface="Montserrat"/>
               </a:rPr>
-              <a:t>010 / 020</a:t>
+              <a:t>010 / 021</a:t>
             </a:r>
           </a:p>
         </p:txBody>
@@ -5264,7 +5375,7 @@
         <p:spPr>
           <a:xfrm>
             <a:off x="822960" y="457200"/>
-            <a:ext cx="8229600" cy="365760"/>
+            <a:ext cx="10058400" cy="365760"/>
           </a:xfrm>
           <a:prstGeom prst="rect">
             <a:avLst/>
@@ -5278,13 +5389,13 @@
           <a:lstStyle/>
           <a:p>
             <a:r>
-              <a:rPr sz="1200" b="1" i="0">
-                <a:solidFill>
-                  <a:srgbClr val="64748B"/>
-                </a:solidFill>
-                <a:latin typeface="Montserrat"/>
-              </a:rPr>
-              <a:t>TÉRMINOS 3.87 Y 3.88</a:t>
+              <a:rPr sz="1300" b="1" i="0">
+                <a:solidFill>
+                  <a:srgbClr val="E8801A"/>
+                </a:solidFill>
+                <a:latin typeface="Montserrat"/>
+              </a:rPr>
+              <a:t>TÉRMINOS 3.86, 3.55</a:t>
             </a:r>
           </a:p>
         </p:txBody>
@@ -5312,26 +5423,70 @@
           <a:lstStyle/>
           <a:p>
             <a:r>
-              <a:rPr sz="2700" b="1" i="0">
+              <a:rPr sz="2800" b="1" i="0">
                 <a:solidFill>
                   <a:srgbClr val="1E2761"/>
                 </a:solidFill>
                 <a:latin typeface="Montserrat"/>
               </a:rPr>
-              <a:t>Potencia útil P y Pn</a:t>
-            </a:r>
-          </a:p>
-        </p:txBody>
-      </p:sp>
-      <p:sp>
-        <p:nvSpPr>
-          <p:cNvPr id="7" name="TextBox 6"/>
+              <a:t>Poder calorífico: Hs y Hi</a:t>
+            </a:r>
+          </a:p>
+        </p:txBody>
+      </p:sp>
+      <p:sp>
+        <p:nvSpPr>
+          <p:cNvPr id="7" name="Rounded Rectangle 6"/>
+          <p:cNvSpPr/>
+          <p:nvPr/>
+        </p:nvSpPr>
+        <p:spPr>
+          <a:xfrm>
+            <a:off x="868680" y="1627632"/>
+            <a:ext cx="2011680" cy="73152"/>
+          </a:xfrm>
+          <a:prstGeom prst="roundRect">
+            <a:avLst/>
+          </a:prstGeom>
+          <a:solidFill>
+            <a:srgbClr val="E8801A"/>
+          </a:solidFill>
+          <a:ln>
+            <a:noFill/>
+          </a:ln>
+          <a:effectLst/>
+        </p:spPr>
+        <p:style>
+          <a:lnRef idx="1">
+            <a:schemeClr val="accent1"/>
+          </a:lnRef>
+          <a:fillRef idx="3">
+            <a:schemeClr val="accent1"/>
+          </a:fillRef>
+          <a:effectRef idx="2">
+            <a:schemeClr val="accent1"/>
+          </a:effectRef>
+          <a:fontRef idx="minor">
+            <a:schemeClr val="lt1"/>
+          </a:fontRef>
+        </p:style>
+        <p:txBody>
+          <a:bodyPr rtlCol="0" anchor="ctr"/>
+          <a:lstStyle/>
+          <a:p>
+            <a:pPr algn="ctr"/>
+          </a:p>
+        </p:txBody>
+      </p:sp>
+      <p:sp>
+        <p:nvSpPr>
+          <p:cNvPr id="8" name="TextBox 7"/>
           <p:cNvSpPr txBox="1"/>
           <p:nvPr/>
         </p:nvSpPr>
         <p:spPr>
           <a:xfrm>
-            <a:off x="822960" y="1920240"/>
+            <a:off x="822960" y="1965960"/>
             <a:ext cx="4983480" cy="4206240"/>
           </a:xfrm>
           <a:prstGeom prst="rect">
@@ -5347,17 +5502,17 @@
           <a:p>
             <a:pPr>
               <a:spcAft>
-                <a:spcPts val="1000"/>
+                <a:spcPts val="1100"/>
               </a:spcAft>
             </a:pPr>
             <a:r>
               <a:rPr sz="1600" b="1" i="0">
                 <a:solidFill>
-                  <a:srgbClr val="2E3A80"/>
-                </a:solidFill>
-                <a:latin typeface="Montserrat"/>
-              </a:rPr>
-              <a:t>•  </a:t>
+                  <a:srgbClr val="E8801A"/>
+                </a:solidFill>
+                <a:latin typeface="Montserrat"/>
+              </a:rPr>
+              <a:t>▸  </a:t>
             </a:r>
             <a:r>
               <a:rPr sz="1600" b="0" i="0">
@@ -5366,23 +5521,23 @@
                 </a:solidFill>
                 <a:latin typeface="Montserrat"/>
               </a:rPr>
-              <a:t>Potencia útil P: calor al agua o aire</a:t>
+              <a:t>Hs superior: el agua se condensa</a:t>
             </a:r>
           </a:p>
           <a:p>
             <a:pPr>
               <a:spcAft>
-                <a:spcPts val="1000"/>
+                <a:spcPts val="1100"/>
               </a:spcAft>
             </a:pPr>
             <a:r>
               <a:rPr sz="1600" b="1" i="0">
                 <a:solidFill>
-                  <a:srgbClr val="2E3A80"/>
-                </a:solidFill>
-                <a:latin typeface="Montserrat"/>
-              </a:rPr>
-              <a:t>•  </a:t>
+                  <a:srgbClr val="E8801A"/>
+                </a:solidFill>
+                <a:latin typeface="Montserrat"/>
+              </a:rPr>
+              <a:t>▸  </a:t>
             </a:r>
             <a:r>
               <a:rPr sz="1600" b="0" i="0">
@@ -5391,23 +5546,23 @@
                 </a:solidFill>
                 <a:latin typeface="Montserrat"/>
               </a:rPr>
-              <a:t>Se mide en kW</a:t>
+              <a:t>Hi inferior: el agua queda en vapor</a:t>
             </a:r>
           </a:p>
           <a:p>
             <a:pPr>
               <a:spcAft>
-                <a:spcPts val="1000"/>
+                <a:spcPts val="1100"/>
               </a:spcAft>
             </a:pPr>
             <a:r>
               <a:rPr sz="1600" b="1" i="0">
                 <a:solidFill>
-                  <a:srgbClr val="2E3A80"/>
-                </a:solidFill>
-                <a:latin typeface="Montserrat"/>
-              </a:rPr>
-              <a:t>•  </a:t>
+                  <a:srgbClr val="E8801A"/>
+                </a:solidFill>
+                <a:latin typeface="Montserrat"/>
+              </a:rPr>
+              <a:t>▸  </a:t>
             </a:r>
             <a:r>
               <a:rPr sz="1600" b="0" i="0">
@@ -5416,23 +5571,23 @@
                 </a:solidFill>
                 <a:latin typeface="Montserrat"/>
               </a:rPr>
-              <a:t>Nominal Pn: el máximo del fabricante</a:t>
+              <a:t>El fabricante suele dar el Hi</a:t>
             </a:r>
           </a:p>
           <a:p>
             <a:pPr>
               <a:spcAft>
-                <a:spcPts val="1000"/>
+                <a:spcPts val="1100"/>
               </a:spcAft>
             </a:pPr>
             <a:r>
               <a:rPr sz="1600" b="1" i="0">
                 <a:solidFill>
-                  <a:srgbClr val="2E3A80"/>
-                </a:solidFill>
-                <a:latin typeface="Montserrat"/>
-              </a:rPr>
-              <a:t>•  </a:t>
+                  <a:srgbClr val="E8801A"/>
+                </a:solidFill>
+                <a:latin typeface="Montserrat"/>
+              </a:rPr>
+              <a:t>▸  </a:t>
             </a:r>
             <a:r>
               <a:rPr sz="1600" b="0" i="0">
@@ -5441,14 +5596,14 @@
                 </a:solidFill>
                 <a:latin typeface="Montserrat"/>
               </a:rPr>
-              <a:t>Útil ≠ consumo calorífico</a:t>
-            </a:r>
-          </a:p>
-        </p:txBody>
-      </p:sp>
-      <p:sp>
-        <p:nvSpPr>
-          <p:cNvPr id="8" name="imgph" descr="IMGQ:heating boiler control panel display"/>
+              <a:t>Condensación: aprovecha hacia el Hs</a:t>
+            </a:r>
+          </a:p>
+        </p:txBody>
+      </p:sp>
+      <p:sp>
+        <p:nvSpPr>
+          <p:cNvPr id="9" name="imgph" descr="IMGQ:condensing boiler with condensate drain pipe"/>
           <p:cNvSpPr/>
           <p:nvPr/>
         </p:nvSpPr>
@@ -5494,7 +5649,7 @@
       </p:sp>
       <p:sp>
         <p:nvSpPr>
-          <p:cNvPr id="9" name="TextBox 8"/>
+          <p:cNvPr id="10" name="TextBox 9"/>
           <p:cNvSpPr txBox="1"/>
           <p:nvPr/>
         </p:nvSpPr>
@@ -5534,7 +5689,7 @@
                 </a:solidFill>
                 <a:latin typeface="Montserrat"/>
               </a:rPr>
-              <a:t>heating boiler control panel display</a:t>
+              <a:t>condensing boiler with condensate drain pipe</a:t>
             </a:r>
           </a:p>
         </p:txBody>
@@ -5631,7 +5786,7 @@
                 </a:solidFill>
                 <a:latin typeface="Montserrat"/>
               </a:rPr>
-              <a:t>011 / 020</a:t>
+              <a:t>011 / 021</a:t>
             </a:r>
           </a:p>
         </p:txBody>
@@ -5679,7 +5834,7 @@
         <p:spPr>
           <a:xfrm>
             <a:off x="822960" y="457200"/>
-            <a:ext cx="8229600" cy="365760"/>
+            <a:ext cx="10058400" cy="365760"/>
           </a:xfrm>
           <a:prstGeom prst="rect">
             <a:avLst/>
@@ -5693,13 +5848,13 @@
           <a:lstStyle/>
           <a:p>
             <a:r>
-              <a:rPr sz="1200" b="1" i="0">
-                <a:solidFill>
-                  <a:srgbClr val="64748B"/>
-                </a:solidFill>
-                <a:latin typeface="Montserrat"/>
-              </a:rPr>
-              <a:t>TÉRMINOS 3.91 A 3.98</a:t>
+              <a:rPr sz="1300" b="1" i="0">
+                <a:solidFill>
+                  <a:srgbClr val="E8801A"/>
+                </a:solidFill>
+                <a:latin typeface="Montserrat"/>
+              </a:rPr>
+              <a:t>TÉRMINOS 3.87 Y 3.88</a:t>
             </a:r>
           </a:p>
         </p:txBody>
@@ -5727,26 +5882,70 @@
           <a:lstStyle/>
           <a:p>
             <a:r>
-              <a:rPr sz="2700" b="1" i="0">
+              <a:rPr sz="2800" b="1" i="0">
                 <a:solidFill>
                   <a:srgbClr val="1E2761"/>
                 </a:solidFill>
                 <a:latin typeface="Montserrat"/>
               </a:rPr>
-              <a:t>La familia de presiones (I)</a:t>
-            </a:r>
-          </a:p>
-        </p:txBody>
-      </p:sp>
-      <p:sp>
-        <p:nvSpPr>
-          <p:cNvPr id="7" name="TextBox 6"/>
+              <a:t>Potencia útil P y Pn</a:t>
+            </a:r>
+          </a:p>
+        </p:txBody>
+      </p:sp>
+      <p:sp>
+        <p:nvSpPr>
+          <p:cNvPr id="7" name="Rounded Rectangle 6"/>
+          <p:cNvSpPr/>
+          <p:nvPr/>
+        </p:nvSpPr>
+        <p:spPr>
+          <a:xfrm>
+            <a:off x="868680" y="1627632"/>
+            <a:ext cx="2011680" cy="73152"/>
+          </a:xfrm>
+          <a:prstGeom prst="roundRect">
+            <a:avLst/>
+          </a:prstGeom>
+          <a:solidFill>
+            <a:srgbClr val="E8801A"/>
+          </a:solidFill>
+          <a:ln>
+            <a:noFill/>
+          </a:ln>
+          <a:effectLst/>
+        </p:spPr>
+        <p:style>
+          <a:lnRef idx="1">
+            <a:schemeClr val="accent1"/>
+          </a:lnRef>
+          <a:fillRef idx="3">
+            <a:schemeClr val="accent1"/>
+          </a:fillRef>
+          <a:effectRef idx="2">
+            <a:schemeClr val="accent1"/>
+          </a:effectRef>
+          <a:fontRef idx="minor">
+            <a:schemeClr val="lt1"/>
+          </a:fontRef>
+        </p:style>
+        <p:txBody>
+          <a:bodyPr rtlCol="0" anchor="ctr"/>
+          <a:lstStyle/>
+          <a:p>
+            <a:pPr algn="ctr"/>
+          </a:p>
+        </p:txBody>
+      </p:sp>
+      <p:sp>
+        <p:nvSpPr>
+          <p:cNvPr id="8" name="TextBox 7"/>
           <p:cNvSpPr txBox="1"/>
           <p:nvPr/>
         </p:nvSpPr>
         <p:spPr>
           <a:xfrm>
-            <a:off x="822960" y="1920240"/>
+            <a:off x="822960" y="1965960"/>
             <a:ext cx="4983480" cy="4206240"/>
           </a:xfrm>
           <a:prstGeom prst="rect">
@@ -5762,17 +5961,17 @@
           <a:p>
             <a:pPr>
               <a:spcAft>
-                <a:spcPts val="1000"/>
+                <a:spcPts val="1100"/>
               </a:spcAft>
             </a:pPr>
             <a:r>
               <a:rPr sz="1600" b="1" i="0">
                 <a:solidFill>
-                  <a:srgbClr val="2E3A80"/>
-                </a:solidFill>
-                <a:latin typeface="Montserrat"/>
-              </a:rPr>
-              <a:t>•  </a:t>
+                  <a:srgbClr val="E8801A"/>
+                </a:solidFill>
+                <a:latin typeface="Montserrat"/>
+              </a:rPr>
+              <a:t>▸  </a:t>
             </a:r>
             <a:r>
               <a:rPr sz="1600" b="0" i="0">
@@ -5781,23 +5980,23 @@
                 </a:solidFill>
                 <a:latin typeface="Montserrat"/>
               </a:rPr>
-              <a:t>MOP: máxima continuada</a:t>
+              <a:t>Potencia útil P: calor al agua o aire</a:t>
             </a:r>
           </a:p>
           <a:p>
             <a:pPr>
               <a:spcAft>
-                <a:spcPts val="1000"/>
+                <a:spcPts val="1100"/>
               </a:spcAft>
             </a:pPr>
             <a:r>
               <a:rPr sz="1600" b="1" i="0">
                 <a:solidFill>
-                  <a:srgbClr val="2E3A80"/>
-                </a:solidFill>
-                <a:latin typeface="Montserrat"/>
-              </a:rPr>
-              <a:t>•  </a:t>
+                  <a:srgbClr val="E8801A"/>
+                </a:solidFill>
+                <a:latin typeface="Montserrat"/>
+              </a:rPr>
+              <a:t>▸  </a:t>
             </a:r>
             <a:r>
               <a:rPr sz="1600" b="0" i="0">
@@ -5806,23 +6005,23 @@
                 </a:solidFill>
                 <a:latin typeface="Montserrat"/>
               </a:rPr>
-              <a:t>MIP: máxima en incidente breve</a:t>
+              <a:t>Se mide en kW</a:t>
             </a:r>
           </a:p>
           <a:p>
             <a:pPr>
               <a:spcAft>
-                <a:spcPts val="1000"/>
+                <a:spcPts val="1100"/>
               </a:spcAft>
             </a:pPr>
             <a:r>
               <a:rPr sz="1600" b="1" i="0">
                 <a:solidFill>
-                  <a:srgbClr val="2E3A80"/>
-                </a:solidFill>
-                <a:latin typeface="Montserrat"/>
-              </a:rPr>
-              <a:t>•  </a:t>
+                  <a:srgbClr val="E8801A"/>
+                </a:solidFill>
+                <a:latin typeface="Montserrat"/>
+              </a:rPr>
+              <a:t>▸  </a:t>
             </a:r>
             <a:r>
               <a:rPr sz="1600" b="0" i="0">
@@ -5831,23 +6030,23 @@
                 </a:solidFill>
                 <a:latin typeface="Montserrat"/>
               </a:rPr>
-              <a:t>TOP: máxima temporal</a:t>
+              <a:t>Nominal Pn: el máximo del fabricante</a:t>
             </a:r>
           </a:p>
           <a:p>
             <a:pPr>
               <a:spcAft>
-                <a:spcPts val="1000"/>
+                <a:spcPts val="1100"/>
               </a:spcAft>
             </a:pPr>
             <a:r>
               <a:rPr sz="1600" b="1" i="0">
                 <a:solidFill>
-                  <a:srgbClr val="2E3A80"/>
-                </a:solidFill>
-                <a:latin typeface="Montserrat"/>
-              </a:rPr>
-              <a:t>•  </a:t>
+                  <a:srgbClr val="E8801A"/>
+                </a:solidFill>
+                <a:latin typeface="Montserrat"/>
+              </a:rPr>
+              <a:t>▸  </a:t>
             </a:r>
             <a:r>
               <a:rPr sz="1600" b="0" i="0">
@@ -5856,14 +6055,14 @@
                 </a:solidFill>
                 <a:latin typeface="Montserrat"/>
               </a:rPr>
-              <a:t>OP: la que hay ahora mismo</a:t>
-            </a:r>
-          </a:p>
-        </p:txBody>
-      </p:sp>
-      <p:sp>
-        <p:nvSpPr>
-          <p:cNvPr id="8" name="imgph" descr="IMGQ:gas pressure regulator with gauge"/>
+              <a:t>Útil ≠ consumo calorífico</a:t>
+            </a:r>
+          </a:p>
+        </p:txBody>
+      </p:sp>
+      <p:sp>
+        <p:nvSpPr>
+          <p:cNvPr id="9" name="imgph" descr="IMGQ:heating boiler control panel display"/>
           <p:cNvSpPr/>
           <p:nvPr/>
         </p:nvSpPr>
@@ -5909,7 +6108,7 @@
       </p:sp>
       <p:sp>
         <p:nvSpPr>
-          <p:cNvPr id="9" name="TextBox 8"/>
+          <p:cNvPr id="10" name="TextBox 9"/>
           <p:cNvSpPr txBox="1"/>
           <p:nvPr/>
         </p:nvSpPr>
@@ -5949,7 +6148,7 @@
                 </a:solidFill>
                 <a:latin typeface="Montserrat"/>
               </a:rPr>
-              <a:t>gas pressure regulator with gauge</a:t>
+              <a:t>heating boiler control panel display</a:t>
             </a:r>
           </a:p>
         </p:txBody>
@@ -6046,7 +6245,7 @@
                 </a:solidFill>
                 <a:latin typeface="Montserrat"/>
               </a:rPr>
-              <a:t>012 / 020</a:t>
+              <a:t>012 / 021</a:t>
             </a:r>
           </a:p>
         </p:txBody>
@@ -6094,7 +6293,7 @@
         <p:spPr>
           <a:xfrm>
             <a:off x="822960" y="457200"/>
-            <a:ext cx="8229600" cy="365760"/>
+            <a:ext cx="10058400" cy="365760"/>
           </a:xfrm>
           <a:prstGeom prst="rect">
             <a:avLst/>
@@ -6108,13 +6307,13 @@
           <a:lstStyle/>
           <a:p>
             <a:r>
-              <a:rPr sz="1200" b="1" i="0">
-                <a:solidFill>
-                  <a:srgbClr val="64748B"/>
-                </a:solidFill>
-                <a:latin typeface="Montserrat"/>
-              </a:rPr>
-              <a:t>TÉRMINOS 3.89 A 3.94</a:t>
+              <a:rPr sz="1300" b="1" i="0">
+                <a:solidFill>
+                  <a:srgbClr val="E8801A"/>
+                </a:solidFill>
+                <a:latin typeface="Montserrat"/>
+              </a:rPr>
+              <a:t>TÉRMINOS 3.91 A 3.98</a:t>
             </a:r>
           </a:p>
         </p:txBody>
@@ -6142,26 +6341,70 @@
           <a:lstStyle/>
           <a:p>
             <a:r>
-              <a:rPr sz="2700" b="1" i="0">
+              <a:rPr sz="2800" b="1" i="0">
                 <a:solidFill>
                   <a:srgbClr val="1E2761"/>
                 </a:solidFill>
                 <a:latin typeface="Montserrat"/>
               </a:rPr>
-              <a:t>La familia de presiones (II)</a:t>
-            </a:r>
-          </a:p>
-        </p:txBody>
-      </p:sp>
-      <p:sp>
-        <p:nvSpPr>
-          <p:cNvPr id="7" name="TextBox 6"/>
+              <a:t>La familia de presiones (I)</a:t>
+            </a:r>
+          </a:p>
+        </p:txBody>
+      </p:sp>
+      <p:sp>
+        <p:nvSpPr>
+          <p:cNvPr id="7" name="Rounded Rectangle 6"/>
+          <p:cNvSpPr/>
+          <p:nvPr/>
+        </p:nvSpPr>
+        <p:spPr>
+          <a:xfrm>
+            <a:off x="868680" y="1627632"/>
+            <a:ext cx="2011680" cy="73152"/>
+          </a:xfrm>
+          <a:prstGeom prst="roundRect">
+            <a:avLst/>
+          </a:prstGeom>
+          <a:solidFill>
+            <a:srgbClr val="E8801A"/>
+          </a:solidFill>
+          <a:ln>
+            <a:noFill/>
+          </a:ln>
+          <a:effectLst/>
+        </p:spPr>
+        <p:style>
+          <a:lnRef idx="1">
+            <a:schemeClr val="accent1"/>
+          </a:lnRef>
+          <a:fillRef idx="3">
+            <a:schemeClr val="accent1"/>
+          </a:fillRef>
+          <a:effectRef idx="2">
+            <a:schemeClr val="accent1"/>
+          </a:effectRef>
+          <a:fontRef idx="minor">
+            <a:schemeClr val="lt1"/>
+          </a:fontRef>
+        </p:style>
+        <p:txBody>
+          <a:bodyPr rtlCol="0" anchor="ctr"/>
+          <a:lstStyle/>
+          <a:p>
+            <a:pPr algn="ctr"/>
+          </a:p>
+        </p:txBody>
+      </p:sp>
+      <p:sp>
+        <p:nvSpPr>
+          <p:cNvPr id="8" name="TextBox 7"/>
           <p:cNvSpPr txBox="1"/>
           <p:nvPr/>
         </p:nvSpPr>
         <p:spPr>
           <a:xfrm>
-            <a:off x="822960" y="1920240"/>
+            <a:off x="822960" y="1965960"/>
             <a:ext cx="4983480" cy="4206240"/>
           </a:xfrm>
           <a:prstGeom prst="rect">
@@ -6177,17 +6420,17 @@
           <a:p>
             <a:pPr>
               <a:spcAft>
-                <a:spcPts val="1000"/>
+                <a:spcPts val="1100"/>
               </a:spcAft>
             </a:pPr>
             <a:r>
               <a:rPr sz="1600" b="1" i="0">
                 <a:solidFill>
-                  <a:srgbClr val="2E3A80"/>
-                </a:solidFill>
-                <a:latin typeface="Montserrat"/>
-              </a:rPr>
-              <a:t>•  </a:t>
+                  <a:srgbClr val="E8801A"/>
+                </a:solidFill>
+                <a:latin typeface="Montserrat"/>
+              </a:rPr>
+              <a:t>▸  </a:t>
             </a:r>
             <a:r>
               <a:rPr sz="1600" b="0" i="0">
@@ -6196,23 +6439,23 @@
                 </a:solidFill>
                 <a:latin typeface="Montserrat"/>
               </a:rPr>
-              <a:t>DP diseño: fija la resistencia mecánica</a:t>
+              <a:t>MOP: máxima continuada</a:t>
             </a:r>
           </a:p>
           <a:p>
             <a:pPr>
               <a:spcAft>
-                <a:spcPts val="1000"/>
+                <a:spcPts val="1100"/>
               </a:spcAft>
             </a:pPr>
             <a:r>
               <a:rPr sz="1600" b="1" i="0">
                 <a:solidFill>
-                  <a:srgbClr val="2E3A80"/>
-                </a:solidFill>
-                <a:latin typeface="Montserrat"/>
-              </a:rPr>
-              <a:t>•  </a:t>
+                  <a:srgbClr val="E8801A"/>
+                </a:solidFill>
+                <a:latin typeface="Montserrat"/>
+              </a:rPr>
+              <a:t>▸  </a:t>
             </a:r>
             <a:r>
               <a:rPr sz="1600" b="0" i="0">
@@ -6221,23 +6464,23 @@
                 </a:solidFill>
                 <a:latin typeface="Montserrat"/>
               </a:rPr>
-              <a:t>Garantía: mínima a la salida de acometida</a:t>
+              <a:t>MIP: máxima en incidente breve</a:t>
             </a:r>
           </a:p>
           <a:p>
             <a:pPr>
               <a:spcAft>
-                <a:spcPts val="1000"/>
+                <a:spcPts val="1100"/>
               </a:spcAft>
             </a:pPr>
             <a:r>
               <a:rPr sz="1600" b="1" i="0">
                 <a:solidFill>
-                  <a:srgbClr val="2E3A80"/>
-                </a:solidFill>
-                <a:latin typeface="Montserrat"/>
-              </a:rPr>
-              <a:t>•  </a:t>
+                  <a:srgbClr val="E8801A"/>
+                </a:solidFill>
+                <a:latin typeface="Montserrat"/>
+              </a:rPr>
+              <a:t>▸  </a:t>
             </a:r>
             <a:r>
               <a:rPr sz="1600" b="0" i="0">
@@ -6246,23 +6489,23 @@
                 </a:solidFill>
                 <a:latin typeface="Montserrat"/>
               </a:rPr>
-              <a:t>STP: prueba de resistencia</a:t>
+              <a:t>TOP: máxima temporal</a:t>
             </a:r>
           </a:p>
           <a:p>
             <a:pPr>
               <a:spcAft>
-                <a:spcPts val="1000"/>
+                <a:spcPts val="1100"/>
               </a:spcAft>
             </a:pPr>
             <a:r>
               <a:rPr sz="1600" b="1" i="0">
                 <a:solidFill>
-                  <a:srgbClr val="2E3A80"/>
-                </a:solidFill>
-                <a:latin typeface="Montserrat"/>
-              </a:rPr>
-              <a:t>•  </a:t>
+                  <a:srgbClr val="E8801A"/>
+                </a:solidFill>
+                <a:latin typeface="Montserrat"/>
+              </a:rPr>
+              <a:t>▸  </a:t>
             </a:r>
             <a:r>
               <a:rPr sz="1600" b="0" i="0">
@@ -6271,14 +6514,14 @@
                 </a:solidFill>
                 <a:latin typeface="Montserrat"/>
               </a:rPr>
-              <a:t>CTP: conjunta resistencia y estanquidad</a:t>
-            </a:r>
-          </a:p>
-        </p:txBody>
-      </p:sp>
-      <p:sp>
-        <p:nvSpPr>
-          <p:cNvPr id="8" name="imgph" descr="IMGQ:pressure test gauge on gas pipe installation"/>
+              <a:t>OP: la que hay ahora mismo</a:t>
+            </a:r>
+          </a:p>
+        </p:txBody>
+      </p:sp>
+      <p:sp>
+        <p:nvSpPr>
+          <p:cNvPr id="9" name="imgph" descr="IMGQ:gas pressure regulator with gauge"/>
           <p:cNvSpPr/>
           <p:nvPr/>
         </p:nvSpPr>
@@ -6324,7 +6567,7 @@
       </p:sp>
       <p:sp>
         <p:nvSpPr>
-          <p:cNvPr id="9" name="TextBox 8"/>
+          <p:cNvPr id="10" name="TextBox 9"/>
           <p:cNvSpPr txBox="1"/>
           <p:nvPr/>
         </p:nvSpPr>
@@ -6364,7 +6607,7 @@
                 </a:solidFill>
                 <a:latin typeface="Montserrat"/>
               </a:rPr>
-              <a:t>pressure test gauge on gas pipe installation</a:t>
+              <a:t>gas pressure regulator with gauge</a:t>
             </a:r>
           </a:p>
         </p:txBody>
@@ -6461,7 +6704,7 @@
                 </a:solidFill>
                 <a:latin typeface="Montserrat"/>
               </a:rPr>
-              <a:t>013 / 020</a:t>
+              <a:t>013 / 021</a:t>
             </a:r>
           </a:p>
         </p:txBody>
@@ -6509,7 +6752,7 @@
         <p:spPr>
           <a:xfrm>
             <a:off x="822960" y="457200"/>
-            <a:ext cx="8229600" cy="365760"/>
+            <a:ext cx="10058400" cy="365760"/>
           </a:xfrm>
           <a:prstGeom prst="rect">
             <a:avLst/>
@@ -6523,13 +6766,13 @@
           <a:lstStyle/>
           <a:p>
             <a:r>
-              <a:rPr sz="1200" b="1" i="0">
-                <a:solidFill>
-                  <a:srgbClr val="64748B"/>
-                </a:solidFill>
-                <a:latin typeface="Montserrat"/>
-              </a:rPr>
-              <a:t>NOTA DE LA NORMA</a:t>
+              <a:rPr sz="1300" b="1" i="0">
+                <a:solidFill>
+                  <a:srgbClr val="E8801A"/>
+                </a:solidFill>
+                <a:latin typeface="Montserrat"/>
+              </a:rPr>
+              <a:t>TÉRMINOS 3.89 A 3.94</a:t>
             </a:r>
           </a:p>
         </p:txBody>
@@ -6557,26 +6800,70 @@
           <a:lstStyle/>
           <a:p>
             <a:r>
-              <a:rPr sz="2700" b="1" i="0">
+              <a:rPr sz="2800" b="1" i="0">
                 <a:solidFill>
                   <a:srgbClr val="1E2761"/>
                 </a:solidFill>
                 <a:latin typeface="Montserrat"/>
               </a:rPr>
-              <a:t>Todas las presiones son relativas</a:t>
-            </a:r>
-          </a:p>
-        </p:txBody>
-      </p:sp>
-      <p:sp>
-        <p:nvSpPr>
-          <p:cNvPr id="7" name="TextBox 6"/>
+              <a:t>La familia de presiones (II)</a:t>
+            </a:r>
+          </a:p>
+        </p:txBody>
+      </p:sp>
+      <p:sp>
+        <p:nvSpPr>
+          <p:cNvPr id="7" name="Rounded Rectangle 6"/>
+          <p:cNvSpPr/>
+          <p:nvPr/>
+        </p:nvSpPr>
+        <p:spPr>
+          <a:xfrm>
+            <a:off x="868680" y="1627632"/>
+            <a:ext cx="2011680" cy="73152"/>
+          </a:xfrm>
+          <a:prstGeom prst="roundRect">
+            <a:avLst/>
+          </a:prstGeom>
+          <a:solidFill>
+            <a:srgbClr val="E8801A"/>
+          </a:solidFill>
+          <a:ln>
+            <a:noFill/>
+          </a:ln>
+          <a:effectLst/>
+        </p:spPr>
+        <p:style>
+          <a:lnRef idx="1">
+            <a:schemeClr val="accent1"/>
+          </a:lnRef>
+          <a:fillRef idx="3">
+            <a:schemeClr val="accent1"/>
+          </a:fillRef>
+          <a:effectRef idx="2">
+            <a:schemeClr val="accent1"/>
+          </a:effectRef>
+          <a:fontRef idx="minor">
+            <a:schemeClr val="lt1"/>
+          </a:fontRef>
+        </p:style>
+        <p:txBody>
+          <a:bodyPr rtlCol="0" anchor="ctr"/>
+          <a:lstStyle/>
+          <a:p>
+            <a:pPr algn="ctr"/>
+          </a:p>
+        </p:txBody>
+      </p:sp>
+      <p:sp>
+        <p:nvSpPr>
+          <p:cNvPr id="8" name="TextBox 7"/>
           <p:cNvSpPr txBox="1"/>
           <p:nvPr/>
         </p:nvSpPr>
         <p:spPr>
           <a:xfrm>
-            <a:off x="822960" y="1920240"/>
+            <a:off x="822960" y="1965960"/>
             <a:ext cx="4983480" cy="4206240"/>
           </a:xfrm>
           <a:prstGeom prst="rect">
@@ -6592,17 +6879,17 @@
           <a:p>
             <a:pPr>
               <a:spcAft>
-                <a:spcPts val="1000"/>
+                <a:spcPts val="1100"/>
               </a:spcAft>
             </a:pPr>
             <a:r>
               <a:rPr sz="1600" b="1" i="0">
                 <a:solidFill>
-                  <a:srgbClr val="2E3A80"/>
-                </a:solidFill>
-                <a:latin typeface="Montserrat"/>
-              </a:rPr>
-              <a:t>•  </a:t>
+                  <a:srgbClr val="E8801A"/>
+                </a:solidFill>
+                <a:latin typeface="Montserrat"/>
+              </a:rPr>
+              <a:t>▸  </a:t>
             </a:r>
             <a:r>
               <a:rPr sz="1600" b="0" i="0">
@@ -6611,23 +6898,23 @@
                 </a:solidFill>
                 <a:latin typeface="Montserrat"/>
               </a:rPr>
-              <a:t>Se miden sobre la atmosférica</a:t>
+              <a:t>DP diseño: fija la resistencia mecánica</a:t>
             </a:r>
           </a:p>
           <a:p>
             <a:pPr>
               <a:spcAft>
-                <a:spcPts val="1000"/>
+                <a:spcPts val="1100"/>
               </a:spcAft>
             </a:pPr>
             <a:r>
               <a:rPr sz="1600" b="1" i="0">
                 <a:solidFill>
-                  <a:srgbClr val="2E3A80"/>
-                </a:solidFill>
-                <a:latin typeface="Montserrat"/>
-              </a:rPr>
-              <a:t>•  </a:t>
+                  <a:srgbClr val="E8801A"/>
+                </a:solidFill>
+                <a:latin typeface="Montserrat"/>
+              </a:rPr>
+              <a:t>▸  </a:t>
             </a:r>
             <a:r>
               <a:rPr sz="1600" b="0" i="0">
@@ -6636,23 +6923,23 @@
                 </a:solidFill>
                 <a:latin typeface="Montserrat"/>
               </a:rPr>
-              <a:t>No en valor absoluto</a:t>
+              <a:t>Garantía: mínima a la salida de acometida</a:t>
             </a:r>
           </a:p>
           <a:p>
             <a:pPr>
               <a:spcAft>
-                <a:spcPts val="1000"/>
+                <a:spcPts val="1100"/>
               </a:spcAft>
             </a:pPr>
             <a:r>
               <a:rPr sz="1600" b="1" i="0">
                 <a:solidFill>
-                  <a:srgbClr val="2E3A80"/>
-                </a:solidFill>
-                <a:latin typeface="Montserrat"/>
-              </a:rPr>
-              <a:t>•  </a:t>
+                  <a:srgbClr val="E8801A"/>
+                </a:solidFill>
+                <a:latin typeface="Montserrat"/>
+              </a:rPr>
+              <a:t>▸  </a:t>
             </a:r>
             <a:r>
               <a:rPr sz="1600" b="0" i="0">
@@ -6661,23 +6948,23 @@
                 </a:solidFill>
                 <a:latin typeface="Montserrat"/>
               </a:rPr>
-              <a:t>Aplica a toda la UNE 60670</a:t>
+              <a:t>STP: prueba de resistencia</a:t>
             </a:r>
           </a:p>
           <a:p>
             <a:pPr>
               <a:spcAft>
-                <a:spcPts val="1000"/>
+                <a:spcPts val="1100"/>
               </a:spcAft>
             </a:pPr>
             <a:r>
               <a:rPr sz="1600" b="1" i="0">
                 <a:solidFill>
-                  <a:srgbClr val="2E3A80"/>
-                </a:solidFill>
-                <a:latin typeface="Montserrat"/>
-              </a:rPr>
-              <a:t>•  </a:t>
+                  <a:srgbClr val="E8801A"/>
+                </a:solidFill>
+                <a:latin typeface="Montserrat"/>
+              </a:rPr>
+              <a:t>▸  </a:t>
             </a:r>
             <a:r>
               <a:rPr sz="1600" b="0" i="0">
@@ -6686,14 +6973,14 @@
                 </a:solidFill>
                 <a:latin typeface="Montserrat"/>
               </a:rPr>
-              <a:t>El manómetro ya marca en relativo</a:t>
-            </a:r>
-          </a:p>
-        </p:txBody>
-      </p:sp>
-      <p:sp>
-        <p:nvSpPr>
-          <p:cNvPr id="8" name="imgph" descr="IMGQ:analog pressure manometer close up"/>
+              <a:t>CTP: conjunta resistencia y estanquidad</a:t>
+            </a:r>
+          </a:p>
+        </p:txBody>
+      </p:sp>
+      <p:sp>
+        <p:nvSpPr>
+          <p:cNvPr id="9" name="imgph" descr="IMGQ:pressure test gauge on gas pipe installation"/>
           <p:cNvSpPr/>
           <p:nvPr/>
         </p:nvSpPr>
@@ -6739,7 +7026,7 @@
       </p:sp>
       <p:sp>
         <p:nvSpPr>
-          <p:cNvPr id="9" name="TextBox 8"/>
+          <p:cNvPr id="10" name="TextBox 9"/>
           <p:cNvSpPr txBox="1"/>
           <p:nvPr/>
         </p:nvSpPr>
@@ -6779,7 +7066,7 @@
                 </a:solidFill>
                 <a:latin typeface="Montserrat"/>
               </a:rPr>
-              <a:t>analog pressure manometer close up</a:t>
+              <a:t>pressure test gauge on gas pipe installation</a:t>
             </a:r>
           </a:p>
         </p:txBody>
@@ -6876,7 +7163,7 @@
                 </a:solidFill>
                 <a:latin typeface="Montserrat"/>
               </a:rPr>
-              <a:t>014 / 020</a:t>
+              <a:t>014 / 021</a:t>
             </a:r>
           </a:p>
         </p:txBody>
@@ -6924,7 +7211,7 @@
         <p:spPr>
           <a:xfrm>
             <a:off x="822960" y="457200"/>
-            <a:ext cx="8229600" cy="365760"/>
+            <a:ext cx="10058400" cy="365760"/>
           </a:xfrm>
           <a:prstGeom prst="rect">
             <a:avLst/>
@@ -6938,13 +7225,13 @@
           <a:lstStyle/>
           <a:p>
             <a:r>
-              <a:rPr sz="1200" b="1" i="0">
-                <a:solidFill>
-                  <a:srgbClr val="64748B"/>
-                </a:solidFill>
-                <a:latin typeface="Montserrat"/>
-              </a:rPr>
-              <a:t>TÉRMINOS 3.95 A 3.103</a:t>
+              <a:rPr sz="1300" b="1" i="0">
+                <a:solidFill>
+                  <a:srgbClr val="E8801A"/>
+                </a:solidFill>
+                <a:latin typeface="Montserrat"/>
+              </a:rPr>
+              <a:t>NOTA DE LA NORMA</a:t>
             </a:r>
           </a:p>
         </p:txBody>
@@ -6972,26 +7259,70 @@
           <a:lstStyle/>
           <a:p>
             <a:r>
-              <a:rPr sz="2700" b="1" i="0">
+              <a:rPr sz="2800" b="1" i="0">
                 <a:solidFill>
                   <a:srgbClr val="1E2761"/>
                 </a:solidFill>
                 <a:latin typeface="Montserrat"/>
               </a:rPr>
-              <a:t>Regulador, tarado y combustión</a:t>
-            </a:r>
-          </a:p>
-        </p:txBody>
-      </p:sp>
-      <p:sp>
-        <p:nvSpPr>
-          <p:cNvPr id="7" name="TextBox 6"/>
+              <a:t>Todas las presiones son relativas</a:t>
+            </a:r>
+          </a:p>
+        </p:txBody>
+      </p:sp>
+      <p:sp>
+        <p:nvSpPr>
+          <p:cNvPr id="7" name="Rounded Rectangle 6"/>
+          <p:cNvSpPr/>
+          <p:nvPr/>
+        </p:nvSpPr>
+        <p:spPr>
+          <a:xfrm>
+            <a:off x="868680" y="1627632"/>
+            <a:ext cx="2011680" cy="73152"/>
+          </a:xfrm>
+          <a:prstGeom prst="roundRect">
+            <a:avLst/>
+          </a:prstGeom>
+          <a:solidFill>
+            <a:srgbClr val="E8801A"/>
+          </a:solidFill>
+          <a:ln>
+            <a:noFill/>
+          </a:ln>
+          <a:effectLst/>
+        </p:spPr>
+        <p:style>
+          <a:lnRef idx="1">
+            <a:schemeClr val="accent1"/>
+          </a:lnRef>
+          <a:fillRef idx="3">
+            <a:schemeClr val="accent1"/>
+          </a:fillRef>
+          <a:effectRef idx="2">
+            <a:schemeClr val="accent1"/>
+          </a:effectRef>
+          <a:fontRef idx="minor">
+            <a:schemeClr val="lt1"/>
+          </a:fontRef>
+        </p:style>
+        <p:txBody>
+          <a:bodyPr rtlCol="0" anchor="ctr"/>
+          <a:lstStyle/>
+          <a:p>
+            <a:pPr algn="ctr"/>
+          </a:p>
+        </p:txBody>
+      </p:sp>
+      <p:sp>
+        <p:nvSpPr>
+          <p:cNvPr id="8" name="TextBox 7"/>
           <p:cNvSpPr txBox="1"/>
           <p:nvPr/>
         </p:nvSpPr>
         <p:spPr>
           <a:xfrm>
-            <a:off x="822960" y="1920240"/>
+            <a:off x="822960" y="1965960"/>
             <a:ext cx="4983480" cy="4206240"/>
           </a:xfrm>
           <a:prstGeom prst="rect">
@@ -7007,17 +7338,17 @@
           <a:p>
             <a:pPr>
               <a:spcAft>
-                <a:spcPts val="1000"/>
+                <a:spcPts val="1100"/>
               </a:spcAft>
             </a:pPr>
             <a:r>
               <a:rPr sz="1600" b="1" i="0">
                 <a:solidFill>
-                  <a:srgbClr val="2E3A80"/>
-                </a:solidFill>
-                <a:latin typeface="Montserrat"/>
-              </a:rPr>
-              <a:t>•  </a:t>
+                  <a:srgbClr val="E8801A"/>
+                </a:solidFill>
+                <a:latin typeface="Montserrat"/>
+              </a:rPr>
+              <a:t>▸  </a:t>
             </a:r>
             <a:r>
               <a:rPr sz="1600" b="0" i="0">
@@ -7026,23 +7357,23 @@
                 </a:solidFill>
                 <a:latin typeface="Montserrat"/>
               </a:rPr>
-              <a:t>Regulador: baja la presión aguas abajo</a:t>
+              <a:t>Se miden sobre la atmosférica</a:t>
             </a:r>
           </a:p>
           <a:p>
             <a:pPr>
               <a:spcAft>
-                <a:spcPts val="1000"/>
+                <a:spcPts val="1100"/>
               </a:spcAft>
             </a:pPr>
             <a:r>
               <a:rPr sz="1600" b="1" i="0">
                 <a:solidFill>
-                  <a:srgbClr val="2E3A80"/>
-                </a:solidFill>
-                <a:latin typeface="Montserrat"/>
-              </a:rPr>
-              <a:t>•  </a:t>
+                  <a:srgbClr val="E8801A"/>
+                </a:solidFill>
+                <a:latin typeface="Montserrat"/>
+              </a:rPr>
+              <a:t>▸  </a:t>
             </a:r>
             <a:r>
               <a:rPr sz="1600" b="0" i="0">
@@ -7051,23 +7382,23 @@
                 </a:solidFill>
                 <a:latin typeface="Montserrat"/>
               </a:rPr>
-              <a:t>Presión de tarado: a la que se ajusta</a:t>
+              <a:t>No en valor absoluto</a:t>
             </a:r>
           </a:p>
           <a:p>
             <a:pPr>
               <a:spcAft>
-                <a:spcPts val="1000"/>
+                <a:spcPts val="1100"/>
               </a:spcAft>
             </a:pPr>
             <a:r>
               <a:rPr sz="1600" b="1" i="0">
                 <a:solidFill>
-                  <a:srgbClr val="2E3A80"/>
-                </a:solidFill>
-                <a:latin typeface="Montserrat"/>
-              </a:rPr>
-              <a:t>•  </a:t>
+                  <a:srgbClr val="E8801A"/>
+                </a:solidFill>
+                <a:latin typeface="Montserrat"/>
+              </a:rPr>
+              <a:t>▸  </a:t>
             </a:r>
             <a:r>
               <a:rPr sz="1600" b="0" i="0">
@@ -7076,23 +7407,23 @@
                 </a:solidFill>
                 <a:latin typeface="Montserrat"/>
               </a:rPr>
-              <a:t>Productos de combustión: gases y vapor</a:t>
+              <a:t>Aplica a toda la UNE 60670</a:t>
             </a:r>
           </a:p>
           <a:p>
             <a:pPr>
               <a:spcAft>
-                <a:spcPts val="1000"/>
+                <a:spcPts val="1100"/>
               </a:spcAft>
             </a:pPr>
             <a:r>
               <a:rPr sz="1600" b="1" i="0">
                 <a:solidFill>
-                  <a:srgbClr val="2E3A80"/>
-                </a:solidFill>
-                <a:latin typeface="Montserrat"/>
-              </a:rPr>
-              <a:t>•  </a:t>
+                  <a:srgbClr val="E8801A"/>
+                </a:solidFill>
+                <a:latin typeface="Montserrat"/>
+              </a:rPr>
+              <a:t>▸  </a:t>
             </a:r>
             <a:r>
               <a:rPr sz="1600" b="0" i="0">
@@ -7101,14 +7432,14 @@
                 </a:solidFill>
                 <a:latin typeface="Montserrat"/>
               </a:rPr>
-              <a:t>Puerta estanca: ciega, con junta</a:t>
-            </a:r>
-          </a:p>
-        </p:txBody>
-      </p:sp>
-      <p:sp>
-        <p:nvSpPr>
-          <p:cNvPr id="8" name="imgph" descr="IMGQ:gas pressure regulator installed on wall"/>
+              <a:t>El manómetro ya marca en relativo</a:t>
+            </a:r>
+          </a:p>
+        </p:txBody>
+      </p:sp>
+      <p:sp>
+        <p:nvSpPr>
+          <p:cNvPr id="9" name="imgph" descr="IMGQ:analog pressure manometer close up"/>
           <p:cNvSpPr/>
           <p:nvPr/>
         </p:nvSpPr>
@@ -7154,7 +7485,7 @@
       </p:sp>
       <p:sp>
         <p:nvSpPr>
-          <p:cNvPr id="9" name="TextBox 8"/>
+          <p:cNvPr id="10" name="TextBox 9"/>
           <p:cNvSpPr txBox="1"/>
           <p:nvPr/>
         </p:nvSpPr>
@@ -7194,7 +7525,7 @@
                 </a:solidFill>
                 <a:latin typeface="Montserrat"/>
               </a:rPr>
-              <a:t>gas pressure regulator installed on wall</a:t>
+              <a:t>analog pressure manometer close up</a:t>
             </a:r>
           </a:p>
         </p:txBody>
@@ -7291,7 +7622,7 @@
                 </a:solidFill>
                 <a:latin typeface="Montserrat"/>
               </a:rPr>
-              <a:t>015 / 020</a:t>
+              <a:t>015 / 021</a:t>
             </a:r>
           </a:p>
         </p:txBody>
@@ -7339,7 +7670,7 @@
         <p:spPr>
           <a:xfrm>
             <a:off x="822960" y="457200"/>
-            <a:ext cx="8229600" cy="365760"/>
+            <a:ext cx="10058400" cy="365760"/>
           </a:xfrm>
           <a:prstGeom prst="rect">
             <a:avLst/>
@@ -7353,13 +7684,13 @@
           <a:lstStyle/>
           <a:p>
             <a:r>
-              <a:rPr sz="1200" b="1" i="0">
-                <a:solidFill>
-                  <a:srgbClr val="64748B"/>
-                </a:solidFill>
-                <a:latin typeface="Montserrat"/>
-              </a:rPr>
-              <a:t>TÉRMINOS 3.104, 3.112, 3.113</a:t>
+              <a:rPr sz="1300" b="1" i="0">
+                <a:solidFill>
+                  <a:srgbClr val="E8801A"/>
+                </a:solidFill>
+                <a:latin typeface="Montserrat"/>
+              </a:rPr>
+              <a:t>TÉRMINOS 3.95 A 3.103</a:t>
             </a:r>
           </a:p>
         </p:txBody>
@@ -7387,26 +7718,70 @@
           <a:lstStyle/>
           <a:p>
             <a:r>
-              <a:rPr sz="2700" b="1" i="0">
+              <a:rPr sz="2800" b="1" i="0">
                 <a:solidFill>
                   <a:srgbClr val="1E2761"/>
                 </a:solidFill>
                 <a:latin typeface="Montserrat"/>
               </a:rPr>
-              <a:t>Tiro, revoco y terminal</a:t>
-            </a:r>
-          </a:p>
-        </p:txBody>
-      </p:sp>
-      <p:sp>
-        <p:nvSpPr>
-          <p:cNvPr id="7" name="TextBox 6"/>
+              <a:t>Regulador, tarado y combustión</a:t>
+            </a:r>
+          </a:p>
+        </p:txBody>
+      </p:sp>
+      <p:sp>
+        <p:nvSpPr>
+          <p:cNvPr id="7" name="Rounded Rectangle 6"/>
+          <p:cNvSpPr/>
+          <p:nvPr/>
+        </p:nvSpPr>
+        <p:spPr>
+          <a:xfrm>
+            <a:off x="868680" y="1627632"/>
+            <a:ext cx="2011680" cy="73152"/>
+          </a:xfrm>
+          <a:prstGeom prst="roundRect">
+            <a:avLst/>
+          </a:prstGeom>
+          <a:solidFill>
+            <a:srgbClr val="E8801A"/>
+          </a:solidFill>
+          <a:ln>
+            <a:noFill/>
+          </a:ln>
+          <a:effectLst/>
+        </p:spPr>
+        <p:style>
+          <a:lnRef idx="1">
+            <a:schemeClr val="accent1"/>
+          </a:lnRef>
+          <a:fillRef idx="3">
+            <a:schemeClr val="accent1"/>
+          </a:fillRef>
+          <a:effectRef idx="2">
+            <a:schemeClr val="accent1"/>
+          </a:effectRef>
+          <a:fontRef idx="minor">
+            <a:schemeClr val="lt1"/>
+          </a:fontRef>
+        </p:style>
+        <p:txBody>
+          <a:bodyPr rtlCol="0" anchor="ctr"/>
+          <a:lstStyle/>
+          <a:p>
+            <a:pPr algn="ctr"/>
+          </a:p>
+        </p:txBody>
+      </p:sp>
+      <p:sp>
+        <p:nvSpPr>
+          <p:cNvPr id="8" name="TextBox 7"/>
           <p:cNvSpPr txBox="1"/>
           <p:nvPr/>
         </p:nvSpPr>
         <p:spPr>
           <a:xfrm>
-            <a:off x="822960" y="1920240"/>
+            <a:off x="822960" y="1965960"/>
             <a:ext cx="4983480" cy="4206240"/>
           </a:xfrm>
           <a:prstGeom prst="rect">
@@ -7422,17 +7797,17 @@
           <a:p>
             <a:pPr>
               <a:spcAft>
-                <a:spcPts val="1000"/>
+                <a:spcPts val="1100"/>
               </a:spcAft>
             </a:pPr>
             <a:r>
               <a:rPr sz="1600" b="1" i="0">
                 <a:solidFill>
-                  <a:srgbClr val="2E3A80"/>
-                </a:solidFill>
-                <a:latin typeface="Montserrat"/>
-              </a:rPr>
-              <a:t>•  </a:t>
+                  <a:srgbClr val="E8801A"/>
+                </a:solidFill>
+                <a:latin typeface="Montserrat"/>
+              </a:rPr>
+              <a:t>▸  </a:t>
             </a:r>
             <a:r>
               <a:rPr sz="1600" b="0" i="0">
@@ -7441,23 +7816,23 @@
                 </a:solidFill>
                 <a:latin typeface="Montserrat"/>
               </a:rPr>
-              <a:t>Tiro: depresión que saca los humos</a:t>
+              <a:t>Regulador: baja la presión aguas abajo</a:t>
             </a:r>
           </a:p>
           <a:p>
             <a:pPr>
               <a:spcAft>
-                <a:spcPts val="1000"/>
+                <a:spcPts val="1100"/>
               </a:spcAft>
             </a:pPr>
             <a:r>
               <a:rPr sz="1600" b="1" i="0">
                 <a:solidFill>
-                  <a:srgbClr val="2E3A80"/>
-                </a:solidFill>
-                <a:latin typeface="Montserrat"/>
-              </a:rPr>
-              <a:t>•  </a:t>
+                  <a:srgbClr val="E8801A"/>
+                </a:solidFill>
+                <a:latin typeface="Montserrat"/>
+              </a:rPr>
+              <a:t>▸  </a:t>
             </a:r>
             <a:r>
               <a:rPr sz="1600" b="0" i="0">
@@ -7466,23 +7841,23 @@
                 </a:solidFill>
                 <a:latin typeface="Montserrat"/>
               </a:rPr>
-              <a:t>Revoco: los humos vuelven al local</a:t>
+              <a:t>Presión de tarado: a la que se ajusta</a:t>
             </a:r>
           </a:p>
           <a:p>
             <a:pPr>
               <a:spcAft>
-                <a:spcPts val="1000"/>
+                <a:spcPts val="1100"/>
               </a:spcAft>
             </a:pPr>
             <a:r>
               <a:rPr sz="1600" b="1" i="0">
                 <a:solidFill>
-                  <a:srgbClr val="2E3A80"/>
-                </a:solidFill>
-                <a:latin typeface="Montserrat"/>
-              </a:rPr>
-              <a:t>•  </a:t>
+                  <a:srgbClr val="E8801A"/>
+                </a:solidFill>
+                <a:latin typeface="Montserrat"/>
+              </a:rPr>
+              <a:t>▸  </a:t>
             </a:r>
             <a:r>
               <a:rPr sz="1600" b="0" i="0">
@@ -7491,23 +7866,23 @@
                 </a:solidFill>
                 <a:latin typeface="Montserrat"/>
               </a:rPr>
-              <a:t>Terminal o deflector: protege del viento</a:t>
+              <a:t>Productos de combustión: gases y vapor</a:t>
             </a:r>
           </a:p>
           <a:p>
             <a:pPr>
               <a:spcAft>
-                <a:spcPts val="1000"/>
+                <a:spcPts val="1100"/>
               </a:spcAft>
             </a:pPr>
             <a:r>
               <a:rPr sz="1600" b="1" i="0">
                 <a:solidFill>
-                  <a:srgbClr val="2E3A80"/>
-                </a:solidFill>
-                <a:latin typeface="Montserrat"/>
-              </a:rPr>
-              <a:t>•  </a:t>
+                  <a:srgbClr val="E8801A"/>
+                </a:solidFill>
+                <a:latin typeface="Montserrat"/>
+              </a:rPr>
+              <a:t>▸  </a:t>
             </a:r>
             <a:r>
               <a:rPr sz="1600" b="0" i="0">
@@ -7516,14 +7891,14 @@
                 </a:solidFill>
                 <a:latin typeface="Montserrat"/>
               </a:rPr>
-              <a:t>Tiro bueno = humos fuera</a:t>
-            </a:r>
-          </a:p>
-        </p:txBody>
-      </p:sp>
-      <p:sp>
-        <p:nvSpPr>
-          <p:cNvPr id="8" name="imgph" descr="IMGQ:chimney terminal cowl on rooftop"/>
+              <a:t>Puerta estanca: ciega, con junta</a:t>
+            </a:r>
+          </a:p>
+        </p:txBody>
+      </p:sp>
+      <p:sp>
+        <p:nvSpPr>
+          <p:cNvPr id="9" name="imgph" descr="IMGQ:gas pressure regulator installed on wall"/>
           <p:cNvSpPr/>
           <p:nvPr/>
         </p:nvSpPr>
@@ -7569,7 +7944,7 @@
       </p:sp>
       <p:sp>
         <p:nvSpPr>
-          <p:cNvPr id="9" name="TextBox 8"/>
+          <p:cNvPr id="10" name="TextBox 9"/>
           <p:cNvSpPr txBox="1"/>
           <p:nvPr/>
         </p:nvSpPr>
@@ -7609,7 +7984,7 @@
                 </a:solidFill>
                 <a:latin typeface="Montserrat"/>
               </a:rPr>
-              <a:t>chimney terminal cowl on rooftop</a:t>
+              <a:t>gas pressure regulator installed on wall</a:t>
             </a:r>
           </a:p>
         </p:txBody>
@@ -7706,7 +8081,7 @@
                 </a:solidFill>
                 <a:latin typeface="Montserrat"/>
               </a:rPr>
-              <a:t>016 / 020</a:t>
+              <a:t>016 / 021</a:t>
             </a:r>
           </a:p>
         </p:txBody>
@@ -7754,7 +8129,7 @@
         <p:spPr>
           <a:xfrm>
             <a:off x="822960" y="457200"/>
-            <a:ext cx="8229600" cy="365760"/>
+            <a:ext cx="10058400" cy="365760"/>
           </a:xfrm>
           <a:prstGeom prst="rect">
             <a:avLst/>
@@ -7768,13 +8143,13 @@
           <a:lstStyle/>
           <a:p>
             <a:r>
-              <a:rPr sz="1200" b="1" i="0">
-                <a:solidFill>
-                  <a:srgbClr val="64748B"/>
-                </a:solidFill>
-                <a:latin typeface="Montserrat"/>
-              </a:rPr>
-              <a:t>TÉRMINOS 3.107 Y 3.108</a:t>
+              <a:rPr sz="1300" b="1" i="0">
+                <a:solidFill>
+                  <a:srgbClr val="E8801A"/>
+                </a:solidFill>
+                <a:latin typeface="Montserrat"/>
+              </a:rPr>
+              <a:t>TÉRMINOS 3.104, 3.112, 3.113</a:t>
             </a:r>
           </a:p>
         </p:txBody>
@@ -7802,26 +8177,70 @@
           <a:lstStyle/>
           <a:p>
             <a:r>
-              <a:rPr sz="2700" b="1" i="0">
+              <a:rPr sz="2800" b="1" i="0">
                 <a:solidFill>
                   <a:srgbClr val="1E2761"/>
                 </a:solidFill>
                 <a:latin typeface="Montserrat"/>
               </a:rPr>
-              <a:t>Shunt y shunt invertido</a:t>
-            </a:r>
-          </a:p>
-        </p:txBody>
-      </p:sp>
-      <p:sp>
-        <p:nvSpPr>
-          <p:cNvPr id="7" name="TextBox 6"/>
+              <a:t>Tiro, revoco y terminal</a:t>
+            </a:r>
+          </a:p>
+        </p:txBody>
+      </p:sp>
+      <p:sp>
+        <p:nvSpPr>
+          <p:cNvPr id="7" name="Rounded Rectangle 6"/>
+          <p:cNvSpPr/>
+          <p:nvPr/>
+        </p:nvSpPr>
+        <p:spPr>
+          <a:xfrm>
+            <a:off x="868680" y="1627632"/>
+            <a:ext cx="2011680" cy="73152"/>
+          </a:xfrm>
+          <a:prstGeom prst="roundRect">
+            <a:avLst/>
+          </a:prstGeom>
+          <a:solidFill>
+            <a:srgbClr val="E8801A"/>
+          </a:solidFill>
+          <a:ln>
+            <a:noFill/>
+          </a:ln>
+          <a:effectLst/>
+        </p:spPr>
+        <p:style>
+          <a:lnRef idx="1">
+            <a:schemeClr val="accent1"/>
+          </a:lnRef>
+          <a:fillRef idx="3">
+            <a:schemeClr val="accent1"/>
+          </a:fillRef>
+          <a:effectRef idx="2">
+            <a:schemeClr val="accent1"/>
+          </a:effectRef>
+          <a:fontRef idx="minor">
+            <a:schemeClr val="lt1"/>
+          </a:fontRef>
+        </p:style>
+        <p:txBody>
+          <a:bodyPr rtlCol="0" anchor="ctr"/>
+          <a:lstStyle/>
+          <a:p>
+            <a:pPr algn="ctr"/>
+          </a:p>
+        </p:txBody>
+      </p:sp>
+      <p:sp>
+        <p:nvSpPr>
+          <p:cNvPr id="8" name="TextBox 7"/>
           <p:cNvSpPr txBox="1"/>
           <p:nvPr/>
         </p:nvSpPr>
         <p:spPr>
           <a:xfrm>
-            <a:off x="822960" y="1920240"/>
+            <a:off x="822960" y="1965960"/>
             <a:ext cx="4983480" cy="4206240"/>
           </a:xfrm>
           <a:prstGeom prst="rect">
@@ -7837,17 +8256,17 @@
           <a:p>
             <a:pPr>
               <a:spcAft>
-                <a:spcPts val="1000"/>
+                <a:spcPts val="1100"/>
               </a:spcAft>
             </a:pPr>
             <a:r>
               <a:rPr sz="1600" b="1" i="0">
                 <a:solidFill>
-                  <a:srgbClr val="2E3A80"/>
-                </a:solidFill>
-                <a:latin typeface="Montserrat"/>
-              </a:rPr>
-              <a:t>•  </a:t>
+                  <a:srgbClr val="E8801A"/>
+                </a:solidFill>
+                <a:latin typeface="Montserrat"/>
+              </a:rPr>
+              <a:t>▸  </a:t>
             </a:r>
             <a:r>
               <a:rPr sz="1600" b="0" i="0">
@@ -7856,23 +8275,23 @@
                 </a:solidFill>
                 <a:latin typeface="Montserrat"/>
               </a:rPr>
-              <a:t>Shunt: saca humos hacia arriba (tipo B)</a:t>
+              <a:t>Tiro: depresión que saca los humos</a:t>
             </a:r>
           </a:p>
           <a:p>
             <a:pPr>
               <a:spcAft>
-                <a:spcPts val="1000"/>
+                <a:spcPts val="1100"/>
               </a:spcAft>
             </a:pPr>
             <a:r>
               <a:rPr sz="1600" b="1" i="0">
                 <a:solidFill>
-                  <a:srgbClr val="2E3A80"/>
-                </a:solidFill>
-                <a:latin typeface="Montserrat"/>
-              </a:rPr>
-              <a:t>•  </a:t>
+                  <a:srgbClr val="E8801A"/>
+                </a:solidFill>
+                <a:latin typeface="Montserrat"/>
+              </a:rPr>
+              <a:t>▸  </a:t>
             </a:r>
             <a:r>
               <a:rPr sz="1600" b="0" i="0">
@@ -7881,23 +8300,23 @@
                 </a:solidFill>
                 <a:latin typeface="Montserrat"/>
               </a:rPr>
-              <a:t>Shunt invertido: mete aire desde la base</a:t>
+              <a:t>Revoco: los humos vuelven al local</a:t>
             </a:r>
           </a:p>
           <a:p>
             <a:pPr>
               <a:spcAft>
-                <a:spcPts val="1000"/>
+                <a:spcPts val="1100"/>
               </a:spcAft>
             </a:pPr>
             <a:r>
               <a:rPr sz="1600" b="1" i="0">
                 <a:solidFill>
-                  <a:srgbClr val="2E3A80"/>
-                </a:solidFill>
-                <a:latin typeface="Montserrat"/>
-              </a:rPr>
-              <a:t>•  </a:t>
+                  <a:srgbClr val="E8801A"/>
+                </a:solidFill>
+                <a:latin typeface="Montserrat"/>
+              </a:rPr>
+              <a:t>▸  </a:t>
             </a:r>
             <a:r>
               <a:rPr sz="1600" b="0" i="0">
@@ -7906,23 +8325,23 @@
                 </a:solidFill>
                 <a:latin typeface="Montserrat"/>
               </a:rPr>
-              <a:t>Ambos verticales, con conducto auxiliar</a:t>
+              <a:t>Terminal o deflector: protege del viento</a:t>
             </a:r>
           </a:p>
           <a:p>
             <a:pPr>
               <a:spcAft>
-                <a:spcPts val="1000"/>
+                <a:spcPts val="1100"/>
               </a:spcAft>
             </a:pPr>
             <a:r>
               <a:rPr sz="1600" b="1" i="0">
                 <a:solidFill>
-                  <a:srgbClr val="2E3A80"/>
-                </a:solidFill>
-                <a:latin typeface="Montserrat"/>
-              </a:rPr>
-              <a:t>•  </a:t>
+                  <a:srgbClr val="E8801A"/>
+                </a:solidFill>
+                <a:latin typeface="Montserrat"/>
+              </a:rPr>
+              <a:t>▸  </a:t>
             </a:r>
             <a:r>
               <a:rPr sz="1600" b="0" i="0">
@@ -7931,14 +8350,14 @@
                 </a:solidFill>
                 <a:latin typeface="Montserrat"/>
               </a:rPr>
-              <a:t>Invertido = al revés = trae aire</a:t>
-            </a:r>
-          </a:p>
-        </p:txBody>
-      </p:sp>
-      <p:sp>
-        <p:nvSpPr>
-          <p:cNvPr id="8" name="imgph" descr="IMGQ:vertical shunt flue duct in building"/>
+              <a:t>Tiro bueno = humos fuera</a:t>
+            </a:r>
+          </a:p>
+        </p:txBody>
+      </p:sp>
+      <p:sp>
+        <p:nvSpPr>
+          <p:cNvPr id="9" name="imgph" descr="IMGQ:chimney terminal cowl on rooftop"/>
           <p:cNvSpPr/>
           <p:nvPr/>
         </p:nvSpPr>
@@ -7984,7 +8403,7 @@
       </p:sp>
       <p:sp>
         <p:nvSpPr>
-          <p:cNvPr id="9" name="TextBox 8"/>
+          <p:cNvPr id="10" name="TextBox 9"/>
           <p:cNvSpPr txBox="1"/>
           <p:nvPr/>
         </p:nvSpPr>
@@ -8024,7 +8443,7 @@
                 </a:solidFill>
                 <a:latin typeface="Montserrat"/>
               </a:rPr>
-              <a:t>vertical shunt flue duct in building</a:t>
+              <a:t>chimney terminal cowl on rooftop</a:t>
             </a:r>
           </a:p>
         </p:txBody>
@@ -8121,7 +8540,7 @@
                 </a:solidFill>
                 <a:latin typeface="Montserrat"/>
               </a:rPr>
-              <a:t>017 / 020</a:t>
+              <a:t>017 / 021</a:t>
             </a:r>
           </a:p>
         </p:txBody>
@@ -8169,7 +8588,7 @@
         <p:spPr>
           <a:xfrm>
             <a:off x="822960" y="457200"/>
-            <a:ext cx="8229600" cy="365760"/>
+            <a:ext cx="10058400" cy="365760"/>
           </a:xfrm>
           <a:prstGeom prst="rect">
             <a:avLst/>
@@ -8183,13 +8602,13 @@
           <a:lstStyle/>
           <a:p>
             <a:r>
-              <a:rPr sz="1200" b="1" i="0">
-                <a:solidFill>
-                  <a:srgbClr val="64748B"/>
-                </a:solidFill>
-                <a:latin typeface="Montserrat"/>
-              </a:rPr>
-              <a:t>TÉRMINOS 3.105 Y 3.106</a:t>
+              <a:rPr sz="1300" b="1" i="0">
+                <a:solidFill>
+                  <a:srgbClr val="E8801A"/>
+                </a:solidFill>
+                <a:latin typeface="Montserrat"/>
+              </a:rPr>
+              <a:t>TÉRMINOS 3.107 Y 3.108</a:t>
             </a:r>
           </a:p>
         </p:txBody>
@@ -8217,26 +8636,70 @@
           <a:lstStyle/>
           <a:p>
             <a:r>
-              <a:rPr sz="2700" b="1" i="0">
+              <a:rPr sz="2800" b="1" i="0">
                 <a:solidFill>
                   <a:srgbClr val="1E2761"/>
                 </a:solidFill>
                 <a:latin typeface="Montserrat"/>
               </a:rPr>
-              <a:t>Sala de máquinas y semisótano</a:t>
-            </a:r>
-          </a:p>
-        </p:txBody>
-      </p:sp>
-      <p:sp>
-        <p:nvSpPr>
-          <p:cNvPr id="7" name="TextBox 6"/>
+              <a:t>Shunt y shunt invertido</a:t>
+            </a:r>
+          </a:p>
+        </p:txBody>
+      </p:sp>
+      <p:sp>
+        <p:nvSpPr>
+          <p:cNvPr id="7" name="Rounded Rectangle 6"/>
+          <p:cNvSpPr/>
+          <p:nvPr/>
+        </p:nvSpPr>
+        <p:spPr>
+          <a:xfrm>
+            <a:off x="868680" y="1627632"/>
+            <a:ext cx="2011680" cy="73152"/>
+          </a:xfrm>
+          <a:prstGeom prst="roundRect">
+            <a:avLst/>
+          </a:prstGeom>
+          <a:solidFill>
+            <a:srgbClr val="E8801A"/>
+          </a:solidFill>
+          <a:ln>
+            <a:noFill/>
+          </a:ln>
+          <a:effectLst/>
+        </p:spPr>
+        <p:style>
+          <a:lnRef idx="1">
+            <a:schemeClr val="accent1"/>
+          </a:lnRef>
+          <a:fillRef idx="3">
+            <a:schemeClr val="accent1"/>
+          </a:fillRef>
+          <a:effectRef idx="2">
+            <a:schemeClr val="accent1"/>
+          </a:effectRef>
+          <a:fontRef idx="minor">
+            <a:schemeClr val="lt1"/>
+          </a:fontRef>
+        </p:style>
+        <p:txBody>
+          <a:bodyPr rtlCol="0" anchor="ctr"/>
+          <a:lstStyle/>
+          <a:p>
+            <a:pPr algn="ctr"/>
+          </a:p>
+        </p:txBody>
+      </p:sp>
+      <p:sp>
+        <p:nvSpPr>
+          <p:cNvPr id="8" name="TextBox 7"/>
           <p:cNvSpPr txBox="1"/>
           <p:nvPr/>
         </p:nvSpPr>
         <p:spPr>
           <a:xfrm>
-            <a:off x="822960" y="1920240"/>
+            <a:off x="822960" y="1965960"/>
             <a:ext cx="4983480" cy="4206240"/>
           </a:xfrm>
           <a:prstGeom prst="rect">
@@ -8252,17 +8715,17 @@
           <a:p>
             <a:pPr>
               <a:spcAft>
-                <a:spcPts val="1000"/>
+                <a:spcPts val="1100"/>
               </a:spcAft>
             </a:pPr>
             <a:r>
               <a:rPr sz="1600" b="1" i="0">
                 <a:solidFill>
-                  <a:srgbClr val="2E3A80"/>
-                </a:solidFill>
-                <a:latin typeface="Montserrat"/>
-              </a:rPr>
-              <a:t>•  </a:t>
+                  <a:srgbClr val="E8801A"/>
+                </a:solidFill>
+                <a:latin typeface="Montserrat"/>
+              </a:rPr>
+              <a:t>▸  </a:t>
             </a:r>
             <a:r>
               <a:rPr sz="1600" b="0" i="0">
@@ -8271,23 +8734,23 @@
                 </a:solidFill>
                 <a:latin typeface="Montserrat"/>
               </a:rPr>
-              <a:t>Sala de máquinas: potencia conjunta &gt; 70 kW</a:t>
+              <a:t>Shunt: saca humos hacia arriba (tipo B)</a:t>
             </a:r>
           </a:p>
           <a:p>
             <a:pPr>
               <a:spcAft>
-                <a:spcPts val="1000"/>
+                <a:spcPts val="1100"/>
               </a:spcAft>
             </a:pPr>
             <a:r>
               <a:rPr sz="1600" b="1" i="0">
                 <a:solidFill>
-                  <a:srgbClr val="2E3A80"/>
-                </a:solidFill>
-                <a:latin typeface="Montserrat"/>
-              </a:rPr>
-              <a:t>•  </a:t>
+                  <a:srgbClr val="E8801A"/>
+                </a:solidFill>
+                <a:latin typeface="Montserrat"/>
+              </a:rPr>
+              <a:t>▸  </a:t>
             </a:r>
             <a:r>
               <a:rPr sz="1600" b="0" i="0">
@@ -8296,23 +8759,23 @@
                 </a:solidFill>
                 <a:latin typeface="Montserrat"/>
               </a:rPr>
-              <a:t>≤ 70 kW o equipos autónomos: no lo es</a:t>
+              <a:t>Shunt invertido: mete aire desde la base</a:t>
             </a:r>
           </a:p>
           <a:p>
             <a:pPr>
               <a:spcAft>
-                <a:spcPts val="1000"/>
+                <a:spcPts val="1100"/>
               </a:spcAft>
             </a:pPr>
             <a:r>
               <a:rPr sz="1600" b="1" i="0">
                 <a:solidFill>
-                  <a:srgbClr val="2E3A80"/>
-                </a:solidFill>
-                <a:latin typeface="Montserrat"/>
-              </a:rPr>
-              <a:t>•  </a:t>
+                  <a:srgbClr val="E8801A"/>
+                </a:solidFill>
+                <a:latin typeface="Montserrat"/>
+              </a:rPr>
+              <a:t>▸  </a:t>
             </a:r>
             <a:r>
               <a:rPr sz="1600" b="0" i="0">
@@ -8321,23 +8784,23 @@
                 </a:solidFill>
                 <a:latin typeface="Montserrat"/>
               </a:rPr>
-              <a:t>Semisótano: suelo &gt; 60 cm bajo el exterior</a:t>
+              <a:t>Ambos verticales, con conducto auxiliar</a:t>
             </a:r>
           </a:p>
           <a:p>
             <a:pPr>
               <a:spcAft>
-                <a:spcPts val="1000"/>
+                <a:spcPts val="1100"/>
               </a:spcAft>
             </a:pPr>
             <a:r>
               <a:rPr sz="1600" b="1" i="0">
                 <a:solidFill>
-                  <a:srgbClr val="2E3A80"/>
-                </a:solidFill>
-                <a:latin typeface="Montserrat"/>
-              </a:rPr>
-              <a:t>•  </a:t>
+                  <a:srgbClr val="E8801A"/>
+                </a:solidFill>
+                <a:latin typeface="Montserrat"/>
+              </a:rPr>
+              <a:t>▸  </a:t>
             </a:r>
             <a:r>
               <a:rPr sz="1600" b="0" i="0">
@@ -8346,14 +8809,14 @@
                 </a:solidFill>
                 <a:latin typeface="Montserrat"/>
               </a:rPr>
-              <a:t>Desaparece el primer sótano</a:t>
-            </a:r>
-          </a:p>
-        </p:txBody>
-      </p:sp>
-      <p:sp>
-        <p:nvSpPr>
-          <p:cNvPr id="8" name="imgph" descr="IMGQ:industrial boiler room with large boilers"/>
+              <a:t>Invertido = al revés = trae aire</a:t>
+            </a:r>
+          </a:p>
+        </p:txBody>
+      </p:sp>
+      <p:sp>
+        <p:nvSpPr>
+          <p:cNvPr id="9" name="imgph" descr="IMGQ:vertical shunt flue duct in building"/>
           <p:cNvSpPr/>
           <p:nvPr/>
         </p:nvSpPr>
@@ -8399,7 +8862,7 @@
       </p:sp>
       <p:sp>
         <p:nvSpPr>
-          <p:cNvPr id="9" name="TextBox 8"/>
+          <p:cNvPr id="10" name="TextBox 9"/>
           <p:cNvSpPr txBox="1"/>
           <p:nvPr/>
         </p:nvSpPr>
@@ -8439,7 +8902,7 @@
                 </a:solidFill>
                 <a:latin typeface="Montserrat"/>
               </a:rPr>
-              <a:t>industrial boiler room with large boilers</a:t>
+              <a:t>vertical shunt flue duct in building</a:t>
             </a:r>
           </a:p>
         </p:txBody>
@@ -8536,7 +8999,7 @@
                 </a:solidFill>
                 <a:latin typeface="Montserrat"/>
               </a:rPr>
-              <a:t>018 / 020</a:t>
+              <a:t>018 / 021</a:t>
             </a:r>
           </a:p>
         </p:txBody>
@@ -8584,7 +9047,7 @@
         <p:spPr>
           <a:xfrm>
             <a:off x="822960" y="457200"/>
-            <a:ext cx="8229600" cy="365760"/>
+            <a:ext cx="10058400" cy="365760"/>
           </a:xfrm>
           <a:prstGeom prst="rect">
             <a:avLst/>
@@ -8598,13 +9061,13 @@
           <a:lstStyle/>
           <a:p>
             <a:r>
-              <a:rPr sz="1200" b="1" i="0">
-                <a:solidFill>
-                  <a:srgbClr val="64748B"/>
-                </a:solidFill>
-                <a:latin typeface="Montserrat"/>
-              </a:rPr>
-              <a:t>TÉRMINOS 3.109 A 3.111</a:t>
+              <a:rPr sz="1300" b="1" i="0">
+                <a:solidFill>
+                  <a:srgbClr val="E8801A"/>
+                </a:solidFill>
+                <a:latin typeface="Montserrat"/>
+              </a:rPr>
+              <a:t>TÉRMINOS 3.105 Y 3.106</a:t>
             </a:r>
           </a:p>
         </p:txBody>
@@ -8632,26 +9095,70 @@
           <a:lstStyle/>
           <a:p>
             <a:r>
-              <a:rPr sz="2700" b="1" i="0">
+              <a:rPr sz="2800" b="1" i="0">
                 <a:solidFill>
                   <a:srgbClr val="1E2761"/>
                 </a:solidFill>
                 <a:latin typeface="Montserrat"/>
               </a:rPr>
-              <a:t>Soldadura blanda o fuerte</a:t>
-            </a:r>
-          </a:p>
-        </p:txBody>
-      </p:sp>
-      <p:sp>
-        <p:nvSpPr>
-          <p:cNvPr id="7" name="TextBox 6"/>
+              <a:t>Sala de máquinas y semisótano</a:t>
+            </a:r>
+          </a:p>
+        </p:txBody>
+      </p:sp>
+      <p:sp>
+        <p:nvSpPr>
+          <p:cNvPr id="7" name="Rounded Rectangle 6"/>
+          <p:cNvSpPr/>
+          <p:nvPr/>
+        </p:nvSpPr>
+        <p:spPr>
+          <a:xfrm>
+            <a:off x="868680" y="1627632"/>
+            <a:ext cx="2011680" cy="73152"/>
+          </a:xfrm>
+          <a:prstGeom prst="roundRect">
+            <a:avLst/>
+          </a:prstGeom>
+          <a:solidFill>
+            <a:srgbClr val="E8801A"/>
+          </a:solidFill>
+          <a:ln>
+            <a:noFill/>
+          </a:ln>
+          <a:effectLst/>
+        </p:spPr>
+        <p:style>
+          <a:lnRef idx="1">
+            <a:schemeClr val="accent1"/>
+          </a:lnRef>
+          <a:fillRef idx="3">
+            <a:schemeClr val="accent1"/>
+          </a:fillRef>
+          <a:effectRef idx="2">
+            <a:schemeClr val="accent1"/>
+          </a:effectRef>
+          <a:fontRef idx="minor">
+            <a:schemeClr val="lt1"/>
+          </a:fontRef>
+        </p:style>
+        <p:txBody>
+          <a:bodyPr rtlCol="0" anchor="ctr"/>
+          <a:lstStyle/>
+          <a:p>
+            <a:pPr algn="ctr"/>
+          </a:p>
+        </p:txBody>
+      </p:sp>
+      <p:sp>
+        <p:nvSpPr>
+          <p:cNvPr id="8" name="TextBox 7"/>
           <p:cNvSpPr txBox="1"/>
           <p:nvPr/>
         </p:nvSpPr>
         <p:spPr>
           <a:xfrm>
-            <a:off x="822960" y="1920240"/>
+            <a:off x="822960" y="1965960"/>
             <a:ext cx="4983480" cy="4206240"/>
           </a:xfrm>
           <a:prstGeom prst="rect">
@@ -8667,17 +9174,17 @@
           <a:p>
             <a:pPr>
               <a:spcAft>
-                <a:spcPts val="1000"/>
+                <a:spcPts val="1100"/>
               </a:spcAft>
             </a:pPr>
             <a:r>
               <a:rPr sz="1600" b="1" i="0">
                 <a:solidFill>
-                  <a:srgbClr val="2E3A80"/>
-                </a:solidFill>
-                <a:latin typeface="Montserrat"/>
-              </a:rPr>
-              <a:t>•  </a:t>
+                  <a:srgbClr val="E8801A"/>
+                </a:solidFill>
+                <a:latin typeface="Montserrat"/>
+              </a:rPr>
+              <a:t>▸  </a:t>
             </a:r>
             <a:r>
               <a:rPr sz="1600" b="0" i="0">
@@ -8686,23 +9193,23 @@
                 </a:solidFill>
                 <a:latin typeface="Montserrat"/>
               </a:rPr>
-              <a:t>Blanda: aporte funde 220 a &lt; 450 °C</a:t>
+              <a:t>Sala de máquinas: potencia conjunta &gt; 70 kW</a:t>
             </a:r>
           </a:p>
           <a:p>
             <a:pPr>
               <a:spcAft>
-                <a:spcPts val="1000"/>
+                <a:spcPts val="1100"/>
               </a:spcAft>
             </a:pPr>
             <a:r>
               <a:rPr sz="1600" b="1" i="0">
                 <a:solidFill>
-                  <a:srgbClr val="2E3A80"/>
-                </a:solidFill>
-                <a:latin typeface="Montserrat"/>
-              </a:rPr>
-              <a:t>•  </a:t>
+                  <a:srgbClr val="E8801A"/>
+                </a:solidFill>
+                <a:latin typeface="Montserrat"/>
+              </a:rPr>
+              <a:t>▸  </a:t>
             </a:r>
             <a:r>
               <a:rPr sz="1600" b="0" i="0">
@@ -8711,23 +9218,23 @@
                 </a:solidFill>
                 <a:latin typeface="Montserrat"/>
               </a:rPr>
-              <a:t>Fuerte: funde ≥ 450 °C</a:t>
+              <a:t>≤ 70 kW o equipos autónomos: no lo es</a:t>
             </a:r>
           </a:p>
           <a:p>
             <a:pPr>
               <a:spcAft>
-                <a:spcPts val="1000"/>
+                <a:spcPts val="1100"/>
               </a:spcAft>
             </a:pPr>
             <a:r>
               <a:rPr sz="1600" b="1" i="0">
                 <a:solidFill>
-                  <a:srgbClr val="2E3A80"/>
-                </a:solidFill>
-                <a:latin typeface="Montserrat"/>
-              </a:rPr>
-              <a:t>•  </a:t>
+                  <a:srgbClr val="E8801A"/>
+                </a:solidFill>
+                <a:latin typeface="Montserrat"/>
+              </a:rPr>
+              <a:t>▸  </a:t>
             </a:r>
             <a:r>
               <a:rPr sz="1600" b="0" i="0">
@@ -8736,23 +9243,23 @@
                 </a:solidFill>
                 <a:latin typeface="Montserrat"/>
               </a:rPr>
-              <a:t>La frontera es 450 °C</a:t>
+              <a:t>Semisótano: suelo &gt; 60 cm bajo el exterior</a:t>
             </a:r>
           </a:p>
           <a:p>
             <a:pPr>
               <a:spcAft>
-                <a:spcPts val="1000"/>
+                <a:spcPts val="1100"/>
               </a:spcAft>
             </a:pPr>
             <a:r>
               <a:rPr sz="1600" b="1" i="0">
                 <a:solidFill>
-                  <a:srgbClr val="2E3A80"/>
-                </a:solidFill>
-                <a:latin typeface="Montserrat"/>
-              </a:rPr>
-              <a:t>•  </a:t>
+                  <a:srgbClr val="E8801A"/>
+                </a:solidFill>
+                <a:latin typeface="Montserrat"/>
+              </a:rPr>
+              <a:t>▸  </a:t>
             </a:r>
             <a:r>
               <a:rPr sz="1600" b="0" i="0">
@@ -8761,14 +9268,14 @@
                 </a:solidFill>
                 <a:latin typeface="Montserrat"/>
               </a:rPr>
-              <a:t>Tallo: paso de enterrado a aéreo</a:t>
-            </a:r>
-          </a:p>
-        </p:txBody>
-      </p:sp>
-      <p:sp>
-        <p:nvSpPr>
-          <p:cNvPr id="8" name="imgph" descr="IMGQ:brazing copper gas pipe with torch"/>
+              <a:t>Desaparece el primer sótano</a:t>
+            </a:r>
+          </a:p>
+        </p:txBody>
+      </p:sp>
+      <p:sp>
+        <p:nvSpPr>
+          <p:cNvPr id="9" name="imgph" descr="IMGQ:industrial boiler room with large boilers"/>
           <p:cNvSpPr/>
           <p:nvPr/>
         </p:nvSpPr>
@@ -8814,7 +9321,7 @@
       </p:sp>
       <p:sp>
         <p:nvSpPr>
-          <p:cNvPr id="9" name="TextBox 8"/>
+          <p:cNvPr id="10" name="TextBox 9"/>
           <p:cNvSpPr txBox="1"/>
           <p:nvPr/>
         </p:nvSpPr>
@@ -8854,7 +9361,7 @@
                 </a:solidFill>
                 <a:latin typeface="Montserrat"/>
               </a:rPr>
-              <a:t>brazing copper gas pipe with torch</a:t>
+              <a:t>industrial boiler room with large boilers</a:t>
             </a:r>
           </a:p>
         </p:txBody>
@@ -8951,7 +9458,7 @@
                 </a:solidFill>
                 <a:latin typeface="Montserrat"/>
               </a:rPr>
-              <a:t>019 / 020</a:t>
+              <a:t>019 / 021</a:t>
             </a:r>
           </a:p>
         </p:txBody>
@@ -8999,7 +9506,7 @@
         <p:spPr>
           <a:xfrm>
             <a:off x="822960" y="457200"/>
-            <a:ext cx="8229600" cy="365760"/>
+            <a:ext cx="10058400" cy="365760"/>
           </a:xfrm>
           <a:prstGeom prst="rect">
             <a:avLst/>
@@ -9013,13 +9520,13 @@
           <a:lstStyle/>
           <a:p>
             <a:r>
-              <a:rPr sz="1200" b="1" i="0">
-                <a:solidFill>
-                  <a:srgbClr val="64748B"/>
-                </a:solidFill>
-                <a:latin typeface="Montserrat"/>
-              </a:rPr>
-              <a:t>TÉRMINOS 3.115 A 3.119</a:t>
+              <a:rPr sz="1300" b="1" i="0">
+                <a:solidFill>
+                  <a:srgbClr val="E8801A"/>
+                </a:solidFill>
+                <a:latin typeface="Montserrat"/>
+              </a:rPr>
+              <a:t>TÉRMINOS 3.109 A 3.111</a:t>
             </a:r>
           </a:p>
         </p:txBody>
@@ -9047,26 +9554,70 @@
           <a:lstStyle/>
           <a:p>
             <a:r>
-              <a:rPr sz="2700" b="1" i="0">
+              <a:rPr sz="2800" b="1" i="0">
                 <a:solidFill>
                   <a:srgbClr val="1E2761"/>
                 </a:solidFill>
                 <a:latin typeface="Montserrat"/>
               </a:rPr>
-              <a:t>Válvulas de seguridad</a:t>
-            </a:r>
-          </a:p>
-        </p:txBody>
-      </p:sp>
-      <p:sp>
-        <p:nvSpPr>
-          <p:cNvPr id="7" name="TextBox 6"/>
+              <a:t>Soldadura blanda o fuerte</a:t>
+            </a:r>
+          </a:p>
+        </p:txBody>
+      </p:sp>
+      <p:sp>
+        <p:nvSpPr>
+          <p:cNvPr id="7" name="Rounded Rectangle 6"/>
+          <p:cNvSpPr/>
+          <p:nvPr/>
+        </p:nvSpPr>
+        <p:spPr>
+          <a:xfrm>
+            <a:off x="868680" y="1627632"/>
+            <a:ext cx="2011680" cy="73152"/>
+          </a:xfrm>
+          <a:prstGeom prst="roundRect">
+            <a:avLst/>
+          </a:prstGeom>
+          <a:solidFill>
+            <a:srgbClr val="E8801A"/>
+          </a:solidFill>
+          <a:ln>
+            <a:noFill/>
+          </a:ln>
+          <a:effectLst/>
+        </p:spPr>
+        <p:style>
+          <a:lnRef idx="1">
+            <a:schemeClr val="accent1"/>
+          </a:lnRef>
+          <a:fillRef idx="3">
+            <a:schemeClr val="accent1"/>
+          </a:fillRef>
+          <a:effectRef idx="2">
+            <a:schemeClr val="accent1"/>
+          </a:effectRef>
+          <a:fontRef idx="minor">
+            <a:schemeClr val="lt1"/>
+          </a:fontRef>
+        </p:style>
+        <p:txBody>
+          <a:bodyPr rtlCol="0" anchor="ctr"/>
+          <a:lstStyle/>
+          <a:p>
+            <a:pPr algn="ctr"/>
+          </a:p>
+        </p:txBody>
+      </p:sp>
+      <p:sp>
+        <p:nvSpPr>
+          <p:cNvPr id="8" name="TextBox 7"/>
           <p:cNvSpPr txBox="1"/>
           <p:nvPr/>
         </p:nvSpPr>
         <p:spPr>
           <a:xfrm>
-            <a:off x="822960" y="1920240"/>
+            <a:off x="822960" y="1965960"/>
             <a:ext cx="4983480" cy="4206240"/>
           </a:xfrm>
           <a:prstGeom prst="rect">
@@ -9082,17 +9633,17 @@
           <a:p>
             <a:pPr>
               <a:spcAft>
-                <a:spcPts val="1000"/>
+                <a:spcPts val="1100"/>
               </a:spcAft>
             </a:pPr>
             <a:r>
               <a:rPr sz="1600" b="1" i="0">
                 <a:solidFill>
-                  <a:srgbClr val="2E3A80"/>
-                </a:solidFill>
-                <a:latin typeface="Montserrat"/>
-              </a:rPr>
-              <a:t>•  </a:t>
+                  <a:srgbClr val="E8801A"/>
+                </a:solidFill>
+                <a:latin typeface="Montserrat"/>
+              </a:rPr>
+              <a:t>▸  </a:t>
             </a:r>
             <a:r>
               <a:rPr sz="1600" b="0" i="0">
@@ -9101,23 +9652,23 @@
                 </a:solidFill>
                 <a:latin typeface="Montserrat"/>
               </a:rPr>
-              <a:t>VAS sobrepresión: alivia soltando gas</a:t>
+              <a:t>Blanda: aporte funde 220 a &lt; 450 °C</a:t>
             </a:r>
           </a:p>
           <a:p>
             <a:pPr>
               <a:spcAft>
-                <a:spcPts val="1000"/>
+                <a:spcPts val="1100"/>
               </a:spcAft>
             </a:pPr>
             <a:r>
               <a:rPr sz="1600" b="1" i="0">
                 <a:solidFill>
-                  <a:srgbClr val="2E3A80"/>
-                </a:solidFill>
-                <a:latin typeface="Montserrat"/>
-              </a:rPr>
-              <a:t>•  </a:t>
+                  <a:srgbClr val="E8801A"/>
+                </a:solidFill>
+                <a:latin typeface="Montserrat"/>
+              </a:rPr>
+              <a:t>▸  </a:t>
             </a:r>
             <a:r>
               <a:rPr sz="1600" b="0" i="0">
@@ -9126,23 +9677,23 @@
                 </a:solidFill>
                 <a:latin typeface="Montserrat"/>
               </a:rPr>
-              <a:t>VISmáx: corta si la presión sube</a:t>
+              <a:t>Fuerte: funde ≥ 450 °C</a:t>
             </a:r>
           </a:p>
           <a:p>
             <a:pPr>
               <a:spcAft>
-                <a:spcPts val="1000"/>
+                <a:spcPts val="1100"/>
               </a:spcAft>
             </a:pPr>
             <a:r>
               <a:rPr sz="1600" b="1" i="0">
                 <a:solidFill>
-                  <a:srgbClr val="2E3A80"/>
-                </a:solidFill>
-                <a:latin typeface="Montserrat"/>
-              </a:rPr>
-              <a:t>•  </a:t>
+                  <a:srgbClr val="E8801A"/>
+                </a:solidFill>
+                <a:latin typeface="Montserrat"/>
+              </a:rPr>
+              <a:t>▸  </a:t>
             </a:r>
             <a:r>
               <a:rPr sz="1600" b="0" i="0">
@@ -9151,23 +9702,23 @@
                 </a:solidFill>
                 <a:latin typeface="Montserrat"/>
               </a:rPr>
-              <a:t>VISmín: corta si la presión baja</a:t>
+              <a:t>La frontera es 450 °C</a:t>
             </a:r>
           </a:p>
           <a:p>
             <a:pPr>
               <a:spcAft>
-                <a:spcPts val="1000"/>
+                <a:spcPts val="1100"/>
               </a:spcAft>
             </a:pPr>
             <a:r>
               <a:rPr sz="1600" b="1" i="0">
                 <a:solidFill>
-                  <a:srgbClr val="2E3A80"/>
-                </a:solidFill>
-                <a:latin typeface="Montserrat"/>
-              </a:rPr>
-              <a:t>•  </a:t>
+                  <a:srgbClr val="E8801A"/>
+                </a:solidFill>
+                <a:latin typeface="Montserrat"/>
+              </a:rPr>
+              <a:t>▸  </a:t>
             </a:r>
             <a:r>
               <a:rPr sz="1600" b="0" i="0">
@@ -9176,14 +9727,14 @@
                 </a:solidFill>
                 <a:latin typeface="Montserrat"/>
               </a:rPr>
-              <a:t>Automática: abre con energía, corta sin ella</a:t>
-            </a:r>
-          </a:p>
-        </p:txBody>
-      </p:sp>
-      <p:sp>
-        <p:nvSpPr>
-          <p:cNvPr id="8" name="imgph" descr="IMGQ:gas safety relief valve on pipeline"/>
+              <a:t>Tallo: paso de enterrado a aéreo</a:t>
+            </a:r>
+          </a:p>
+        </p:txBody>
+      </p:sp>
+      <p:sp>
+        <p:nvSpPr>
+          <p:cNvPr id="9" name="imgph" descr="IMGQ:brazing copper gas pipe with torch"/>
           <p:cNvSpPr/>
           <p:nvPr/>
         </p:nvSpPr>
@@ -9229,7 +9780,7 @@
       </p:sp>
       <p:sp>
         <p:nvSpPr>
-          <p:cNvPr id="9" name="TextBox 8"/>
+          <p:cNvPr id="10" name="TextBox 9"/>
           <p:cNvSpPr txBox="1"/>
           <p:nvPr/>
         </p:nvSpPr>
@@ -9269,7 +9820,7 @@
                 </a:solidFill>
                 <a:latin typeface="Montserrat"/>
               </a:rPr>
-              <a:t>gas safety relief valve on pipeline</a:t>
+              <a:t>brazing copper gas pipe with torch</a:t>
             </a:r>
           </a:p>
         </p:txBody>
@@ -9366,7 +9917,7 @@
                 </a:solidFill>
                 <a:latin typeface="Montserrat"/>
               </a:rPr>
-              <a:t>002 / 020</a:t>
+              <a:t>002 / 021</a:t>
             </a:r>
           </a:p>
         </p:txBody>
@@ -9430,7 +9981,7 @@
             <a:r>
               <a:rPr sz="2700" b="1" i="0">
                 <a:solidFill>
-                  <a:srgbClr val="1E2761"/>
+                  <a:srgbClr val="E8801A"/>
                 </a:solidFill>
                 <a:latin typeface="Montserrat"/>
               </a:rPr>
@@ -9442,6 +9993,50 @@
       <p:sp>
         <p:nvSpPr>
           <p:cNvPr id="6" name="Rounded Rectangle 5"/>
+          <p:cNvSpPr/>
+          <p:nvPr/>
+        </p:nvSpPr>
+        <p:spPr>
+          <a:xfrm>
+            <a:off x="868680" y="1234440"/>
+            <a:ext cx="1463040" cy="73152"/>
+          </a:xfrm>
+          <a:prstGeom prst="roundRect">
+            <a:avLst/>
+          </a:prstGeom>
+          <a:solidFill>
+            <a:srgbClr val="1E2761"/>
+          </a:solidFill>
+          <a:ln>
+            <a:noFill/>
+          </a:ln>
+          <a:effectLst/>
+        </p:spPr>
+        <p:style>
+          <a:lnRef idx="1">
+            <a:schemeClr val="accent1"/>
+          </a:lnRef>
+          <a:fillRef idx="3">
+            <a:schemeClr val="accent1"/>
+          </a:fillRef>
+          <a:effectRef idx="2">
+            <a:schemeClr val="accent1"/>
+          </a:effectRef>
+          <a:fontRef idx="minor">
+            <a:schemeClr val="lt1"/>
+          </a:fontRef>
+        </p:style>
+        <p:txBody>
+          <a:bodyPr rtlCol="0" anchor="ctr"/>
+          <a:lstStyle/>
+          <a:p>
+            <a:pPr algn="ctr"/>
+          </a:p>
+        </p:txBody>
+      </p:sp>
+      <p:sp>
+        <p:nvSpPr>
+          <p:cNvPr id="7" name="Rounded Rectangle 6"/>
           <p:cNvSpPr/>
           <p:nvPr/>
         </p:nvSpPr>
@@ -9487,7 +10082,7 @@
       </p:sp>
       <p:sp>
         <p:nvSpPr>
-          <p:cNvPr id="7" name="TextBox 6"/>
+          <p:cNvPr id="8" name="TextBox 7"/>
           <p:cNvSpPr txBox="1"/>
           <p:nvPr/>
         </p:nvSpPr>
@@ -9522,7 +10117,7 @@
       </p:sp>
       <p:sp>
         <p:nvSpPr>
-          <p:cNvPr id="8" name="TextBox 7"/>
+          <p:cNvPr id="9" name="TextBox 8"/>
           <p:cNvSpPr txBox="1"/>
           <p:nvPr/>
         </p:nvSpPr>
@@ -9557,7 +10152,7 @@
       </p:sp>
       <p:sp>
         <p:nvSpPr>
-          <p:cNvPr id="9" name="Rounded Rectangle 8"/>
+          <p:cNvPr id="10" name="Rounded Rectangle 9"/>
           <p:cNvSpPr/>
           <p:nvPr/>
         </p:nvSpPr>
@@ -9603,7 +10198,7 @@
       </p:sp>
       <p:sp>
         <p:nvSpPr>
-          <p:cNvPr id="10" name="TextBox 9"/>
+          <p:cNvPr id="11" name="TextBox 10"/>
           <p:cNvSpPr txBox="1"/>
           <p:nvPr/>
         </p:nvSpPr>
@@ -9638,7 +10233,7 @@
       </p:sp>
       <p:sp>
         <p:nvSpPr>
-          <p:cNvPr id="11" name="TextBox 10"/>
+          <p:cNvPr id="12" name="TextBox 11"/>
           <p:cNvSpPr txBox="1"/>
           <p:nvPr/>
         </p:nvSpPr>
@@ -9673,7 +10268,7 @@
       </p:sp>
       <p:sp>
         <p:nvSpPr>
-          <p:cNvPr id="12" name="Rounded Rectangle 11"/>
+          <p:cNvPr id="13" name="Rounded Rectangle 12"/>
           <p:cNvSpPr/>
           <p:nvPr/>
         </p:nvSpPr>
@@ -9719,7 +10314,7 @@
       </p:sp>
       <p:sp>
         <p:nvSpPr>
-          <p:cNvPr id="13" name="TextBox 12"/>
+          <p:cNvPr id="14" name="TextBox 13"/>
           <p:cNvSpPr txBox="1"/>
           <p:nvPr/>
         </p:nvSpPr>
@@ -9754,7 +10349,7 @@
       </p:sp>
       <p:sp>
         <p:nvSpPr>
-          <p:cNvPr id="14" name="TextBox 13"/>
+          <p:cNvPr id="15" name="TextBox 14"/>
           <p:cNvSpPr txBox="1"/>
           <p:nvPr/>
         </p:nvSpPr>
@@ -9820,6 +10415,465 @@
             <a:avLst/>
           </a:prstGeom>
           <a:solidFill>
+            <a:srgbClr val="FFFFFF"/>
+          </a:solidFill>
+          <a:ln>
+            <a:noFill/>
+          </a:ln>
+          <a:effectLst/>
+        </p:spPr>
+        <p:style>
+          <a:lnRef idx="1">
+            <a:schemeClr val="accent1"/>
+          </a:lnRef>
+          <a:fillRef idx="3">
+            <a:schemeClr val="accent1"/>
+          </a:fillRef>
+          <a:effectRef idx="2">
+            <a:schemeClr val="accent1"/>
+          </a:effectRef>
+          <a:fontRef idx="minor">
+            <a:schemeClr val="lt1"/>
+          </a:fontRef>
+        </p:style>
+        <p:txBody>
+          <a:bodyPr rtlCol="0" anchor="ctr"/>
+          <a:lstStyle/>
+          <a:p>
+            <a:pPr algn="ctr"/>
+          </a:p>
+        </p:txBody>
+      </p:sp>
+      <p:sp>
+        <p:nvSpPr>
+          <p:cNvPr id="3" name="TextBox 2"/>
+          <p:cNvSpPr txBox="1"/>
+          <p:nvPr/>
+        </p:nvSpPr>
+        <p:spPr>
+          <a:xfrm>
+            <a:off x="10607040" y="320040"/>
+            <a:ext cx="1371600" cy="365760"/>
+          </a:xfrm>
+          <a:prstGeom prst="rect">
+            <a:avLst/>
+          </a:prstGeom>
+          <a:noFill/>
+        </p:spPr>
+        <p:txBody>
+          <a:bodyPr wrap="square">
+            <a:spAutoFit/>
+          </a:bodyPr>
+          <a:lstStyle/>
+          <a:p>
+            <a:pPr algn="r"/>
+            <a:r>
+              <a:rPr sz="1000" b="1" i="0">
+                <a:solidFill>
+                  <a:srgbClr val="64748B"/>
+                </a:solidFill>
+                <a:latin typeface="Montserrat"/>
+              </a:rPr>
+              <a:t>020 / 021</a:t>
+            </a:r>
+          </a:p>
+        </p:txBody>
+      </p:sp>
+      <p:sp>
+        <p:nvSpPr>
+          <p:cNvPr id="4" name="TextBox 3"/>
+          <p:cNvSpPr txBox="1"/>
+          <p:nvPr/>
+        </p:nvSpPr>
+        <p:spPr>
+          <a:xfrm>
+            <a:off x="457200" y="6419088"/>
+            <a:ext cx="8229600" cy="365760"/>
+          </a:xfrm>
+          <a:prstGeom prst="rect">
+            <a:avLst/>
+          </a:prstGeom>
+          <a:noFill/>
+        </p:spPr>
+        <p:txBody>
+          <a:bodyPr wrap="square">
+            <a:spAutoFit/>
+          </a:bodyPr>
+          <a:lstStyle/>
+          <a:p>
+            <a:r>
+              <a:rPr sz="900" b="0" i="0">
+                <a:solidFill>
+                  <a:srgbClr val="64748B"/>
+                </a:solidFill>
+                <a:latin typeface="Montserrat"/>
+              </a:rPr>
+              <a:t>Curso Gas B · Tema 09 · UNE 60670-1 y -2</a:t>
+            </a:r>
+          </a:p>
+        </p:txBody>
+      </p:sp>
+      <p:sp>
+        <p:nvSpPr>
+          <p:cNvPr id="5" name="TextBox 4"/>
+          <p:cNvSpPr txBox="1"/>
+          <p:nvPr/>
+        </p:nvSpPr>
+        <p:spPr>
+          <a:xfrm>
+            <a:off x="822960" y="457200"/>
+            <a:ext cx="10058400" cy="365760"/>
+          </a:xfrm>
+          <a:prstGeom prst="rect">
+            <a:avLst/>
+          </a:prstGeom>
+          <a:noFill/>
+        </p:spPr>
+        <p:txBody>
+          <a:bodyPr wrap="square">
+            <a:spAutoFit/>
+          </a:bodyPr>
+          <a:lstStyle/>
+          <a:p>
+            <a:r>
+              <a:rPr sz="1300" b="1" i="0">
+                <a:solidFill>
+                  <a:srgbClr val="E8801A"/>
+                </a:solidFill>
+                <a:latin typeface="Montserrat"/>
+              </a:rPr>
+              <a:t>TÉRMINOS 3.115 A 3.119</a:t>
+            </a:r>
+          </a:p>
+        </p:txBody>
+      </p:sp>
+      <p:sp>
+        <p:nvSpPr>
+          <p:cNvPr id="6" name="TextBox 5"/>
+          <p:cNvSpPr txBox="1"/>
+          <p:nvPr/>
+        </p:nvSpPr>
+        <p:spPr>
+          <a:xfrm>
+            <a:off x="822960" y="868680"/>
+            <a:ext cx="10515600" cy="914400"/>
+          </a:xfrm>
+          <a:prstGeom prst="rect">
+            <a:avLst/>
+          </a:prstGeom>
+          <a:noFill/>
+        </p:spPr>
+        <p:txBody>
+          <a:bodyPr wrap="square">
+            <a:spAutoFit/>
+          </a:bodyPr>
+          <a:lstStyle/>
+          <a:p>
+            <a:r>
+              <a:rPr sz="2800" b="1" i="0">
+                <a:solidFill>
+                  <a:srgbClr val="1E2761"/>
+                </a:solidFill>
+                <a:latin typeface="Montserrat"/>
+              </a:rPr>
+              <a:t>Válvulas de seguridad</a:t>
+            </a:r>
+          </a:p>
+        </p:txBody>
+      </p:sp>
+      <p:sp>
+        <p:nvSpPr>
+          <p:cNvPr id="7" name="Rounded Rectangle 6"/>
+          <p:cNvSpPr/>
+          <p:nvPr/>
+        </p:nvSpPr>
+        <p:spPr>
+          <a:xfrm>
+            <a:off x="868680" y="1627632"/>
+            <a:ext cx="2011680" cy="73152"/>
+          </a:xfrm>
+          <a:prstGeom prst="roundRect">
+            <a:avLst/>
+          </a:prstGeom>
+          <a:solidFill>
+            <a:srgbClr val="E8801A"/>
+          </a:solidFill>
+          <a:ln>
+            <a:noFill/>
+          </a:ln>
+          <a:effectLst/>
+        </p:spPr>
+        <p:style>
+          <a:lnRef idx="1">
+            <a:schemeClr val="accent1"/>
+          </a:lnRef>
+          <a:fillRef idx="3">
+            <a:schemeClr val="accent1"/>
+          </a:fillRef>
+          <a:effectRef idx="2">
+            <a:schemeClr val="accent1"/>
+          </a:effectRef>
+          <a:fontRef idx="minor">
+            <a:schemeClr val="lt1"/>
+          </a:fontRef>
+        </p:style>
+        <p:txBody>
+          <a:bodyPr rtlCol="0" anchor="ctr"/>
+          <a:lstStyle/>
+          <a:p>
+            <a:pPr algn="ctr"/>
+          </a:p>
+        </p:txBody>
+      </p:sp>
+      <p:sp>
+        <p:nvSpPr>
+          <p:cNvPr id="8" name="TextBox 7"/>
+          <p:cNvSpPr txBox="1"/>
+          <p:nvPr/>
+        </p:nvSpPr>
+        <p:spPr>
+          <a:xfrm>
+            <a:off x="822960" y="1965960"/>
+            <a:ext cx="4983480" cy="4206240"/>
+          </a:xfrm>
+          <a:prstGeom prst="rect">
+            <a:avLst/>
+          </a:prstGeom>
+          <a:noFill/>
+        </p:spPr>
+        <p:txBody>
+          <a:bodyPr wrap="square">
+            <a:spAutoFit/>
+          </a:bodyPr>
+          <a:lstStyle/>
+          <a:p>
+            <a:pPr>
+              <a:spcAft>
+                <a:spcPts val="1100"/>
+              </a:spcAft>
+            </a:pPr>
+            <a:r>
+              <a:rPr sz="1600" b="1" i="0">
+                <a:solidFill>
+                  <a:srgbClr val="E8801A"/>
+                </a:solidFill>
+                <a:latin typeface="Montserrat"/>
+              </a:rPr>
+              <a:t>▸  </a:t>
+            </a:r>
+            <a:r>
+              <a:rPr sz="1600" b="0" i="0">
+                <a:solidFill>
+                  <a:srgbClr val="1B2330"/>
+                </a:solidFill>
+                <a:latin typeface="Montserrat"/>
+              </a:rPr>
+              <a:t>VAS sobrepresión: alivia soltando gas</a:t>
+            </a:r>
+          </a:p>
+          <a:p>
+            <a:pPr>
+              <a:spcAft>
+                <a:spcPts val="1100"/>
+              </a:spcAft>
+            </a:pPr>
+            <a:r>
+              <a:rPr sz="1600" b="1" i="0">
+                <a:solidFill>
+                  <a:srgbClr val="E8801A"/>
+                </a:solidFill>
+                <a:latin typeface="Montserrat"/>
+              </a:rPr>
+              <a:t>▸  </a:t>
+            </a:r>
+            <a:r>
+              <a:rPr sz="1600" b="0" i="0">
+                <a:solidFill>
+                  <a:srgbClr val="1B2330"/>
+                </a:solidFill>
+                <a:latin typeface="Montserrat"/>
+              </a:rPr>
+              <a:t>VISmáx: corta si la presión sube</a:t>
+            </a:r>
+          </a:p>
+          <a:p>
+            <a:pPr>
+              <a:spcAft>
+                <a:spcPts val="1100"/>
+              </a:spcAft>
+            </a:pPr>
+            <a:r>
+              <a:rPr sz="1600" b="1" i="0">
+                <a:solidFill>
+                  <a:srgbClr val="E8801A"/>
+                </a:solidFill>
+                <a:latin typeface="Montserrat"/>
+              </a:rPr>
+              <a:t>▸  </a:t>
+            </a:r>
+            <a:r>
+              <a:rPr sz="1600" b="0" i="0">
+                <a:solidFill>
+                  <a:srgbClr val="1B2330"/>
+                </a:solidFill>
+                <a:latin typeface="Montserrat"/>
+              </a:rPr>
+              <a:t>VISmín: corta si la presión baja</a:t>
+            </a:r>
+          </a:p>
+          <a:p>
+            <a:pPr>
+              <a:spcAft>
+                <a:spcPts val="1100"/>
+              </a:spcAft>
+            </a:pPr>
+            <a:r>
+              <a:rPr sz="1600" b="1" i="0">
+                <a:solidFill>
+                  <a:srgbClr val="E8801A"/>
+                </a:solidFill>
+                <a:latin typeface="Montserrat"/>
+              </a:rPr>
+              <a:t>▸  </a:t>
+            </a:r>
+            <a:r>
+              <a:rPr sz="1600" b="0" i="0">
+                <a:solidFill>
+                  <a:srgbClr val="1B2330"/>
+                </a:solidFill>
+                <a:latin typeface="Montserrat"/>
+              </a:rPr>
+              <a:t>Automática: abre con energía, corta sin ella</a:t>
+            </a:r>
+          </a:p>
+        </p:txBody>
+      </p:sp>
+      <p:sp>
+        <p:nvSpPr>
+          <p:cNvPr id="9" name="imgph" descr="IMGQ:gas safety relief valve on pipeline"/>
+          <p:cNvSpPr/>
+          <p:nvPr/>
+        </p:nvSpPr>
+        <p:spPr>
+          <a:xfrm>
+            <a:off x="5806440" y="1051560"/>
+            <a:ext cx="5298947" cy="4629150"/>
+          </a:xfrm>
+          <a:prstGeom prst="roundRect">
+            <a:avLst/>
+          </a:prstGeom>
+          <a:solidFill>
+            <a:srgbClr val="F3F6FB"/>
+          </a:solidFill>
+          <a:ln w="12700">
+            <a:solidFill>
+              <a:srgbClr val="C7D2E6"/>
+            </a:solidFill>
+          </a:ln>
+          <a:effectLst/>
+        </p:spPr>
+        <p:style>
+          <a:lnRef idx="1">
+            <a:schemeClr val="accent1"/>
+          </a:lnRef>
+          <a:fillRef idx="3">
+            <a:schemeClr val="accent1"/>
+          </a:fillRef>
+          <a:effectRef idx="2">
+            <a:schemeClr val="accent1"/>
+          </a:effectRef>
+          <a:fontRef idx="minor">
+            <a:schemeClr val="lt1"/>
+          </a:fontRef>
+        </p:style>
+        <p:txBody>
+          <a:bodyPr rtlCol="0" anchor="ctr"/>
+          <a:lstStyle/>
+          <a:p>
+            <a:pPr algn="ctr"/>
+          </a:p>
+        </p:txBody>
+      </p:sp>
+      <p:sp>
+        <p:nvSpPr>
+          <p:cNvPr id="10" name="TextBox 9"/>
+          <p:cNvSpPr txBox="1"/>
+          <p:nvPr/>
+        </p:nvSpPr>
+        <p:spPr>
+          <a:xfrm>
+            <a:off x="6080760" y="2726055"/>
+            <a:ext cx="4750307" cy="1280160"/>
+          </a:xfrm>
+          <a:prstGeom prst="rect">
+            <a:avLst/>
+          </a:prstGeom>
+          <a:noFill/>
+        </p:spPr>
+        <p:txBody>
+          <a:bodyPr wrap="square">
+            <a:spAutoFit/>
+          </a:bodyPr>
+          <a:lstStyle/>
+          <a:p>
+            <a:pPr algn="ctr"/>
+            <a:r>
+              <a:rPr sz="1400" b="1" i="0">
+                <a:solidFill>
+                  <a:srgbClr val="64748B"/>
+                </a:solidFill>
+                <a:latin typeface="Montserrat"/>
+              </a:rPr>
+              <a:t>IMAGEN REALISTA</a:t>
+            </a:r>
+          </a:p>
+          <a:p>
+            <a:pPr algn="ctr"/>
+            <a:r>
+              <a:rPr sz="1100" b="0" i="1">
+                <a:solidFill>
+                  <a:srgbClr val="64748B"/>
+                </a:solidFill>
+                <a:latin typeface="Montserrat"/>
+              </a:rPr>
+              <a:t>gas safety relief valve on pipeline</a:t>
+            </a:r>
+          </a:p>
+        </p:txBody>
+      </p:sp>
+    </p:spTree>
+  </p:cSld>
+  <p:clrMapOvr>
+    <a:masterClrMapping/>
+  </p:clrMapOvr>
+</p:sld>
+</file>
+
+<file path=ppt/slides/slide21.xml><?xml version="1.0" encoding="utf-8"?>
+<p:sld xmlns:a="http://schemas.openxmlformats.org/drawingml/2006/main" xmlns:p="http://schemas.openxmlformats.org/presentationml/2006/main" xmlns:r="http://schemas.openxmlformats.org/officeDocument/2006/relationships">
+  <p:cSld>
+    <p:spTree>
+      <p:nvGrpSpPr>
+        <p:cNvPr id="1" name=""/>
+        <p:cNvGrpSpPr/>
+        <p:nvPr/>
+      </p:nvGrpSpPr>
+      <p:grpSpPr/>
+      <p:sp>
+        <p:nvSpPr>
+          <p:cNvPr id="2" name="Rectangle 1"/>
+          <p:cNvSpPr/>
+          <p:nvPr/>
+        </p:nvSpPr>
+        <p:spPr>
+          <a:xfrm>
+            <a:off x="0" y="0"/>
+            <a:ext cx="12191695" cy="6858000"/>
+          </a:xfrm>
+          <a:prstGeom prst="rect">
+            <a:avLst/>
+          </a:prstGeom>
+          <a:solidFill>
             <a:srgbClr val="1E2761"/>
           </a:solidFill>
           <a:ln>
@@ -9874,7 +10928,7 @@
             <a:r>
               <a:rPr sz="1400" b="1" i="0">
                 <a:solidFill>
-                  <a:srgbClr val="CADCFC"/>
+                  <a:srgbClr val="F4A24C"/>
                 </a:solidFill>
                 <a:latin typeface="Montserrat"/>
               </a:rPr>
@@ -9885,13 +10939,57 @@
       </p:sp>
       <p:sp>
         <p:nvSpPr>
-          <p:cNvPr id="4" name="TextBox 3"/>
+          <p:cNvPr id="4" name="Rounded Rectangle 3"/>
+          <p:cNvSpPr/>
+          <p:nvPr/>
+        </p:nvSpPr>
+        <p:spPr>
+          <a:xfrm>
+            <a:off x="868680" y="1051560"/>
+            <a:ext cx="1463040" cy="82296"/>
+          </a:xfrm>
+          <a:prstGeom prst="roundRect">
+            <a:avLst/>
+          </a:prstGeom>
+          <a:solidFill>
+            <a:srgbClr val="E8801A"/>
+          </a:solidFill>
+          <a:ln>
+            <a:noFill/>
+          </a:ln>
+          <a:effectLst/>
+        </p:spPr>
+        <p:style>
+          <a:lnRef idx="1">
+            <a:schemeClr val="accent1"/>
+          </a:lnRef>
+          <a:fillRef idx="3">
+            <a:schemeClr val="accent1"/>
+          </a:fillRef>
+          <a:effectRef idx="2">
+            <a:schemeClr val="accent1"/>
+          </a:effectRef>
+          <a:fontRef idx="minor">
+            <a:schemeClr val="lt1"/>
+          </a:fontRef>
+        </p:style>
+        <p:txBody>
+          <a:bodyPr rtlCol="0" anchor="ctr"/>
+          <a:lstStyle/>
+          <a:p>
+            <a:pPr algn="ctr"/>
+          </a:p>
+        </p:txBody>
+      </p:sp>
+      <p:sp>
+        <p:nvSpPr>
+          <p:cNvPr id="5" name="TextBox 4"/>
           <p:cNvSpPr txBox="1"/>
           <p:nvPr/>
         </p:nvSpPr>
         <p:spPr>
           <a:xfrm>
-            <a:off x="822960" y="1143000"/>
+            <a:off x="822960" y="1234440"/>
             <a:ext cx="10515600" cy="1097280"/>
           </a:xfrm>
           <a:prstGeom prst="rect">
@@ -9919,14 +11017,14 @@
       </p:sp>
       <p:sp>
         <p:nvSpPr>
-          <p:cNvPr id="5" name="TextBox 4"/>
+          <p:cNvPr id="6" name="TextBox 5"/>
           <p:cNvSpPr txBox="1"/>
           <p:nvPr/>
         </p:nvSpPr>
         <p:spPr>
           <a:xfrm>
-            <a:off x="822960" y="2514600"/>
-            <a:ext cx="10515600" cy="2834640"/>
+            <a:off x="822960" y="2606040"/>
+            <a:ext cx="10515600" cy="2743200"/>
           </a:xfrm>
           <a:prstGeom prst="rect">
             <a:avLst/>
@@ -9947,7 +11045,7 @@
             <a:r>
               <a:rPr sz="2000" b="1" i="0">
                 <a:solidFill>
-                  <a:srgbClr val="CADCFC"/>
+                  <a:srgbClr val="F4A24C"/>
                 </a:solidFill>
                 <a:latin typeface="Montserrat"/>
               </a:rPr>
@@ -9972,7 +11070,7 @@
             <a:r>
               <a:rPr sz="2000" b="1" i="0">
                 <a:solidFill>
-                  <a:srgbClr val="CADCFC"/>
+                  <a:srgbClr val="F4A24C"/>
                 </a:solidFill>
                 <a:latin typeface="Montserrat"/>
               </a:rPr>
@@ -9997,7 +11095,7 @@
             <a:r>
               <a:rPr sz="2000" b="1" i="0">
                 <a:solidFill>
-                  <a:srgbClr val="CADCFC"/>
+                  <a:srgbClr val="F4A24C"/>
                 </a:solidFill>
                 <a:latin typeface="Montserrat"/>
               </a:rPr>
@@ -10022,7 +11120,7 @@
             <a:r>
               <a:rPr sz="2000" b="1" i="0">
                 <a:solidFill>
-                  <a:srgbClr val="CADCFC"/>
+                  <a:srgbClr val="F4A24C"/>
                 </a:solidFill>
                 <a:latin typeface="Montserrat"/>
               </a:rPr>
@@ -10042,20 +11140,20 @@
       </p:sp>
       <p:sp>
         <p:nvSpPr>
-          <p:cNvPr id="6" name="Rounded Rectangle 5"/>
+          <p:cNvPr id="7" name="Rounded Rectangle 6"/>
           <p:cNvSpPr/>
           <p:nvPr/>
         </p:nvSpPr>
         <p:spPr>
           <a:xfrm>
             <a:off x="822960" y="5532120"/>
-            <a:ext cx="10515600" cy="777240"/>
+            <a:ext cx="10515600" cy="822960"/>
           </a:xfrm>
           <a:prstGeom prst="roundRect">
             <a:avLst/>
           </a:prstGeom>
           <a:solidFill>
-            <a:srgbClr val="2E3A80"/>
+            <a:srgbClr val="E8801A"/>
           </a:solidFill>
           <a:ln>
             <a:noFill/>
@@ -10086,13 +11184,13 @@
       </p:sp>
       <p:sp>
         <p:nvSpPr>
-          <p:cNvPr id="7" name="TextBox 6"/>
+          <p:cNvPr id="8" name="TextBox 7"/>
           <p:cNvSpPr txBox="1"/>
           <p:nvPr/>
         </p:nvSpPr>
         <p:spPr>
           <a:xfrm>
-            <a:off x="1051560" y="5605272"/>
+            <a:off x="1051560" y="5623560"/>
             <a:ext cx="10058400" cy="640080"/>
           </a:xfrm>
           <a:prstGeom prst="rect">
@@ -10109,7 +11207,7 @@
             <a:r>
               <a:rPr sz="1500" b="1" i="1">
                 <a:solidFill>
-                  <a:srgbClr val="CADCFC"/>
+                  <a:srgbClr val="1E2761"/>
                 </a:solidFill>
                 <a:latin typeface="Montserrat"/>
               </a:rPr>
@@ -10210,7 +11308,7 @@
                 </a:solidFill>
                 <a:latin typeface="Montserrat"/>
               </a:rPr>
-              <a:t>003 / 020</a:t>
+              <a:t>003 / 021</a:t>
             </a:r>
           </a:p>
         </p:txBody>
@@ -10257,7 +11355,7 @@
         </p:nvSpPr>
         <p:spPr>
           <a:xfrm>
-            <a:off x="822960" y="457200"/>
+            <a:off x="822960" y="502920"/>
             <a:ext cx="8229600" cy="365760"/>
           </a:xfrm>
           <a:prstGeom prst="rect">
@@ -10272,13 +11370,13 @@
           <a:lstStyle/>
           <a:p>
             <a:r>
-              <a:rPr sz="1200" b="1" i="0">
-                <a:solidFill>
-                  <a:srgbClr val="64748B"/>
-                </a:solidFill>
-                <a:latin typeface="Montserrat"/>
-              </a:rPr>
-              <a:t>TÉRMINOS 3.61 Y 3.62</a:t>
+              <a:rPr sz="1300" b="1" i="0">
+                <a:solidFill>
+                  <a:srgbClr val="E8801A"/>
+                </a:solidFill>
+                <a:latin typeface="Montserrat"/>
+              </a:rPr>
+              <a:t>PARTES DE ESTE VÍDEO</a:t>
             </a:r>
           </a:p>
         </p:txBody>
@@ -10291,7 +11389,7 @@
         </p:nvSpPr>
         <p:spPr>
           <a:xfrm>
-            <a:off x="822960" y="868680"/>
+            <a:off x="822960" y="914400"/>
             <a:ext cx="10515600" cy="914400"/>
           </a:xfrm>
           <a:prstGeom prst="rect">
@@ -10312,155 +11410,30 @@
                 </a:solidFill>
                 <a:latin typeface="Montserrat"/>
               </a:rPr>
-              <a:t>LIE y LSE: la franja del peligro</a:t>
-            </a:r>
-          </a:p>
-        </p:txBody>
-      </p:sp>
-      <p:sp>
-        <p:nvSpPr>
-          <p:cNvPr id="7" name="TextBox 6"/>
-          <p:cNvSpPr txBox="1"/>
-          <p:nvPr/>
-        </p:nvSpPr>
-        <p:spPr>
-          <a:xfrm>
-            <a:off x="822960" y="1920240"/>
-            <a:ext cx="4983480" cy="4206240"/>
-          </a:xfrm>
-          <a:prstGeom prst="rect">
-            <a:avLst/>
-          </a:prstGeom>
-          <a:noFill/>
-        </p:spPr>
-        <p:txBody>
-          <a:bodyPr wrap="square">
-            <a:spAutoFit/>
-          </a:bodyPr>
-          <a:lstStyle/>
-          <a:p>
-            <a:pPr>
-              <a:spcAft>
-                <a:spcPts val="1000"/>
-              </a:spcAft>
-            </a:pPr>
-            <a:r>
-              <a:rPr sz="1600" b="1" i="0">
-                <a:solidFill>
-                  <a:srgbClr val="2E3A80"/>
-                </a:solidFill>
-                <a:latin typeface="Montserrat"/>
-              </a:rPr>
-              <a:t>•  </a:t>
-            </a:r>
-            <a:r>
-              <a:rPr sz="1600" b="0" i="0">
-                <a:solidFill>
-                  <a:srgbClr val="1B2330"/>
-                </a:solidFill>
-                <a:latin typeface="Montserrat"/>
-              </a:rPr>
-              <a:t>LIE: a partir de aquí ya explota</a:t>
-            </a:r>
-          </a:p>
-          <a:p>
-            <a:pPr>
-              <a:spcAft>
-                <a:spcPts val="1000"/>
-              </a:spcAft>
-            </a:pPr>
-            <a:r>
-              <a:rPr sz="1600" b="1" i="0">
-                <a:solidFill>
-                  <a:srgbClr val="2E3A80"/>
-                </a:solidFill>
-                <a:latin typeface="Montserrat"/>
-              </a:rPr>
-              <a:t>•  </a:t>
-            </a:r>
-            <a:r>
-              <a:rPr sz="1600" b="0" i="0">
-                <a:solidFill>
-                  <a:srgbClr val="1B2330"/>
-                </a:solidFill>
-                <a:latin typeface="Montserrat"/>
-              </a:rPr>
-              <a:t>LSE: por encima deja de explotar</a:t>
-            </a:r>
-          </a:p>
-          <a:p>
-            <a:pPr>
-              <a:spcAft>
-                <a:spcPts val="1000"/>
-              </a:spcAft>
-            </a:pPr>
-            <a:r>
-              <a:rPr sz="1600" b="1" i="0">
-                <a:solidFill>
-                  <a:srgbClr val="2E3A80"/>
-                </a:solidFill>
-                <a:latin typeface="Montserrat"/>
-              </a:rPr>
-              <a:t>•  </a:t>
-            </a:r>
-            <a:r>
-              <a:rPr sz="1600" b="0" i="0">
-                <a:solidFill>
-                  <a:srgbClr val="1B2330"/>
-                </a:solidFill>
-                <a:latin typeface="Montserrat"/>
-              </a:rPr>
-              <a:t>En % de gas en aire</a:t>
-            </a:r>
-          </a:p>
-          <a:p>
-            <a:pPr>
-              <a:spcAft>
-                <a:spcPts val="1000"/>
-              </a:spcAft>
-            </a:pPr>
-            <a:r>
-              <a:rPr sz="1600" b="1" i="0">
-                <a:solidFill>
-                  <a:srgbClr val="2E3A80"/>
-                </a:solidFill>
-                <a:latin typeface="Montserrat"/>
-              </a:rPr>
-              <a:t>•  </a:t>
-            </a:r>
-            <a:r>
-              <a:rPr sz="1600" b="0" i="0">
-                <a:solidFill>
-                  <a:srgbClr val="1B2330"/>
-                </a:solidFill>
-                <a:latin typeface="Montserrat"/>
-              </a:rPr>
-              <a:t>Entre los dos límites, ¡boom!</a:t>
-            </a:r>
-          </a:p>
-        </p:txBody>
-      </p:sp>
-      <p:sp>
-        <p:nvSpPr>
-          <p:cNvPr id="8" name="imgph" descr="IMGQ:gas detector display showing percentage reading"/>
+              <a:t>En este vídeo</a:t>
+            </a:r>
+          </a:p>
+        </p:txBody>
+      </p:sp>
+      <p:sp>
+        <p:nvSpPr>
+          <p:cNvPr id="7" name="Rounded Rectangle 6"/>
           <p:cNvSpPr/>
           <p:nvPr/>
         </p:nvSpPr>
         <p:spPr>
           <a:xfrm>
-            <a:off x="5806440" y="1051560"/>
-            <a:ext cx="5298947" cy="4629150"/>
+            <a:off x="868680" y="1673352"/>
+            <a:ext cx="2011680" cy="73152"/>
           </a:xfrm>
           <a:prstGeom prst="roundRect">
             <a:avLst/>
           </a:prstGeom>
           <a:solidFill>
-            <a:srgbClr val="F3F6FB"/>
+            <a:srgbClr val="E8801A"/>
           </a:solidFill>
-          <a:ln w="12700">
-            <a:solidFill>
-              <a:srgbClr val="C7D2E6"/>
-            </a:solidFill>
+          <a:ln>
+            <a:noFill/>
           </a:ln>
           <a:effectLst/>
         </p:spPr>
@@ -10488,14 +11461,14 @@
       </p:sp>
       <p:sp>
         <p:nvSpPr>
-          <p:cNvPr id="9" name="TextBox 8"/>
+          <p:cNvPr id="8" name="TextBox 7"/>
           <p:cNvSpPr txBox="1"/>
           <p:nvPr/>
         </p:nvSpPr>
         <p:spPr>
           <a:xfrm>
-            <a:off x="6080760" y="2726055"/>
-            <a:ext cx="4750307" cy="1280160"/>
+            <a:off x="822960" y="2103120"/>
+            <a:ext cx="10515600" cy="4023360"/>
           </a:xfrm>
           <a:prstGeom prst="rect">
             <a:avLst/>
@@ -10508,27 +11481,228 @@
           </a:bodyPr>
           <a:lstStyle/>
           <a:p>
-            <a:pPr algn="ctr"/>
-            <a:r>
-              <a:rPr sz="1400" b="1" i="0">
-                <a:solidFill>
-                  <a:srgbClr val="64748B"/>
-                </a:solidFill>
-                <a:latin typeface="Montserrat"/>
-              </a:rPr>
-              <a:t>IMAGEN REALISTA</a:t>
-            </a:r>
-          </a:p>
-          <a:p>
-            <a:pPr algn="ctr"/>
-            <a:r>
-              <a:rPr sz="1100" b="0" i="1">
-                <a:solidFill>
-                  <a:srgbClr val="64748B"/>
-                </a:solidFill>
-                <a:latin typeface="Montserrat"/>
-              </a:rPr>
-              <a:t>gas detector display showing percentage reading</a:t>
+            <a:pPr>
+              <a:spcAft>
+                <a:spcPts val="900"/>
+              </a:spcAft>
+            </a:pPr>
+            <a:r>
+              <a:rPr sz="1800" b="1" i="0">
+                <a:solidFill>
+                  <a:srgbClr val="E8801A"/>
+                </a:solidFill>
+                <a:latin typeface="Montserrat"/>
+              </a:rPr>
+              <a:t>01   </a:t>
+            </a:r>
+            <a:r>
+              <a:rPr sz="1700" b="0" i="0">
+                <a:solidFill>
+                  <a:srgbClr val="1B2330"/>
+                </a:solidFill>
+                <a:latin typeface="Montserrat"/>
+              </a:rPr>
+              <a:t>Términos 3.61 y 3.62</a:t>
+            </a:r>
+          </a:p>
+          <a:p>
+            <a:pPr>
+              <a:spcAft>
+                <a:spcPts val="900"/>
+              </a:spcAft>
+            </a:pPr>
+            <a:r>
+              <a:rPr sz="1800" b="1" i="0">
+                <a:solidFill>
+                  <a:srgbClr val="E8801A"/>
+                </a:solidFill>
+                <a:latin typeface="Montserrat"/>
+              </a:rPr>
+              <a:t>02   </a:t>
+            </a:r>
+            <a:r>
+              <a:rPr sz="1700" b="0" i="0">
+                <a:solidFill>
+                  <a:srgbClr val="1B2330"/>
+                </a:solidFill>
+                <a:latin typeface="Montserrat"/>
+              </a:rPr>
+              <a:t>Términos 3.63 a 3.69</a:t>
+            </a:r>
+          </a:p>
+          <a:p>
+            <a:pPr>
+              <a:spcAft>
+                <a:spcPts val="900"/>
+              </a:spcAft>
+            </a:pPr>
+            <a:r>
+              <a:rPr sz="1800" b="1" i="0">
+                <a:solidFill>
+                  <a:srgbClr val="E8801A"/>
+                </a:solidFill>
+                <a:latin typeface="Montserrat"/>
+              </a:rPr>
+              <a:t>03   </a:t>
+            </a:r>
+            <a:r>
+              <a:rPr sz="1700" b="0" i="0">
+                <a:solidFill>
+                  <a:srgbClr val="1B2330"/>
+                </a:solidFill>
+                <a:latin typeface="Montserrat"/>
+              </a:rPr>
+              <a:t>Términos 3.70 a 3.77</a:t>
+            </a:r>
+          </a:p>
+          <a:p>
+            <a:pPr>
+              <a:spcAft>
+                <a:spcPts val="900"/>
+              </a:spcAft>
+            </a:pPr>
+            <a:r>
+              <a:rPr sz="1800" b="1" i="0">
+                <a:solidFill>
+                  <a:srgbClr val="E8801A"/>
+                </a:solidFill>
+                <a:latin typeface="Montserrat"/>
+              </a:rPr>
+              <a:t>04   </a:t>
+            </a:r>
+            <a:r>
+              <a:rPr sz="1700" b="0" i="0">
+                <a:solidFill>
+                  <a:srgbClr val="1B2330"/>
+                </a:solidFill>
+                <a:latin typeface="Montserrat"/>
+              </a:rPr>
+              <a:t>Términos 3.71 y 3.76</a:t>
+            </a:r>
+          </a:p>
+          <a:p>
+            <a:pPr>
+              <a:spcAft>
+                <a:spcPts val="900"/>
+              </a:spcAft>
+            </a:pPr>
+            <a:r>
+              <a:rPr sz="1800" b="1" i="0">
+                <a:solidFill>
+                  <a:srgbClr val="E8801A"/>
+                </a:solidFill>
+                <a:latin typeface="Montserrat"/>
+              </a:rPr>
+              <a:t>05   </a:t>
+            </a:r>
+            <a:r>
+              <a:rPr sz="1700" b="0" i="0">
+                <a:solidFill>
+                  <a:srgbClr val="1B2330"/>
+                </a:solidFill>
+                <a:latin typeface="Montserrat"/>
+              </a:rPr>
+              <a:t>Términos 3.78 a 3.80</a:t>
+            </a:r>
+          </a:p>
+          <a:p>
+            <a:pPr>
+              <a:spcAft>
+                <a:spcPts val="900"/>
+              </a:spcAft>
+            </a:pPr>
+            <a:r>
+              <a:rPr sz="1800" b="1" i="0">
+                <a:solidFill>
+                  <a:srgbClr val="E8801A"/>
+                </a:solidFill>
+                <a:latin typeface="Montserrat"/>
+              </a:rPr>
+              <a:t>06   </a:t>
+            </a:r>
+            <a:r>
+              <a:rPr sz="1700" b="0" i="0">
+                <a:solidFill>
+                  <a:srgbClr val="1B2330"/>
+                </a:solidFill>
+                <a:latin typeface="Montserrat"/>
+              </a:rPr>
+              <a:t>Términos 3.81 a 3.114</a:t>
+            </a:r>
+          </a:p>
+          <a:p>
+            <a:pPr>
+              <a:spcAft>
+                <a:spcPts val="900"/>
+              </a:spcAft>
+            </a:pPr>
+            <a:r>
+              <a:rPr sz="1800" b="1" i="0">
+                <a:solidFill>
+                  <a:srgbClr val="E8801A"/>
+                </a:solidFill>
+                <a:latin typeface="Montserrat"/>
+              </a:rPr>
+              <a:t>07   </a:t>
+            </a:r>
+            <a:r>
+              <a:rPr sz="1700" b="0" i="0">
+                <a:solidFill>
+                  <a:srgbClr val="1B2330"/>
+                </a:solidFill>
+                <a:latin typeface="Montserrat"/>
+              </a:rPr>
+              <a:t>Términos 3.86, 3.55</a:t>
+            </a:r>
+          </a:p>
+          <a:p>
+            <a:pPr>
+              <a:spcAft>
+                <a:spcPts val="900"/>
+              </a:spcAft>
+            </a:pPr>
+            <a:r>
+              <a:rPr sz="1800" b="1" i="0">
+                <a:solidFill>
+                  <a:srgbClr val="E8801A"/>
+                </a:solidFill>
+                <a:latin typeface="Montserrat"/>
+              </a:rPr>
+              <a:t>08   </a:t>
+            </a:r>
+            <a:r>
+              <a:rPr sz="1700" b="0" i="0">
+                <a:solidFill>
+                  <a:srgbClr val="1B2330"/>
+                </a:solidFill>
+                <a:latin typeface="Montserrat"/>
+              </a:rPr>
+              <a:t>Términos 3.87 y 3.88</a:t>
+            </a:r>
+          </a:p>
+          <a:p>
+            <a:pPr>
+              <a:spcAft>
+                <a:spcPts val="900"/>
+              </a:spcAft>
+            </a:pPr>
+            <a:r>
+              <a:rPr sz="1800" b="1" i="0">
+                <a:solidFill>
+                  <a:srgbClr val="E8801A"/>
+                </a:solidFill>
+                <a:latin typeface="Montserrat"/>
+              </a:rPr>
+              <a:t>09   </a:t>
+            </a:r>
+            <a:r>
+              <a:rPr sz="1700" b="0" i="0">
+                <a:solidFill>
+                  <a:srgbClr val="1B2330"/>
+                </a:solidFill>
+                <a:latin typeface="Montserrat"/>
+              </a:rPr>
+              <a:t>Términos 3.91 a 3.98</a:t>
             </a:r>
           </a:p>
         </p:txBody>
@@ -10625,7 +11799,7 @@
                 </a:solidFill>
                 <a:latin typeface="Montserrat"/>
               </a:rPr>
-              <a:t>004 / 020</a:t>
+              <a:t>004 / 021</a:t>
             </a:r>
           </a:p>
         </p:txBody>
@@ -10673,7 +11847,7 @@
         <p:spPr>
           <a:xfrm>
             <a:off x="822960" y="457200"/>
-            <a:ext cx="8229600" cy="365760"/>
+            <a:ext cx="10058400" cy="365760"/>
           </a:xfrm>
           <a:prstGeom prst="rect">
             <a:avLst/>
@@ -10687,13 +11861,13 @@
           <a:lstStyle/>
           <a:p>
             <a:r>
-              <a:rPr sz="1200" b="1" i="0">
-                <a:solidFill>
-                  <a:srgbClr val="64748B"/>
-                </a:solidFill>
-                <a:latin typeface="Montserrat"/>
-              </a:rPr>
-              <a:t>TÉRMINOS 3.63 A 3.69</a:t>
+              <a:rPr sz="1300" b="1" i="0">
+                <a:solidFill>
+                  <a:srgbClr val="E8801A"/>
+                </a:solidFill>
+                <a:latin typeface="Montserrat"/>
+              </a:rPr>
+              <a:t>TÉRMINOS 3.61 Y 3.62</a:t>
             </a:r>
           </a:p>
         </p:txBody>
@@ -10721,26 +11895,70 @@
           <a:lstStyle/>
           <a:p>
             <a:r>
-              <a:rPr sz="2700" b="1" i="0">
+              <a:rPr sz="2800" b="1" i="0">
                 <a:solidFill>
                   <a:srgbClr val="1E2761"/>
                 </a:solidFill>
                 <a:latin typeface="Montserrat"/>
               </a:rPr>
-              <a:t>Locales y zonas</a:t>
-            </a:r>
-          </a:p>
-        </p:txBody>
-      </p:sp>
-      <p:sp>
-        <p:nvSpPr>
-          <p:cNvPr id="7" name="TextBox 6"/>
+              <a:t>LIE y LSE: la franja del peligro</a:t>
+            </a:r>
+          </a:p>
+        </p:txBody>
+      </p:sp>
+      <p:sp>
+        <p:nvSpPr>
+          <p:cNvPr id="7" name="Rounded Rectangle 6"/>
+          <p:cNvSpPr/>
+          <p:nvPr/>
+        </p:nvSpPr>
+        <p:spPr>
+          <a:xfrm>
+            <a:off x="868680" y="1627632"/>
+            <a:ext cx="2011680" cy="73152"/>
+          </a:xfrm>
+          <a:prstGeom prst="roundRect">
+            <a:avLst/>
+          </a:prstGeom>
+          <a:solidFill>
+            <a:srgbClr val="E8801A"/>
+          </a:solidFill>
+          <a:ln>
+            <a:noFill/>
+          </a:ln>
+          <a:effectLst/>
+        </p:spPr>
+        <p:style>
+          <a:lnRef idx="1">
+            <a:schemeClr val="accent1"/>
+          </a:lnRef>
+          <a:fillRef idx="3">
+            <a:schemeClr val="accent1"/>
+          </a:fillRef>
+          <a:effectRef idx="2">
+            <a:schemeClr val="accent1"/>
+          </a:effectRef>
+          <a:fontRef idx="minor">
+            <a:schemeClr val="lt1"/>
+          </a:fontRef>
+        </p:style>
+        <p:txBody>
+          <a:bodyPr rtlCol="0" anchor="ctr"/>
+          <a:lstStyle/>
+          <a:p>
+            <a:pPr algn="ctr"/>
+          </a:p>
+        </p:txBody>
+      </p:sp>
+      <p:sp>
+        <p:nvSpPr>
+          <p:cNvPr id="8" name="TextBox 7"/>
           <p:cNvSpPr txBox="1"/>
           <p:nvPr/>
         </p:nvSpPr>
         <p:spPr>
           <a:xfrm>
-            <a:off x="822960" y="1920240"/>
+            <a:off x="822960" y="1965960"/>
             <a:ext cx="4983480" cy="4206240"/>
           </a:xfrm>
           <a:prstGeom prst="rect">
@@ -10756,17 +11974,17 @@
           <a:p>
             <a:pPr>
               <a:spcAft>
-                <a:spcPts val="1000"/>
+                <a:spcPts val="1100"/>
               </a:spcAft>
             </a:pPr>
             <a:r>
               <a:rPr sz="1600" b="1" i="0">
                 <a:solidFill>
-                  <a:srgbClr val="2E3A80"/>
-                </a:solidFill>
-                <a:latin typeface="Montserrat"/>
-              </a:rPr>
-              <a:t>•  </a:t>
+                  <a:srgbClr val="E8801A"/>
+                </a:solidFill>
+                <a:latin typeface="Montserrat"/>
+              </a:rPr>
+              <a:t>▸  </a:t>
             </a:r>
             <a:r>
               <a:rPr sz="1600" b="0" i="0">
@@ -10775,23 +11993,23 @@
                 </a:solidFill>
                 <a:latin typeface="Montserrat"/>
               </a:rPr>
-              <a:t>Aseo: solo higiene; baño: con bañera o ducha</a:t>
+              <a:t>LIE: a partir de aquí ya explota</a:t>
             </a:r>
           </a:p>
           <a:p>
             <a:pPr>
               <a:spcAft>
-                <a:spcPts val="1000"/>
+                <a:spcPts val="1100"/>
               </a:spcAft>
             </a:pPr>
             <a:r>
               <a:rPr sz="1600" b="1" i="0">
                 <a:solidFill>
-                  <a:srgbClr val="2E3A80"/>
-                </a:solidFill>
-                <a:latin typeface="Montserrat"/>
-              </a:rPr>
-              <a:t>•  </a:t>
+                  <a:srgbClr val="E8801A"/>
+                </a:solidFill>
+                <a:latin typeface="Montserrat"/>
+              </a:rPr>
+              <a:t>▸  </a:t>
             </a:r>
             <a:r>
               <a:rPr sz="1600" b="0" i="0">
@@ -10800,23 +12018,23 @@
                 </a:solidFill>
                 <a:latin typeface="Montserrat"/>
               </a:rPr>
-              <a:t>Doméstico: vivienda; industrial: proceso</a:t>
+              <a:t>LSE: por encima deja de explotar</a:t>
             </a:r>
           </a:p>
           <a:p>
             <a:pPr>
               <a:spcAft>
-                <a:spcPts val="1000"/>
+                <a:spcPts val="1100"/>
               </a:spcAft>
             </a:pPr>
             <a:r>
               <a:rPr sz="1600" b="1" i="0">
                 <a:solidFill>
-                  <a:srgbClr val="2E3A80"/>
-                </a:solidFill>
-                <a:latin typeface="Montserrat"/>
-              </a:rPr>
-              <a:t>•  </a:t>
+                  <a:srgbClr val="E8801A"/>
+                </a:solidFill>
+                <a:latin typeface="Montserrat"/>
+              </a:rPr>
+              <a:t>▸  </a:t>
             </a:r>
             <a:r>
               <a:rPr sz="1600" b="0" i="0">
@@ -10825,23 +12043,23 @@
                 </a:solidFill>
                 <a:latin typeface="Montserrat"/>
               </a:rPr>
-              <a:t>Loft: sin divisiones interiores</a:t>
+              <a:t>En % de gas en aire</a:t>
             </a:r>
           </a:p>
           <a:p>
             <a:pPr>
               <a:spcAft>
-                <a:spcPts val="1000"/>
+                <a:spcPts val="1100"/>
               </a:spcAft>
             </a:pPr>
             <a:r>
               <a:rPr sz="1600" b="1" i="0">
                 <a:solidFill>
-                  <a:srgbClr val="2E3A80"/>
-                </a:solidFill>
-                <a:latin typeface="Montserrat"/>
-              </a:rPr>
-              <a:t>•  </a:t>
+                  <a:srgbClr val="E8801A"/>
+                </a:solidFill>
+                <a:latin typeface="Montserrat"/>
+              </a:rPr>
+              <a:t>▸  </a:t>
             </a:r>
             <a:r>
               <a:rPr sz="1600" b="0" i="0">
@@ -10850,14 +12068,14 @@
                 </a:solidFill>
                 <a:latin typeface="Montserrat"/>
               </a:rPr>
-              <a:t>Local técnico: contadores centralizados</a:t>
-            </a:r>
-          </a:p>
-        </p:txBody>
-      </p:sp>
-      <p:sp>
-        <p:nvSpPr>
-          <p:cNvPr id="8" name="imgph" descr="IMGQ:open plan loft apartment interior"/>
+              <a:t>Entre los dos límites, ¡boom!</a:t>
+            </a:r>
+          </a:p>
+        </p:txBody>
+      </p:sp>
+      <p:sp>
+        <p:nvSpPr>
+          <p:cNvPr id="9" name="imgph" descr="IMGQ:gas detector display showing percentage reading"/>
           <p:cNvSpPr/>
           <p:nvPr/>
         </p:nvSpPr>
@@ -10903,7 +12121,7 @@
       </p:sp>
       <p:sp>
         <p:nvSpPr>
-          <p:cNvPr id="9" name="TextBox 8"/>
+          <p:cNvPr id="10" name="TextBox 9"/>
           <p:cNvSpPr txBox="1"/>
           <p:nvPr/>
         </p:nvSpPr>
@@ -10943,7 +12161,7 @@
                 </a:solidFill>
                 <a:latin typeface="Montserrat"/>
               </a:rPr>
-              <a:t>open plan loft apartment interior</a:t>
+              <a:t>gas detector display showing percentage reading</a:t>
             </a:r>
           </a:p>
         </p:txBody>
@@ -11040,7 +12258,7 @@
                 </a:solidFill>
                 <a:latin typeface="Montserrat"/>
               </a:rPr>
-              <a:t>005 / 020</a:t>
+              <a:t>005 / 021</a:t>
             </a:r>
           </a:p>
         </p:txBody>
@@ -11088,7 +12306,7 @@
         <p:spPr>
           <a:xfrm>
             <a:off x="822960" y="457200"/>
-            <a:ext cx="8229600" cy="365760"/>
+            <a:ext cx="10058400" cy="365760"/>
           </a:xfrm>
           <a:prstGeom prst="rect">
             <a:avLst/>
@@ -11102,13 +12320,13 @@
           <a:lstStyle/>
           <a:p>
             <a:r>
-              <a:rPr sz="1200" b="1" i="0">
-                <a:solidFill>
-                  <a:srgbClr val="64748B"/>
-                </a:solidFill>
-                <a:latin typeface="Montserrat"/>
-              </a:rPr>
-              <a:t>TÉRMINOS 3.70 A 3.77</a:t>
+              <a:rPr sz="1300" b="1" i="0">
+                <a:solidFill>
+                  <a:srgbClr val="E8801A"/>
+                </a:solidFill>
+                <a:latin typeface="Montserrat"/>
+              </a:rPr>
+              <a:t>TÉRMINOS 3.63 A 3.69</a:t>
             </a:r>
           </a:p>
         </p:txBody>
@@ -11136,26 +12354,70 @@
           <a:lstStyle/>
           <a:p>
             <a:r>
-              <a:rPr sz="2700" b="1" i="0">
+              <a:rPr sz="2800" b="1" i="0">
                 <a:solidFill>
                   <a:srgbClr val="1E2761"/>
                 </a:solidFill>
                 <a:latin typeface="Montserrat"/>
               </a:rPr>
-              <a:t>El árbol de llaves</a:t>
-            </a:r>
-          </a:p>
-        </p:txBody>
-      </p:sp>
-      <p:sp>
-        <p:nvSpPr>
-          <p:cNvPr id="7" name="TextBox 6"/>
+              <a:t>Locales y zonas</a:t>
+            </a:r>
+          </a:p>
+        </p:txBody>
+      </p:sp>
+      <p:sp>
+        <p:nvSpPr>
+          <p:cNvPr id="7" name="Rounded Rectangle 6"/>
+          <p:cNvSpPr/>
+          <p:nvPr/>
+        </p:nvSpPr>
+        <p:spPr>
+          <a:xfrm>
+            <a:off x="868680" y="1627632"/>
+            <a:ext cx="2011680" cy="73152"/>
+          </a:xfrm>
+          <a:prstGeom prst="roundRect">
+            <a:avLst/>
+          </a:prstGeom>
+          <a:solidFill>
+            <a:srgbClr val="E8801A"/>
+          </a:solidFill>
+          <a:ln>
+            <a:noFill/>
+          </a:ln>
+          <a:effectLst/>
+        </p:spPr>
+        <p:style>
+          <a:lnRef idx="1">
+            <a:schemeClr val="accent1"/>
+          </a:lnRef>
+          <a:fillRef idx="3">
+            <a:schemeClr val="accent1"/>
+          </a:fillRef>
+          <a:effectRef idx="2">
+            <a:schemeClr val="accent1"/>
+          </a:effectRef>
+          <a:fontRef idx="minor">
+            <a:schemeClr val="lt1"/>
+          </a:fontRef>
+        </p:style>
+        <p:txBody>
+          <a:bodyPr rtlCol="0" anchor="ctr"/>
+          <a:lstStyle/>
+          <a:p>
+            <a:pPr algn="ctr"/>
+          </a:p>
+        </p:txBody>
+      </p:sp>
+      <p:sp>
+        <p:nvSpPr>
+          <p:cNvPr id="8" name="TextBox 7"/>
           <p:cNvSpPr txBox="1"/>
           <p:nvPr/>
         </p:nvSpPr>
         <p:spPr>
           <a:xfrm>
-            <a:off x="822960" y="1920240"/>
+            <a:off x="822960" y="1965960"/>
             <a:ext cx="4983480" cy="4206240"/>
           </a:xfrm>
           <a:prstGeom prst="rect">
@@ -11171,17 +12433,17 @@
           <a:p>
             <a:pPr>
               <a:spcAft>
-                <a:spcPts val="1000"/>
+                <a:spcPts val="1100"/>
               </a:spcAft>
             </a:pPr>
             <a:r>
               <a:rPr sz="1600" b="1" i="0">
                 <a:solidFill>
-                  <a:srgbClr val="2E3A80"/>
-                </a:solidFill>
-                <a:latin typeface="Montserrat"/>
-              </a:rPr>
-              <a:t>•  </a:t>
+                  <a:srgbClr val="E8801A"/>
+                </a:solidFill>
+                <a:latin typeface="Montserrat"/>
+              </a:rPr>
+              <a:t>▸  </a:t>
             </a:r>
             <a:r>
               <a:rPr sz="1600" b="0" i="0">
@@ -11190,23 +12452,23 @@
                 </a:solidFill>
                 <a:latin typeface="Montserrat"/>
               </a:rPr>
-              <a:t>Acometida → edificio → montante colectivo</a:t>
+              <a:t>Aseo: solo higiene; baño: con bañera o ducha</a:t>
             </a:r>
           </a:p>
           <a:p>
             <a:pPr>
               <a:spcAft>
-                <a:spcPts val="1000"/>
+                <a:spcPts val="1100"/>
               </a:spcAft>
             </a:pPr>
             <a:r>
               <a:rPr sz="1600" b="1" i="0">
                 <a:solidFill>
-                  <a:srgbClr val="2E3A80"/>
-                </a:solidFill>
-                <a:latin typeface="Montserrat"/>
-              </a:rPr>
-              <a:t>•  </a:t>
+                  <a:srgbClr val="E8801A"/>
+                </a:solidFill>
+                <a:latin typeface="Montserrat"/>
+              </a:rPr>
+              <a:t>▸  </a:t>
             </a:r>
             <a:r>
               <a:rPr sz="1600" b="0" i="0">
@@ -11215,23 +12477,23 @@
                 </a:solidFill>
                 <a:latin typeface="Montserrat"/>
               </a:rPr>
-              <a:t>→ usuario → vivienda → contador/regulador</a:t>
+              <a:t>Doméstico: vivienda; industrial: proceso</a:t>
             </a:r>
           </a:p>
           <a:p>
             <a:pPr>
               <a:spcAft>
-                <a:spcPts val="1000"/>
+                <a:spcPts val="1100"/>
               </a:spcAft>
             </a:pPr>
             <a:r>
               <a:rPr sz="1600" b="1" i="0">
                 <a:solidFill>
-                  <a:srgbClr val="2E3A80"/>
-                </a:solidFill>
-                <a:latin typeface="Montserrat"/>
-              </a:rPr>
-              <a:t>•  </a:t>
+                  <a:srgbClr val="E8801A"/>
+                </a:solidFill>
+                <a:latin typeface="Montserrat"/>
+              </a:rPr>
+              <a:t>▸  </a:t>
             </a:r>
             <a:r>
               <a:rPr sz="1600" b="0" i="0">
@@ -11240,23 +12502,23 @@
                 </a:solidFill>
                 <a:latin typeface="Montserrat"/>
               </a:rPr>
-              <a:t>→ conexión de aparato</a:t>
+              <a:t>Loft: sin divisiones interiores</a:t>
             </a:r>
           </a:p>
           <a:p>
             <a:pPr>
               <a:spcAft>
-                <a:spcPts val="1000"/>
+                <a:spcPts val="1100"/>
               </a:spcAft>
             </a:pPr>
             <a:r>
               <a:rPr sz="1600" b="1" i="0">
                 <a:solidFill>
-                  <a:srgbClr val="2E3A80"/>
-                </a:solidFill>
-                <a:latin typeface="Montserrat"/>
-              </a:rPr>
-              <a:t>•  </a:t>
+                  <a:srgbClr val="E8801A"/>
+                </a:solidFill>
+                <a:latin typeface="Montserrat"/>
+              </a:rPr>
+              <a:t>▸  </a:t>
             </a:r>
             <a:r>
               <a:rPr sz="1600" b="0" i="0">
@@ -11265,14 +12527,14 @@
                 </a:solidFill>
                 <a:latin typeface="Montserrat"/>
               </a:rPr>
-              <a:t>Cada llave corta de ahí para adentro</a:t>
-            </a:r>
-          </a:p>
-        </p:txBody>
-      </p:sp>
-      <p:sp>
-        <p:nvSpPr>
-          <p:cNvPr id="8" name="imgph" descr="IMGQ:gas shut off valve on pipe"/>
+              <a:t>Local técnico: contadores centralizados</a:t>
+            </a:r>
+          </a:p>
+        </p:txBody>
+      </p:sp>
+      <p:sp>
+        <p:nvSpPr>
+          <p:cNvPr id="9" name="imgph" descr="IMGQ:open plan loft apartment interior"/>
           <p:cNvSpPr/>
           <p:nvPr/>
         </p:nvSpPr>
@@ -11318,7 +12580,7 @@
       </p:sp>
       <p:sp>
         <p:nvSpPr>
-          <p:cNvPr id="9" name="TextBox 8"/>
+          <p:cNvPr id="10" name="TextBox 9"/>
           <p:cNvSpPr txBox="1"/>
           <p:nvPr/>
         </p:nvSpPr>
@@ -11358,7 +12620,7 @@
                 </a:solidFill>
                 <a:latin typeface="Montserrat"/>
               </a:rPr>
-              <a:t>gas shut off valve on pipe</a:t>
+              <a:t>open plan loft apartment interior</a:t>
             </a:r>
           </a:p>
         </p:txBody>
@@ -11455,7 +12717,7 @@
                 </a:solidFill>
                 <a:latin typeface="Montserrat"/>
               </a:rPr>
-              <a:t>006 / 020</a:t>
+              <a:t>006 / 021</a:t>
             </a:r>
           </a:p>
         </p:txBody>
@@ -11503,7 +12765,7 @@
         <p:spPr>
           <a:xfrm>
             <a:off x="822960" y="457200"/>
-            <a:ext cx="8229600" cy="365760"/>
+            <a:ext cx="10058400" cy="365760"/>
           </a:xfrm>
           <a:prstGeom prst="rect">
             <a:avLst/>
@@ -11517,13 +12779,13 @@
           <a:lstStyle/>
           <a:p>
             <a:r>
-              <a:rPr sz="1200" b="1" i="0">
-                <a:solidFill>
-                  <a:srgbClr val="64748B"/>
-                </a:solidFill>
-                <a:latin typeface="Montserrat"/>
-              </a:rPr>
-              <a:t>TÉRMINOS 3.71 Y 3.76</a:t>
+              <a:rPr sz="1300" b="1" i="0">
+                <a:solidFill>
+                  <a:srgbClr val="E8801A"/>
+                </a:solidFill>
+                <a:latin typeface="Montserrat"/>
+              </a:rPr>
+              <a:t>TÉRMINOS 3.70 A 3.77</a:t>
             </a:r>
           </a:p>
         </p:txBody>
@@ -11551,26 +12813,70 @@
           <a:lstStyle/>
           <a:p>
             <a:r>
-              <a:rPr sz="2700" b="1" i="0">
+              <a:rPr sz="2800" b="1" i="0">
                 <a:solidFill>
                   <a:srgbClr val="1E2761"/>
                 </a:solidFill>
                 <a:latin typeface="Montserrat"/>
               </a:rPr>
-              <a:t>Llaves que más se confunden</a:t>
-            </a:r>
-          </a:p>
-        </p:txBody>
-      </p:sp>
-      <p:sp>
-        <p:nvSpPr>
-          <p:cNvPr id="7" name="TextBox 6"/>
+              <a:t>El árbol de llaves</a:t>
+            </a:r>
+          </a:p>
+        </p:txBody>
+      </p:sp>
+      <p:sp>
+        <p:nvSpPr>
+          <p:cNvPr id="7" name="Rounded Rectangle 6"/>
+          <p:cNvSpPr/>
+          <p:nvPr/>
+        </p:nvSpPr>
+        <p:spPr>
+          <a:xfrm>
+            <a:off x="868680" y="1627632"/>
+            <a:ext cx="2011680" cy="73152"/>
+          </a:xfrm>
+          <a:prstGeom prst="roundRect">
+            <a:avLst/>
+          </a:prstGeom>
+          <a:solidFill>
+            <a:srgbClr val="E8801A"/>
+          </a:solidFill>
+          <a:ln>
+            <a:noFill/>
+          </a:ln>
+          <a:effectLst/>
+        </p:spPr>
+        <p:style>
+          <a:lnRef idx="1">
+            <a:schemeClr val="accent1"/>
+          </a:lnRef>
+          <a:fillRef idx="3">
+            <a:schemeClr val="accent1"/>
+          </a:fillRef>
+          <a:effectRef idx="2">
+            <a:schemeClr val="accent1"/>
+          </a:effectRef>
+          <a:fontRef idx="minor">
+            <a:schemeClr val="lt1"/>
+          </a:fontRef>
+        </p:style>
+        <p:txBody>
+          <a:bodyPr rtlCol="0" anchor="ctr"/>
+          <a:lstStyle/>
+          <a:p>
+            <a:pPr algn="ctr"/>
+          </a:p>
+        </p:txBody>
+      </p:sp>
+      <p:sp>
+        <p:nvSpPr>
+          <p:cNvPr id="8" name="TextBox 7"/>
           <p:cNvSpPr txBox="1"/>
           <p:nvPr/>
         </p:nvSpPr>
         <p:spPr>
           <a:xfrm>
-            <a:off x="822960" y="1920240"/>
+            <a:off x="822960" y="1965960"/>
             <a:ext cx="4983480" cy="4206240"/>
           </a:xfrm>
           <a:prstGeom prst="rect">
@@ -11586,17 +12892,17 @@
           <a:p>
             <a:pPr>
               <a:spcAft>
-                <a:spcPts val="1000"/>
+                <a:spcPts val="1100"/>
               </a:spcAft>
             </a:pPr>
             <a:r>
               <a:rPr sz="1600" b="1" i="0">
                 <a:solidFill>
-                  <a:srgbClr val="2E3A80"/>
-                </a:solidFill>
-                <a:latin typeface="Montserrat"/>
-              </a:rPr>
-              <a:t>•  </a:t>
+                  <a:srgbClr val="E8801A"/>
+                </a:solidFill>
+                <a:latin typeface="Montserrat"/>
+              </a:rPr>
+              <a:t>▸  </a:t>
             </a:r>
             <a:r>
               <a:rPr sz="1600" b="0" i="0">
@@ -11605,23 +12911,23 @@
                 </a:solidFill>
                 <a:latin typeface="Montserrat"/>
               </a:rPr>
-              <a:t>Usuario: límite común / individual</a:t>
+              <a:t>Acometida → edificio → montante colectivo</a:t>
             </a:r>
           </a:p>
           <a:p>
             <a:pPr>
               <a:spcAft>
-                <a:spcPts val="1000"/>
+                <a:spcPts val="1100"/>
               </a:spcAft>
             </a:pPr>
             <a:r>
               <a:rPr sz="1600" b="1" i="0">
                 <a:solidFill>
-                  <a:srgbClr val="2E3A80"/>
-                </a:solidFill>
-                <a:latin typeface="Montserrat"/>
-              </a:rPr>
-              <a:t>•  </a:t>
+                  <a:srgbClr val="E8801A"/>
+                </a:solidFill>
+                <a:latin typeface="Montserrat"/>
+              </a:rPr>
+              <a:t>▸  </a:t>
             </a:r>
             <a:r>
               <a:rPr sz="1600" b="0" i="0">
@@ -11630,23 +12936,23 @@
                 </a:solidFill>
                 <a:latin typeface="Montserrat"/>
               </a:rPr>
-              <a:t>Conexión de aparato: la más próxima al aparato</a:t>
+              <a:t>→ usuario → vivienda → contador/regulador</a:t>
             </a:r>
           </a:p>
           <a:p>
             <a:pPr>
               <a:spcAft>
-                <a:spcPts val="1000"/>
+                <a:spcPts val="1100"/>
               </a:spcAft>
             </a:pPr>
             <a:r>
               <a:rPr sz="1600" b="1" i="0">
                 <a:solidFill>
-                  <a:srgbClr val="2E3A80"/>
-                </a:solidFill>
-                <a:latin typeface="Montserrat"/>
-              </a:rPr>
-              <a:t>•  </a:t>
+                  <a:srgbClr val="E8801A"/>
+                </a:solidFill>
+                <a:latin typeface="Montserrat"/>
+              </a:rPr>
+              <a:t>▸  </a:t>
             </a:r>
             <a:r>
               <a:rPr sz="1600" b="0" i="0">
@@ -11655,23 +12961,23 @@
                 </a:solidFill>
                 <a:latin typeface="Montserrat"/>
               </a:rPr>
-              <a:t>No es la llave del propio aparato</a:t>
+              <a:t>→ conexión de aparato</a:t>
             </a:r>
           </a:p>
           <a:p>
             <a:pPr>
               <a:spcAft>
-                <a:spcPts val="1000"/>
+                <a:spcPts val="1100"/>
               </a:spcAft>
             </a:pPr>
             <a:r>
               <a:rPr sz="1600" b="1" i="0">
                 <a:solidFill>
-                  <a:srgbClr val="2E3A80"/>
-                </a:solidFill>
-                <a:latin typeface="Montserrat"/>
-              </a:rPr>
-              <a:t>•  </a:t>
+                  <a:srgbClr val="E8801A"/>
+                </a:solidFill>
+                <a:latin typeface="Montserrat"/>
+              </a:rPr>
+              <a:t>▸  </a:t>
             </a:r>
             <a:r>
               <a:rPr sz="1600" b="0" i="0">
@@ -11680,14 +12986,14 @@
                 </a:solidFill>
                 <a:latin typeface="Montserrat"/>
               </a:rPr>
-              <a:t>Contador: a la entrada del contador</a:t>
-            </a:r>
-          </a:p>
-        </p:txBody>
-      </p:sp>
-      <p:sp>
-        <p:nvSpPr>
-          <p:cNvPr id="8" name="imgph" descr="IMGQ:gas cooker connection valve close up"/>
+              <a:t>Cada llave corta de ahí para adentro</a:t>
+            </a:r>
+          </a:p>
+        </p:txBody>
+      </p:sp>
+      <p:sp>
+        <p:nvSpPr>
+          <p:cNvPr id="9" name="imgph" descr="IMGQ:gas shut off valve on pipe"/>
           <p:cNvSpPr/>
           <p:nvPr/>
         </p:nvSpPr>
@@ -11733,7 +13039,7 @@
       </p:sp>
       <p:sp>
         <p:nvSpPr>
-          <p:cNvPr id="9" name="TextBox 8"/>
+          <p:cNvPr id="10" name="TextBox 9"/>
           <p:cNvSpPr txBox="1"/>
           <p:nvPr/>
         </p:nvSpPr>
@@ -11773,7 +13079,7 @@
                 </a:solidFill>
                 <a:latin typeface="Montserrat"/>
               </a:rPr>
-              <a:t>gas cooker connection valve close up</a:t>
+              <a:t>gas shut off valve on pipe</a:t>
             </a:r>
           </a:p>
         </p:txBody>
@@ -11870,7 +13176,7 @@
                 </a:solidFill>
                 <a:latin typeface="Montserrat"/>
               </a:rPr>
-              <a:t>007 / 020</a:t>
+              <a:t>007 / 021</a:t>
             </a:r>
           </a:p>
         </p:txBody>
@@ -11918,7 +13224,7 @@
         <p:spPr>
           <a:xfrm>
             <a:off x="822960" y="457200"/>
-            <a:ext cx="8229600" cy="365760"/>
+            <a:ext cx="10058400" cy="365760"/>
           </a:xfrm>
           <a:prstGeom prst="rect">
             <a:avLst/>
@@ -11932,13 +13238,13 @@
           <a:lstStyle/>
           <a:p>
             <a:r>
-              <a:rPr sz="1200" b="1" i="0">
-                <a:solidFill>
-                  <a:srgbClr val="64748B"/>
-                </a:solidFill>
-                <a:latin typeface="Montserrat"/>
-              </a:rPr>
-              <a:t>TÉRMINOS 3.78 A 3.80</a:t>
+              <a:rPr sz="1300" b="1" i="0">
+                <a:solidFill>
+                  <a:srgbClr val="E8801A"/>
+                </a:solidFill>
+                <a:latin typeface="Montserrat"/>
+              </a:rPr>
+              <a:t>TÉRMINOS 3.71 Y 3.76</a:t>
             </a:r>
           </a:p>
         </p:txBody>
@@ -11966,26 +13272,70 @@
           <a:lstStyle/>
           <a:p>
             <a:r>
-              <a:rPr sz="2700" b="1" i="0">
+              <a:rPr sz="2800" b="1" i="0">
                 <a:solidFill>
                   <a:srgbClr val="1E2761"/>
                 </a:solidFill>
                 <a:latin typeface="Montserrat"/>
               </a:rPr>
-              <a:t>Metro cúbico estándar y normal</a:t>
-            </a:r>
-          </a:p>
-        </p:txBody>
-      </p:sp>
-      <p:sp>
-        <p:nvSpPr>
-          <p:cNvPr id="7" name="TextBox 6"/>
+              <a:t>Llaves que más se confunden</a:t>
+            </a:r>
+          </a:p>
+        </p:txBody>
+      </p:sp>
+      <p:sp>
+        <p:nvSpPr>
+          <p:cNvPr id="7" name="Rounded Rectangle 6"/>
+          <p:cNvSpPr/>
+          <p:nvPr/>
+        </p:nvSpPr>
+        <p:spPr>
+          <a:xfrm>
+            <a:off x="868680" y="1627632"/>
+            <a:ext cx="2011680" cy="73152"/>
+          </a:xfrm>
+          <a:prstGeom prst="roundRect">
+            <a:avLst/>
+          </a:prstGeom>
+          <a:solidFill>
+            <a:srgbClr val="E8801A"/>
+          </a:solidFill>
+          <a:ln>
+            <a:noFill/>
+          </a:ln>
+          <a:effectLst/>
+        </p:spPr>
+        <p:style>
+          <a:lnRef idx="1">
+            <a:schemeClr val="accent1"/>
+          </a:lnRef>
+          <a:fillRef idx="3">
+            <a:schemeClr val="accent1"/>
+          </a:fillRef>
+          <a:effectRef idx="2">
+            <a:schemeClr val="accent1"/>
+          </a:effectRef>
+          <a:fontRef idx="minor">
+            <a:schemeClr val="lt1"/>
+          </a:fontRef>
+        </p:style>
+        <p:txBody>
+          <a:bodyPr rtlCol="0" anchor="ctr"/>
+          <a:lstStyle/>
+          <a:p>
+            <a:pPr algn="ctr"/>
+          </a:p>
+        </p:txBody>
+      </p:sp>
+      <p:sp>
+        <p:nvSpPr>
+          <p:cNvPr id="8" name="TextBox 7"/>
           <p:cNvSpPr txBox="1"/>
           <p:nvPr/>
         </p:nvSpPr>
         <p:spPr>
           <a:xfrm>
-            <a:off x="822960" y="1920240"/>
+            <a:off x="822960" y="1965960"/>
             <a:ext cx="4983480" cy="4206240"/>
           </a:xfrm>
           <a:prstGeom prst="rect">
@@ -12001,17 +13351,17 @@
           <a:p>
             <a:pPr>
               <a:spcAft>
-                <a:spcPts val="1000"/>
+                <a:spcPts val="1100"/>
               </a:spcAft>
             </a:pPr>
             <a:r>
               <a:rPr sz="1600" b="1" i="0">
                 <a:solidFill>
-                  <a:srgbClr val="2E3A80"/>
-                </a:solidFill>
-                <a:latin typeface="Montserrat"/>
-              </a:rPr>
-              <a:t>•  </a:t>
+                  <a:srgbClr val="E8801A"/>
+                </a:solidFill>
+                <a:latin typeface="Montserrat"/>
+              </a:rPr>
+              <a:t>▸  </a:t>
             </a:r>
             <a:r>
               <a:rPr sz="1600" b="0" i="0">
@@ -12020,23 +13370,23 @@
                 </a:solidFill>
                 <a:latin typeface="Montserrat"/>
               </a:rPr>
-              <a:t>m³(s) estándar: a 15 °C</a:t>
+              <a:t>Usuario: límite común / individual</a:t>
             </a:r>
           </a:p>
           <a:p>
             <a:pPr>
               <a:spcAft>
-                <a:spcPts val="1000"/>
+                <a:spcPts val="1100"/>
               </a:spcAft>
             </a:pPr>
             <a:r>
               <a:rPr sz="1600" b="1" i="0">
                 <a:solidFill>
-                  <a:srgbClr val="2E3A80"/>
-                </a:solidFill>
-                <a:latin typeface="Montserrat"/>
-              </a:rPr>
-              <a:t>•  </a:t>
+                  <a:srgbClr val="E8801A"/>
+                </a:solidFill>
+                <a:latin typeface="Montserrat"/>
+              </a:rPr>
+              <a:t>▸  </a:t>
             </a:r>
             <a:r>
               <a:rPr sz="1600" b="0" i="0">
@@ -12045,23 +13395,23 @@
                 </a:solidFill>
                 <a:latin typeface="Montserrat"/>
               </a:rPr>
-              <a:t>m³(n) normal: a 0 °C</a:t>
+              <a:t>Conexión de aparato: la más próxima al aparato</a:t>
             </a:r>
           </a:p>
           <a:p>
             <a:pPr>
               <a:spcAft>
-                <a:spcPts val="1000"/>
+                <a:spcPts val="1100"/>
               </a:spcAft>
             </a:pPr>
             <a:r>
               <a:rPr sz="1600" b="1" i="0">
                 <a:solidFill>
-                  <a:srgbClr val="2E3A80"/>
-                </a:solidFill>
-                <a:latin typeface="Montserrat"/>
-              </a:rPr>
-              <a:t>•  </a:t>
+                  <a:srgbClr val="E8801A"/>
+                </a:solidFill>
+                <a:latin typeface="Montserrat"/>
+              </a:rPr>
+              <a:t>▸  </a:t>
             </a:r>
             <a:r>
               <a:rPr sz="1600" b="0" i="0">
@@ -12070,23 +13420,23 @@
                 </a:solidFill>
                 <a:latin typeface="Montserrat"/>
               </a:rPr>
-              <a:t>Ambos a 1,013 25 bar</a:t>
+              <a:t>No es la llave del propio aparato</a:t>
             </a:r>
           </a:p>
           <a:p>
             <a:pPr>
               <a:spcAft>
-                <a:spcPts val="1000"/>
+                <a:spcPts val="1100"/>
               </a:spcAft>
             </a:pPr>
             <a:r>
               <a:rPr sz="1600" b="1" i="0">
                 <a:solidFill>
-                  <a:srgbClr val="2E3A80"/>
-                </a:solidFill>
-                <a:latin typeface="Montserrat"/>
-              </a:rPr>
-              <a:t>•  </a:t>
+                  <a:srgbClr val="E8801A"/>
+                </a:solidFill>
+                <a:latin typeface="Montserrat"/>
+              </a:rPr>
+              <a:t>▸  </a:t>
             </a:r>
             <a:r>
               <a:rPr sz="1600" b="0" i="0">
@@ -12095,14 +13445,14 @@
                 </a:solidFill>
                 <a:latin typeface="Montserrat"/>
               </a:rPr>
-              <a:t>Mantenimiento: mantener estado y función</a:t>
-            </a:r>
-          </a:p>
-        </p:txBody>
-      </p:sp>
-      <p:sp>
-        <p:nvSpPr>
-          <p:cNvPr id="8" name="imgph" descr="IMGQ:gas meter dial reading cubic meters"/>
+              <a:t>Contador: a la entrada del contador</a:t>
+            </a:r>
+          </a:p>
+        </p:txBody>
+      </p:sp>
+      <p:sp>
+        <p:nvSpPr>
+          <p:cNvPr id="9" name="imgph" descr="IMGQ:gas cooker connection valve close up"/>
           <p:cNvSpPr/>
           <p:nvPr/>
         </p:nvSpPr>
@@ -12148,7 +13498,7 @@
       </p:sp>
       <p:sp>
         <p:nvSpPr>
-          <p:cNvPr id="9" name="TextBox 8"/>
+          <p:cNvPr id="10" name="TextBox 9"/>
           <p:cNvSpPr txBox="1"/>
           <p:nvPr/>
         </p:nvSpPr>
@@ -12188,7 +13538,7 @@
                 </a:solidFill>
                 <a:latin typeface="Montserrat"/>
               </a:rPr>
-              <a:t>gas meter dial reading cubic meters</a:t>
+              <a:t>gas cooker connection valve close up</a:t>
             </a:r>
           </a:p>
         </p:txBody>
@@ -12285,7 +13635,7 @@
                 </a:solidFill>
                 <a:latin typeface="Montserrat"/>
               </a:rPr>
-              <a:t>008 / 020</a:t>
+              <a:t>008 / 021</a:t>
             </a:r>
           </a:p>
         </p:txBody>
@@ -12333,7 +13683,7 @@
         <p:spPr>
           <a:xfrm>
             <a:off x="822960" y="457200"/>
-            <a:ext cx="8229600" cy="365760"/>
+            <a:ext cx="10058400" cy="365760"/>
           </a:xfrm>
           <a:prstGeom prst="rect">
             <a:avLst/>
@@ -12347,13 +13697,13 @@
           <a:lstStyle/>
           <a:p>
             <a:r>
-              <a:rPr sz="1200" b="1" i="0">
-                <a:solidFill>
-                  <a:srgbClr val="64748B"/>
-                </a:solidFill>
-                <a:latin typeface="Montserrat"/>
-              </a:rPr>
-              <a:t>TÉRMINOS 3.81 A 3.114</a:t>
+              <a:rPr sz="1300" b="1" i="0">
+                <a:solidFill>
+                  <a:srgbClr val="E8801A"/>
+                </a:solidFill>
+                <a:latin typeface="Montserrat"/>
+              </a:rPr>
+              <a:t>TÉRMINOS 3.78 A 3.80</a:t>
             </a:r>
           </a:p>
         </p:txBody>
@@ -12381,26 +13731,70 @@
           <a:lstStyle/>
           <a:p>
             <a:r>
-              <a:rPr sz="2700" b="1" i="0">
+              <a:rPr sz="2800" b="1" i="0">
                 <a:solidFill>
                   <a:srgbClr val="1E2761"/>
                 </a:solidFill>
                 <a:latin typeface="Montserrat"/>
               </a:rPr>
-              <a:t>Patios, pasamuros y ventilación</a:t>
-            </a:r>
-          </a:p>
-        </p:txBody>
-      </p:sp>
-      <p:sp>
-        <p:nvSpPr>
-          <p:cNvPr id="7" name="TextBox 6"/>
+              <a:t>Metro cúbico estándar y normal</a:t>
+            </a:r>
+          </a:p>
+        </p:txBody>
+      </p:sp>
+      <p:sp>
+        <p:nvSpPr>
+          <p:cNvPr id="7" name="Rounded Rectangle 6"/>
+          <p:cNvSpPr/>
+          <p:nvPr/>
+        </p:nvSpPr>
+        <p:spPr>
+          <a:xfrm>
+            <a:off x="868680" y="1627632"/>
+            <a:ext cx="2011680" cy="73152"/>
+          </a:xfrm>
+          <a:prstGeom prst="roundRect">
+            <a:avLst/>
+          </a:prstGeom>
+          <a:solidFill>
+            <a:srgbClr val="E8801A"/>
+          </a:solidFill>
+          <a:ln>
+            <a:noFill/>
+          </a:ln>
+          <a:effectLst/>
+        </p:spPr>
+        <p:style>
+          <a:lnRef idx="1">
+            <a:schemeClr val="accent1"/>
+          </a:lnRef>
+          <a:fillRef idx="3">
+            <a:schemeClr val="accent1"/>
+          </a:fillRef>
+          <a:effectRef idx="2">
+            <a:schemeClr val="accent1"/>
+          </a:effectRef>
+          <a:fontRef idx="minor">
+            <a:schemeClr val="lt1"/>
+          </a:fontRef>
+        </p:style>
+        <p:txBody>
+          <a:bodyPr rtlCol="0" anchor="ctr"/>
+          <a:lstStyle/>
+          <a:p>
+            <a:pPr algn="ctr"/>
+          </a:p>
+        </p:txBody>
+      </p:sp>
+      <p:sp>
+        <p:nvSpPr>
+          <p:cNvPr id="8" name="TextBox 7"/>
           <p:cNvSpPr txBox="1"/>
           <p:nvPr/>
         </p:nvSpPr>
         <p:spPr>
           <a:xfrm>
-            <a:off x="822960" y="1920240"/>
+            <a:off x="822960" y="1965960"/>
             <a:ext cx="4983480" cy="4206240"/>
           </a:xfrm>
           <a:prstGeom prst="rect">
@@ -12416,17 +13810,17 @@
           <a:p>
             <a:pPr>
               <a:spcAft>
-                <a:spcPts val="1000"/>
+                <a:spcPts val="1100"/>
               </a:spcAft>
             </a:pPr>
             <a:r>
               <a:rPr sz="1600" b="1" i="0">
                 <a:solidFill>
-                  <a:srgbClr val="2E3A80"/>
-                </a:solidFill>
-                <a:latin typeface="Montserrat"/>
-              </a:rPr>
-              <a:t>•  </a:t>
+                  <a:srgbClr val="E8801A"/>
+                </a:solidFill>
+                <a:latin typeface="Montserrat"/>
+              </a:rPr>
+              <a:t>▸  </a:t>
             </a:r>
             <a:r>
               <a:rPr sz="1600" b="0" i="0">
@@ -12435,23 +13829,23 @@
                 </a:solidFill>
                 <a:latin typeface="Montserrat"/>
               </a:rPr>
-              <a:t>Pasamuros: vaina al cruzar un muro</a:t>
+              <a:t>m³(s) estándar: a 15 °C</a:t>
             </a:r>
           </a:p>
           <a:p>
             <a:pPr>
               <a:spcAft>
-                <a:spcPts val="1000"/>
+                <a:spcPts val="1100"/>
               </a:spcAft>
             </a:pPr>
             <a:r>
               <a:rPr sz="1600" b="1" i="0">
                 <a:solidFill>
-                  <a:srgbClr val="2E3A80"/>
-                </a:solidFill>
-                <a:latin typeface="Montserrat"/>
-              </a:rPr>
-              <a:t>•  </a:t>
+                  <a:srgbClr val="E8801A"/>
+                </a:solidFill>
+                <a:latin typeface="Montserrat"/>
+              </a:rPr>
+              <a:t>▸  </a:t>
             </a:r>
             <a:r>
               <a:rPr sz="1600" b="0" i="0">
@@ -12460,23 +13854,23 @@
                 </a:solidFill>
                 <a:latin typeface="Montserrat"/>
               </a:rPr>
-              <a:t>Vaina: solo una tubería de gas</a:t>
+              <a:t>m³(n) normal: a 0 °C</a:t>
             </a:r>
           </a:p>
           <a:p>
             <a:pPr>
               <a:spcAft>
-                <a:spcPts val="1000"/>
+                <a:spcPts val="1100"/>
               </a:spcAft>
             </a:pPr>
             <a:r>
               <a:rPr sz="1600" b="1" i="0">
                 <a:solidFill>
-                  <a:srgbClr val="2E3A80"/>
-                </a:solidFill>
-                <a:latin typeface="Montserrat"/>
-              </a:rPr>
-              <a:t>•  </a:t>
+                  <a:srgbClr val="E8801A"/>
+                </a:solidFill>
+                <a:latin typeface="Montserrat"/>
+              </a:rPr>
+              <a:t>▸  </a:t>
             </a:r>
             <a:r>
               <a:rPr sz="1600" b="0" i="0">
@@ -12485,23 +13879,23 @@
                 </a:solidFill>
                 <a:latin typeface="Montserrat"/>
               </a:rPr>
-              <a:t>Patio de ventilación e inglés</a:t>
+              <a:t>Ambos a 1,013 25 bar</a:t>
             </a:r>
           </a:p>
           <a:p>
             <a:pPr>
               <a:spcAft>
-                <a:spcPts val="1000"/>
+                <a:spcPts val="1100"/>
               </a:spcAft>
             </a:pPr>
             <a:r>
               <a:rPr sz="1600" b="1" i="0">
                 <a:solidFill>
-                  <a:srgbClr val="2E3A80"/>
-                </a:solidFill>
-                <a:latin typeface="Montserrat"/>
-              </a:rPr>
-              <a:t>•  </a:t>
+                  <a:srgbClr val="E8801A"/>
+                </a:solidFill>
+                <a:latin typeface="Montserrat"/>
+              </a:rPr>
+              <a:t>▸  </a:t>
             </a:r>
             <a:r>
               <a:rPr sz="1600" b="0" i="0">
@@ -12510,14 +13904,14 @@
                 </a:solidFill>
                 <a:latin typeface="Montserrat"/>
               </a:rPr>
-              <a:t>Ventilación cruzada: dos aberturas opuestas</a:t>
-            </a:r>
-          </a:p>
-        </p:txBody>
-      </p:sp>
-      <p:sp>
-        <p:nvSpPr>
-          <p:cNvPr id="8" name="imgph" descr="IMGQ:pipe passing through wall sleeve"/>
+              <a:t>Mantenimiento: mantener estado y función</a:t>
+            </a:r>
+          </a:p>
+        </p:txBody>
+      </p:sp>
+      <p:sp>
+        <p:nvSpPr>
+          <p:cNvPr id="9" name="imgph" descr="IMGQ:gas meter dial reading cubic meters"/>
           <p:cNvSpPr/>
           <p:nvPr/>
         </p:nvSpPr>
@@ -12563,7 +13957,7 @@
       </p:sp>
       <p:sp>
         <p:nvSpPr>
-          <p:cNvPr id="9" name="TextBox 8"/>
+          <p:cNvPr id="10" name="TextBox 9"/>
           <p:cNvSpPr txBox="1"/>
           <p:nvPr/>
         </p:nvSpPr>
@@ -12603,7 +13997,7 @@
                 </a:solidFill>
                 <a:latin typeface="Montserrat"/>
               </a:rPr>
-              <a:t>pipe passing through wall sleeve</a:t>
+              <a:t>gas meter dial reading cubic meters</a:t>
             </a:r>
           </a:p>
         </p:txBody>
@@ -12700,7 +14094,7 @@
                 </a:solidFill>
                 <a:latin typeface="Montserrat"/>
               </a:rPr>
-              <a:t>009 / 020</a:t>
+              <a:t>009 / 021</a:t>
             </a:r>
           </a:p>
         </p:txBody>
@@ -12748,7 +14142,7 @@
         <p:spPr>
           <a:xfrm>
             <a:off x="822960" y="457200"/>
-            <a:ext cx="8229600" cy="365760"/>
+            <a:ext cx="10058400" cy="365760"/>
           </a:xfrm>
           <a:prstGeom prst="rect">
             <a:avLst/>
@@ -12762,13 +14156,13 @@
           <a:lstStyle/>
           <a:p>
             <a:r>
-              <a:rPr sz="1200" b="1" i="0">
-                <a:solidFill>
-                  <a:srgbClr val="64748B"/>
-                </a:solidFill>
-                <a:latin typeface="Montserrat"/>
-              </a:rPr>
-              <a:t>TÉRMINOS 3.86, 3.55</a:t>
+              <a:rPr sz="1300" b="1" i="0">
+                <a:solidFill>
+                  <a:srgbClr val="E8801A"/>
+                </a:solidFill>
+                <a:latin typeface="Montserrat"/>
+              </a:rPr>
+              <a:t>TÉRMINOS 3.81 A 3.114</a:t>
             </a:r>
           </a:p>
         </p:txBody>
@@ -12796,26 +14190,70 @@
           <a:lstStyle/>
           <a:p>
             <a:r>
-              <a:rPr sz="2700" b="1" i="0">
+              <a:rPr sz="2800" b="1" i="0">
                 <a:solidFill>
                   <a:srgbClr val="1E2761"/>
                 </a:solidFill>
                 <a:latin typeface="Montserrat"/>
               </a:rPr>
-              <a:t>Poder calorífico: Hs y Hi</a:t>
-            </a:r>
-          </a:p>
-        </p:txBody>
-      </p:sp>
-      <p:sp>
-        <p:nvSpPr>
-          <p:cNvPr id="7" name="TextBox 6"/>
+              <a:t>Patios, pasamuros y ventilación</a:t>
+            </a:r>
+          </a:p>
+        </p:txBody>
+      </p:sp>
+      <p:sp>
+        <p:nvSpPr>
+          <p:cNvPr id="7" name="Rounded Rectangle 6"/>
+          <p:cNvSpPr/>
+          <p:nvPr/>
+        </p:nvSpPr>
+        <p:spPr>
+          <a:xfrm>
+            <a:off x="868680" y="1627632"/>
+            <a:ext cx="2011680" cy="73152"/>
+          </a:xfrm>
+          <a:prstGeom prst="roundRect">
+            <a:avLst/>
+          </a:prstGeom>
+          <a:solidFill>
+            <a:srgbClr val="E8801A"/>
+          </a:solidFill>
+          <a:ln>
+            <a:noFill/>
+          </a:ln>
+          <a:effectLst/>
+        </p:spPr>
+        <p:style>
+          <a:lnRef idx="1">
+            <a:schemeClr val="accent1"/>
+          </a:lnRef>
+          <a:fillRef idx="3">
+            <a:schemeClr val="accent1"/>
+          </a:fillRef>
+          <a:effectRef idx="2">
+            <a:schemeClr val="accent1"/>
+          </a:effectRef>
+          <a:fontRef idx="minor">
+            <a:schemeClr val="lt1"/>
+          </a:fontRef>
+        </p:style>
+        <p:txBody>
+          <a:bodyPr rtlCol="0" anchor="ctr"/>
+          <a:lstStyle/>
+          <a:p>
+            <a:pPr algn="ctr"/>
+          </a:p>
+        </p:txBody>
+      </p:sp>
+      <p:sp>
+        <p:nvSpPr>
+          <p:cNvPr id="8" name="TextBox 7"/>
           <p:cNvSpPr txBox="1"/>
           <p:nvPr/>
         </p:nvSpPr>
         <p:spPr>
           <a:xfrm>
-            <a:off x="822960" y="1920240"/>
+            <a:off x="822960" y="1965960"/>
             <a:ext cx="4983480" cy="4206240"/>
           </a:xfrm>
           <a:prstGeom prst="rect">
@@ -12831,17 +14269,17 @@
           <a:p>
             <a:pPr>
               <a:spcAft>
-                <a:spcPts val="1000"/>
+                <a:spcPts val="1100"/>
               </a:spcAft>
             </a:pPr>
             <a:r>
               <a:rPr sz="1600" b="1" i="0">
                 <a:solidFill>
-                  <a:srgbClr val="2E3A80"/>
-                </a:solidFill>
-                <a:latin typeface="Montserrat"/>
-              </a:rPr>
-              <a:t>•  </a:t>
+                  <a:srgbClr val="E8801A"/>
+                </a:solidFill>
+                <a:latin typeface="Montserrat"/>
+              </a:rPr>
+              <a:t>▸  </a:t>
             </a:r>
             <a:r>
               <a:rPr sz="1600" b="0" i="0">
@@ -12850,23 +14288,23 @@
                 </a:solidFill>
                 <a:latin typeface="Montserrat"/>
               </a:rPr>
-              <a:t>Hs superior: el agua se condensa</a:t>
+              <a:t>Pasamuros: vaina al cruzar un muro</a:t>
             </a:r>
           </a:p>
           <a:p>
             <a:pPr>
               <a:spcAft>
-                <a:spcPts val="1000"/>
+                <a:spcPts val="1100"/>
               </a:spcAft>
             </a:pPr>
             <a:r>
               <a:rPr sz="1600" b="1" i="0">
                 <a:solidFill>
-                  <a:srgbClr val="2E3A80"/>
-                </a:solidFill>
-                <a:latin typeface="Montserrat"/>
-              </a:rPr>
-              <a:t>•  </a:t>
+                  <a:srgbClr val="E8801A"/>
+                </a:solidFill>
+                <a:latin typeface="Montserrat"/>
+              </a:rPr>
+              <a:t>▸  </a:t>
             </a:r>
             <a:r>
               <a:rPr sz="1600" b="0" i="0">
@@ -12875,23 +14313,23 @@
                 </a:solidFill>
                 <a:latin typeface="Montserrat"/>
               </a:rPr>
-              <a:t>Hi inferior: el agua queda en vapor</a:t>
+              <a:t>Vaina: solo una tubería de gas</a:t>
             </a:r>
           </a:p>
           <a:p>
             <a:pPr>
               <a:spcAft>
-                <a:spcPts val="1000"/>
+                <a:spcPts val="1100"/>
               </a:spcAft>
             </a:pPr>
             <a:r>
               <a:rPr sz="1600" b="1" i="0">
                 <a:solidFill>
-                  <a:srgbClr val="2E3A80"/>
-                </a:solidFill>
-                <a:latin typeface="Montserrat"/>
-              </a:rPr>
-              <a:t>•  </a:t>
+                  <a:srgbClr val="E8801A"/>
+                </a:solidFill>
+                <a:latin typeface="Montserrat"/>
+              </a:rPr>
+              <a:t>▸  </a:t>
             </a:r>
             <a:r>
               <a:rPr sz="1600" b="0" i="0">
@@ -12900,23 +14338,23 @@
                 </a:solidFill>
                 <a:latin typeface="Montserrat"/>
               </a:rPr>
-              <a:t>El fabricante suele dar el Hi</a:t>
+              <a:t>Patio de ventilación e inglés</a:t>
             </a:r>
           </a:p>
           <a:p>
             <a:pPr>
               <a:spcAft>
-                <a:spcPts val="1000"/>
+                <a:spcPts val="1100"/>
               </a:spcAft>
             </a:pPr>
             <a:r>
               <a:rPr sz="1600" b="1" i="0">
                 <a:solidFill>
-                  <a:srgbClr val="2E3A80"/>
-                </a:solidFill>
-                <a:latin typeface="Montserrat"/>
-              </a:rPr>
-              <a:t>•  </a:t>
+                  <a:srgbClr val="E8801A"/>
+                </a:solidFill>
+                <a:latin typeface="Montserrat"/>
+              </a:rPr>
+              <a:t>▸  </a:t>
             </a:r>
             <a:r>
               <a:rPr sz="1600" b="0" i="0">
@@ -12925,14 +14363,14 @@
                 </a:solidFill>
                 <a:latin typeface="Montserrat"/>
               </a:rPr>
-              <a:t>Condensación: aprovecha hacia el Hs</a:t>
-            </a:r>
-          </a:p>
-        </p:txBody>
-      </p:sp>
-      <p:sp>
-        <p:nvSpPr>
-          <p:cNvPr id="8" name="imgph" descr="IMGQ:condensing boiler with condensate drain pipe"/>
+              <a:t>Ventilación cruzada: dos aberturas opuestas</a:t>
+            </a:r>
+          </a:p>
+        </p:txBody>
+      </p:sp>
+      <p:sp>
+        <p:nvSpPr>
+          <p:cNvPr id="9" name="imgph" descr="IMGQ:pipe passing through wall sleeve"/>
           <p:cNvSpPr/>
           <p:nvPr/>
         </p:nvSpPr>
@@ -12978,7 +14416,7 @@
       </p:sp>
       <p:sp>
         <p:nvSpPr>
-          <p:cNvPr id="9" name="TextBox 8"/>
+          <p:cNvPr id="10" name="TextBox 9"/>
           <p:cNvSpPr txBox="1"/>
           <p:nvPr/>
         </p:nvSpPr>
@@ -13018,7 +14456,7 @@
                 </a:solidFill>
                 <a:latin typeface="Montserrat"/>
               </a:rPr>
-              <a:t>condensing boiler with condensate drain pipe</a:t>
+              <a:t>pipe passing through wall sleeve</a:t>
             </a:r>
           </a:p>
         </p:txBody>

--- a/Curso Gas B/09 - UNE 60670 - Generalidades y terminologia/09 - UNE 60670 - Generalidades y terminologia - Vídeo 3.pptx
+++ b/Curso Gas B/09 - UNE 60670 - Generalidades y terminologia/09 - UNE 60670 - Generalidades y terminologia - Vídeo 3.pptx
@@ -26,6 +26,12 @@
     <p:sldId id="274" r:id="rId26"/>
     <p:sldId id="275" r:id="rId27"/>
     <p:sldId id="276" r:id="rId28"/>
+    <p:sldId id="277" r:id="rId29"/>
+    <p:sldId id="278" r:id="rId30"/>
+    <p:sldId id="279" r:id="rId31"/>
+    <p:sldId id="280" r:id="rId32"/>
+    <p:sldId id="281" r:id="rId33"/>
+    <p:sldId id="282" r:id="rId34"/>
   </p:sldIdLst>
   <p:sldSz cx="12191695" cy="6858000" type="screen4x3"/>
   <p:notesSz cx="6858000" cy="9144000"/>
@@ -822,12 +828,12 @@
           <a:lstStyle/>
           <a:p>
             <a:r>
-              <a:t>N1: ¿Y las presiones de diseño y de prueba?</a:t>
-            </a:r>
-          </a:p>
-          <a:p>
-            <a:r>
-              <a:t>N2: Estas son las de trabajo del proyectista y del que prueba. La presión de diseño, DP, es la máxima a la que técnicamente puede funcionar la instalación, y se usa para calcular la resistencia mecánica: con ella eliges tubos y accesorios que aguanten. La presión de garantía es distinta: es la mínima que la compañía te asegura al inicio de la instalación, justo a la salida de la llave de acometida; es el número con el que arrancas el cálculo, porque si te garantizan poco, tendrás que poner tubos más generosos para que llegue caudal. Y las de prueba, que usas para entregar la instalación: la STP es la presión de la prueba de resistencia mecánica; la CTP es la de la prueba conjunta de resistencia y estanquidad. Aviso de obra: probar a menos presión de la que toca deja pasar la fuga que no ves.</a:t>
+              <a:t>N1: Bloque estrella, las siglas de presión: ¿cuál es la máxima continuada?</a:t>
+            </a:r>
+          </a:p>
+          <a:p>
+            <a:r>
+              <a:t>N2: Pista: la letra eme te ayuda; piensa en mantenida.</a:t>
             </a:r>
           </a:p>
         </p:txBody>
@@ -897,12 +903,12 @@
           <a:lstStyle/>
           <a:p>
             <a:r>
-              <a:t>N1: Cuando la norma dice una presión, ¿es presión total o qué?</a:t>
-            </a:r>
-          </a:p>
-          <a:p>
-            <a:r>
-              <a:t>N2: Muy buena pregunta, y es un detalle que cae. Todas las presiones de la norma son relativas, también llamadas manométricas. Quiere decir que se miden por encima de la presión atmosférica, tomando la atmósfera como cero, no en valor absoluto. Es lo natural, porque el manómetro que enchufas a la instalación ya marca así: en reposo, con la instalación abierta al aire, marca cero, aunque la atmósfera esté empujando. Este matiz aparece como nota al pie en la presión de diseño, pero aplica a todas las presiones de la UNE sesenta mil seiscientos setenta. Grábate la frase: en el gas, salvo que se diga lo contrario, la presión es relativa.</a:t>
+              <a:t>N1: ¿Por qué la MOP?</a:t>
+            </a:r>
+          </a:p>
+          <a:p>
+            <a:r>
+              <a:t>N2: Porque la presión máxima de operación es la más alta a la que la instalación puede estar sometida de forma continuada en condiciones normales. La MIP es la máxima en un incidente breve, la TOP la máxima temporal y la OP la que hay ahora mismo. Truco: eme de MOP igual a mantenida, i de MIP igual a incidente, te de TOP igual a temporal.</a:t>
             </a:r>
           </a:p>
         </p:txBody>
@@ -972,12 +978,12 @@
           <a:lstStyle/>
           <a:p>
             <a:r>
-              <a:t>N1: ¿Qué hace exactamente un regulador y qué es su tarado?</a:t>
-            </a:r>
-          </a:p>
-          <a:p>
-            <a:r>
-              <a:t>N2: El regulador de presión es la pieza que reduce la presión aguas abajo, es decir, después de él, y la mantiene dentro de unos límites aunque cambie el caudal; gracias a él, del alta que viene de la calle sale la baja que necesita el aparato. La presión de tarado es la predeterminada a la que se ajusta cada función de un dispositivo de regulación o de seguridad; tarar es afinar ese punto de disparo. No la confundas con la de garantía, que era la mínima de partida. Y aprovecho términos cercanos: los productos de la combustión son el conjunto de gases y vapor de agua que salen al quemar, los humos, que llevan monóxido si la combustión es mala; el quemador de encendido, o piloto, es un quemador pequeño cuya llama enciende el principal; y una puerta o registro estanco es la que, siendo ciega, cierra en todo su perímetro con una junta, para que no pase ni aire ni gas.</a:t>
+              <a:t>N1: ¿Y las presiones de diseño y de prueba?</a:t>
+            </a:r>
+          </a:p>
+          <a:p>
+            <a:r>
+              <a:t>N2: Estas son las de trabajo del proyectista y del que prueba. La presión de diseño, DP, es la máxima a la que técnicamente puede funcionar la instalación, y se usa para calcular la resistencia mecánica: con ella eliges tubos y accesorios que aguanten. La presión de garantía es distinta: es la mínima que la compañía te asegura al inicio de la instalación, justo a la salida de la llave de acometida; es el número con el que arrancas el cálculo, porque si te garantizan poco, tendrás que poner tubos más generosos para que llegue caudal. Y las de prueba, que usas para entregar la instalación: la STP es la presión de la prueba de resistencia mecánica; la CTP es la de la prueba conjunta de resistencia y estanquidad. Aviso de obra: probar a menos presión de la que toca deja pasar la fuga que no ves.</a:t>
             </a:r>
           </a:p>
         </p:txBody>
@@ -1047,12 +1053,12 @@
           <a:lstStyle/>
           <a:p>
             <a:r>
-              <a:t>N1: Tiro y revoco, ¿son cosas distintas o lo mismo visto al revés?</a:t>
-            </a:r>
-          </a:p>
-          <a:p>
-            <a:r>
-              <a:t>N2: Son las dos caras del mismo conducto, una buena y una mala. El tiro es lo que debe pasar: una depresión, una succión suave que se genera entre los extremos del conducto y que empuja los humos hacia fuera; el aire caliente pesa menos y sube, y arrastra los humos. El revoco es el fallo: cuando el tiro no funciona, por un conducto obstruido, mal rematado o sin aire de aporte, parte de los humos se vuelven al local por el cortatiro. Y ahí es donde hay intoxicaciones por monóxido; puede ser puntual o continuado. El terminal, o deflector, es la pieza de arriba del todo, en el exterior, que protege el tiro del viento para que una racha no empuje los humos hacia dentro. Resumen: tiro bueno, humos fuera; revoco, humos dentro, peligro. En el control periódico esto es de lo primero que compruebas.</a:t>
+              <a:t>N1: Cuando la norma dice una presión, ¿es presión total o qué?</a:t>
+            </a:r>
+          </a:p>
+          <a:p>
+            <a:r>
+              <a:t>N2: Muy buena pregunta, y es un detalle que cae. Todas las presiones de la norma son relativas, también llamadas manométricas. Quiere decir que se miden por encima de la presión atmosférica, tomando la atmósfera como cero, no en valor absoluto. Es lo natural, porque el manómetro que enchufas a la instalación ya marca así: en reposo, con la instalación abierta al aire, marca cero, aunque la atmósfera esté empujando. Este matiz aparece como nota al pie en la presión de diseño, pero aplica a todas las presiones de la UNE sesenta mil seiscientos setenta. Grábate la frase: en el gas, salvo que se diga lo contrario, la presión es relativa.</a:t>
             </a:r>
           </a:p>
         </p:txBody>
@@ -1122,12 +1128,12 @@
           <a:lstStyle/>
           <a:p>
             <a:r>
-              <a:t>N1: Un shunt y un shunt invertido, ¿en qué se diferencian?</a:t>
-            </a:r>
-          </a:p>
-          <a:p>
-            <a:r>
-              <a:t>N2: En el sentido: uno saca y el otro mete. El shunt es un conducto de evacuación vertical, compartido, diseñado para sacar los humos de aparatos tipo B de varias plantas; cada planta no se une directamente al conducto general, sino a un conducto auxiliar que sube una planta antes de desembocar en el principal, y este termina por encima del tejado. El shunt invertido tiene la misma forma, vertical ascendente con conducto auxiliar de una planta, pero hace lo contrario: en vez de sacar humos, mete aire; toma aire limpio del exterior por su base y lo reparte a los locales de cada planta. Truco para no fallar: invertido igual a al revés igual a trae aire. Uno evacúa, el otro aporta.</a:t>
+              <a:t>N1: ¿Qué hace exactamente un regulador y qué es su tarado?</a:t>
+            </a:r>
+          </a:p>
+          <a:p>
+            <a:r>
+              <a:t>N2: El regulador de presión es la pieza que reduce la presión aguas abajo, es decir, después de él, y la mantiene dentro de unos límites aunque cambie el caudal; gracias a él, del alta que viene de la calle sale la baja que necesita el aparato. La presión de tarado es la predeterminada a la que se ajusta cada función de un dispositivo de regulación o de seguridad; tarar es afinar ese punto de disparo. No la confundas con la de garantía, que era la mínima de partida. Y aprovecho términos cercanos: los productos de la combustión son el conjunto de gases y vapor de agua que salen al quemar, los humos, que llevan monóxido si la combustión es mala; el quemador de encendido, o piloto, es un quemador pequeño cuya llama enciende el principal; y una puerta o registro estanco es la que, siendo ciega, cierra en todo su perímetro con una junta, para que no pase ni aire ni gas.</a:t>
             </a:r>
           </a:p>
         </p:txBody>
@@ -1197,12 +1203,12 @@
           <a:lstStyle/>
           <a:p>
             <a:r>
-              <a:t>N1: ¿Cuándo un cuarto de calderas es sala de máquinas?</a:t>
-            </a:r>
-          </a:p>
-          <a:p>
-            <a:r>
-              <a:t>N2: El número mágico es setenta kilovatios. Si los equipos de producción de calor o frío que alberga el local suman una potencia útil nominal conjunta superior a setenta kilovatios, ese local es sala de máquinas, con exigencias reforzadas de ventilación y seguridad. Por debajo o igual a setenta kilovatios no lo es; tampoco lo son los equipos autónomos de cualquier potencia, ni los locales de solo cocción, iluminación o lavandería. O sea, no basta con que haya una caldera: manda la potencia conjunta. Y el semisótano: una planta es semisótano cuando su suelo queda, en todo su contorno, más de sesenta centímetros por debajo del nivel exterior o del patio de ventilación contiguo. El número clave son sesenta centímetros. Dato de examen: en esta edición desaparece el primer sótano; para el gas solo manejas semisótano.</a:t>
+              <a:t>N1: Tiro y revoco, ¿son cosas distintas o lo mismo visto al revés?</a:t>
+            </a:r>
+          </a:p>
+          <a:p>
+            <a:r>
+              <a:t>N2: Son las dos caras del mismo conducto, una buena y una mala. El tiro es lo que debe pasar: una depresión, una succión suave que se genera entre los extremos del conducto y que empuja los humos hacia fuera; el aire caliente pesa menos y sube, y arrastra los humos. El revoco es el fallo: cuando el tiro no funciona, por un conducto obstruido, mal rematado o sin aire de aporte, parte de los humos se vuelven al local por el cortatiro. Y ahí es donde hay intoxicaciones por monóxido; puede ser puntual o continuado. El terminal, o deflector, es la pieza de arriba del todo, en el exterior, que protege el tiro del viento para que una racha no empuje los humos hacia dentro. Resumen: tiro bueno, humos fuera; revoco, humos dentro, peligro. En el control periódico esto es de lo primero que compruebas.</a:t>
             </a:r>
           </a:p>
         </p:txBody>
@@ -1272,12 +1278,12 @@
           <a:lstStyle/>
           <a:p>
             <a:r>
-              <a:t>N1: ¿Qué diferencia hay entre soldadura blanda y fuerte?</a:t>
-            </a:r>
-          </a:p>
-          <a:p>
-            <a:r>
-              <a:t>N2: Un solo número lo decide: cuatrocientos cincuenta grados, la temperatura a la que funde el material de aportación, el metal que rellena la unión. Si ese material funde por debajo de cuatrocientos cincuenta grados, y a partir de doscientos veinte, la soldadura es blanda. Si funde a cuatrocientos cincuenta grados o más, es fuerte. La fuerte aguanta más y se exige en los tramos más comprometidos. Por qué importa tanto: elegir mal la unión es, directamente, una fuga esperando. Y aprovecho un término cercano: el tallo es la pieza de transición que permite pasar de la parte enterrada a la parte aérea de la instalación, o al revés; ese cambio tierra-aire siempre se hace con una pieza pensada para ello.</a:t>
+              <a:t>N1: Un shunt y un shunt invertido, ¿en qué se diferencian?</a:t>
+            </a:r>
+          </a:p>
+          <a:p>
+            <a:r>
+              <a:t>N2: En el sentido: uno saca y el otro mete. El shunt es un conducto de evacuación vertical, compartido, diseñado para sacar los humos de aparatos tipo B de varias plantas; cada planta no se une directamente al conducto general, sino a un conducto auxiliar que sube una planta antes de desembocar en el principal, y este termina por encima del tejado. El shunt invertido tiene la misma forma, vertical ascendente con conducto auxiliar de una planta, pero hace lo contrario: en vez de sacar humos, mete aire; toma aire limpio del exterior por su base y lo reparte a los locales de cada planta. Truco para no fallar: invertido igual a al revés igual a trae aire. Uno evacúa, el otro aporta.</a:t>
             </a:r>
           </a:p>
         </p:txBody>
@@ -1422,12 +1428,12 @@
           <a:lstStyle/>
           <a:p>
             <a:r>
-              <a:t>N1: Hay varias válvulas de seguridad, ¿hacen todas lo mismo?</a:t>
-            </a:r>
-          </a:p>
-          <a:p>
-            <a:r>
-              <a:t>N2: No, cada una tiene su papel; no las mezcles. La válvula de alivio de seguridad, o de sobrepresión, la VAS, alivia: cuando la presión pasa de un valor, suelta al exterior una pequeña cantidad de gas para bajarla, y luego sigue trabajando; respira. Las VIS, en cambio, cortan. La VISmáx, de máxima presión, corta el suministro aguas abajo cuando la presión sube demasiado. La VISmín, de mínima, corta cuando la presión baja demasiado. Y la válvula automática de corte tiene la lógica a prueba de fallos que ya conoces: abre cuando recibe energía y se cierra sola en cuanto le falta, con rearme siempre manual. Regla: la de alivio respira; las VIS cierran, una por exceso y otra por defecto. En obra, cuando algo salta y corta el gas sin motivo aparente, sospecha del tarado de estas o del regulador antes de tocar el aparato.</a:t>
+              <a:t>N1: ¿Cuándo un cuarto de calderas es sala de máquinas?</a:t>
+            </a:r>
+          </a:p>
+          <a:p>
+            <a:r>
+              <a:t>N2: El número mágico es setenta kilovatios. Si los equipos de producción de calor o frío que alberga el local suman una potencia útil nominal conjunta superior a setenta kilovatios, ese local es sala de máquinas, con exigencias reforzadas de ventilación y seguridad. Por debajo o igual a setenta kilovatios no lo es; tampoco lo son los equipos autónomos de cualquier potencia, ni los locales de solo cocción, iluminación o lavandería. O sea, no basta con que haya una caldera: manda la potencia conjunta. Y el semisótano: una planta es semisótano cuando su suelo queda, en todo su contorno, más de sesenta centímetros por debajo del nivel exterior o del patio de ventilación contiguo. El número clave son sesenta centímetros. Dato de examen: en esta edición desaparece el primer sótano; para el gas solo manejas semisótano.</a:t>
             </a:r>
           </a:p>
         </p:txBody>
@@ -1453,6 +1459,456 @@
 </file>
 
 <file path=ppt/notesSlides/notesSlide21.xml><?xml version="1.0" encoding="utf-8"?>
+<p:notes xmlns:a="http://schemas.openxmlformats.org/drawingml/2006/main" xmlns:p="http://schemas.openxmlformats.org/presentationml/2006/main" xmlns:r="http://schemas.openxmlformats.org/officeDocument/2006/relationships">
+  <p:cSld>
+    <p:spTree>
+      <p:nvGrpSpPr>
+        <p:cNvPr id="1" name=""/>
+        <p:cNvGrpSpPr/>
+        <p:nvPr/>
+      </p:nvGrpSpPr>
+      <p:grpSpPr>
+        <a:xfrm>
+          <a:off x="0" y="0"/>
+          <a:ext cx="0" cy="0"/>
+          <a:chOff x="0" y="0"/>
+          <a:chExt cx="0" cy="0"/>
+        </a:xfrm>
+      </p:grpSpPr>
+      <p:sp>
+        <p:nvSpPr>
+          <p:cNvPr id="2" name="Slide Image Placeholder 1"/>
+          <p:cNvSpPr>
+            <a:spLocks noGrp="1"/>
+          </p:cNvSpPr>
+          <p:nvPr>
+            <p:ph type="sldImg" idx="2"/>
+          </p:nvPr>
+        </p:nvSpPr>
+        <p:spPr/>
+      </p:sp>
+      <p:sp>
+        <p:nvSpPr>
+          <p:cNvPr id="3" name="Notes Placeholder 2"/>
+          <p:cNvSpPr>
+            <a:spLocks noGrp="1"/>
+          </p:cNvSpPr>
+          <p:nvPr>
+            <p:ph type="body" idx="3" sz="quarter"/>
+          </p:nvPr>
+        </p:nvSpPr>
+        <p:spPr/>
+        <p:txBody>
+          <a:bodyPr/>
+          <a:lstStyle/>
+          <a:p>
+            <a:r>
+              <a:t>N1: ¿Qué diferencia hay entre soldadura blanda y fuerte?</a:t>
+            </a:r>
+          </a:p>
+          <a:p>
+            <a:r>
+              <a:t>N2: Un solo número lo decide: cuatrocientos cincuenta grados, la temperatura a la que funde el material de aportación, el metal que rellena la unión. Si ese material funde por debajo de cuatrocientos cincuenta grados, y a partir de doscientos veinte, la soldadura es blanda. Si funde a cuatrocientos cincuenta grados o más, es fuerte. La fuerte aguanta más y se exige en los tramos más comprometidos. Por qué importa tanto: elegir mal la unión es, directamente, una fuga esperando. Y aprovecho un término cercano: el tallo es la pieza de transición que permite pasar de la parte enterrada a la parte aérea de la instalación, o al revés; ese cambio tierra-aire siempre se hace con una pieza pensada para ello.</a:t>
+            </a:r>
+          </a:p>
+        </p:txBody>
+      </p:sp>
+      <p:sp>
+        <p:nvSpPr>
+          <p:cNvPr id="4" name="Slide Number Placeholder 3"/>
+          <p:cNvSpPr>
+            <a:spLocks noGrp="1"/>
+          </p:cNvSpPr>
+          <p:nvPr>
+            <p:ph type="sldNum" idx="5" sz="quarter"/>
+          </p:nvPr>
+        </p:nvSpPr>
+        <p:spPr/>
+      </p:sp>
+    </p:spTree>
+  </p:cSld>
+  <p:clrMapOvr>
+    <a:masterClrMapping/>
+  </p:clrMapOvr>
+</p:notes>
+</file>
+
+<file path=ppt/notesSlides/notesSlide22.xml><?xml version="1.0" encoding="utf-8"?>
+<p:notes xmlns:a="http://schemas.openxmlformats.org/drawingml/2006/main" xmlns:p="http://schemas.openxmlformats.org/presentationml/2006/main" xmlns:r="http://schemas.openxmlformats.org/officeDocument/2006/relationships">
+  <p:cSld>
+    <p:spTree>
+      <p:nvGrpSpPr>
+        <p:cNvPr id="1" name=""/>
+        <p:cNvGrpSpPr/>
+        <p:nvPr/>
+      </p:nvGrpSpPr>
+      <p:grpSpPr>
+        <a:xfrm>
+          <a:off x="0" y="0"/>
+          <a:ext cx="0" cy="0"/>
+          <a:chOff x="0" y="0"/>
+          <a:chExt cx="0" cy="0"/>
+        </a:xfrm>
+      </p:grpSpPr>
+      <p:sp>
+        <p:nvSpPr>
+          <p:cNvPr id="2" name="Slide Image Placeholder 1"/>
+          <p:cNvSpPr>
+            <a:spLocks noGrp="1"/>
+          </p:cNvSpPr>
+          <p:nvPr>
+            <p:ph type="sldImg" idx="2"/>
+          </p:nvPr>
+        </p:nvSpPr>
+        <p:spPr/>
+      </p:sp>
+      <p:sp>
+        <p:nvSpPr>
+          <p:cNvPr id="3" name="Notes Placeholder 2"/>
+          <p:cNvSpPr>
+            <a:spLocks noGrp="1"/>
+          </p:cNvSpPr>
+          <p:nvPr>
+            <p:ph type="body" idx="3" sz="quarter"/>
+          </p:nvPr>
+        </p:nvSpPr>
+        <p:spPr/>
+        <p:txBody>
+          <a:bodyPr/>
+          <a:lstStyle/>
+          <a:p>
+            <a:r>
+              <a:t>N1: Un solo número lo decide: ¿desde qué temperatura la soldadura es fuerte?</a:t>
+            </a:r>
+          </a:p>
+          <a:p>
+            <a:r>
+              <a:t>N2: Pista: es la frontera entre blanda y fuerte, una cifra redonda en grados.</a:t>
+            </a:r>
+          </a:p>
+        </p:txBody>
+      </p:sp>
+      <p:sp>
+        <p:nvSpPr>
+          <p:cNvPr id="4" name="Slide Number Placeholder 3"/>
+          <p:cNvSpPr>
+            <a:spLocks noGrp="1"/>
+          </p:cNvSpPr>
+          <p:nvPr>
+            <p:ph type="sldNum" idx="5" sz="quarter"/>
+          </p:nvPr>
+        </p:nvSpPr>
+        <p:spPr/>
+      </p:sp>
+    </p:spTree>
+  </p:cSld>
+  <p:clrMapOvr>
+    <a:masterClrMapping/>
+  </p:clrMapOvr>
+</p:notes>
+</file>
+
+<file path=ppt/notesSlides/notesSlide23.xml><?xml version="1.0" encoding="utf-8"?>
+<p:notes xmlns:a="http://schemas.openxmlformats.org/drawingml/2006/main" xmlns:p="http://schemas.openxmlformats.org/presentationml/2006/main" xmlns:r="http://schemas.openxmlformats.org/officeDocument/2006/relationships">
+  <p:cSld>
+    <p:spTree>
+      <p:nvGrpSpPr>
+        <p:cNvPr id="1" name=""/>
+        <p:cNvGrpSpPr/>
+        <p:nvPr/>
+      </p:nvGrpSpPr>
+      <p:grpSpPr>
+        <a:xfrm>
+          <a:off x="0" y="0"/>
+          <a:ext cx="0" cy="0"/>
+          <a:chOff x="0" y="0"/>
+          <a:chExt cx="0" cy="0"/>
+        </a:xfrm>
+      </p:grpSpPr>
+      <p:sp>
+        <p:nvSpPr>
+          <p:cNvPr id="2" name="Slide Image Placeholder 1"/>
+          <p:cNvSpPr>
+            <a:spLocks noGrp="1"/>
+          </p:cNvSpPr>
+          <p:nvPr>
+            <p:ph type="sldImg" idx="2"/>
+          </p:nvPr>
+        </p:nvSpPr>
+        <p:spPr/>
+      </p:sp>
+      <p:sp>
+        <p:nvSpPr>
+          <p:cNvPr id="3" name="Notes Placeholder 2"/>
+          <p:cNvSpPr>
+            <a:spLocks noGrp="1"/>
+          </p:cNvSpPr>
+          <p:nvPr>
+            <p:ph type="body" idx="3" sz="quarter"/>
+          </p:nvPr>
+        </p:nvSpPr>
+        <p:spPr/>
+        <p:txBody>
+          <a:bodyPr/>
+          <a:lstStyle/>
+          <a:p>
+            <a:r>
+              <a:t>N1: ¿Por qué cuatrocientos cincuenta grados?</a:t>
+            </a:r>
+          </a:p>
+          <a:p>
+            <a:r>
+              <a:t>N2: Porque la soldadura fuerte es aquella cuyo material de aportación funde a cuatrocientos cincuenta grados o más; la blanda funde por debajo, a partir de doscientos veinte. La fuerte aguanta más y se exige en los tramos más comprometidos. Truco: un solo número, cuatrocientos cincuenta grados.</a:t>
+            </a:r>
+          </a:p>
+        </p:txBody>
+      </p:sp>
+      <p:sp>
+        <p:nvSpPr>
+          <p:cNvPr id="4" name="Slide Number Placeholder 3"/>
+          <p:cNvSpPr>
+            <a:spLocks noGrp="1"/>
+          </p:cNvSpPr>
+          <p:nvPr>
+            <p:ph type="sldNum" idx="5" sz="quarter"/>
+          </p:nvPr>
+        </p:nvSpPr>
+        <p:spPr/>
+      </p:sp>
+    </p:spTree>
+  </p:cSld>
+  <p:clrMapOvr>
+    <a:masterClrMapping/>
+  </p:clrMapOvr>
+</p:notes>
+</file>
+
+<file path=ppt/notesSlides/notesSlide24.xml><?xml version="1.0" encoding="utf-8"?>
+<p:notes xmlns:a="http://schemas.openxmlformats.org/drawingml/2006/main" xmlns:p="http://schemas.openxmlformats.org/presentationml/2006/main" xmlns:r="http://schemas.openxmlformats.org/officeDocument/2006/relationships">
+  <p:cSld>
+    <p:spTree>
+      <p:nvGrpSpPr>
+        <p:cNvPr id="1" name=""/>
+        <p:cNvGrpSpPr/>
+        <p:nvPr/>
+      </p:nvGrpSpPr>
+      <p:grpSpPr>
+        <a:xfrm>
+          <a:off x="0" y="0"/>
+          <a:ext cx="0" cy="0"/>
+          <a:chOff x="0" y="0"/>
+          <a:chExt cx="0" cy="0"/>
+        </a:xfrm>
+      </p:grpSpPr>
+      <p:sp>
+        <p:nvSpPr>
+          <p:cNvPr id="2" name="Slide Image Placeholder 1"/>
+          <p:cNvSpPr>
+            <a:spLocks noGrp="1"/>
+          </p:cNvSpPr>
+          <p:nvPr>
+            <p:ph type="sldImg" idx="2"/>
+          </p:nvPr>
+        </p:nvSpPr>
+        <p:spPr/>
+      </p:sp>
+      <p:sp>
+        <p:nvSpPr>
+          <p:cNvPr id="3" name="Notes Placeholder 2"/>
+          <p:cNvSpPr>
+            <a:spLocks noGrp="1"/>
+          </p:cNvSpPr>
+          <p:nvPr>
+            <p:ph type="body" idx="3" sz="quarter"/>
+          </p:nvPr>
+        </p:nvSpPr>
+        <p:spPr/>
+        <p:txBody>
+          <a:bodyPr/>
+          <a:lstStyle/>
+          <a:p>
+            <a:r>
+              <a:t>N1: Hay varias válvulas de seguridad, ¿hacen todas lo mismo?</a:t>
+            </a:r>
+          </a:p>
+          <a:p>
+            <a:r>
+              <a:t>N2: No, cada una tiene su papel; no las mezcles. La válvula de alivio de seguridad, o de sobrepresión, la VAS, alivia: cuando la presión pasa de un valor, suelta al exterior una pequeña cantidad de gas para bajarla, y luego sigue trabajando; respira. Las VIS, en cambio, cortan. La VISmáx, de máxima presión, corta el suministro aguas abajo cuando la presión sube demasiado. La VISmín, de mínima, corta cuando la presión baja demasiado. Y la válvula automática de corte tiene la lógica a prueba de fallos que ya conoces: abre cuando recibe energía y se cierra sola en cuanto le falta, con rearme siempre manual. Regla: la de alivio respira; las VIS cierran, una por exceso y otra por defecto. En obra, cuando algo salta y corta el gas sin motivo aparente, sospecha del tarado de estas o del regulador antes de tocar el aparato.</a:t>
+            </a:r>
+          </a:p>
+        </p:txBody>
+      </p:sp>
+      <p:sp>
+        <p:nvSpPr>
+          <p:cNvPr id="4" name="Slide Number Placeholder 3"/>
+          <p:cNvSpPr>
+            <a:spLocks noGrp="1"/>
+          </p:cNvSpPr>
+          <p:nvPr>
+            <p:ph type="sldNum" idx="5" sz="quarter"/>
+          </p:nvPr>
+        </p:nvSpPr>
+        <p:spPr/>
+      </p:sp>
+    </p:spTree>
+  </p:cSld>
+  <p:clrMapOvr>
+    <a:masterClrMapping/>
+  </p:clrMapOvr>
+</p:notes>
+</file>
+
+<file path=ppt/notesSlides/notesSlide25.xml><?xml version="1.0" encoding="utf-8"?>
+<p:notes xmlns:a="http://schemas.openxmlformats.org/drawingml/2006/main" xmlns:p="http://schemas.openxmlformats.org/presentationml/2006/main" xmlns:r="http://schemas.openxmlformats.org/officeDocument/2006/relationships">
+  <p:cSld>
+    <p:spTree>
+      <p:nvGrpSpPr>
+        <p:cNvPr id="1" name=""/>
+        <p:cNvGrpSpPr/>
+        <p:nvPr/>
+      </p:nvGrpSpPr>
+      <p:grpSpPr>
+        <a:xfrm>
+          <a:off x="0" y="0"/>
+          <a:ext cx="0" cy="0"/>
+          <a:chOff x="0" y="0"/>
+          <a:chExt cx="0" cy="0"/>
+        </a:xfrm>
+      </p:grpSpPr>
+      <p:sp>
+        <p:nvSpPr>
+          <p:cNvPr id="2" name="Slide Image Placeholder 1"/>
+          <p:cNvSpPr>
+            <a:spLocks noGrp="1"/>
+          </p:cNvSpPr>
+          <p:nvPr>
+            <p:ph type="sldImg" idx="2"/>
+          </p:nvPr>
+        </p:nvSpPr>
+        <p:spPr/>
+      </p:sp>
+      <p:sp>
+        <p:nvSpPr>
+          <p:cNvPr id="3" name="Notes Placeholder 2"/>
+          <p:cNvSpPr>
+            <a:spLocks noGrp="1"/>
+          </p:cNvSpPr>
+          <p:nvPr>
+            <p:ph type="body" idx="3" sz="quarter"/>
+          </p:nvPr>
+        </p:nvSpPr>
+        <p:spPr/>
+        <p:txBody>
+          <a:bodyPr/>
+          <a:lstStyle/>
+          <a:p>
+            <a:r>
+              <a:t>N1: Tres válvulas, tres papeles: ¿qué hace la de sobrepresión, la VAS?</a:t>
+            </a:r>
+          </a:p>
+          <a:p>
+            <a:r>
+              <a:t>N2: Pista: no corta, respira; suelta algo al exterior y sigue trabajando.</a:t>
+            </a:r>
+          </a:p>
+        </p:txBody>
+      </p:sp>
+      <p:sp>
+        <p:nvSpPr>
+          <p:cNvPr id="4" name="Slide Number Placeholder 3"/>
+          <p:cNvSpPr>
+            <a:spLocks noGrp="1"/>
+          </p:cNvSpPr>
+          <p:nvPr>
+            <p:ph type="sldNum" idx="5" sz="quarter"/>
+          </p:nvPr>
+        </p:nvSpPr>
+        <p:spPr/>
+      </p:sp>
+    </p:spTree>
+  </p:cSld>
+  <p:clrMapOvr>
+    <a:masterClrMapping/>
+  </p:clrMapOvr>
+</p:notes>
+</file>
+
+<file path=ppt/notesSlides/notesSlide26.xml><?xml version="1.0" encoding="utf-8"?>
+<p:notes xmlns:a="http://schemas.openxmlformats.org/drawingml/2006/main" xmlns:p="http://schemas.openxmlformats.org/presentationml/2006/main" xmlns:r="http://schemas.openxmlformats.org/officeDocument/2006/relationships">
+  <p:cSld>
+    <p:spTree>
+      <p:nvGrpSpPr>
+        <p:cNvPr id="1" name=""/>
+        <p:cNvGrpSpPr/>
+        <p:nvPr/>
+      </p:nvGrpSpPr>
+      <p:grpSpPr>
+        <a:xfrm>
+          <a:off x="0" y="0"/>
+          <a:ext cx="0" cy="0"/>
+          <a:chOff x="0" y="0"/>
+          <a:chExt cx="0" cy="0"/>
+        </a:xfrm>
+      </p:grpSpPr>
+      <p:sp>
+        <p:nvSpPr>
+          <p:cNvPr id="2" name="Slide Image Placeholder 1"/>
+          <p:cNvSpPr>
+            <a:spLocks noGrp="1"/>
+          </p:cNvSpPr>
+          <p:nvPr>
+            <p:ph type="sldImg" idx="2"/>
+          </p:nvPr>
+        </p:nvSpPr>
+        <p:spPr/>
+      </p:sp>
+      <p:sp>
+        <p:nvSpPr>
+          <p:cNvPr id="3" name="Notes Placeholder 2"/>
+          <p:cNvSpPr>
+            <a:spLocks noGrp="1"/>
+          </p:cNvSpPr>
+          <p:nvPr>
+            <p:ph type="body" idx="3" sz="quarter"/>
+          </p:nvPr>
+        </p:nvSpPr>
+        <p:spPr/>
+        <p:txBody>
+          <a:bodyPr/>
+          <a:lstStyle/>
+          <a:p>
+            <a:r>
+              <a:t>N1: ¿Por qué la B?</a:t>
+            </a:r>
+          </a:p>
+          <a:p>
+            <a:r>
+              <a:t>N2: Porque la válvula de alivio de seguridad, o de sobrepresión, alivia: cuando la presión pasa de un valor suelta al exterior una pequeña cantidad de gas para bajarla, y luego sigue trabajando. La que corta por presión alta es la de máxima presión, y la que corta por presión baja es la de mínima. Regla: la de alivio respira, y las de máxima y mínima cierran.</a:t>
+            </a:r>
+          </a:p>
+        </p:txBody>
+      </p:sp>
+      <p:sp>
+        <p:nvSpPr>
+          <p:cNvPr id="4" name="Slide Number Placeholder 3"/>
+          <p:cNvSpPr>
+            <a:spLocks noGrp="1"/>
+          </p:cNvSpPr>
+          <p:nvPr>
+            <p:ph type="sldNum" idx="5" sz="quarter"/>
+          </p:nvPr>
+        </p:nvSpPr>
+        <p:spPr/>
+      </p:sp>
+    </p:spTree>
+  </p:cSld>
+  <p:clrMapOvr>
+    <a:masterClrMapping/>
+  </p:clrMapOvr>
+</p:notes>
+</file>
+
+<file path=ppt/notesSlides/notesSlide27.xml><?xml version="1.0" encoding="utf-8"?>
 <p:notes xmlns:a="http://schemas.openxmlformats.org/drawingml/2006/main" xmlns:p="http://schemas.openxmlformats.org/presentationml/2006/main" xmlns:r="http://schemas.openxmlformats.org/officeDocument/2006/relationships">
   <p:cSld>
     <p:spTree>
@@ -5114,7 +5570,7 @@
       </p:sp>
       <p:sp>
         <p:nvSpPr>
-          <p:cNvPr id="4" name="Rounded Rectangle 3"/>
+          <p:cNvPr id="4" name="Rectangle 3"/>
           <p:cNvSpPr/>
           <p:nvPr/>
         </p:nvSpPr>
@@ -5123,7 +5579,7 @@
             <a:off x="868680" y="2057400"/>
             <a:ext cx="1463040" cy="82296"/>
           </a:xfrm>
-          <a:prstGeom prst="roundRect">
+          <a:prstGeom prst="rect">
             <a:avLst/>
           </a:prstGeom>
           <a:solidFill>
@@ -5240,6 +5696,18 @@
   <p:clrMapOvr>
     <a:masterClrMapping/>
   </p:clrMapOvr>
+  <mc:AlternateContent xmlns:mc="http://schemas.openxmlformats.org/markup-compatibility/2006">
+    <mc:Choice xmlns:p14="http://schemas.microsoft.com/office/powerpoint/2010/main" Requires="p14">
+      <p:transition spd="med" p14:dur="700">
+        <p14:cube dir="l"/>
+      </p:transition>
+    </mc:Choice>
+    <mc:Fallback>
+      <p:transition spd="med">
+        <p:push dir="l"/>
+      </p:transition>
+    </mc:Fallback>
+  </mc:AlternateContent>
 </p:sld>
 </file>
 
@@ -5327,7 +5795,7 @@
                 </a:solidFill>
                 <a:latin typeface="Montserrat"/>
               </a:rPr>
-              <a:t>010 / 021</a:t>
+              <a:t>010 / 027</a:t>
             </a:r>
           </a:p>
         </p:txBody>
@@ -5436,7 +5904,7 @@
       </p:sp>
       <p:sp>
         <p:nvSpPr>
-          <p:cNvPr id="7" name="Rounded Rectangle 6"/>
+          <p:cNvPr id="7" name="Rectangle 6"/>
           <p:cNvSpPr/>
           <p:nvPr/>
         </p:nvSpPr>
@@ -5445,7 +5913,7 @@
             <a:off x="868680" y="1627632"/>
             <a:ext cx="2011680" cy="73152"/>
           </a:xfrm>
-          <a:prstGeom prst="roundRect">
+          <a:prstGeom prst="rect">
             <a:avLst/>
           </a:prstGeom>
           <a:solidFill>
@@ -5487,7 +5955,7 @@
         <p:spPr>
           <a:xfrm>
             <a:off x="822960" y="1965960"/>
-            <a:ext cx="4983480" cy="4206240"/>
+            <a:ext cx="5029200" cy="4206240"/>
           </a:xfrm>
           <a:prstGeom prst="rect">
             <a:avLst/>
@@ -5609,8 +6077,8 @@
         </p:nvSpPr>
         <p:spPr>
           <a:xfrm>
-            <a:off x="5806440" y="1051560"/>
-            <a:ext cx="5298947" cy="4629150"/>
+            <a:off x="6080760" y="1965960"/>
+            <a:ext cx="5303520" cy="4572000"/>
           </a:xfrm>
           <a:prstGeom prst="roundRect">
             <a:avLst/>
@@ -5655,8 +6123,8 @@
         </p:nvSpPr>
         <p:spPr>
           <a:xfrm>
-            <a:off x="6080760" y="2726055"/>
-            <a:ext cx="4750307" cy="1280160"/>
+            <a:off x="6355080" y="3611880"/>
+            <a:ext cx="4754880" cy="1280160"/>
           </a:xfrm>
           <a:prstGeom prst="rect">
             <a:avLst/>
@@ -5677,7 +6145,7 @@
                 </a:solidFill>
                 <a:latin typeface="Montserrat"/>
               </a:rPr>
-              <a:t>IMAGEN REALISTA</a:t>
+              <a:t>IMAGEN</a:t>
             </a:r>
           </a:p>
           <a:p>
@@ -5699,6 +6167,18 @@
   <p:clrMapOvr>
     <a:masterClrMapping/>
   </p:clrMapOvr>
+  <mc:AlternateContent xmlns:mc="http://schemas.openxmlformats.org/markup-compatibility/2006">
+    <mc:Choice xmlns:p14="http://schemas.microsoft.com/office/powerpoint/2010/main" Requires="p14">
+      <p:transition spd="med" p14:dur="700">
+        <p14:cube dir="r"/>
+      </p:transition>
+    </mc:Choice>
+    <mc:Fallback>
+      <p:transition spd="med">
+        <p:push dir="r"/>
+      </p:transition>
+    </mc:Fallback>
+  </mc:AlternateContent>
 </p:sld>
 </file>
 
@@ -5786,7 +6266,7 @@
                 </a:solidFill>
                 <a:latin typeface="Montserrat"/>
               </a:rPr>
-              <a:t>011 / 021</a:t>
+              <a:t>011 / 027</a:t>
             </a:r>
           </a:p>
         </p:txBody>
@@ -5895,7 +6375,7 @@
       </p:sp>
       <p:sp>
         <p:nvSpPr>
-          <p:cNvPr id="7" name="Rounded Rectangle 6"/>
+          <p:cNvPr id="7" name="Rectangle 6"/>
           <p:cNvSpPr/>
           <p:nvPr/>
         </p:nvSpPr>
@@ -5904,7 +6384,7 @@
             <a:off x="868680" y="1627632"/>
             <a:ext cx="2011680" cy="73152"/>
           </a:xfrm>
-          <a:prstGeom prst="roundRect">
+          <a:prstGeom prst="rect">
             <a:avLst/>
           </a:prstGeom>
           <a:solidFill>
@@ -5945,8 +6425,8 @@
         </p:nvSpPr>
         <p:spPr>
           <a:xfrm>
-            <a:off x="822960" y="1965960"/>
-            <a:ext cx="4983480" cy="4206240"/>
+            <a:off x="6355080" y="1965960"/>
+            <a:ext cx="5029200" cy="4206240"/>
           </a:xfrm>
           <a:prstGeom prst="rect">
             <a:avLst/>
@@ -6068,8 +6548,8 @@
         </p:nvSpPr>
         <p:spPr>
           <a:xfrm>
-            <a:off x="5806440" y="1051560"/>
-            <a:ext cx="5298947" cy="4629150"/>
+            <a:off x="822960" y="1965960"/>
+            <a:ext cx="5303520" cy="4572000"/>
           </a:xfrm>
           <a:prstGeom prst="roundRect">
             <a:avLst/>
@@ -6114,8 +6594,8 @@
         </p:nvSpPr>
         <p:spPr>
           <a:xfrm>
-            <a:off x="6080760" y="2726055"/>
-            <a:ext cx="4750307" cy="1280160"/>
+            <a:off x="1097280" y="3611880"/>
+            <a:ext cx="4754880" cy="1280160"/>
           </a:xfrm>
           <a:prstGeom prst="rect">
             <a:avLst/>
@@ -6136,7 +6616,7 @@
                 </a:solidFill>
                 <a:latin typeface="Montserrat"/>
               </a:rPr>
-              <a:t>IMAGEN REALISTA</a:t>
+              <a:t>IMAGEN</a:t>
             </a:r>
           </a:p>
           <a:p>
@@ -6158,6 +6638,18 @@
   <p:clrMapOvr>
     <a:masterClrMapping/>
   </p:clrMapOvr>
+  <mc:AlternateContent xmlns:mc="http://schemas.openxmlformats.org/markup-compatibility/2006">
+    <mc:Choice xmlns:p14="http://schemas.microsoft.com/office/powerpoint/2010/main" Requires="p14">
+      <p:transition spd="med" p14:dur="700">
+        <p14:cube dir="l"/>
+      </p:transition>
+    </mc:Choice>
+    <mc:Fallback>
+      <p:transition spd="med">
+        <p:push dir="l"/>
+      </p:transition>
+    </mc:Fallback>
+  </mc:AlternateContent>
 </p:sld>
 </file>
 
@@ -6245,7 +6737,7 @@
                 </a:solidFill>
                 <a:latin typeface="Montserrat"/>
               </a:rPr>
-              <a:t>012 / 021</a:t>
+              <a:t>012 / 027</a:t>
             </a:r>
           </a:p>
         </p:txBody>
@@ -6354,7 +6846,7 @@
       </p:sp>
       <p:sp>
         <p:nvSpPr>
-          <p:cNvPr id="7" name="Rounded Rectangle 6"/>
+          <p:cNvPr id="7" name="Rectangle 6"/>
           <p:cNvSpPr/>
           <p:nvPr/>
         </p:nvSpPr>
@@ -6363,7 +6855,7 @@
             <a:off x="868680" y="1627632"/>
             <a:ext cx="2011680" cy="73152"/>
           </a:xfrm>
-          <a:prstGeom prst="roundRect">
+          <a:prstGeom prst="rect">
             <a:avLst/>
           </a:prstGeom>
           <a:solidFill>
@@ -6405,7 +6897,7 @@
         <p:spPr>
           <a:xfrm>
             <a:off x="822960" y="1965960"/>
-            <a:ext cx="4983480" cy="4206240"/>
+            <a:ext cx="5029200" cy="4206240"/>
           </a:xfrm>
           <a:prstGeom prst="rect">
             <a:avLst/>
@@ -6527,8 +7019,8 @@
         </p:nvSpPr>
         <p:spPr>
           <a:xfrm>
-            <a:off x="5806440" y="1051560"/>
-            <a:ext cx="5298947" cy="4629150"/>
+            <a:off x="6080760" y="1965960"/>
+            <a:ext cx="5303520" cy="4572000"/>
           </a:xfrm>
           <a:prstGeom prst="roundRect">
             <a:avLst/>
@@ -6573,8 +7065,8 @@
         </p:nvSpPr>
         <p:spPr>
           <a:xfrm>
-            <a:off x="6080760" y="2726055"/>
-            <a:ext cx="4750307" cy="1280160"/>
+            <a:off x="6355080" y="3611880"/>
+            <a:ext cx="4754880" cy="1280160"/>
           </a:xfrm>
           <a:prstGeom prst="rect">
             <a:avLst/>
@@ -6595,7 +7087,7 @@
                 </a:solidFill>
                 <a:latin typeface="Montserrat"/>
               </a:rPr>
-              <a:t>IMAGEN REALISTA</a:t>
+              <a:t>IMAGEN</a:t>
             </a:r>
           </a:p>
           <a:p>
@@ -6617,6 +7109,18 @@
   <p:clrMapOvr>
     <a:masterClrMapping/>
   </p:clrMapOvr>
+  <mc:AlternateContent xmlns:mc="http://schemas.openxmlformats.org/markup-compatibility/2006">
+    <mc:Choice xmlns:p14="http://schemas.microsoft.com/office/powerpoint/2010/main" Requires="p14">
+      <p:transition spd="med" p14:dur="700">
+        <p14:cube dir="r"/>
+      </p:transition>
+    </mc:Choice>
+    <mc:Fallback>
+      <p:transition spd="med">
+        <p:push dir="r"/>
+      </p:transition>
+    </mc:Fallback>
+  </mc:AlternateContent>
 </p:sld>
 </file>
 
@@ -6704,7 +7208,7 @@
                 </a:solidFill>
                 <a:latin typeface="Montserrat"/>
               </a:rPr>
-              <a:t>013 / 021</a:t>
+              <a:t>013 / 027</a:t>
             </a:r>
           </a:p>
         </p:txBody>
@@ -6745,84 +7249,16 @@
       </p:sp>
       <p:sp>
         <p:nvSpPr>
-          <p:cNvPr id="5" name="TextBox 4"/>
-          <p:cNvSpPr txBox="1"/>
-          <p:nvPr/>
-        </p:nvSpPr>
-        <p:spPr>
-          <a:xfrm>
-            <a:off x="822960" y="457200"/>
-            <a:ext cx="10058400" cy="365760"/>
-          </a:xfrm>
-          <a:prstGeom prst="rect">
-            <a:avLst/>
-          </a:prstGeom>
-          <a:noFill/>
-        </p:spPr>
-        <p:txBody>
-          <a:bodyPr wrap="square">
-            <a:spAutoFit/>
-          </a:bodyPr>
-          <a:lstStyle/>
-          <a:p>
-            <a:r>
-              <a:rPr sz="1300" b="1" i="0">
-                <a:solidFill>
-                  <a:srgbClr val="E8801A"/>
-                </a:solidFill>
-                <a:latin typeface="Montserrat"/>
-              </a:rPr>
-              <a:t>TÉRMINOS 3.89 A 3.94</a:t>
-            </a:r>
-          </a:p>
-        </p:txBody>
-      </p:sp>
-      <p:sp>
-        <p:nvSpPr>
-          <p:cNvPr id="6" name="TextBox 5"/>
-          <p:cNvSpPr txBox="1"/>
-          <p:nvPr/>
-        </p:nvSpPr>
-        <p:spPr>
-          <a:xfrm>
-            <a:off x="822960" y="868680"/>
-            <a:ext cx="10515600" cy="914400"/>
-          </a:xfrm>
-          <a:prstGeom prst="rect">
-            <a:avLst/>
-          </a:prstGeom>
-          <a:noFill/>
-        </p:spPr>
-        <p:txBody>
-          <a:bodyPr wrap="square">
-            <a:spAutoFit/>
-          </a:bodyPr>
-          <a:lstStyle/>
-          <a:p>
-            <a:r>
-              <a:rPr sz="2800" b="1" i="0">
-                <a:solidFill>
-                  <a:srgbClr val="1E2761"/>
-                </a:solidFill>
-                <a:latin typeface="Montserrat"/>
-              </a:rPr>
-              <a:t>La familia de presiones (II)</a:t>
-            </a:r>
-          </a:p>
-        </p:txBody>
-      </p:sp>
-      <p:sp>
-        <p:nvSpPr>
-          <p:cNvPr id="7" name="Rounded Rectangle 6"/>
+          <p:cNvPr id="5" name="Rectangle 4"/>
           <p:cNvSpPr/>
           <p:nvPr/>
         </p:nvSpPr>
         <p:spPr>
           <a:xfrm>
-            <a:off x="868680" y="1627632"/>
-            <a:ext cx="2011680" cy="73152"/>
-          </a:xfrm>
-          <a:prstGeom prst="roundRect">
+            <a:off x="0" y="0"/>
+            <a:ext cx="12191695" cy="1143000"/>
+          </a:xfrm>
+          <a:prstGeom prst="rect">
             <a:avLst/>
           </a:prstGeom>
           <a:solidFill>
@@ -6857,14 +7293,14 @@
       </p:sp>
       <p:sp>
         <p:nvSpPr>
-          <p:cNvPr id="8" name="TextBox 7"/>
+          <p:cNvPr id="6" name="TextBox 5"/>
           <p:cNvSpPr txBox="1"/>
           <p:nvPr/>
         </p:nvSpPr>
         <p:spPr>
           <a:xfrm>
-            <a:off x="822960" y="1965960"/>
-            <a:ext cx="4983480" cy="4206240"/>
+            <a:off x="822960" y="274320"/>
+            <a:ext cx="10515600" cy="640080"/>
           </a:xfrm>
           <a:prstGeom prst="rect">
             <a:avLst/>
@@ -6877,117 +7313,62 @@
           </a:bodyPr>
           <a:lstStyle/>
           <a:p>
-            <a:pPr>
-              <a:spcAft>
-                <a:spcPts val="1100"/>
-              </a:spcAft>
-            </a:pPr>
-            <a:r>
-              <a:rPr sz="1600" b="1" i="0">
-                <a:solidFill>
-                  <a:srgbClr val="E8801A"/>
-                </a:solidFill>
-                <a:latin typeface="Montserrat"/>
-              </a:rPr>
-              <a:t>▸  </a:t>
-            </a:r>
-            <a:r>
-              <a:rPr sz="1600" b="0" i="0">
-                <a:solidFill>
-                  <a:srgbClr val="1B2330"/>
-                </a:solidFill>
-                <a:latin typeface="Montserrat"/>
-              </a:rPr>
-              <a:t>DP diseño: fija la resistencia mecánica</a:t>
-            </a:r>
-          </a:p>
-          <a:p>
-            <a:pPr>
-              <a:spcAft>
-                <a:spcPts val="1100"/>
-              </a:spcAft>
-            </a:pPr>
-            <a:r>
-              <a:rPr sz="1600" b="1" i="0">
-                <a:solidFill>
-                  <a:srgbClr val="E8801A"/>
-                </a:solidFill>
-                <a:latin typeface="Montserrat"/>
-              </a:rPr>
-              <a:t>▸  </a:t>
-            </a:r>
-            <a:r>
-              <a:rPr sz="1600" b="0" i="0">
-                <a:solidFill>
-                  <a:srgbClr val="1B2330"/>
-                </a:solidFill>
-                <a:latin typeface="Montserrat"/>
-              </a:rPr>
-              <a:t>Garantía: mínima a la salida de acometida</a:t>
-            </a:r>
-          </a:p>
-          <a:p>
-            <a:pPr>
-              <a:spcAft>
-                <a:spcPts val="1100"/>
-              </a:spcAft>
-            </a:pPr>
-            <a:r>
-              <a:rPr sz="1600" b="1" i="0">
-                <a:solidFill>
-                  <a:srgbClr val="E8801A"/>
-                </a:solidFill>
-                <a:latin typeface="Montserrat"/>
-              </a:rPr>
-              <a:t>▸  </a:t>
-            </a:r>
-            <a:r>
-              <a:rPr sz="1600" b="0" i="0">
-                <a:solidFill>
-                  <a:srgbClr val="1B2330"/>
-                </a:solidFill>
-                <a:latin typeface="Montserrat"/>
-              </a:rPr>
-              <a:t>STP: prueba de resistencia</a:t>
-            </a:r>
-          </a:p>
-          <a:p>
-            <a:pPr>
-              <a:spcAft>
-                <a:spcPts val="1100"/>
-              </a:spcAft>
-            </a:pPr>
-            <a:r>
-              <a:rPr sz="1600" b="1" i="0">
-                <a:solidFill>
-                  <a:srgbClr val="E8801A"/>
-                </a:solidFill>
-                <a:latin typeface="Montserrat"/>
-              </a:rPr>
-              <a:t>▸  </a:t>
-            </a:r>
-            <a:r>
-              <a:rPr sz="1600" b="0" i="0">
-                <a:solidFill>
-                  <a:srgbClr val="1B2330"/>
-                </a:solidFill>
-                <a:latin typeface="Montserrat"/>
-              </a:rPr>
-              <a:t>CTP: conjunta resistencia y estanquidad</a:t>
-            </a:r>
-          </a:p>
-        </p:txBody>
-      </p:sp>
-      <p:sp>
-        <p:nvSpPr>
-          <p:cNvPr id="9" name="imgph" descr="IMGQ:pressure test gauge on gas pipe installation"/>
+            <a:r>
+              <a:rPr sz="2400" b="1" i="0">
+                <a:solidFill>
+                  <a:srgbClr val="FFFFFF"/>
+                </a:solidFill>
+                <a:latin typeface="Montserrat"/>
+              </a:rPr>
+              <a:t>⚡  PREGUNTA RÁPIDA</a:t>
+            </a:r>
+          </a:p>
+        </p:txBody>
+      </p:sp>
+      <p:sp>
+        <p:nvSpPr>
+          <p:cNvPr id="7" name="TextBox 6"/>
+          <p:cNvSpPr txBox="1"/>
+          <p:nvPr/>
+        </p:nvSpPr>
+        <p:spPr>
+          <a:xfrm>
+            <a:off x="822960" y="1508760"/>
+            <a:ext cx="10515600" cy="1371600"/>
+          </a:xfrm>
+          <a:prstGeom prst="rect">
+            <a:avLst/>
+          </a:prstGeom>
+          <a:noFill/>
+        </p:spPr>
+        <p:txBody>
+          <a:bodyPr wrap="square">
+            <a:spAutoFit/>
+          </a:bodyPr>
+          <a:lstStyle/>
+          <a:p>
+            <a:r>
+              <a:rPr sz="2400" b="1" i="0">
+                <a:solidFill>
+                  <a:srgbClr val="1E2761"/>
+                </a:solidFill>
+                <a:latin typeface="Montserrat"/>
+              </a:rPr>
+              <a:t>¿Qué presión es la máxima a la que la instalación puede estar sometida de forma continuada?</a:t>
+            </a:r>
+          </a:p>
+        </p:txBody>
+      </p:sp>
+      <p:sp>
+        <p:nvSpPr>
+          <p:cNvPr id="8" name="Rounded Rectangle 7"/>
           <p:cNvSpPr/>
           <p:nvPr/>
         </p:nvSpPr>
         <p:spPr>
           <a:xfrm>
-            <a:off x="5806440" y="1051560"/>
-            <a:ext cx="5298947" cy="4629150"/>
+            <a:off x="822960" y="3291840"/>
+            <a:ext cx="4983480" cy="1143000"/>
           </a:xfrm>
           <a:prstGeom prst="roundRect">
             <a:avLst/>
@@ -7026,14 +7407,58 @@
       </p:sp>
       <p:sp>
         <p:nvSpPr>
+          <p:cNvPr id="9" name="Rectangle 8"/>
+          <p:cNvSpPr/>
+          <p:nvPr/>
+        </p:nvSpPr>
+        <p:spPr>
+          <a:xfrm>
+            <a:off x="822960" y="3291840"/>
+            <a:ext cx="640080" cy="1143000"/>
+          </a:xfrm>
+          <a:prstGeom prst="rect">
+            <a:avLst/>
+          </a:prstGeom>
+          <a:solidFill>
+            <a:srgbClr val="1E2761"/>
+          </a:solidFill>
+          <a:ln>
+            <a:noFill/>
+          </a:ln>
+          <a:effectLst/>
+        </p:spPr>
+        <p:style>
+          <a:lnRef idx="1">
+            <a:schemeClr val="accent1"/>
+          </a:lnRef>
+          <a:fillRef idx="3">
+            <a:schemeClr val="accent1"/>
+          </a:fillRef>
+          <a:effectRef idx="2">
+            <a:schemeClr val="accent1"/>
+          </a:effectRef>
+          <a:fontRef idx="minor">
+            <a:schemeClr val="lt1"/>
+          </a:fontRef>
+        </p:style>
+        <p:txBody>
+          <a:bodyPr rtlCol="0" anchor="ctr"/>
+          <a:lstStyle/>
+          <a:p>
+            <a:pPr algn="ctr"/>
+          </a:p>
+        </p:txBody>
+      </p:sp>
+      <p:sp>
+        <p:nvSpPr>
           <p:cNvPr id="10" name="TextBox 9"/>
           <p:cNvSpPr txBox="1"/>
           <p:nvPr/>
         </p:nvSpPr>
         <p:spPr>
           <a:xfrm>
-            <a:off x="6080760" y="2726055"/>
-            <a:ext cx="4750307" cy="1280160"/>
+            <a:off x="822960" y="3611880"/>
+            <a:ext cx="640080" cy="548640"/>
           </a:xfrm>
           <a:prstGeom prst="rect">
             <a:avLst/>
@@ -7048,25 +7473,524 @@
           <a:p>
             <a:pPr algn="ctr"/>
             <a:r>
-              <a:rPr sz="1400" b="1" i="0">
-                <a:solidFill>
-                  <a:srgbClr val="64748B"/>
-                </a:solidFill>
-                <a:latin typeface="Montserrat"/>
-              </a:rPr>
-              <a:t>IMAGEN REALISTA</a:t>
-            </a:r>
-          </a:p>
+              <a:rPr sz="2200" b="1" i="0">
+                <a:solidFill>
+                  <a:srgbClr val="FFFFFF"/>
+                </a:solidFill>
+                <a:latin typeface="Montserrat"/>
+              </a:rPr>
+              <a:t>A</a:t>
+            </a:r>
+          </a:p>
+        </p:txBody>
+      </p:sp>
+      <p:sp>
+        <p:nvSpPr>
+          <p:cNvPr id="11" name="TextBox 10"/>
+          <p:cNvSpPr txBox="1"/>
+          <p:nvPr/>
+        </p:nvSpPr>
+        <p:spPr>
+          <a:xfrm>
+            <a:off x="1600200" y="3474720"/>
+            <a:ext cx="4114800" cy="868680"/>
+          </a:xfrm>
+          <a:prstGeom prst="rect">
+            <a:avLst/>
+          </a:prstGeom>
+          <a:noFill/>
+        </p:spPr>
+        <p:txBody>
+          <a:bodyPr wrap="square">
+            <a:spAutoFit/>
+          </a:bodyPr>
+          <a:lstStyle/>
+          <a:p>
+            <a:r>
+              <a:rPr sz="1400" b="0" i="0">
+                <a:solidFill>
+                  <a:srgbClr val="1B2330"/>
+                </a:solidFill>
+                <a:latin typeface="Montserrat"/>
+              </a:rPr>
+              <a:t>MIP</a:t>
+            </a:r>
+          </a:p>
+        </p:txBody>
+      </p:sp>
+      <p:sp>
+        <p:nvSpPr>
+          <p:cNvPr id="12" name="Rounded Rectangle 11"/>
+          <p:cNvSpPr/>
+          <p:nvPr/>
+        </p:nvSpPr>
+        <p:spPr>
+          <a:xfrm>
+            <a:off x="6355080" y="3291840"/>
+            <a:ext cx="4983480" cy="1143000"/>
+          </a:xfrm>
+          <a:prstGeom prst="roundRect">
+            <a:avLst/>
+          </a:prstGeom>
+          <a:solidFill>
+            <a:srgbClr val="F3F6FB"/>
+          </a:solidFill>
+          <a:ln w="12700">
+            <a:solidFill>
+              <a:srgbClr val="C7D2E6"/>
+            </a:solidFill>
+          </a:ln>
+          <a:effectLst/>
+        </p:spPr>
+        <p:style>
+          <a:lnRef idx="1">
+            <a:schemeClr val="accent1"/>
+          </a:lnRef>
+          <a:fillRef idx="3">
+            <a:schemeClr val="accent1"/>
+          </a:fillRef>
+          <a:effectRef idx="2">
+            <a:schemeClr val="accent1"/>
+          </a:effectRef>
+          <a:fontRef idx="minor">
+            <a:schemeClr val="lt1"/>
+          </a:fontRef>
+        </p:style>
+        <p:txBody>
+          <a:bodyPr rtlCol="0" anchor="ctr"/>
+          <a:lstStyle/>
           <a:p>
             <a:pPr algn="ctr"/>
-            <a:r>
-              <a:rPr sz="1100" b="0" i="1">
-                <a:solidFill>
-                  <a:srgbClr val="64748B"/>
-                </a:solidFill>
-                <a:latin typeface="Montserrat"/>
-              </a:rPr>
-              <a:t>pressure test gauge on gas pipe installation</a:t>
+          </a:p>
+        </p:txBody>
+      </p:sp>
+      <p:sp>
+        <p:nvSpPr>
+          <p:cNvPr id="13" name="Rectangle 12"/>
+          <p:cNvSpPr/>
+          <p:nvPr/>
+        </p:nvSpPr>
+        <p:spPr>
+          <a:xfrm>
+            <a:off x="6355080" y="3291840"/>
+            <a:ext cx="640080" cy="1143000"/>
+          </a:xfrm>
+          <a:prstGeom prst="rect">
+            <a:avLst/>
+          </a:prstGeom>
+          <a:solidFill>
+            <a:srgbClr val="1E2761"/>
+          </a:solidFill>
+          <a:ln>
+            <a:noFill/>
+          </a:ln>
+          <a:effectLst/>
+        </p:spPr>
+        <p:style>
+          <a:lnRef idx="1">
+            <a:schemeClr val="accent1"/>
+          </a:lnRef>
+          <a:fillRef idx="3">
+            <a:schemeClr val="accent1"/>
+          </a:fillRef>
+          <a:effectRef idx="2">
+            <a:schemeClr val="accent1"/>
+          </a:effectRef>
+          <a:fontRef idx="minor">
+            <a:schemeClr val="lt1"/>
+          </a:fontRef>
+        </p:style>
+        <p:txBody>
+          <a:bodyPr rtlCol="0" anchor="ctr"/>
+          <a:lstStyle/>
+          <a:p>
+            <a:pPr algn="ctr"/>
+          </a:p>
+        </p:txBody>
+      </p:sp>
+      <p:sp>
+        <p:nvSpPr>
+          <p:cNvPr id="14" name="TextBox 13"/>
+          <p:cNvSpPr txBox="1"/>
+          <p:nvPr/>
+        </p:nvSpPr>
+        <p:spPr>
+          <a:xfrm>
+            <a:off x="6355080" y="3611880"/>
+            <a:ext cx="640080" cy="548640"/>
+          </a:xfrm>
+          <a:prstGeom prst="rect">
+            <a:avLst/>
+          </a:prstGeom>
+          <a:noFill/>
+        </p:spPr>
+        <p:txBody>
+          <a:bodyPr wrap="square">
+            <a:spAutoFit/>
+          </a:bodyPr>
+          <a:lstStyle/>
+          <a:p>
+            <a:pPr algn="ctr"/>
+            <a:r>
+              <a:rPr sz="2200" b="1" i="0">
+                <a:solidFill>
+                  <a:srgbClr val="FFFFFF"/>
+                </a:solidFill>
+                <a:latin typeface="Montserrat"/>
+              </a:rPr>
+              <a:t>B</a:t>
+            </a:r>
+          </a:p>
+        </p:txBody>
+      </p:sp>
+      <p:sp>
+        <p:nvSpPr>
+          <p:cNvPr id="15" name="TextBox 14"/>
+          <p:cNvSpPr txBox="1"/>
+          <p:nvPr/>
+        </p:nvSpPr>
+        <p:spPr>
+          <a:xfrm>
+            <a:off x="7132320" y="3474720"/>
+            <a:ext cx="4114800" cy="868680"/>
+          </a:xfrm>
+          <a:prstGeom prst="rect">
+            <a:avLst/>
+          </a:prstGeom>
+          <a:noFill/>
+        </p:spPr>
+        <p:txBody>
+          <a:bodyPr wrap="square">
+            <a:spAutoFit/>
+          </a:bodyPr>
+          <a:lstStyle/>
+          <a:p>
+            <a:r>
+              <a:rPr sz="1400" b="0" i="0">
+                <a:solidFill>
+                  <a:srgbClr val="1B2330"/>
+                </a:solidFill>
+                <a:latin typeface="Montserrat"/>
+              </a:rPr>
+              <a:t>TOP</a:t>
+            </a:r>
+          </a:p>
+        </p:txBody>
+      </p:sp>
+      <p:sp>
+        <p:nvSpPr>
+          <p:cNvPr id="16" name="Rounded Rectangle 15"/>
+          <p:cNvSpPr/>
+          <p:nvPr/>
+        </p:nvSpPr>
+        <p:spPr>
+          <a:xfrm>
+            <a:off x="822960" y="4617720"/>
+            <a:ext cx="4983480" cy="1143000"/>
+          </a:xfrm>
+          <a:prstGeom prst="roundRect">
+            <a:avLst/>
+          </a:prstGeom>
+          <a:solidFill>
+            <a:srgbClr val="F3F6FB"/>
+          </a:solidFill>
+          <a:ln w="12700">
+            <a:solidFill>
+              <a:srgbClr val="C7D2E6"/>
+            </a:solidFill>
+          </a:ln>
+          <a:effectLst/>
+        </p:spPr>
+        <p:style>
+          <a:lnRef idx="1">
+            <a:schemeClr val="accent1"/>
+          </a:lnRef>
+          <a:fillRef idx="3">
+            <a:schemeClr val="accent1"/>
+          </a:fillRef>
+          <a:effectRef idx="2">
+            <a:schemeClr val="accent1"/>
+          </a:effectRef>
+          <a:fontRef idx="minor">
+            <a:schemeClr val="lt1"/>
+          </a:fontRef>
+        </p:style>
+        <p:txBody>
+          <a:bodyPr rtlCol="0" anchor="ctr"/>
+          <a:lstStyle/>
+          <a:p>
+            <a:pPr algn="ctr"/>
+          </a:p>
+        </p:txBody>
+      </p:sp>
+      <p:sp>
+        <p:nvSpPr>
+          <p:cNvPr id="17" name="Rectangle 16"/>
+          <p:cNvSpPr/>
+          <p:nvPr/>
+        </p:nvSpPr>
+        <p:spPr>
+          <a:xfrm>
+            <a:off x="822960" y="4617720"/>
+            <a:ext cx="640080" cy="1143000"/>
+          </a:xfrm>
+          <a:prstGeom prst="rect">
+            <a:avLst/>
+          </a:prstGeom>
+          <a:solidFill>
+            <a:srgbClr val="1E2761"/>
+          </a:solidFill>
+          <a:ln>
+            <a:noFill/>
+          </a:ln>
+          <a:effectLst/>
+        </p:spPr>
+        <p:style>
+          <a:lnRef idx="1">
+            <a:schemeClr val="accent1"/>
+          </a:lnRef>
+          <a:fillRef idx="3">
+            <a:schemeClr val="accent1"/>
+          </a:fillRef>
+          <a:effectRef idx="2">
+            <a:schemeClr val="accent1"/>
+          </a:effectRef>
+          <a:fontRef idx="minor">
+            <a:schemeClr val="lt1"/>
+          </a:fontRef>
+        </p:style>
+        <p:txBody>
+          <a:bodyPr rtlCol="0" anchor="ctr"/>
+          <a:lstStyle/>
+          <a:p>
+            <a:pPr algn="ctr"/>
+          </a:p>
+        </p:txBody>
+      </p:sp>
+      <p:sp>
+        <p:nvSpPr>
+          <p:cNvPr id="18" name="TextBox 17"/>
+          <p:cNvSpPr txBox="1"/>
+          <p:nvPr/>
+        </p:nvSpPr>
+        <p:spPr>
+          <a:xfrm>
+            <a:off x="822960" y="4937760"/>
+            <a:ext cx="640080" cy="548640"/>
+          </a:xfrm>
+          <a:prstGeom prst="rect">
+            <a:avLst/>
+          </a:prstGeom>
+          <a:noFill/>
+        </p:spPr>
+        <p:txBody>
+          <a:bodyPr wrap="square">
+            <a:spAutoFit/>
+          </a:bodyPr>
+          <a:lstStyle/>
+          <a:p>
+            <a:pPr algn="ctr"/>
+            <a:r>
+              <a:rPr sz="2200" b="1" i="0">
+                <a:solidFill>
+                  <a:srgbClr val="FFFFFF"/>
+                </a:solidFill>
+                <a:latin typeface="Montserrat"/>
+              </a:rPr>
+              <a:t>C</a:t>
+            </a:r>
+          </a:p>
+        </p:txBody>
+      </p:sp>
+      <p:sp>
+        <p:nvSpPr>
+          <p:cNvPr id="19" name="TextBox 18"/>
+          <p:cNvSpPr txBox="1"/>
+          <p:nvPr/>
+        </p:nvSpPr>
+        <p:spPr>
+          <a:xfrm>
+            <a:off x="1600200" y="4800600"/>
+            <a:ext cx="4114800" cy="868680"/>
+          </a:xfrm>
+          <a:prstGeom prst="rect">
+            <a:avLst/>
+          </a:prstGeom>
+          <a:noFill/>
+        </p:spPr>
+        <p:txBody>
+          <a:bodyPr wrap="square">
+            <a:spAutoFit/>
+          </a:bodyPr>
+          <a:lstStyle/>
+          <a:p>
+            <a:r>
+              <a:rPr sz="1400" b="0" i="0">
+                <a:solidFill>
+                  <a:srgbClr val="1B2330"/>
+                </a:solidFill>
+                <a:latin typeface="Montserrat"/>
+              </a:rPr>
+              <a:t>OP</a:t>
+            </a:r>
+          </a:p>
+        </p:txBody>
+      </p:sp>
+      <p:sp>
+        <p:nvSpPr>
+          <p:cNvPr id="20" name="Rounded Rectangle 19"/>
+          <p:cNvSpPr/>
+          <p:nvPr/>
+        </p:nvSpPr>
+        <p:spPr>
+          <a:xfrm>
+            <a:off x="6355080" y="4617720"/>
+            <a:ext cx="4983480" cy="1143000"/>
+          </a:xfrm>
+          <a:prstGeom prst="roundRect">
+            <a:avLst/>
+          </a:prstGeom>
+          <a:solidFill>
+            <a:srgbClr val="F3F6FB"/>
+          </a:solidFill>
+          <a:ln w="12700">
+            <a:solidFill>
+              <a:srgbClr val="C7D2E6"/>
+            </a:solidFill>
+          </a:ln>
+          <a:effectLst/>
+        </p:spPr>
+        <p:style>
+          <a:lnRef idx="1">
+            <a:schemeClr val="accent1"/>
+          </a:lnRef>
+          <a:fillRef idx="3">
+            <a:schemeClr val="accent1"/>
+          </a:fillRef>
+          <a:effectRef idx="2">
+            <a:schemeClr val="accent1"/>
+          </a:effectRef>
+          <a:fontRef idx="minor">
+            <a:schemeClr val="lt1"/>
+          </a:fontRef>
+        </p:style>
+        <p:txBody>
+          <a:bodyPr rtlCol="0" anchor="ctr"/>
+          <a:lstStyle/>
+          <a:p>
+            <a:pPr algn="ctr"/>
+          </a:p>
+        </p:txBody>
+      </p:sp>
+      <p:sp>
+        <p:nvSpPr>
+          <p:cNvPr id="21" name="Rectangle 20"/>
+          <p:cNvSpPr/>
+          <p:nvPr/>
+        </p:nvSpPr>
+        <p:spPr>
+          <a:xfrm>
+            <a:off x="6355080" y="4617720"/>
+            <a:ext cx="640080" cy="1143000"/>
+          </a:xfrm>
+          <a:prstGeom prst="rect">
+            <a:avLst/>
+          </a:prstGeom>
+          <a:solidFill>
+            <a:srgbClr val="1E2761"/>
+          </a:solidFill>
+          <a:ln>
+            <a:noFill/>
+          </a:ln>
+          <a:effectLst/>
+        </p:spPr>
+        <p:style>
+          <a:lnRef idx="1">
+            <a:schemeClr val="accent1"/>
+          </a:lnRef>
+          <a:fillRef idx="3">
+            <a:schemeClr val="accent1"/>
+          </a:fillRef>
+          <a:effectRef idx="2">
+            <a:schemeClr val="accent1"/>
+          </a:effectRef>
+          <a:fontRef idx="minor">
+            <a:schemeClr val="lt1"/>
+          </a:fontRef>
+        </p:style>
+        <p:txBody>
+          <a:bodyPr rtlCol="0" anchor="ctr"/>
+          <a:lstStyle/>
+          <a:p>
+            <a:pPr algn="ctr"/>
+          </a:p>
+        </p:txBody>
+      </p:sp>
+      <p:sp>
+        <p:nvSpPr>
+          <p:cNvPr id="22" name="TextBox 21"/>
+          <p:cNvSpPr txBox="1"/>
+          <p:nvPr/>
+        </p:nvSpPr>
+        <p:spPr>
+          <a:xfrm>
+            <a:off x="6355080" y="4937760"/>
+            <a:ext cx="640080" cy="548640"/>
+          </a:xfrm>
+          <a:prstGeom prst="rect">
+            <a:avLst/>
+          </a:prstGeom>
+          <a:noFill/>
+        </p:spPr>
+        <p:txBody>
+          <a:bodyPr wrap="square">
+            <a:spAutoFit/>
+          </a:bodyPr>
+          <a:lstStyle/>
+          <a:p>
+            <a:pPr algn="ctr"/>
+            <a:r>
+              <a:rPr sz="2200" b="1" i="0">
+                <a:solidFill>
+                  <a:srgbClr val="FFFFFF"/>
+                </a:solidFill>
+                <a:latin typeface="Montserrat"/>
+              </a:rPr>
+              <a:t>D</a:t>
+            </a:r>
+          </a:p>
+        </p:txBody>
+      </p:sp>
+      <p:sp>
+        <p:nvSpPr>
+          <p:cNvPr id="23" name="TextBox 22"/>
+          <p:cNvSpPr txBox="1"/>
+          <p:nvPr/>
+        </p:nvSpPr>
+        <p:spPr>
+          <a:xfrm>
+            <a:off x="7132320" y="4800600"/>
+            <a:ext cx="4114800" cy="868680"/>
+          </a:xfrm>
+          <a:prstGeom prst="rect">
+            <a:avLst/>
+          </a:prstGeom>
+          <a:noFill/>
+        </p:spPr>
+        <p:txBody>
+          <a:bodyPr wrap="square">
+            <a:spAutoFit/>
+          </a:bodyPr>
+          <a:lstStyle/>
+          <a:p>
+            <a:r>
+              <a:rPr sz="1400" b="0" i="0">
+                <a:solidFill>
+                  <a:srgbClr val="1B2330"/>
+                </a:solidFill>
+                <a:latin typeface="Montserrat"/>
+              </a:rPr>
+              <a:t>MOP</a:t>
             </a:r>
           </a:p>
         </p:txBody>
@@ -7076,6 +8000,18 @@
   <p:clrMapOvr>
     <a:masterClrMapping/>
   </p:clrMapOvr>
+  <mc:AlternateContent xmlns:mc="http://schemas.openxmlformats.org/markup-compatibility/2006">
+    <mc:Choice xmlns:p14="http://schemas.microsoft.com/office/powerpoint/2010/main" Requires="p14">
+      <p:transition spd="med" p14:dur="700">
+        <p14:cube dir="l"/>
+      </p:transition>
+    </mc:Choice>
+    <mc:Fallback>
+      <p:transition spd="med">
+        <p:push dir="l"/>
+      </p:transition>
+    </mc:Fallback>
+  </mc:AlternateContent>
 </p:sld>
 </file>
 
@@ -7163,7 +8099,7 @@
                 </a:solidFill>
                 <a:latin typeface="Montserrat"/>
               </a:rPr>
-              <a:t>014 / 021</a:t>
+              <a:t>014 / 027</a:t>
             </a:r>
           </a:p>
         </p:txBody>
@@ -7204,88 +8140,20 @@
       </p:sp>
       <p:sp>
         <p:nvSpPr>
-          <p:cNvPr id="5" name="TextBox 4"/>
-          <p:cNvSpPr txBox="1"/>
-          <p:nvPr/>
-        </p:nvSpPr>
-        <p:spPr>
-          <a:xfrm>
-            <a:off x="822960" y="457200"/>
-            <a:ext cx="10058400" cy="365760"/>
-          </a:xfrm>
-          <a:prstGeom prst="rect">
-            <a:avLst/>
-          </a:prstGeom>
-          <a:noFill/>
-        </p:spPr>
-        <p:txBody>
-          <a:bodyPr wrap="square">
-            <a:spAutoFit/>
-          </a:bodyPr>
-          <a:lstStyle/>
-          <a:p>
-            <a:r>
-              <a:rPr sz="1300" b="1" i="0">
-                <a:solidFill>
-                  <a:srgbClr val="E8801A"/>
-                </a:solidFill>
-                <a:latin typeface="Montserrat"/>
-              </a:rPr>
-              <a:t>NOTA DE LA NORMA</a:t>
-            </a:r>
-          </a:p>
-        </p:txBody>
-      </p:sp>
-      <p:sp>
-        <p:nvSpPr>
-          <p:cNvPr id="6" name="TextBox 5"/>
-          <p:cNvSpPr txBox="1"/>
-          <p:nvPr/>
-        </p:nvSpPr>
-        <p:spPr>
-          <a:xfrm>
-            <a:off x="822960" y="868680"/>
-            <a:ext cx="10515600" cy="914400"/>
-          </a:xfrm>
-          <a:prstGeom prst="rect">
-            <a:avLst/>
-          </a:prstGeom>
-          <a:noFill/>
-        </p:spPr>
-        <p:txBody>
-          <a:bodyPr wrap="square">
-            <a:spAutoFit/>
-          </a:bodyPr>
-          <a:lstStyle/>
-          <a:p>
-            <a:r>
-              <a:rPr sz="2800" b="1" i="0">
-                <a:solidFill>
-                  <a:srgbClr val="1E2761"/>
-                </a:solidFill>
-                <a:latin typeface="Montserrat"/>
-              </a:rPr>
-              <a:t>Todas las presiones son relativas</a:t>
-            </a:r>
-          </a:p>
-        </p:txBody>
-      </p:sp>
-      <p:sp>
-        <p:nvSpPr>
-          <p:cNvPr id="7" name="Rounded Rectangle 6"/>
+          <p:cNvPr id="5" name="Rectangle 4"/>
           <p:cNvSpPr/>
           <p:nvPr/>
         </p:nvSpPr>
         <p:spPr>
           <a:xfrm>
-            <a:off x="868680" y="1627632"/>
-            <a:ext cx="2011680" cy="73152"/>
-          </a:xfrm>
-          <a:prstGeom prst="roundRect">
+            <a:off x="0" y="0"/>
+            <a:ext cx="12191695" cy="1143000"/>
+          </a:xfrm>
+          <a:prstGeom prst="rect">
             <a:avLst/>
           </a:prstGeom>
           <a:solidFill>
-            <a:srgbClr val="E8801A"/>
+            <a:srgbClr val="1E8E4B"/>
           </a:solidFill>
           <a:ln>
             <a:noFill/>
@@ -7316,14 +8184,14 @@
       </p:sp>
       <p:sp>
         <p:nvSpPr>
-          <p:cNvPr id="8" name="TextBox 7"/>
+          <p:cNvPr id="6" name="TextBox 5"/>
           <p:cNvSpPr txBox="1"/>
           <p:nvPr/>
         </p:nvSpPr>
         <p:spPr>
           <a:xfrm>
-            <a:off x="822960" y="1965960"/>
-            <a:ext cx="4983480" cy="4206240"/>
+            <a:off x="822960" y="274320"/>
+            <a:ext cx="10515600" cy="640080"/>
           </a:xfrm>
           <a:prstGeom prst="rect">
             <a:avLst/>
@@ -7336,127 +8204,72 @@
           </a:bodyPr>
           <a:lstStyle/>
           <a:p>
-            <a:pPr>
-              <a:spcAft>
-                <a:spcPts val="1100"/>
-              </a:spcAft>
-            </a:pPr>
-            <a:r>
-              <a:rPr sz="1600" b="1" i="0">
-                <a:solidFill>
-                  <a:srgbClr val="E8801A"/>
-                </a:solidFill>
-                <a:latin typeface="Montserrat"/>
-              </a:rPr>
-              <a:t>▸  </a:t>
-            </a:r>
-            <a:r>
-              <a:rPr sz="1600" b="0" i="0">
-                <a:solidFill>
-                  <a:srgbClr val="1B2330"/>
-                </a:solidFill>
-                <a:latin typeface="Montserrat"/>
-              </a:rPr>
-              <a:t>Se miden sobre la atmosférica</a:t>
-            </a:r>
-          </a:p>
-          <a:p>
-            <a:pPr>
-              <a:spcAft>
-                <a:spcPts val="1100"/>
-              </a:spcAft>
-            </a:pPr>
-            <a:r>
-              <a:rPr sz="1600" b="1" i="0">
-                <a:solidFill>
-                  <a:srgbClr val="E8801A"/>
-                </a:solidFill>
-                <a:latin typeface="Montserrat"/>
-              </a:rPr>
-              <a:t>▸  </a:t>
-            </a:r>
-            <a:r>
-              <a:rPr sz="1600" b="0" i="0">
-                <a:solidFill>
-                  <a:srgbClr val="1B2330"/>
-                </a:solidFill>
-                <a:latin typeface="Montserrat"/>
-              </a:rPr>
-              <a:t>No en valor absoluto</a:t>
-            </a:r>
-          </a:p>
-          <a:p>
-            <a:pPr>
-              <a:spcAft>
-                <a:spcPts val="1100"/>
-              </a:spcAft>
-            </a:pPr>
-            <a:r>
-              <a:rPr sz="1600" b="1" i="0">
-                <a:solidFill>
-                  <a:srgbClr val="E8801A"/>
-                </a:solidFill>
-                <a:latin typeface="Montserrat"/>
-              </a:rPr>
-              <a:t>▸  </a:t>
-            </a:r>
-            <a:r>
-              <a:rPr sz="1600" b="0" i="0">
-                <a:solidFill>
-                  <a:srgbClr val="1B2330"/>
-                </a:solidFill>
-                <a:latin typeface="Montserrat"/>
-              </a:rPr>
-              <a:t>Aplica a toda la UNE 60670</a:t>
-            </a:r>
-          </a:p>
-          <a:p>
-            <a:pPr>
-              <a:spcAft>
-                <a:spcPts val="1100"/>
-              </a:spcAft>
-            </a:pPr>
-            <a:r>
-              <a:rPr sz="1600" b="1" i="0">
-                <a:solidFill>
-                  <a:srgbClr val="E8801A"/>
-                </a:solidFill>
-                <a:latin typeface="Montserrat"/>
-              </a:rPr>
-              <a:t>▸  </a:t>
-            </a:r>
-            <a:r>
-              <a:rPr sz="1600" b="0" i="0">
-                <a:solidFill>
-                  <a:srgbClr val="1B2330"/>
-                </a:solidFill>
-                <a:latin typeface="Montserrat"/>
-              </a:rPr>
-              <a:t>El manómetro ya marca en relativo</a:t>
-            </a:r>
-          </a:p>
-        </p:txBody>
-      </p:sp>
-      <p:sp>
-        <p:nvSpPr>
-          <p:cNvPr id="9" name="imgph" descr="IMGQ:analog pressure manometer close up"/>
+            <a:r>
+              <a:rPr sz="2400" b="1" i="0">
+                <a:solidFill>
+                  <a:srgbClr val="FFFFFF"/>
+                </a:solidFill>
+                <a:latin typeface="Montserrat"/>
+              </a:rPr>
+              <a:t>✔  RESPUESTA:  D</a:t>
+            </a:r>
+          </a:p>
+        </p:txBody>
+      </p:sp>
+      <p:sp>
+        <p:nvSpPr>
+          <p:cNvPr id="7" name="TextBox 6"/>
+          <p:cNvSpPr txBox="1"/>
+          <p:nvPr/>
+        </p:nvSpPr>
+        <p:spPr>
+          <a:xfrm>
+            <a:off x="822960" y="1417320"/>
+            <a:ext cx="10515600" cy="914400"/>
+          </a:xfrm>
+          <a:prstGeom prst="rect">
+            <a:avLst/>
+          </a:prstGeom>
+          <a:noFill/>
+        </p:spPr>
+        <p:txBody>
+          <a:bodyPr wrap="square">
+            <a:spAutoFit/>
+          </a:bodyPr>
+          <a:lstStyle/>
+          <a:p>
+            <a:r>
+              <a:rPr sz="1800" b="1" i="0">
+                <a:solidFill>
+                  <a:srgbClr val="64748B"/>
+                </a:solidFill>
+                <a:latin typeface="Montserrat"/>
+              </a:rPr>
+              <a:t>¿Qué presión es la máxima a la que la instalación puede estar sometida de forma continuada?</a:t>
+            </a:r>
+          </a:p>
+        </p:txBody>
+      </p:sp>
+      <p:sp>
+        <p:nvSpPr>
+          <p:cNvPr id="8" name="Rounded Rectangle 7"/>
           <p:cNvSpPr/>
           <p:nvPr/>
         </p:nvSpPr>
         <p:spPr>
           <a:xfrm>
-            <a:off x="5806440" y="1051560"/>
-            <a:ext cx="5298947" cy="4629150"/>
+            <a:off x="822960" y="2514600"/>
+            <a:ext cx="10515600" cy="914400"/>
           </a:xfrm>
           <a:prstGeom prst="roundRect">
             <a:avLst/>
           </a:prstGeom>
           <a:solidFill>
-            <a:srgbClr val="F3F6FB"/>
+            <a:srgbClr val="E9F6EE"/>
           </a:solidFill>
           <a:ln w="12700">
             <a:solidFill>
-              <a:srgbClr val="C7D2E6"/>
+              <a:srgbClr val="1E8E4B"/>
             </a:solidFill>
           </a:ln>
           <a:effectLst/>
@@ -7485,14 +8298,14 @@
       </p:sp>
       <p:sp>
         <p:nvSpPr>
-          <p:cNvPr id="10" name="TextBox 9"/>
+          <p:cNvPr id="9" name="TextBox 8"/>
           <p:cNvSpPr txBox="1"/>
           <p:nvPr/>
         </p:nvSpPr>
         <p:spPr>
           <a:xfrm>
-            <a:off x="6080760" y="2726055"/>
-            <a:ext cx="4750307" cy="1280160"/>
+            <a:off x="1097280" y="2697480"/>
+            <a:ext cx="10058400" cy="640080"/>
           </a:xfrm>
           <a:prstGeom prst="rect">
             <a:avLst/>
@@ -7505,27 +8318,66 @@
           </a:bodyPr>
           <a:lstStyle/>
           <a:p>
-            <a:pPr algn="ctr"/>
-            <a:r>
-              <a:rPr sz="1400" b="1" i="0">
-                <a:solidFill>
-                  <a:srgbClr val="64748B"/>
-                </a:solidFill>
-                <a:latin typeface="Montserrat"/>
-              </a:rPr>
-              <a:t>IMAGEN REALISTA</a:t>
-            </a:r>
-          </a:p>
-          <a:p>
-            <a:pPr algn="ctr"/>
-            <a:r>
-              <a:rPr sz="1100" b="0" i="1">
-                <a:solidFill>
-                  <a:srgbClr val="64748B"/>
-                </a:solidFill>
-                <a:latin typeface="Montserrat"/>
-              </a:rPr>
-              <a:t>analog pressure manometer close up</a:t>
+            <a:r>
+              <a:rPr sz="1800" b="1" i="0">
+                <a:solidFill>
+                  <a:srgbClr val="1E8E4B"/>
+                </a:solidFill>
+                <a:latin typeface="Montserrat"/>
+              </a:rPr>
+              <a:t>D.  </a:t>
+            </a:r>
+            <a:r>
+              <a:rPr sz="1800" b="1" i="0">
+                <a:solidFill>
+                  <a:srgbClr val="1E2761"/>
+                </a:solidFill>
+                <a:latin typeface="Montserrat"/>
+              </a:rPr>
+              <a:t>MOP</a:t>
+            </a:r>
+          </a:p>
+        </p:txBody>
+      </p:sp>
+      <p:sp>
+        <p:nvSpPr>
+          <p:cNvPr id="10" name="TextBox 9"/>
+          <p:cNvSpPr txBox="1"/>
+          <p:nvPr/>
+        </p:nvSpPr>
+        <p:spPr>
+          <a:xfrm>
+            <a:off x="822960" y="3749039"/>
+            <a:ext cx="10515600" cy="2194560"/>
+          </a:xfrm>
+          <a:prstGeom prst="rect">
+            <a:avLst/>
+          </a:prstGeom>
+          <a:noFill/>
+        </p:spPr>
+        <p:txBody>
+          <a:bodyPr wrap="square">
+            <a:spAutoFit/>
+          </a:bodyPr>
+          <a:lstStyle/>
+          <a:p>
+            <a:r>
+              <a:rPr sz="1500" b="1" i="0">
+                <a:solidFill>
+                  <a:srgbClr val="E8801A"/>
+                </a:solidFill>
+                <a:latin typeface="Montserrat"/>
+              </a:rPr>
+              <a:t>Por qué:  </a:t>
+            </a:r>
+            <a:r>
+              <a:rPr sz="1500" b="0" i="0">
+                <a:solidFill>
+                  <a:srgbClr val="1B2330"/>
+                </a:solidFill>
+                <a:latin typeface="Montserrat"/>
+              </a:rPr>
+              <a:t>La MOP es la presión máxima de operación: la máxima admitida de forma continuada en condiciones normales.</a:t>
             </a:r>
           </a:p>
         </p:txBody>
@@ -7535,6 +8387,18 @@
   <p:clrMapOvr>
     <a:masterClrMapping/>
   </p:clrMapOvr>
+  <mc:AlternateContent xmlns:mc="http://schemas.openxmlformats.org/markup-compatibility/2006">
+    <mc:Choice xmlns:p14="http://schemas.microsoft.com/office/powerpoint/2010/main" Requires="p14">
+      <p:transition spd="med" p14:dur="700">
+        <p14:cube dir="r"/>
+      </p:transition>
+    </mc:Choice>
+    <mc:Fallback>
+      <p:transition spd="med">
+        <p:push dir="r"/>
+      </p:transition>
+    </mc:Fallback>
+  </mc:AlternateContent>
 </p:sld>
 </file>
 
@@ -7622,7 +8486,7 @@
                 </a:solidFill>
                 <a:latin typeface="Montserrat"/>
               </a:rPr>
-              <a:t>015 / 021</a:t>
+              <a:t>015 / 027</a:t>
             </a:r>
           </a:p>
         </p:txBody>
@@ -7690,7 +8554,7 @@
                 </a:solidFill>
                 <a:latin typeface="Montserrat"/>
               </a:rPr>
-              <a:t>TÉRMINOS 3.95 A 3.103</a:t>
+              <a:t>TÉRMINOS 3.89 A 3.94</a:t>
             </a:r>
           </a:p>
         </p:txBody>
@@ -7724,14 +8588,14 @@
                 </a:solidFill>
                 <a:latin typeface="Montserrat"/>
               </a:rPr>
-              <a:t>Regulador, tarado y combustión</a:t>
-            </a:r>
-          </a:p>
-        </p:txBody>
-      </p:sp>
-      <p:sp>
-        <p:nvSpPr>
-          <p:cNvPr id="7" name="Rounded Rectangle 6"/>
+              <a:t>La familia de presiones (II)</a:t>
+            </a:r>
+          </a:p>
+        </p:txBody>
+      </p:sp>
+      <p:sp>
+        <p:nvSpPr>
+          <p:cNvPr id="7" name="Rectangle 6"/>
           <p:cNvSpPr/>
           <p:nvPr/>
         </p:nvSpPr>
@@ -7740,7 +8604,7 @@
             <a:off x="868680" y="1627632"/>
             <a:ext cx="2011680" cy="73152"/>
           </a:xfrm>
-          <a:prstGeom prst="roundRect">
+          <a:prstGeom prst="rect">
             <a:avLst/>
           </a:prstGeom>
           <a:solidFill>
@@ -7781,8 +8645,8 @@
         </p:nvSpPr>
         <p:spPr>
           <a:xfrm>
-            <a:off x="822960" y="1965960"/>
-            <a:ext cx="4983480" cy="4206240"/>
+            <a:off x="6355080" y="1965960"/>
+            <a:ext cx="5029200" cy="4206240"/>
           </a:xfrm>
           <a:prstGeom prst="rect">
             <a:avLst/>
@@ -7816,7 +8680,7 @@
                 </a:solidFill>
                 <a:latin typeface="Montserrat"/>
               </a:rPr>
-              <a:t>Regulador: baja la presión aguas abajo</a:t>
+              <a:t>DP diseño: fija la resistencia mecánica</a:t>
             </a:r>
           </a:p>
           <a:p>
@@ -7841,7 +8705,7 @@
                 </a:solidFill>
                 <a:latin typeface="Montserrat"/>
               </a:rPr>
-              <a:t>Presión de tarado: a la que se ajusta</a:t>
+              <a:t>Garantía: mínima a la salida de acometida</a:t>
             </a:r>
           </a:p>
           <a:p>
@@ -7866,7 +8730,7 @@
                 </a:solidFill>
                 <a:latin typeface="Montserrat"/>
               </a:rPr>
-              <a:t>Productos de combustión: gases y vapor</a:t>
+              <a:t>STP: prueba de resistencia</a:t>
             </a:r>
           </a:p>
           <a:p>
@@ -7891,21 +8755,21 @@
                 </a:solidFill>
                 <a:latin typeface="Montserrat"/>
               </a:rPr>
-              <a:t>Puerta estanca: ciega, con junta</a:t>
-            </a:r>
-          </a:p>
-        </p:txBody>
-      </p:sp>
-      <p:sp>
-        <p:nvSpPr>
-          <p:cNvPr id="9" name="imgph" descr="IMGQ:gas pressure regulator installed on wall"/>
+              <a:t>CTP: conjunta resistencia y estanquidad</a:t>
+            </a:r>
+          </a:p>
+        </p:txBody>
+      </p:sp>
+      <p:sp>
+        <p:nvSpPr>
+          <p:cNvPr id="9" name="imgph" descr="IMGQ:pressure test gauge on gas pipe installation"/>
           <p:cNvSpPr/>
           <p:nvPr/>
         </p:nvSpPr>
         <p:spPr>
           <a:xfrm>
-            <a:off x="5806440" y="1051560"/>
-            <a:ext cx="5298947" cy="4629150"/>
+            <a:off x="822960" y="1965960"/>
+            <a:ext cx="5303520" cy="4572000"/>
           </a:xfrm>
           <a:prstGeom prst="roundRect">
             <a:avLst/>
@@ -7950,8 +8814,8 @@
         </p:nvSpPr>
         <p:spPr>
           <a:xfrm>
-            <a:off x="6080760" y="2726055"/>
-            <a:ext cx="4750307" cy="1280160"/>
+            <a:off x="1097280" y="3611880"/>
+            <a:ext cx="4754880" cy="1280160"/>
           </a:xfrm>
           <a:prstGeom prst="rect">
             <a:avLst/>
@@ -7972,7 +8836,7 @@
                 </a:solidFill>
                 <a:latin typeface="Montserrat"/>
               </a:rPr>
-              <a:t>IMAGEN REALISTA</a:t>
+              <a:t>IMAGEN</a:t>
             </a:r>
           </a:p>
           <a:p>
@@ -7984,7 +8848,7 @@
                 </a:solidFill>
                 <a:latin typeface="Montserrat"/>
               </a:rPr>
-              <a:t>gas pressure regulator installed on wall</a:t>
+              <a:t>pressure test gauge on gas pipe installation</a:t>
             </a:r>
           </a:p>
         </p:txBody>
@@ -7994,6 +8858,18 @@
   <p:clrMapOvr>
     <a:masterClrMapping/>
   </p:clrMapOvr>
+  <mc:AlternateContent xmlns:mc="http://schemas.openxmlformats.org/markup-compatibility/2006">
+    <mc:Choice xmlns:p14="http://schemas.microsoft.com/office/powerpoint/2010/main" Requires="p14">
+      <p:transition spd="med" p14:dur="700">
+        <p14:cube dir="l"/>
+      </p:transition>
+    </mc:Choice>
+    <mc:Fallback>
+      <p:transition spd="med">
+        <p:push dir="l"/>
+      </p:transition>
+    </mc:Fallback>
+  </mc:AlternateContent>
 </p:sld>
 </file>
 
@@ -8081,7 +8957,7 @@
                 </a:solidFill>
                 <a:latin typeface="Montserrat"/>
               </a:rPr>
-              <a:t>016 / 021</a:t>
+              <a:t>016 / 027</a:t>
             </a:r>
           </a:p>
         </p:txBody>
@@ -8149,7 +9025,7 @@
                 </a:solidFill>
                 <a:latin typeface="Montserrat"/>
               </a:rPr>
-              <a:t>TÉRMINOS 3.104, 3.112, 3.113</a:t>
+              <a:t>NOTA DE LA NORMA</a:t>
             </a:r>
           </a:p>
         </p:txBody>
@@ -8183,14 +9059,14 @@
                 </a:solidFill>
                 <a:latin typeface="Montserrat"/>
               </a:rPr>
-              <a:t>Tiro, revoco y terminal</a:t>
-            </a:r>
-          </a:p>
-        </p:txBody>
-      </p:sp>
-      <p:sp>
-        <p:nvSpPr>
-          <p:cNvPr id="7" name="Rounded Rectangle 6"/>
+              <a:t>Todas las presiones son relativas</a:t>
+            </a:r>
+          </a:p>
+        </p:txBody>
+      </p:sp>
+      <p:sp>
+        <p:nvSpPr>
+          <p:cNvPr id="7" name="Rectangle 6"/>
           <p:cNvSpPr/>
           <p:nvPr/>
         </p:nvSpPr>
@@ -8199,7 +9075,7 @@
             <a:off x="868680" y="1627632"/>
             <a:ext cx="2011680" cy="73152"/>
           </a:xfrm>
-          <a:prstGeom prst="roundRect">
+          <a:prstGeom prst="rect">
             <a:avLst/>
           </a:prstGeom>
           <a:solidFill>
@@ -8241,7 +9117,7 @@
         <p:spPr>
           <a:xfrm>
             <a:off x="822960" y="1965960"/>
-            <a:ext cx="4983480" cy="4206240"/>
+            <a:ext cx="5029200" cy="4206240"/>
           </a:xfrm>
           <a:prstGeom prst="rect">
             <a:avLst/>
@@ -8275,7 +9151,7 @@
                 </a:solidFill>
                 <a:latin typeface="Montserrat"/>
               </a:rPr>
-              <a:t>Tiro: depresión que saca los humos</a:t>
+              <a:t>Se miden sobre la atmosférica</a:t>
             </a:r>
           </a:p>
           <a:p>
@@ -8300,7 +9176,7 @@
                 </a:solidFill>
                 <a:latin typeface="Montserrat"/>
               </a:rPr>
-              <a:t>Revoco: los humos vuelven al local</a:t>
+              <a:t>No en valor absoluto</a:t>
             </a:r>
           </a:p>
           <a:p>
@@ -8325,7 +9201,7 @@
                 </a:solidFill>
                 <a:latin typeface="Montserrat"/>
               </a:rPr>
-              <a:t>Terminal o deflector: protege del viento</a:t>
+              <a:t>Aplica a toda la UNE 60670</a:t>
             </a:r>
           </a:p>
           <a:p>
@@ -8350,21 +9226,21 @@
                 </a:solidFill>
                 <a:latin typeface="Montserrat"/>
               </a:rPr>
-              <a:t>Tiro bueno = humos fuera</a:t>
-            </a:r>
-          </a:p>
-        </p:txBody>
-      </p:sp>
-      <p:sp>
-        <p:nvSpPr>
-          <p:cNvPr id="9" name="imgph" descr="IMGQ:chimney terminal cowl on rooftop"/>
+              <a:t>El manómetro ya marca en relativo</a:t>
+            </a:r>
+          </a:p>
+        </p:txBody>
+      </p:sp>
+      <p:sp>
+        <p:nvSpPr>
+          <p:cNvPr id="9" name="imgph" descr="IMGQ:analog pressure manometer close up"/>
           <p:cNvSpPr/>
           <p:nvPr/>
         </p:nvSpPr>
         <p:spPr>
           <a:xfrm>
-            <a:off x="5806440" y="1051560"/>
-            <a:ext cx="5298947" cy="4629150"/>
+            <a:off x="6080760" y="1965960"/>
+            <a:ext cx="5303520" cy="4572000"/>
           </a:xfrm>
           <a:prstGeom prst="roundRect">
             <a:avLst/>
@@ -8409,8 +9285,8 @@
         </p:nvSpPr>
         <p:spPr>
           <a:xfrm>
-            <a:off x="6080760" y="2726055"/>
-            <a:ext cx="4750307" cy="1280160"/>
+            <a:off x="6355080" y="3611880"/>
+            <a:ext cx="4754880" cy="1280160"/>
           </a:xfrm>
           <a:prstGeom prst="rect">
             <a:avLst/>
@@ -8431,7 +9307,7 @@
                 </a:solidFill>
                 <a:latin typeface="Montserrat"/>
               </a:rPr>
-              <a:t>IMAGEN REALISTA</a:t>
+              <a:t>IMAGEN</a:t>
             </a:r>
           </a:p>
           <a:p>
@@ -8443,7 +9319,7 @@
                 </a:solidFill>
                 <a:latin typeface="Montserrat"/>
               </a:rPr>
-              <a:t>chimney terminal cowl on rooftop</a:t>
+              <a:t>analog pressure manometer close up</a:t>
             </a:r>
           </a:p>
         </p:txBody>
@@ -8453,6 +9329,18 @@
   <p:clrMapOvr>
     <a:masterClrMapping/>
   </p:clrMapOvr>
+  <mc:AlternateContent xmlns:mc="http://schemas.openxmlformats.org/markup-compatibility/2006">
+    <mc:Choice xmlns:p14="http://schemas.microsoft.com/office/powerpoint/2010/main" Requires="p14">
+      <p:transition spd="med" p14:dur="700">
+        <p14:cube dir="r"/>
+      </p:transition>
+    </mc:Choice>
+    <mc:Fallback>
+      <p:transition spd="med">
+        <p:push dir="r"/>
+      </p:transition>
+    </mc:Fallback>
+  </mc:AlternateContent>
 </p:sld>
 </file>
 
@@ -8540,7 +9428,7 @@
                 </a:solidFill>
                 <a:latin typeface="Montserrat"/>
               </a:rPr>
-              <a:t>017 / 021</a:t>
+              <a:t>017 / 027</a:t>
             </a:r>
           </a:p>
         </p:txBody>
@@ -8608,7 +9496,7 @@
                 </a:solidFill>
                 <a:latin typeface="Montserrat"/>
               </a:rPr>
-              <a:t>TÉRMINOS 3.107 Y 3.108</a:t>
+              <a:t>TÉRMINOS 3.95 A 3.103</a:t>
             </a:r>
           </a:p>
         </p:txBody>
@@ -8642,14 +9530,14 @@
                 </a:solidFill>
                 <a:latin typeface="Montserrat"/>
               </a:rPr>
-              <a:t>Shunt y shunt invertido</a:t>
-            </a:r>
-          </a:p>
-        </p:txBody>
-      </p:sp>
-      <p:sp>
-        <p:nvSpPr>
-          <p:cNvPr id="7" name="Rounded Rectangle 6"/>
+              <a:t>Regulador, tarado y combustión</a:t>
+            </a:r>
+          </a:p>
+        </p:txBody>
+      </p:sp>
+      <p:sp>
+        <p:nvSpPr>
+          <p:cNvPr id="7" name="Rectangle 6"/>
           <p:cNvSpPr/>
           <p:nvPr/>
         </p:nvSpPr>
@@ -8658,7 +9546,7 @@
             <a:off x="868680" y="1627632"/>
             <a:ext cx="2011680" cy="73152"/>
           </a:xfrm>
-          <a:prstGeom prst="roundRect">
+          <a:prstGeom prst="rect">
             <a:avLst/>
           </a:prstGeom>
           <a:solidFill>
@@ -8699,8 +9587,8 @@
         </p:nvSpPr>
         <p:spPr>
           <a:xfrm>
-            <a:off x="822960" y="1965960"/>
-            <a:ext cx="4983480" cy="4206240"/>
+            <a:off x="6355080" y="1965960"/>
+            <a:ext cx="5029200" cy="4206240"/>
           </a:xfrm>
           <a:prstGeom prst="rect">
             <a:avLst/>
@@ -8734,7 +9622,7 @@
                 </a:solidFill>
                 <a:latin typeface="Montserrat"/>
               </a:rPr>
-              <a:t>Shunt: saca humos hacia arriba (tipo B)</a:t>
+              <a:t>Regulador: baja la presión aguas abajo</a:t>
             </a:r>
           </a:p>
           <a:p>
@@ -8759,7 +9647,7 @@
                 </a:solidFill>
                 <a:latin typeface="Montserrat"/>
               </a:rPr>
-              <a:t>Shunt invertido: mete aire desde la base</a:t>
+              <a:t>Presión de tarado: a la que se ajusta</a:t>
             </a:r>
           </a:p>
           <a:p>
@@ -8784,7 +9672,7 @@
                 </a:solidFill>
                 <a:latin typeface="Montserrat"/>
               </a:rPr>
-              <a:t>Ambos verticales, con conducto auxiliar</a:t>
+              <a:t>Productos de combustión: gases y vapor</a:t>
             </a:r>
           </a:p>
           <a:p>
@@ -8809,21 +9697,21 @@
                 </a:solidFill>
                 <a:latin typeface="Montserrat"/>
               </a:rPr>
-              <a:t>Invertido = al revés = trae aire</a:t>
-            </a:r>
-          </a:p>
-        </p:txBody>
-      </p:sp>
-      <p:sp>
-        <p:nvSpPr>
-          <p:cNvPr id="9" name="imgph" descr="IMGQ:vertical shunt flue duct in building"/>
+              <a:t>Puerta estanca: ciega, con junta</a:t>
+            </a:r>
+          </a:p>
+        </p:txBody>
+      </p:sp>
+      <p:sp>
+        <p:nvSpPr>
+          <p:cNvPr id="9" name="imgph" descr="IMGQ:gas pressure regulator installed on wall"/>
           <p:cNvSpPr/>
           <p:nvPr/>
         </p:nvSpPr>
         <p:spPr>
           <a:xfrm>
-            <a:off x="5806440" y="1051560"/>
-            <a:ext cx="5298947" cy="4629150"/>
+            <a:off x="822960" y="1965960"/>
+            <a:ext cx="5303520" cy="4572000"/>
           </a:xfrm>
           <a:prstGeom prst="roundRect">
             <a:avLst/>
@@ -8868,8 +9756,8 @@
         </p:nvSpPr>
         <p:spPr>
           <a:xfrm>
-            <a:off x="6080760" y="2726055"/>
-            <a:ext cx="4750307" cy="1280160"/>
+            <a:off x="1097280" y="3611880"/>
+            <a:ext cx="4754880" cy="1280160"/>
           </a:xfrm>
           <a:prstGeom prst="rect">
             <a:avLst/>
@@ -8890,7 +9778,7 @@
                 </a:solidFill>
                 <a:latin typeface="Montserrat"/>
               </a:rPr>
-              <a:t>IMAGEN REALISTA</a:t>
+              <a:t>IMAGEN</a:t>
             </a:r>
           </a:p>
           <a:p>
@@ -8902,7 +9790,7 @@
                 </a:solidFill>
                 <a:latin typeface="Montserrat"/>
               </a:rPr>
-              <a:t>vertical shunt flue duct in building</a:t>
+              <a:t>gas pressure regulator installed on wall</a:t>
             </a:r>
           </a:p>
         </p:txBody>
@@ -8912,6 +9800,18 @@
   <p:clrMapOvr>
     <a:masterClrMapping/>
   </p:clrMapOvr>
+  <mc:AlternateContent xmlns:mc="http://schemas.openxmlformats.org/markup-compatibility/2006">
+    <mc:Choice xmlns:p14="http://schemas.microsoft.com/office/powerpoint/2010/main" Requires="p14">
+      <p:transition spd="med" p14:dur="700">
+        <p14:cube dir="l"/>
+      </p:transition>
+    </mc:Choice>
+    <mc:Fallback>
+      <p:transition spd="med">
+        <p:push dir="l"/>
+      </p:transition>
+    </mc:Fallback>
+  </mc:AlternateContent>
 </p:sld>
 </file>
 
@@ -8999,7 +9899,7 @@
                 </a:solidFill>
                 <a:latin typeface="Montserrat"/>
               </a:rPr>
-              <a:t>018 / 021</a:t>
+              <a:t>018 / 027</a:t>
             </a:r>
           </a:p>
         </p:txBody>
@@ -9067,7 +9967,7 @@
                 </a:solidFill>
                 <a:latin typeface="Montserrat"/>
               </a:rPr>
-              <a:t>TÉRMINOS 3.105 Y 3.106</a:t>
+              <a:t>TÉRMINOS 3.104, 3.112, 3.113</a:t>
             </a:r>
           </a:p>
         </p:txBody>
@@ -9101,14 +10001,14 @@
                 </a:solidFill>
                 <a:latin typeface="Montserrat"/>
               </a:rPr>
-              <a:t>Sala de máquinas y semisótano</a:t>
-            </a:r>
-          </a:p>
-        </p:txBody>
-      </p:sp>
-      <p:sp>
-        <p:nvSpPr>
-          <p:cNvPr id="7" name="Rounded Rectangle 6"/>
+              <a:t>Tiro, revoco y terminal</a:t>
+            </a:r>
+          </a:p>
+        </p:txBody>
+      </p:sp>
+      <p:sp>
+        <p:nvSpPr>
+          <p:cNvPr id="7" name="Rectangle 6"/>
           <p:cNvSpPr/>
           <p:nvPr/>
         </p:nvSpPr>
@@ -9117,7 +10017,7 @@
             <a:off x="868680" y="1627632"/>
             <a:ext cx="2011680" cy="73152"/>
           </a:xfrm>
-          <a:prstGeom prst="roundRect">
+          <a:prstGeom prst="rect">
             <a:avLst/>
           </a:prstGeom>
           <a:solidFill>
@@ -9159,7 +10059,7 @@
         <p:spPr>
           <a:xfrm>
             <a:off x="822960" y="1965960"/>
-            <a:ext cx="4983480" cy="4206240"/>
+            <a:ext cx="5029200" cy="4206240"/>
           </a:xfrm>
           <a:prstGeom prst="rect">
             <a:avLst/>
@@ -9193,7 +10093,7 @@
                 </a:solidFill>
                 <a:latin typeface="Montserrat"/>
               </a:rPr>
-              <a:t>Sala de máquinas: potencia conjunta &gt; 70 kW</a:t>
+              <a:t>Tiro: depresión que saca los humos</a:t>
             </a:r>
           </a:p>
           <a:p>
@@ -9218,7 +10118,7 @@
                 </a:solidFill>
                 <a:latin typeface="Montserrat"/>
               </a:rPr>
-              <a:t>≤ 70 kW o equipos autónomos: no lo es</a:t>
+              <a:t>Revoco: los humos vuelven al local</a:t>
             </a:r>
           </a:p>
           <a:p>
@@ -9243,7 +10143,7 @@
                 </a:solidFill>
                 <a:latin typeface="Montserrat"/>
               </a:rPr>
-              <a:t>Semisótano: suelo &gt; 60 cm bajo el exterior</a:t>
+              <a:t>Terminal o deflector: protege del viento</a:t>
             </a:r>
           </a:p>
           <a:p>
@@ -9268,21 +10168,21 @@
                 </a:solidFill>
                 <a:latin typeface="Montserrat"/>
               </a:rPr>
-              <a:t>Desaparece el primer sótano</a:t>
-            </a:r>
-          </a:p>
-        </p:txBody>
-      </p:sp>
-      <p:sp>
-        <p:nvSpPr>
-          <p:cNvPr id="9" name="imgph" descr="IMGQ:industrial boiler room with large boilers"/>
+              <a:t>Tiro bueno = humos fuera</a:t>
+            </a:r>
+          </a:p>
+        </p:txBody>
+      </p:sp>
+      <p:sp>
+        <p:nvSpPr>
+          <p:cNvPr id="9" name="imgph" descr="IMGQ:chimney terminal cowl on rooftop"/>
           <p:cNvSpPr/>
           <p:nvPr/>
         </p:nvSpPr>
         <p:spPr>
           <a:xfrm>
-            <a:off x="5806440" y="1051560"/>
-            <a:ext cx="5298947" cy="4629150"/>
+            <a:off x="6080760" y="1965960"/>
+            <a:ext cx="5303520" cy="4572000"/>
           </a:xfrm>
           <a:prstGeom prst="roundRect">
             <a:avLst/>
@@ -9327,8 +10227,8 @@
         </p:nvSpPr>
         <p:spPr>
           <a:xfrm>
-            <a:off x="6080760" y="2726055"/>
-            <a:ext cx="4750307" cy="1280160"/>
+            <a:off x="6355080" y="3611880"/>
+            <a:ext cx="4754880" cy="1280160"/>
           </a:xfrm>
           <a:prstGeom prst="rect">
             <a:avLst/>
@@ -9349,7 +10249,7 @@
                 </a:solidFill>
                 <a:latin typeface="Montserrat"/>
               </a:rPr>
-              <a:t>IMAGEN REALISTA</a:t>
+              <a:t>IMAGEN</a:t>
             </a:r>
           </a:p>
           <a:p>
@@ -9361,7 +10261,7 @@
                 </a:solidFill>
                 <a:latin typeface="Montserrat"/>
               </a:rPr>
-              <a:t>industrial boiler room with large boilers</a:t>
+              <a:t>chimney terminal cowl on rooftop</a:t>
             </a:r>
           </a:p>
         </p:txBody>
@@ -9371,6 +10271,18 @@
   <p:clrMapOvr>
     <a:masterClrMapping/>
   </p:clrMapOvr>
+  <mc:AlternateContent xmlns:mc="http://schemas.openxmlformats.org/markup-compatibility/2006">
+    <mc:Choice xmlns:p14="http://schemas.microsoft.com/office/powerpoint/2010/main" Requires="p14">
+      <p:transition spd="med" p14:dur="700">
+        <p14:cube dir="r"/>
+      </p:transition>
+    </mc:Choice>
+    <mc:Fallback>
+      <p:transition spd="med">
+        <p:push dir="r"/>
+      </p:transition>
+    </mc:Fallback>
+  </mc:AlternateContent>
 </p:sld>
 </file>
 
@@ -9458,7 +10370,7 @@
                 </a:solidFill>
                 <a:latin typeface="Montserrat"/>
               </a:rPr>
-              <a:t>019 / 021</a:t>
+              <a:t>019 / 027</a:t>
             </a:r>
           </a:p>
         </p:txBody>
@@ -9526,7 +10438,7 @@
                 </a:solidFill>
                 <a:latin typeface="Montserrat"/>
               </a:rPr>
-              <a:t>TÉRMINOS 3.109 A 3.111</a:t>
+              <a:t>TÉRMINOS 3.107 Y 3.108</a:t>
             </a:r>
           </a:p>
         </p:txBody>
@@ -9560,14 +10472,14 @@
                 </a:solidFill>
                 <a:latin typeface="Montserrat"/>
               </a:rPr>
-              <a:t>Soldadura blanda o fuerte</a:t>
-            </a:r>
-          </a:p>
-        </p:txBody>
-      </p:sp>
-      <p:sp>
-        <p:nvSpPr>
-          <p:cNvPr id="7" name="Rounded Rectangle 6"/>
+              <a:t>Shunt y shunt invertido</a:t>
+            </a:r>
+          </a:p>
+        </p:txBody>
+      </p:sp>
+      <p:sp>
+        <p:nvSpPr>
+          <p:cNvPr id="7" name="Rectangle 6"/>
           <p:cNvSpPr/>
           <p:nvPr/>
         </p:nvSpPr>
@@ -9576,7 +10488,7 @@
             <a:off x="868680" y="1627632"/>
             <a:ext cx="2011680" cy="73152"/>
           </a:xfrm>
-          <a:prstGeom prst="roundRect">
+          <a:prstGeom prst="rect">
             <a:avLst/>
           </a:prstGeom>
           <a:solidFill>
@@ -9617,8 +10529,8 @@
         </p:nvSpPr>
         <p:spPr>
           <a:xfrm>
-            <a:off x="822960" y="1965960"/>
-            <a:ext cx="4983480" cy="4206240"/>
+            <a:off x="6355080" y="1965960"/>
+            <a:ext cx="5029200" cy="4206240"/>
           </a:xfrm>
           <a:prstGeom prst="rect">
             <a:avLst/>
@@ -9652,7 +10564,7 @@
                 </a:solidFill>
                 <a:latin typeface="Montserrat"/>
               </a:rPr>
-              <a:t>Blanda: aporte funde 220 a &lt; 450 °C</a:t>
+              <a:t>Shunt: saca humos hacia arriba (tipo B)</a:t>
             </a:r>
           </a:p>
           <a:p>
@@ -9677,7 +10589,7 @@
                 </a:solidFill>
                 <a:latin typeface="Montserrat"/>
               </a:rPr>
-              <a:t>Fuerte: funde ≥ 450 °C</a:t>
+              <a:t>Shunt invertido: mete aire desde la base</a:t>
             </a:r>
           </a:p>
           <a:p>
@@ -9702,7 +10614,7 @@
                 </a:solidFill>
                 <a:latin typeface="Montserrat"/>
               </a:rPr>
-              <a:t>La frontera es 450 °C</a:t>
+              <a:t>Ambos verticales, con conducto auxiliar</a:t>
             </a:r>
           </a:p>
           <a:p>
@@ -9727,21 +10639,21 @@
                 </a:solidFill>
                 <a:latin typeface="Montserrat"/>
               </a:rPr>
-              <a:t>Tallo: paso de enterrado a aéreo</a:t>
-            </a:r>
-          </a:p>
-        </p:txBody>
-      </p:sp>
-      <p:sp>
-        <p:nvSpPr>
-          <p:cNvPr id="9" name="imgph" descr="IMGQ:brazing copper gas pipe with torch"/>
+              <a:t>Invertido = al revés = trae aire</a:t>
+            </a:r>
+          </a:p>
+        </p:txBody>
+      </p:sp>
+      <p:sp>
+        <p:nvSpPr>
+          <p:cNvPr id="9" name="imgph" descr="IMGQ:vertical shunt flue duct in building"/>
           <p:cNvSpPr/>
           <p:nvPr/>
         </p:nvSpPr>
         <p:spPr>
           <a:xfrm>
-            <a:off x="5806440" y="1051560"/>
-            <a:ext cx="5298947" cy="4629150"/>
+            <a:off x="822960" y="1965960"/>
+            <a:ext cx="5303520" cy="4572000"/>
           </a:xfrm>
           <a:prstGeom prst="roundRect">
             <a:avLst/>
@@ -9786,8 +10698,8 @@
         </p:nvSpPr>
         <p:spPr>
           <a:xfrm>
-            <a:off x="6080760" y="2726055"/>
-            <a:ext cx="4750307" cy="1280160"/>
+            <a:off x="1097280" y="3611880"/>
+            <a:ext cx="4754880" cy="1280160"/>
           </a:xfrm>
           <a:prstGeom prst="rect">
             <a:avLst/>
@@ -9808,7 +10720,7 @@
                 </a:solidFill>
                 <a:latin typeface="Montserrat"/>
               </a:rPr>
-              <a:t>IMAGEN REALISTA</a:t>
+              <a:t>IMAGEN</a:t>
             </a:r>
           </a:p>
           <a:p>
@@ -9820,7 +10732,7 @@
                 </a:solidFill>
                 <a:latin typeface="Montserrat"/>
               </a:rPr>
-              <a:t>brazing copper gas pipe with torch</a:t>
+              <a:t>vertical shunt flue duct in building</a:t>
             </a:r>
           </a:p>
         </p:txBody>
@@ -9830,6 +10742,18 @@
   <p:clrMapOvr>
     <a:masterClrMapping/>
   </p:clrMapOvr>
+  <mc:AlternateContent xmlns:mc="http://schemas.openxmlformats.org/markup-compatibility/2006">
+    <mc:Choice xmlns:p14="http://schemas.microsoft.com/office/powerpoint/2010/main" Requires="p14">
+      <p:transition spd="med" p14:dur="700">
+        <p14:cube dir="l"/>
+      </p:transition>
+    </mc:Choice>
+    <mc:Fallback>
+      <p:transition spd="med">
+        <p:push dir="l"/>
+      </p:transition>
+    </mc:Fallback>
+  </mc:AlternateContent>
 </p:sld>
 </file>
 
@@ -9917,7 +10841,7 @@
                 </a:solidFill>
                 <a:latin typeface="Montserrat"/>
               </a:rPr>
-              <a:t>002 / 021</a:t>
+              <a:t>002 / 027</a:t>
             </a:r>
           </a:p>
         </p:txBody>
@@ -9992,7 +10916,7 @@
       </p:sp>
       <p:sp>
         <p:nvSpPr>
-          <p:cNvPr id="6" name="Rounded Rectangle 5"/>
+          <p:cNvPr id="6" name="Rectangle 5"/>
           <p:cNvSpPr/>
           <p:nvPr/>
         </p:nvSpPr>
@@ -10001,7 +10925,7 @@
             <a:off x="868680" y="1234440"/>
             <a:ext cx="1463040" cy="73152"/>
           </a:xfrm>
-          <a:prstGeom prst="roundRect">
+          <a:prstGeom prst="rect">
             <a:avLst/>
           </a:prstGeom>
           <a:solidFill>
@@ -10082,14 +11006,58 @@
       </p:sp>
       <p:sp>
         <p:nvSpPr>
-          <p:cNvPr id="8" name="TextBox 7"/>
+          <p:cNvPr id="8" name="Rectangle 7"/>
+          <p:cNvSpPr/>
+          <p:nvPr/>
+        </p:nvSpPr>
+        <p:spPr>
+          <a:xfrm>
+            <a:off x="822960" y="2011680"/>
+            <a:ext cx="3017520" cy="128016"/>
+          </a:xfrm>
+          <a:prstGeom prst="rect">
+            <a:avLst/>
+          </a:prstGeom>
+          <a:solidFill>
+            <a:srgbClr val="E8801A"/>
+          </a:solidFill>
+          <a:ln>
+            <a:noFill/>
+          </a:ln>
+          <a:effectLst/>
+        </p:spPr>
+        <p:style>
+          <a:lnRef idx="1">
+            <a:schemeClr val="accent1"/>
+          </a:lnRef>
+          <a:fillRef idx="3">
+            <a:schemeClr val="accent1"/>
+          </a:fillRef>
+          <a:effectRef idx="2">
+            <a:schemeClr val="accent1"/>
+          </a:effectRef>
+          <a:fontRef idx="minor">
+            <a:schemeClr val="lt1"/>
+          </a:fontRef>
+        </p:style>
+        <p:txBody>
+          <a:bodyPr rtlCol="0" anchor="ctr"/>
+          <a:lstStyle/>
+          <a:p>
+            <a:pPr algn="ctr"/>
+          </a:p>
+        </p:txBody>
+      </p:sp>
+      <p:sp>
+        <p:nvSpPr>
+          <p:cNvPr id="9" name="TextBox 8"/>
           <p:cNvSpPr txBox="1"/>
           <p:nvPr/>
         </p:nvSpPr>
         <p:spPr>
           <a:xfrm>
-            <a:off x="822960" y="2331720"/>
-            <a:ext cx="3017520" cy="1463040"/>
+            <a:off x="822960" y="2377440"/>
+            <a:ext cx="3017520" cy="1371600"/>
           </a:xfrm>
           <a:prstGeom prst="rect">
             <a:avLst/>
@@ -10104,7 +11072,7 @@
           <a:p>
             <a:pPr algn="ctr"/>
             <a:r>
-              <a:rPr sz="6000" b="1" i="0">
+              <a:rPr sz="5800" b="1" i="0">
                 <a:solidFill>
                   <a:srgbClr val="1E2761"/>
                 </a:solidFill>
@@ -10117,13 +11085,13 @@
       </p:sp>
       <p:sp>
         <p:nvSpPr>
-          <p:cNvPr id="9" name="TextBox 8"/>
+          <p:cNvPr id="10" name="TextBox 9"/>
           <p:cNvSpPr txBox="1"/>
           <p:nvPr/>
         </p:nvSpPr>
         <p:spPr>
           <a:xfrm>
-            <a:off x="1051560" y="3611880"/>
+            <a:off x="1051560" y="3657600"/>
             <a:ext cx="2560320" cy="1005840"/>
           </a:xfrm>
           <a:prstGeom prst="rect">
@@ -10152,7 +11120,7 @@
       </p:sp>
       <p:sp>
         <p:nvSpPr>
-          <p:cNvPr id="10" name="Rounded Rectangle 9"/>
+          <p:cNvPr id="11" name="Rounded Rectangle 10"/>
           <p:cNvSpPr/>
           <p:nvPr/>
         </p:nvSpPr>
@@ -10198,14 +11166,58 @@
       </p:sp>
       <p:sp>
         <p:nvSpPr>
-          <p:cNvPr id="11" name="TextBox 10"/>
+          <p:cNvPr id="12" name="Rectangle 11"/>
+          <p:cNvSpPr/>
+          <p:nvPr/>
+        </p:nvSpPr>
+        <p:spPr>
+          <a:xfrm>
+            <a:off x="4617720" y="2011680"/>
+            <a:ext cx="3017520" cy="128016"/>
+          </a:xfrm>
+          <a:prstGeom prst="rect">
+            <a:avLst/>
+          </a:prstGeom>
+          <a:solidFill>
+            <a:srgbClr val="E8801A"/>
+          </a:solidFill>
+          <a:ln>
+            <a:noFill/>
+          </a:ln>
+          <a:effectLst/>
+        </p:spPr>
+        <p:style>
+          <a:lnRef idx="1">
+            <a:schemeClr val="accent1"/>
+          </a:lnRef>
+          <a:fillRef idx="3">
+            <a:schemeClr val="accent1"/>
+          </a:fillRef>
+          <a:effectRef idx="2">
+            <a:schemeClr val="accent1"/>
+          </a:effectRef>
+          <a:fontRef idx="minor">
+            <a:schemeClr val="lt1"/>
+          </a:fontRef>
+        </p:style>
+        <p:txBody>
+          <a:bodyPr rtlCol="0" anchor="ctr"/>
+          <a:lstStyle/>
+          <a:p>
+            <a:pPr algn="ctr"/>
+          </a:p>
+        </p:txBody>
+      </p:sp>
+      <p:sp>
+        <p:nvSpPr>
+          <p:cNvPr id="13" name="TextBox 12"/>
           <p:cNvSpPr txBox="1"/>
           <p:nvPr/>
         </p:nvSpPr>
         <p:spPr>
           <a:xfrm>
-            <a:off x="4617720" y="2331720"/>
-            <a:ext cx="3017520" cy="1463040"/>
+            <a:off x="4617720" y="2377440"/>
+            <a:ext cx="3017520" cy="1371600"/>
           </a:xfrm>
           <a:prstGeom prst="rect">
             <a:avLst/>
@@ -10220,7 +11232,7 @@
           <a:p>
             <a:pPr algn="ctr"/>
             <a:r>
-              <a:rPr sz="6000" b="1" i="0">
+              <a:rPr sz="5800" b="1" i="0">
                 <a:solidFill>
                   <a:srgbClr val="1E2761"/>
                 </a:solidFill>
@@ -10233,13 +11245,13 @@
       </p:sp>
       <p:sp>
         <p:nvSpPr>
-          <p:cNvPr id="12" name="TextBox 11"/>
+          <p:cNvPr id="14" name="TextBox 13"/>
           <p:cNvSpPr txBox="1"/>
           <p:nvPr/>
         </p:nvSpPr>
         <p:spPr>
           <a:xfrm>
-            <a:off x="4846320" y="3611880"/>
+            <a:off x="4846320" y="3657600"/>
             <a:ext cx="2560320" cy="1005840"/>
           </a:xfrm>
           <a:prstGeom prst="rect">
@@ -10268,7 +11280,7 @@
       </p:sp>
       <p:sp>
         <p:nvSpPr>
-          <p:cNvPr id="13" name="Rounded Rectangle 12"/>
+          <p:cNvPr id="15" name="Rounded Rectangle 14"/>
           <p:cNvSpPr/>
           <p:nvPr/>
         </p:nvSpPr>
@@ -10314,14 +11326,58 @@
       </p:sp>
       <p:sp>
         <p:nvSpPr>
-          <p:cNvPr id="14" name="TextBox 13"/>
+          <p:cNvPr id="16" name="Rectangle 15"/>
+          <p:cNvSpPr/>
+          <p:nvPr/>
+        </p:nvSpPr>
+        <p:spPr>
+          <a:xfrm>
+            <a:off x="8412480" y="2011680"/>
+            <a:ext cx="3017520" cy="128016"/>
+          </a:xfrm>
+          <a:prstGeom prst="rect">
+            <a:avLst/>
+          </a:prstGeom>
+          <a:solidFill>
+            <a:srgbClr val="E8801A"/>
+          </a:solidFill>
+          <a:ln>
+            <a:noFill/>
+          </a:ln>
+          <a:effectLst/>
+        </p:spPr>
+        <p:style>
+          <a:lnRef idx="1">
+            <a:schemeClr val="accent1"/>
+          </a:lnRef>
+          <a:fillRef idx="3">
+            <a:schemeClr val="accent1"/>
+          </a:fillRef>
+          <a:effectRef idx="2">
+            <a:schemeClr val="accent1"/>
+          </a:effectRef>
+          <a:fontRef idx="minor">
+            <a:schemeClr val="lt1"/>
+          </a:fontRef>
+        </p:style>
+        <p:txBody>
+          <a:bodyPr rtlCol="0" anchor="ctr"/>
+          <a:lstStyle/>
+          <a:p>
+            <a:pPr algn="ctr"/>
+          </a:p>
+        </p:txBody>
+      </p:sp>
+      <p:sp>
+        <p:nvSpPr>
+          <p:cNvPr id="17" name="TextBox 16"/>
           <p:cNvSpPr txBox="1"/>
           <p:nvPr/>
         </p:nvSpPr>
         <p:spPr>
           <a:xfrm>
-            <a:off x="8412480" y="2331720"/>
-            <a:ext cx="3017520" cy="1463040"/>
+            <a:off x="8412480" y="2377440"/>
+            <a:ext cx="3017520" cy="1371600"/>
           </a:xfrm>
           <a:prstGeom prst="rect">
             <a:avLst/>
@@ -10336,7 +11392,7 @@
           <a:p>
             <a:pPr algn="ctr"/>
             <a:r>
-              <a:rPr sz="6000" b="1" i="0">
+              <a:rPr sz="5800" b="1" i="0">
                 <a:solidFill>
                   <a:srgbClr val="1E2761"/>
                 </a:solidFill>
@@ -10349,13 +11405,13 @@
       </p:sp>
       <p:sp>
         <p:nvSpPr>
-          <p:cNvPr id="15" name="TextBox 14"/>
+          <p:cNvPr id="18" name="TextBox 17"/>
           <p:cNvSpPr txBox="1"/>
           <p:nvPr/>
         </p:nvSpPr>
         <p:spPr>
           <a:xfrm>
-            <a:off x="8641080" y="3611880"/>
+            <a:off x="8641080" y="3657600"/>
             <a:ext cx="2560320" cy="1005840"/>
           </a:xfrm>
           <a:prstGeom prst="rect">
@@ -10387,6 +11443,18 @@
   <p:clrMapOvr>
     <a:masterClrMapping/>
   </p:clrMapOvr>
+  <mc:AlternateContent xmlns:mc="http://schemas.openxmlformats.org/markup-compatibility/2006">
+    <mc:Choice xmlns:p14="http://schemas.microsoft.com/office/powerpoint/2010/main" Requires="p14">
+      <p:transition spd="med" p14:dur="700">
+        <p14:cube dir="r"/>
+      </p:transition>
+    </mc:Choice>
+    <mc:Fallback>
+      <p:transition spd="med">
+        <p:push dir="r"/>
+      </p:transition>
+    </mc:Fallback>
+  </mc:AlternateContent>
 </p:sld>
 </file>
 
@@ -10474,7 +11542,7 @@
                 </a:solidFill>
                 <a:latin typeface="Montserrat"/>
               </a:rPr>
-              <a:t>020 / 021</a:t>
+              <a:t>020 / 027</a:t>
             </a:r>
           </a:p>
         </p:txBody>
@@ -10542,7 +11610,7 @@
                 </a:solidFill>
                 <a:latin typeface="Montserrat"/>
               </a:rPr>
-              <a:t>TÉRMINOS 3.115 A 3.119</a:t>
+              <a:t>TÉRMINOS 3.105 Y 3.106</a:t>
             </a:r>
           </a:p>
         </p:txBody>
@@ -10576,14 +11644,14 @@
                 </a:solidFill>
                 <a:latin typeface="Montserrat"/>
               </a:rPr>
-              <a:t>Válvulas de seguridad</a:t>
-            </a:r>
-          </a:p>
-        </p:txBody>
-      </p:sp>
-      <p:sp>
-        <p:nvSpPr>
-          <p:cNvPr id="7" name="Rounded Rectangle 6"/>
+              <a:t>Sala de máquinas y semisótano</a:t>
+            </a:r>
+          </a:p>
+        </p:txBody>
+      </p:sp>
+      <p:sp>
+        <p:nvSpPr>
+          <p:cNvPr id="7" name="Rectangle 6"/>
           <p:cNvSpPr/>
           <p:nvPr/>
         </p:nvSpPr>
@@ -10592,7 +11660,7 @@
             <a:off x="868680" y="1627632"/>
             <a:ext cx="2011680" cy="73152"/>
           </a:xfrm>
-          <a:prstGeom prst="roundRect">
+          <a:prstGeom prst="rect">
             <a:avLst/>
           </a:prstGeom>
           <a:solidFill>
@@ -10634,7 +11702,7 @@
         <p:spPr>
           <a:xfrm>
             <a:off x="822960" y="1965960"/>
-            <a:ext cx="4983480" cy="4206240"/>
+            <a:ext cx="5029200" cy="4206240"/>
           </a:xfrm>
           <a:prstGeom prst="rect">
             <a:avLst/>
@@ -10668,7 +11736,7 @@
                 </a:solidFill>
                 <a:latin typeface="Montserrat"/>
               </a:rPr>
-              <a:t>VAS sobrepresión: alivia soltando gas</a:t>
+              <a:t>Sala de máquinas: potencia conjunta &gt; 70 kW</a:t>
             </a:r>
           </a:p>
           <a:p>
@@ -10693,7 +11761,7 @@
                 </a:solidFill>
                 <a:latin typeface="Montserrat"/>
               </a:rPr>
-              <a:t>VISmáx: corta si la presión sube</a:t>
+              <a:t>≤ 70 kW o equipos autónomos: no lo es</a:t>
             </a:r>
           </a:p>
           <a:p>
@@ -10718,7 +11786,7 @@
                 </a:solidFill>
                 <a:latin typeface="Montserrat"/>
               </a:rPr>
-              <a:t>VISmín: corta si la presión baja</a:t>
+              <a:t>Semisótano: suelo &gt; 60 cm bajo el exterior</a:t>
             </a:r>
           </a:p>
           <a:p>
@@ -10743,21 +11811,21 @@
                 </a:solidFill>
                 <a:latin typeface="Montserrat"/>
               </a:rPr>
-              <a:t>Automática: abre con energía, corta sin ella</a:t>
-            </a:r>
-          </a:p>
-        </p:txBody>
-      </p:sp>
-      <p:sp>
-        <p:nvSpPr>
-          <p:cNvPr id="9" name="imgph" descr="IMGQ:gas safety relief valve on pipeline"/>
+              <a:t>Desaparece el primer sótano</a:t>
+            </a:r>
+          </a:p>
+        </p:txBody>
+      </p:sp>
+      <p:sp>
+        <p:nvSpPr>
+          <p:cNvPr id="9" name="imgph" descr="IMGQ:industrial boiler room with large boilers"/>
           <p:cNvSpPr/>
           <p:nvPr/>
         </p:nvSpPr>
         <p:spPr>
           <a:xfrm>
-            <a:off x="5806440" y="1051560"/>
-            <a:ext cx="5298947" cy="4629150"/>
+            <a:off x="6080760" y="1965960"/>
+            <a:ext cx="5303520" cy="4572000"/>
           </a:xfrm>
           <a:prstGeom prst="roundRect">
             <a:avLst/>
@@ -10802,8 +11870,8 @@
         </p:nvSpPr>
         <p:spPr>
           <a:xfrm>
-            <a:off x="6080760" y="2726055"/>
-            <a:ext cx="4750307" cy="1280160"/>
+            <a:off x="6355080" y="3611880"/>
+            <a:ext cx="4754880" cy="1280160"/>
           </a:xfrm>
           <a:prstGeom prst="rect">
             <a:avLst/>
@@ -10824,7 +11892,7 @@
                 </a:solidFill>
                 <a:latin typeface="Montserrat"/>
               </a:rPr>
-              <a:t>IMAGEN REALISTA</a:t>
+              <a:t>IMAGEN</a:t>
             </a:r>
           </a:p>
           <a:p>
@@ -10836,7 +11904,7 @@
                 </a:solidFill>
                 <a:latin typeface="Montserrat"/>
               </a:rPr>
-              <a:t>gas safety relief valve on pipeline</a:t>
+              <a:t>industrial boiler room with large boilers</a:t>
             </a:r>
           </a:p>
         </p:txBody>
@@ -10846,6 +11914,18 @@
   <p:clrMapOvr>
     <a:masterClrMapping/>
   </p:clrMapOvr>
+  <mc:AlternateContent xmlns:mc="http://schemas.openxmlformats.org/markup-compatibility/2006">
+    <mc:Choice xmlns:p14="http://schemas.microsoft.com/office/powerpoint/2010/main" Requires="p14">
+      <p:transition spd="med" p14:dur="700">
+        <p14:cube dir="r"/>
+      </p:transition>
+    </mc:Choice>
+    <mc:Fallback>
+      <p:transition spd="med">
+        <p:push dir="r"/>
+      </p:transition>
+    </mc:Fallback>
+  </mc:AlternateContent>
 </p:sld>
 </file>
 
@@ -10874,7 +11954,7 @@
             <a:avLst/>
           </a:prstGeom>
           <a:solidFill>
-            <a:srgbClr val="1E2761"/>
+            <a:srgbClr val="FFFFFF"/>
           </a:solidFill>
           <a:ln>
             <a:noFill/>
@@ -10911,8 +11991,8 @@
         </p:nvSpPr>
         <p:spPr>
           <a:xfrm>
-            <a:off x="822960" y="640080"/>
-            <a:ext cx="10515600" cy="457200"/>
+            <a:off x="10607040" y="320040"/>
+            <a:ext cx="1371600" cy="365760"/>
           </a:xfrm>
           <a:prstGeom prst="rect">
             <a:avLst/>
@@ -10925,30 +12005,133 @@
           </a:bodyPr>
           <a:lstStyle/>
           <a:p>
-            <a:r>
-              <a:rPr sz="1400" b="1" i="0">
-                <a:solidFill>
-                  <a:srgbClr val="F4A24C"/>
-                </a:solidFill>
-                <a:latin typeface="Montserrat"/>
-              </a:rPr>
-              <a:t>LO QUE YA DOMINAS</a:t>
-            </a:r>
-          </a:p>
-        </p:txBody>
-      </p:sp>
-      <p:sp>
-        <p:nvSpPr>
-          <p:cNvPr id="4" name="Rounded Rectangle 3"/>
+            <a:pPr algn="r"/>
+            <a:r>
+              <a:rPr sz="1000" b="1" i="0">
+                <a:solidFill>
+                  <a:srgbClr val="64748B"/>
+                </a:solidFill>
+                <a:latin typeface="Montserrat"/>
+              </a:rPr>
+              <a:t>021 / 027</a:t>
+            </a:r>
+          </a:p>
+        </p:txBody>
+      </p:sp>
+      <p:sp>
+        <p:nvSpPr>
+          <p:cNvPr id="4" name="TextBox 3"/>
+          <p:cNvSpPr txBox="1"/>
+          <p:nvPr/>
+        </p:nvSpPr>
+        <p:spPr>
+          <a:xfrm>
+            <a:off x="457200" y="6419088"/>
+            <a:ext cx="8229600" cy="365760"/>
+          </a:xfrm>
+          <a:prstGeom prst="rect">
+            <a:avLst/>
+          </a:prstGeom>
+          <a:noFill/>
+        </p:spPr>
+        <p:txBody>
+          <a:bodyPr wrap="square">
+            <a:spAutoFit/>
+          </a:bodyPr>
+          <a:lstStyle/>
+          <a:p>
+            <a:r>
+              <a:rPr sz="900" b="0" i="0">
+                <a:solidFill>
+                  <a:srgbClr val="64748B"/>
+                </a:solidFill>
+                <a:latin typeface="Montserrat"/>
+              </a:rPr>
+              <a:t>Curso Gas B · Tema 09 · UNE 60670-1 y -2</a:t>
+            </a:r>
+          </a:p>
+        </p:txBody>
+      </p:sp>
+      <p:sp>
+        <p:nvSpPr>
+          <p:cNvPr id="5" name="TextBox 4"/>
+          <p:cNvSpPr txBox="1"/>
+          <p:nvPr/>
+        </p:nvSpPr>
+        <p:spPr>
+          <a:xfrm>
+            <a:off x="822960" y="457200"/>
+            <a:ext cx="10058400" cy="365760"/>
+          </a:xfrm>
+          <a:prstGeom prst="rect">
+            <a:avLst/>
+          </a:prstGeom>
+          <a:noFill/>
+        </p:spPr>
+        <p:txBody>
+          <a:bodyPr wrap="square">
+            <a:spAutoFit/>
+          </a:bodyPr>
+          <a:lstStyle/>
+          <a:p>
+            <a:r>
+              <a:rPr sz="1300" b="1" i="0">
+                <a:solidFill>
+                  <a:srgbClr val="E8801A"/>
+                </a:solidFill>
+                <a:latin typeface="Montserrat"/>
+              </a:rPr>
+              <a:t>TÉRMINOS 3.109 A 3.111</a:t>
+            </a:r>
+          </a:p>
+        </p:txBody>
+      </p:sp>
+      <p:sp>
+        <p:nvSpPr>
+          <p:cNvPr id="6" name="TextBox 5"/>
+          <p:cNvSpPr txBox="1"/>
+          <p:nvPr/>
+        </p:nvSpPr>
+        <p:spPr>
+          <a:xfrm>
+            <a:off x="822960" y="868680"/>
+            <a:ext cx="10515600" cy="914400"/>
+          </a:xfrm>
+          <a:prstGeom prst="rect">
+            <a:avLst/>
+          </a:prstGeom>
+          <a:noFill/>
+        </p:spPr>
+        <p:txBody>
+          <a:bodyPr wrap="square">
+            <a:spAutoFit/>
+          </a:bodyPr>
+          <a:lstStyle/>
+          <a:p>
+            <a:r>
+              <a:rPr sz="2800" b="1" i="0">
+                <a:solidFill>
+                  <a:srgbClr val="1E2761"/>
+                </a:solidFill>
+                <a:latin typeface="Montserrat"/>
+              </a:rPr>
+              <a:t>Soldadura blanda o fuerte</a:t>
+            </a:r>
+          </a:p>
+        </p:txBody>
+      </p:sp>
+      <p:sp>
+        <p:nvSpPr>
+          <p:cNvPr id="7" name="Rectangle 6"/>
           <p:cNvSpPr/>
           <p:nvPr/>
         </p:nvSpPr>
         <p:spPr>
           <a:xfrm>
-            <a:off x="868680" y="1051560"/>
-            <a:ext cx="1463040" cy="82296"/>
-          </a:xfrm>
-          <a:prstGeom prst="roundRect">
+            <a:off x="868680" y="1627632"/>
+            <a:ext cx="2011680" cy="73152"/>
+          </a:xfrm>
+          <a:prstGeom prst="rect">
             <a:avLst/>
           </a:prstGeom>
           <a:solidFill>
@@ -10983,14 +12166,14 @@
       </p:sp>
       <p:sp>
         <p:nvSpPr>
-          <p:cNvPr id="5" name="TextBox 4"/>
+          <p:cNvPr id="8" name="TextBox 7"/>
           <p:cNvSpPr txBox="1"/>
           <p:nvPr/>
         </p:nvSpPr>
         <p:spPr>
           <a:xfrm>
-            <a:off x="822960" y="1234440"/>
-            <a:ext cx="10515600" cy="1097280"/>
+            <a:off x="6355080" y="1965960"/>
+            <a:ext cx="5029200" cy="4206240"/>
           </a:xfrm>
           <a:prstGeom prst="rect">
             <a:avLst/>
@@ -11003,28 +12186,163 @@
           </a:bodyPr>
           <a:lstStyle/>
           <a:p>
-            <a:r>
-              <a:rPr sz="3400" b="1" i="0">
-                <a:solidFill>
-                  <a:srgbClr val="FFFFFF"/>
-                </a:solidFill>
-                <a:latin typeface="Montserrat"/>
-              </a:rPr>
-              <a:t>Ya dominas el diccionario entero</a:t>
-            </a:r>
-          </a:p>
-        </p:txBody>
-      </p:sp>
-      <p:sp>
-        <p:nvSpPr>
-          <p:cNvPr id="6" name="TextBox 5"/>
+            <a:pPr>
+              <a:spcAft>
+                <a:spcPts val="1100"/>
+              </a:spcAft>
+            </a:pPr>
+            <a:r>
+              <a:rPr sz="1600" b="1" i="0">
+                <a:solidFill>
+                  <a:srgbClr val="E8801A"/>
+                </a:solidFill>
+                <a:latin typeface="Montserrat"/>
+              </a:rPr>
+              <a:t>▸  </a:t>
+            </a:r>
+            <a:r>
+              <a:rPr sz="1600" b="0" i="0">
+                <a:solidFill>
+                  <a:srgbClr val="1B2330"/>
+                </a:solidFill>
+                <a:latin typeface="Montserrat"/>
+              </a:rPr>
+              <a:t>Blanda: aporte funde 220 a &lt; 450 °C</a:t>
+            </a:r>
+          </a:p>
+          <a:p>
+            <a:pPr>
+              <a:spcAft>
+                <a:spcPts val="1100"/>
+              </a:spcAft>
+            </a:pPr>
+            <a:r>
+              <a:rPr sz="1600" b="1" i="0">
+                <a:solidFill>
+                  <a:srgbClr val="E8801A"/>
+                </a:solidFill>
+                <a:latin typeface="Montserrat"/>
+              </a:rPr>
+              <a:t>▸  </a:t>
+            </a:r>
+            <a:r>
+              <a:rPr sz="1600" b="0" i="0">
+                <a:solidFill>
+                  <a:srgbClr val="1B2330"/>
+                </a:solidFill>
+                <a:latin typeface="Montserrat"/>
+              </a:rPr>
+              <a:t>Fuerte: funde ≥ 450 °C</a:t>
+            </a:r>
+          </a:p>
+          <a:p>
+            <a:pPr>
+              <a:spcAft>
+                <a:spcPts val="1100"/>
+              </a:spcAft>
+            </a:pPr>
+            <a:r>
+              <a:rPr sz="1600" b="1" i="0">
+                <a:solidFill>
+                  <a:srgbClr val="E8801A"/>
+                </a:solidFill>
+                <a:latin typeface="Montserrat"/>
+              </a:rPr>
+              <a:t>▸  </a:t>
+            </a:r>
+            <a:r>
+              <a:rPr sz="1600" b="0" i="0">
+                <a:solidFill>
+                  <a:srgbClr val="1B2330"/>
+                </a:solidFill>
+                <a:latin typeface="Montserrat"/>
+              </a:rPr>
+              <a:t>La frontera es 450 °C</a:t>
+            </a:r>
+          </a:p>
+          <a:p>
+            <a:pPr>
+              <a:spcAft>
+                <a:spcPts val="1100"/>
+              </a:spcAft>
+            </a:pPr>
+            <a:r>
+              <a:rPr sz="1600" b="1" i="0">
+                <a:solidFill>
+                  <a:srgbClr val="E8801A"/>
+                </a:solidFill>
+                <a:latin typeface="Montserrat"/>
+              </a:rPr>
+              <a:t>▸  </a:t>
+            </a:r>
+            <a:r>
+              <a:rPr sz="1600" b="0" i="0">
+                <a:solidFill>
+                  <a:srgbClr val="1B2330"/>
+                </a:solidFill>
+                <a:latin typeface="Montserrat"/>
+              </a:rPr>
+              <a:t>Tallo: paso de enterrado a aéreo</a:t>
+            </a:r>
+          </a:p>
+        </p:txBody>
+      </p:sp>
+      <p:sp>
+        <p:nvSpPr>
+          <p:cNvPr id="9" name="imgph" descr="IMGQ:brazing copper gas pipe with torch"/>
+          <p:cNvSpPr/>
+          <p:nvPr/>
+        </p:nvSpPr>
+        <p:spPr>
+          <a:xfrm>
+            <a:off x="822960" y="1965960"/>
+            <a:ext cx="5303520" cy="4572000"/>
+          </a:xfrm>
+          <a:prstGeom prst="roundRect">
+            <a:avLst/>
+          </a:prstGeom>
+          <a:solidFill>
+            <a:srgbClr val="F3F6FB"/>
+          </a:solidFill>
+          <a:ln w="12700">
+            <a:solidFill>
+              <a:srgbClr val="C7D2E6"/>
+            </a:solidFill>
+          </a:ln>
+          <a:effectLst/>
+        </p:spPr>
+        <p:style>
+          <a:lnRef idx="1">
+            <a:schemeClr val="accent1"/>
+          </a:lnRef>
+          <a:fillRef idx="3">
+            <a:schemeClr val="accent1"/>
+          </a:fillRef>
+          <a:effectRef idx="2">
+            <a:schemeClr val="accent1"/>
+          </a:effectRef>
+          <a:fontRef idx="minor">
+            <a:schemeClr val="lt1"/>
+          </a:fontRef>
+        </p:style>
+        <p:txBody>
+          <a:bodyPr rtlCol="0" anchor="ctr"/>
+          <a:lstStyle/>
+          <a:p>
+            <a:pPr algn="ctr"/>
+          </a:p>
+        </p:txBody>
+      </p:sp>
+      <p:sp>
+        <p:nvSpPr>
+          <p:cNvPr id="10" name="TextBox 9"/>
           <p:cNvSpPr txBox="1"/>
           <p:nvPr/>
         </p:nvSpPr>
         <p:spPr>
           <a:xfrm>
-            <a:off x="822960" y="2606040"/>
-            <a:ext cx="10515600" cy="2743200"/>
+            <a:off x="1097280" y="3611880"/>
+            <a:ext cx="4754880" cy="1280160"/>
           </a:xfrm>
           <a:prstGeom prst="rect">
             <a:avLst/>
@@ -11037,119 +12355,186 @@
           </a:bodyPr>
           <a:lstStyle/>
           <a:p>
-            <a:pPr>
-              <a:spcAft>
-                <a:spcPts val="1200"/>
-              </a:spcAft>
-            </a:pPr>
-            <a:r>
-              <a:rPr sz="2000" b="1" i="0">
-                <a:solidFill>
-                  <a:srgbClr val="F4A24C"/>
-                </a:solidFill>
-                <a:latin typeface="Montserrat"/>
-              </a:rPr>
-              <a:t>✓  </a:t>
-            </a:r>
-            <a:r>
-              <a:rPr sz="1900" b="0" i="0">
-                <a:solidFill>
-                  <a:srgbClr val="FFFFFF"/>
-                </a:solidFill>
-                <a:latin typeface="Montserrat"/>
-              </a:rPr>
-              <a:t>La familia de presiones: MOP, MIP, TOP, DP, STP, CTP</a:t>
-            </a:r>
-          </a:p>
-          <a:p>
-            <a:pPr>
-              <a:spcAft>
-                <a:spcPts val="1200"/>
-              </a:spcAft>
-            </a:pPr>
-            <a:r>
-              <a:rPr sz="2000" b="1" i="0">
-                <a:solidFill>
-                  <a:srgbClr val="F4A24C"/>
-                </a:solidFill>
-                <a:latin typeface="Montserrat"/>
-              </a:rPr>
-              <a:t>✓  </a:t>
-            </a:r>
-            <a:r>
-              <a:rPr sz="1900" b="0" i="0">
-                <a:solidFill>
-                  <a:srgbClr val="FFFFFF"/>
-                </a:solidFill>
-                <a:latin typeface="Montserrat"/>
-              </a:rPr>
-              <a:t>El árbol de llaves, de la calle al aparato</a:t>
-            </a:r>
-          </a:p>
-          <a:p>
-            <a:pPr>
-              <a:spcAft>
-                <a:spcPts val="1200"/>
-              </a:spcAft>
-            </a:pPr>
-            <a:r>
-              <a:rPr sz="2000" b="1" i="0">
-                <a:solidFill>
-                  <a:srgbClr val="F4A24C"/>
-                </a:solidFill>
-                <a:latin typeface="Montserrat"/>
-              </a:rPr>
-              <a:t>✓  </a:t>
-            </a:r>
-            <a:r>
-              <a:rPr sz="1900" b="0" i="0">
-                <a:solidFill>
-                  <a:srgbClr val="FFFFFF"/>
-                </a:solidFill>
-                <a:latin typeface="Montserrat"/>
-              </a:rPr>
-              <a:t>Tiro y revoco: dónde aparece el CO</a:t>
-            </a:r>
-          </a:p>
-          <a:p>
-            <a:pPr>
-              <a:spcAft>
-                <a:spcPts val="1200"/>
-              </a:spcAft>
-            </a:pPr>
-            <a:r>
-              <a:rPr sz="2000" b="1" i="0">
-                <a:solidFill>
-                  <a:srgbClr val="F4A24C"/>
-                </a:solidFill>
-                <a:latin typeface="Montserrat"/>
-              </a:rPr>
-              <a:t>✓  </a:t>
-            </a:r>
-            <a:r>
-              <a:rPr sz="1900" b="0" i="0">
-                <a:solidFill>
-                  <a:srgbClr val="FFFFFF"/>
-                </a:solidFill>
-                <a:latin typeface="Montserrat"/>
-              </a:rPr>
-              <a:t>70 kW, 450 °C y 60 cm decididos en obra</a:t>
-            </a:r>
-          </a:p>
-        </p:txBody>
-      </p:sp>
-      <p:sp>
-        <p:nvSpPr>
-          <p:cNvPr id="7" name="Rounded Rectangle 6"/>
+            <a:pPr algn="ctr"/>
+            <a:r>
+              <a:rPr sz="1400" b="1" i="0">
+                <a:solidFill>
+                  <a:srgbClr val="64748B"/>
+                </a:solidFill>
+                <a:latin typeface="Montserrat"/>
+              </a:rPr>
+              <a:t>IMAGEN</a:t>
+            </a:r>
+          </a:p>
+          <a:p>
+            <a:pPr algn="ctr"/>
+            <a:r>
+              <a:rPr sz="1100" b="0" i="1">
+                <a:solidFill>
+                  <a:srgbClr val="64748B"/>
+                </a:solidFill>
+                <a:latin typeface="Montserrat"/>
+              </a:rPr>
+              <a:t>brazing copper gas pipe with torch</a:t>
+            </a:r>
+          </a:p>
+        </p:txBody>
+      </p:sp>
+    </p:spTree>
+  </p:cSld>
+  <p:clrMapOvr>
+    <a:masterClrMapping/>
+  </p:clrMapOvr>
+  <mc:AlternateContent xmlns:mc="http://schemas.openxmlformats.org/markup-compatibility/2006">
+    <mc:Choice xmlns:p14="http://schemas.microsoft.com/office/powerpoint/2010/main" Requires="p14">
+      <p:transition spd="med" p14:dur="700">
+        <p14:cube dir="l"/>
+      </p:transition>
+    </mc:Choice>
+    <mc:Fallback>
+      <p:transition spd="med">
+        <p:push dir="l"/>
+      </p:transition>
+    </mc:Fallback>
+  </mc:AlternateContent>
+</p:sld>
+</file>
+
+<file path=ppt/slides/slide22.xml><?xml version="1.0" encoding="utf-8"?>
+<p:sld xmlns:a="http://schemas.openxmlformats.org/drawingml/2006/main" xmlns:p="http://schemas.openxmlformats.org/presentationml/2006/main" xmlns:r="http://schemas.openxmlformats.org/officeDocument/2006/relationships">
+  <p:cSld>
+    <p:spTree>
+      <p:nvGrpSpPr>
+        <p:cNvPr id="1" name=""/>
+        <p:cNvGrpSpPr/>
+        <p:nvPr/>
+      </p:nvGrpSpPr>
+      <p:grpSpPr/>
+      <p:sp>
+        <p:nvSpPr>
+          <p:cNvPr id="2" name="Rectangle 1"/>
           <p:cNvSpPr/>
           <p:nvPr/>
         </p:nvSpPr>
         <p:spPr>
           <a:xfrm>
-            <a:off x="822960" y="5532120"/>
-            <a:ext cx="10515600" cy="822960"/>
-          </a:xfrm>
-          <a:prstGeom prst="roundRect">
+            <a:off x="0" y="0"/>
+            <a:ext cx="12191695" cy="6858000"/>
+          </a:xfrm>
+          <a:prstGeom prst="rect">
+            <a:avLst/>
+          </a:prstGeom>
+          <a:solidFill>
+            <a:srgbClr val="FFFFFF"/>
+          </a:solidFill>
+          <a:ln>
+            <a:noFill/>
+          </a:ln>
+          <a:effectLst/>
+        </p:spPr>
+        <p:style>
+          <a:lnRef idx="1">
+            <a:schemeClr val="accent1"/>
+          </a:lnRef>
+          <a:fillRef idx="3">
+            <a:schemeClr val="accent1"/>
+          </a:fillRef>
+          <a:effectRef idx="2">
+            <a:schemeClr val="accent1"/>
+          </a:effectRef>
+          <a:fontRef idx="minor">
+            <a:schemeClr val="lt1"/>
+          </a:fontRef>
+        </p:style>
+        <p:txBody>
+          <a:bodyPr rtlCol="0" anchor="ctr"/>
+          <a:lstStyle/>
+          <a:p>
+            <a:pPr algn="ctr"/>
+          </a:p>
+        </p:txBody>
+      </p:sp>
+      <p:sp>
+        <p:nvSpPr>
+          <p:cNvPr id="3" name="TextBox 2"/>
+          <p:cNvSpPr txBox="1"/>
+          <p:nvPr/>
+        </p:nvSpPr>
+        <p:spPr>
+          <a:xfrm>
+            <a:off x="10607040" y="320040"/>
+            <a:ext cx="1371600" cy="365760"/>
+          </a:xfrm>
+          <a:prstGeom prst="rect">
+            <a:avLst/>
+          </a:prstGeom>
+          <a:noFill/>
+        </p:spPr>
+        <p:txBody>
+          <a:bodyPr wrap="square">
+            <a:spAutoFit/>
+          </a:bodyPr>
+          <a:lstStyle/>
+          <a:p>
+            <a:pPr algn="r"/>
+            <a:r>
+              <a:rPr sz="1000" b="1" i="0">
+                <a:solidFill>
+                  <a:srgbClr val="64748B"/>
+                </a:solidFill>
+                <a:latin typeface="Montserrat"/>
+              </a:rPr>
+              <a:t>022 / 027</a:t>
+            </a:r>
+          </a:p>
+        </p:txBody>
+      </p:sp>
+      <p:sp>
+        <p:nvSpPr>
+          <p:cNvPr id="4" name="TextBox 3"/>
+          <p:cNvSpPr txBox="1"/>
+          <p:nvPr/>
+        </p:nvSpPr>
+        <p:spPr>
+          <a:xfrm>
+            <a:off x="457200" y="6419088"/>
+            <a:ext cx="8229600" cy="365760"/>
+          </a:xfrm>
+          <a:prstGeom prst="rect">
+            <a:avLst/>
+          </a:prstGeom>
+          <a:noFill/>
+        </p:spPr>
+        <p:txBody>
+          <a:bodyPr wrap="square">
+            <a:spAutoFit/>
+          </a:bodyPr>
+          <a:lstStyle/>
+          <a:p>
+            <a:r>
+              <a:rPr sz="900" b="0" i="0">
+                <a:solidFill>
+                  <a:srgbClr val="64748B"/>
+                </a:solidFill>
+                <a:latin typeface="Montserrat"/>
+              </a:rPr>
+              <a:t>Curso Gas B · Tema 09 · UNE 60670-1 y -2</a:t>
+            </a:r>
+          </a:p>
+        </p:txBody>
+      </p:sp>
+      <p:sp>
+        <p:nvSpPr>
+          <p:cNvPr id="5" name="Rectangle 4"/>
+          <p:cNvSpPr/>
+          <p:nvPr/>
+        </p:nvSpPr>
+        <p:spPr>
+          <a:xfrm>
+            <a:off x="0" y="0"/>
+            <a:ext cx="12191695" cy="1143000"/>
+          </a:xfrm>
+          <a:prstGeom prst="rect">
             <a:avLst/>
           </a:prstGeom>
           <a:solidFill>
@@ -11184,14 +12569,14 @@
       </p:sp>
       <p:sp>
         <p:nvSpPr>
-          <p:cNvPr id="8" name="TextBox 7"/>
+          <p:cNvPr id="6" name="TextBox 5"/>
           <p:cNvSpPr txBox="1"/>
           <p:nvPr/>
         </p:nvSpPr>
         <p:spPr>
           <a:xfrm>
-            <a:off x="1051560" y="5623560"/>
-            <a:ext cx="10058400" cy="640080"/>
+            <a:off x="822960" y="274320"/>
+            <a:ext cx="10515600" cy="640080"/>
           </a:xfrm>
           <a:prstGeom prst="rect">
             <a:avLst/>
@@ -11205,13 +12590,683 @@
           <a:lstStyle/>
           <a:p>
             <a:r>
-              <a:rPr sz="1500" b="1" i="1">
+              <a:rPr sz="2400" b="1" i="0">
+                <a:solidFill>
+                  <a:srgbClr val="FFFFFF"/>
+                </a:solidFill>
+                <a:latin typeface="Montserrat"/>
+              </a:rPr>
+              <a:t>⚡  PREGUNTA RÁPIDA</a:t>
+            </a:r>
+          </a:p>
+        </p:txBody>
+      </p:sp>
+      <p:sp>
+        <p:nvSpPr>
+          <p:cNvPr id="7" name="TextBox 6"/>
+          <p:cNvSpPr txBox="1"/>
+          <p:nvPr/>
+        </p:nvSpPr>
+        <p:spPr>
+          <a:xfrm>
+            <a:off x="822960" y="1508760"/>
+            <a:ext cx="10515600" cy="1371600"/>
+          </a:xfrm>
+          <a:prstGeom prst="rect">
+            <a:avLst/>
+          </a:prstGeom>
+          <a:noFill/>
+        </p:spPr>
+        <p:txBody>
+          <a:bodyPr wrap="square">
+            <a:spAutoFit/>
+          </a:bodyPr>
+          <a:lstStyle/>
+          <a:p>
+            <a:r>
+              <a:rPr sz="2400" b="1" i="0">
                 <a:solidFill>
                   <a:srgbClr val="1E2761"/>
                 </a:solidFill>
                 <a:latin typeface="Montserrat"/>
               </a:rPr>
-              <a:t>Tema 09 cerrado. Ya piensas y hablas como un gasista de categoría B.</a:t>
+              <a:t>¿A partir de qué temperatura de fusión del material de aportación la soldadura es fuerte?</a:t>
+            </a:r>
+          </a:p>
+        </p:txBody>
+      </p:sp>
+      <p:sp>
+        <p:nvSpPr>
+          <p:cNvPr id="8" name="Rounded Rectangle 7"/>
+          <p:cNvSpPr/>
+          <p:nvPr/>
+        </p:nvSpPr>
+        <p:spPr>
+          <a:xfrm>
+            <a:off x="822960" y="3291840"/>
+            <a:ext cx="4983480" cy="1143000"/>
+          </a:xfrm>
+          <a:prstGeom prst="roundRect">
+            <a:avLst/>
+          </a:prstGeom>
+          <a:solidFill>
+            <a:srgbClr val="F3F6FB"/>
+          </a:solidFill>
+          <a:ln w="12700">
+            <a:solidFill>
+              <a:srgbClr val="C7D2E6"/>
+            </a:solidFill>
+          </a:ln>
+          <a:effectLst/>
+        </p:spPr>
+        <p:style>
+          <a:lnRef idx="1">
+            <a:schemeClr val="accent1"/>
+          </a:lnRef>
+          <a:fillRef idx="3">
+            <a:schemeClr val="accent1"/>
+          </a:fillRef>
+          <a:effectRef idx="2">
+            <a:schemeClr val="accent1"/>
+          </a:effectRef>
+          <a:fontRef idx="minor">
+            <a:schemeClr val="lt1"/>
+          </a:fontRef>
+        </p:style>
+        <p:txBody>
+          <a:bodyPr rtlCol="0" anchor="ctr"/>
+          <a:lstStyle/>
+          <a:p>
+            <a:pPr algn="ctr"/>
+          </a:p>
+        </p:txBody>
+      </p:sp>
+      <p:sp>
+        <p:nvSpPr>
+          <p:cNvPr id="9" name="Rectangle 8"/>
+          <p:cNvSpPr/>
+          <p:nvPr/>
+        </p:nvSpPr>
+        <p:spPr>
+          <a:xfrm>
+            <a:off x="822960" y="3291840"/>
+            <a:ext cx="640080" cy="1143000"/>
+          </a:xfrm>
+          <a:prstGeom prst="rect">
+            <a:avLst/>
+          </a:prstGeom>
+          <a:solidFill>
+            <a:srgbClr val="1E2761"/>
+          </a:solidFill>
+          <a:ln>
+            <a:noFill/>
+          </a:ln>
+          <a:effectLst/>
+        </p:spPr>
+        <p:style>
+          <a:lnRef idx="1">
+            <a:schemeClr val="accent1"/>
+          </a:lnRef>
+          <a:fillRef idx="3">
+            <a:schemeClr val="accent1"/>
+          </a:fillRef>
+          <a:effectRef idx="2">
+            <a:schemeClr val="accent1"/>
+          </a:effectRef>
+          <a:fontRef idx="minor">
+            <a:schemeClr val="lt1"/>
+          </a:fontRef>
+        </p:style>
+        <p:txBody>
+          <a:bodyPr rtlCol="0" anchor="ctr"/>
+          <a:lstStyle/>
+          <a:p>
+            <a:pPr algn="ctr"/>
+          </a:p>
+        </p:txBody>
+      </p:sp>
+      <p:sp>
+        <p:nvSpPr>
+          <p:cNvPr id="10" name="TextBox 9"/>
+          <p:cNvSpPr txBox="1"/>
+          <p:nvPr/>
+        </p:nvSpPr>
+        <p:spPr>
+          <a:xfrm>
+            <a:off x="822960" y="3611880"/>
+            <a:ext cx="640080" cy="548640"/>
+          </a:xfrm>
+          <a:prstGeom prst="rect">
+            <a:avLst/>
+          </a:prstGeom>
+          <a:noFill/>
+        </p:spPr>
+        <p:txBody>
+          <a:bodyPr wrap="square">
+            <a:spAutoFit/>
+          </a:bodyPr>
+          <a:lstStyle/>
+          <a:p>
+            <a:pPr algn="ctr"/>
+            <a:r>
+              <a:rPr sz="2200" b="1" i="0">
+                <a:solidFill>
+                  <a:srgbClr val="FFFFFF"/>
+                </a:solidFill>
+                <a:latin typeface="Montserrat"/>
+              </a:rPr>
+              <a:t>A</a:t>
+            </a:r>
+          </a:p>
+        </p:txBody>
+      </p:sp>
+      <p:sp>
+        <p:nvSpPr>
+          <p:cNvPr id="11" name="TextBox 10"/>
+          <p:cNvSpPr txBox="1"/>
+          <p:nvPr/>
+        </p:nvSpPr>
+        <p:spPr>
+          <a:xfrm>
+            <a:off x="1600200" y="3474720"/>
+            <a:ext cx="4114800" cy="868680"/>
+          </a:xfrm>
+          <a:prstGeom prst="rect">
+            <a:avLst/>
+          </a:prstGeom>
+          <a:noFill/>
+        </p:spPr>
+        <p:txBody>
+          <a:bodyPr wrap="square">
+            <a:spAutoFit/>
+          </a:bodyPr>
+          <a:lstStyle/>
+          <a:p>
+            <a:r>
+              <a:rPr sz="1400" b="0" i="0">
+                <a:solidFill>
+                  <a:srgbClr val="1B2330"/>
+                </a:solidFill>
+                <a:latin typeface="Montserrat"/>
+              </a:rPr>
+              <a:t>220 °C</a:t>
+            </a:r>
+          </a:p>
+        </p:txBody>
+      </p:sp>
+      <p:sp>
+        <p:nvSpPr>
+          <p:cNvPr id="12" name="Rounded Rectangle 11"/>
+          <p:cNvSpPr/>
+          <p:nvPr/>
+        </p:nvSpPr>
+        <p:spPr>
+          <a:xfrm>
+            <a:off x="6355080" y="3291840"/>
+            <a:ext cx="4983480" cy="1143000"/>
+          </a:xfrm>
+          <a:prstGeom prst="roundRect">
+            <a:avLst/>
+          </a:prstGeom>
+          <a:solidFill>
+            <a:srgbClr val="F3F6FB"/>
+          </a:solidFill>
+          <a:ln w="12700">
+            <a:solidFill>
+              <a:srgbClr val="C7D2E6"/>
+            </a:solidFill>
+          </a:ln>
+          <a:effectLst/>
+        </p:spPr>
+        <p:style>
+          <a:lnRef idx="1">
+            <a:schemeClr val="accent1"/>
+          </a:lnRef>
+          <a:fillRef idx="3">
+            <a:schemeClr val="accent1"/>
+          </a:fillRef>
+          <a:effectRef idx="2">
+            <a:schemeClr val="accent1"/>
+          </a:effectRef>
+          <a:fontRef idx="minor">
+            <a:schemeClr val="lt1"/>
+          </a:fontRef>
+        </p:style>
+        <p:txBody>
+          <a:bodyPr rtlCol="0" anchor="ctr"/>
+          <a:lstStyle/>
+          <a:p>
+            <a:pPr algn="ctr"/>
+          </a:p>
+        </p:txBody>
+      </p:sp>
+      <p:sp>
+        <p:nvSpPr>
+          <p:cNvPr id="13" name="Rectangle 12"/>
+          <p:cNvSpPr/>
+          <p:nvPr/>
+        </p:nvSpPr>
+        <p:spPr>
+          <a:xfrm>
+            <a:off x="6355080" y="3291840"/>
+            <a:ext cx="640080" cy="1143000"/>
+          </a:xfrm>
+          <a:prstGeom prst="rect">
+            <a:avLst/>
+          </a:prstGeom>
+          <a:solidFill>
+            <a:srgbClr val="1E2761"/>
+          </a:solidFill>
+          <a:ln>
+            <a:noFill/>
+          </a:ln>
+          <a:effectLst/>
+        </p:spPr>
+        <p:style>
+          <a:lnRef idx="1">
+            <a:schemeClr val="accent1"/>
+          </a:lnRef>
+          <a:fillRef idx="3">
+            <a:schemeClr val="accent1"/>
+          </a:fillRef>
+          <a:effectRef idx="2">
+            <a:schemeClr val="accent1"/>
+          </a:effectRef>
+          <a:fontRef idx="minor">
+            <a:schemeClr val="lt1"/>
+          </a:fontRef>
+        </p:style>
+        <p:txBody>
+          <a:bodyPr rtlCol="0" anchor="ctr"/>
+          <a:lstStyle/>
+          <a:p>
+            <a:pPr algn="ctr"/>
+          </a:p>
+        </p:txBody>
+      </p:sp>
+      <p:sp>
+        <p:nvSpPr>
+          <p:cNvPr id="14" name="TextBox 13"/>
+          <p:cNvSpPr txBox="1"/>
+          <p:nvPr/>
+        </p:nvSpPr>
+        <p:spPr>
+          <a:xfrm>
+            <a:off x="6355080" y="3611880"/>
+            <a:ext cx="640080" cy="548640"/>
+          </a:xfrm>
+          <a:prstGeom prst="rect">
+            <a:avLst/>
+          </a:prstGeom>
+          <a:noFill/>
+        </p:spPr>
+        <p:txBody>
+          <a:bodyPr wrap="square">
+            <a:spAutoFit/>
+          </a:bodyPr>
+          <a:lstStyle/>
+          <a:p>
+            <a:pPr algn="ctr"/>
+            <a:r>
+              <a:rPr sz="2200" b="1" i="0">
+                <a:solidFill>
+                  <a:srgbClr val="FFFFFF"/>
+                </a:solidFill>
+                <a:latin typeface="Montserrat"/>
+              </a:rPr>
+              <a:t>B</a:t>
+            </a:r>
+          </a:p>
+        </p:txBody>
+      </p:sp>
+      <p:sp>
+        <p:nvSpPr>
+          <p:cNvPr id="15" name="TextBox 14"/>
+          <p:cNvSpPr txBox="1"/>
+          <p:nvPr/>
+        </p:nvSpPr>
+        <p:spPr>
+          <a:xfrm>
+            <a:off x="7132320" y="3474720"/>
+            <a:ext cx="4114800" cy="868680"/>
+          </a:xfrm>
+          <a:prstGeom prst="rect">
+            <a:avLst/>
+          </a:prstGeom>
+          <a:noFill/>
+        </p:spPr>
+        <p:txBody>
+          <a:bodyPr wrap="square">
+            <a:spAutoFit/>
+          </a:bodyPr>
+          <a:lstStyle/>
+          <a:p>
+            <a:r>
+              <a:rPr sz="1400" b="0" i="0">
+                <a:solidFill>
+                  <a:srgbClr val="1B2330"/>
+                </a:solidFill>
+                <a:latin typeface="Montserrat"/>
+              </a:rPr>
+              <a:t>350 °C</a:t>
+            </a:r>
+          </a:p>
+        </p:txBody>
+      </p:sp>
+      <p:sp>
+        <p:nvSpPr>
+          <p:cNvPr id="16" name="Rounded Rectangle 15"/>
+          <p:cNvSpPr/>
+          <p:nvPr/>
+        </p:nvSpPr>
+        <p:spPr>
+          <a:xfrm>
+            <a:off x="822960" y="4617720"/>
+            <a:ext cx="4983480" cy="1143000"/>
+          </a:xfrm>
+          <a:prstGeom prst="roundRect">
+            <a:avLst/>
+          </a:prstGeom>
+          <a:solidFill>
+            <a:srgbClr val="F3F6FB"/>
+          </a:solidFill>
+          <a:ln w="12700">
+            <a:solidFill>
+              <a:srgbClr val="C7D2E6"/>
+            </a:solidFill>
+          </a:ln>
+          <a:effectLst/>
+        </p:spPr>
+        <p:style>
+          <a:lnRef idx="1">
+            <a:schemeClr val="accent1"/>
+          </a:lnRef>
+          <a:fillRef idx="3">
+            <a:schemeClr val="accent1"/>
+          </a:fillRef>
+          <a:effectRef idx="2">
+            <a:schemeClr val="accent1"/>
+          </a:effectRef>
+          <a:fontRef idx="minor">
+            <a:schemeClr val="lt1"/>
+          </a:fontRef>
+        </p:style>
+        <p:txBody>
+          <a:bodyPr rtlCol="0" anchor="ctr"/>
+          <a:lstStyle/>
+          <a:p>
+            <a:pPr algn="ctr"/>
+          </a:p>
+        </p:txBody>
+      </p:sp>
+      <p:sp>
+        <p:nvSpPr>
+          <p:cNvPr id="17" name="Rectangle 16"/>
+          <p:cNvSpPr/>
+          <p:nvPr/>
+        </p:nvSpPr>
+        <p:spPr>
+          <a:xfrm>
+            <a:off x="822960" y="4617720"/>
+            <a:ext cx="640080" cy="1143000"/>
+          </a:xfrm>
+          <a:prstGeom prst="rect">
+            <a:avLst/>
+          </a:prstGeom>
+          <a:solidFill>
+            <a:srgbClr val="1E2761"/>
+          </a:solidFill>
+          <a:ln>
+            <a:noFill/>
+          </a:ln>
+          <a:effectLst/>
+        </p:spPr>
+        <p:style>
+          <a:lnRef idx="1">
+            <a:schemeClr val="accent1"/>
+          </a:lnRef>
+          <a:fillRef idx="3">
+            <a:schemeClr val="accent1"/>
+          </a:fillRef>
+          <a:effectRef idx="2">
+            <a:schemeClr val="accent1"/>
+          </a:effectRef>
+          <a:fontRef idx="minor">
+            <a:schemeClr val="lt1"/>
+          </a:fontRef>
+        </p:style>
+        <p:txBody>
+          <a:bodyPr rtlCol="0" anchor="ctr"/>
+          <a:lstStyle/>
+          <a:p>
+            <a:pPr algn="ctr"/>
+          </a:p>
+        </p:txBody>
+      </p:sp>
+      <p:sp>
+        <p:nvSpPr>
+          <p:cNvPr id="18" name="TextBox 17"/>
+          <p:cNvSpPr txBox="1"/>
+          <p:nvPr/>
+        </p:nvSpPr>
+        <p:spPr>
+          <a:xfrm>
+            <a:off x="822960" y="4937760"/>
+            <a:ext cx="640080" cy="548640"/>
+          </a:xfrm>
+          <a:prstGeom prst="rect">
+            <a:avLst/>
+          </a:prstGeom>
+          <a:noFill/>
+        </p:spPr>
+        <p:txBody>
+          <a:bodyPr wrap="square">
+            <a:spAutoFit/>
+          </a:bodyPr>
+          <a:lstStyle/>
+          <a:p>
+            <a:pPr algn="ctr"/>
+            <a:r>
+              <a:rPr sz="2200" b="1" i="0">
+                <a:solidFill>
+                  <a:srgbClr val="FFFFFF"/>
+                </a:solidFill>
+                <a:latin typeface="Montserrat"/>
+              </a:rPr>
+              <a:t>C</a:t>
+            </a:r>
+          </a:p>
+        </p:txBody>
+      </p:sp>
+      <p:sp>
+        <p:nvSpPr>
+          <p:cNvPr id="19" name="TextBox 18"/>
+          <p:cNvSpPr txBox="1"/>
+          <p:nvPr/>
+        </p:nvSpPr>
+        <p:spPr>
+          <a:xfrm>
+            <a:off x="1600200" y="4800600"/>
+            <a:ext cx="4114800" cy="868680"/>
+          </a:xfrm>
+          <a:prstGeom prst="rect">
+            <a:avLst/>
+          </a:prstGeom>
+          <a:noFill/>
+        </p:spPr>
+        <p:txBody>
+          <a:bodyPr wrap="square">
+            <a:spAutoFit/>
+          </a:bodyPr>
+          <a:lstStyle/>
+          <a:p>
+            <a:r>
+              <a:rPr sz="1400" b="0" i="0">
+                <a:solidFill>
+                  <a:srgbClr val="1B2330"/>
+                </a:solidFill>
+                <a:latin typeface="Montserrat"/>
+              </a:rPr>
+              <a:t>450 °C</a:t>
+            </a:r>
+          </a:p>
+        </p:txBody>
+      </p:sp>
+      <p:sp>
+        <p:nvSpPr>
+          <p:cNvPr id="20" name="Rounded Rectangle 19"/>
+          <p:cNvSpPr/>
+          <p:nvPr/>
+        </p:nvSpPr>
+        <p:spPr>
+          <a:xfrm>
+            <a:off x="6355080" y="4617720"/>
+            <a:ext cx="4983480" cy="1143000"/>
+          </a:xfrm>
+          <a:prstGeom prst="roundRect">
+            <a:avLst/>
+          </a:prstGeom>
+          <a:solidFill>
+            <a:srgbClr val="F3F6FB"/>
+          </a:solidFill>
+          <a:ln w="12700">
+            <a:solidFill>
+              <a:srgbClr val="C7D2E6"/>
+            </a:solidFill>
+          </a:ln>
+          <a:effectLst/>
+        </p:spPr>
+        <p:style>
+          <a:lnRef idx="1">
+            <a:schemeClr val="accent1"/>
+          </a:lnRef>
+          <a:fillRef idx="3">
+            <a:schemeClr val="accent1"/>
+          </a:fillRef>
+          <a:effectRef idx="2">
+            <a:schemeClr val="accent1"/>
+          </a:effectRef>
+          <a:fontRef idx="minor">
+            <a:schemeClr val="lt1"/>
+          </a:fontRef>
+        </p:style>
+        <p:txBody>
+          <a:bodyPr rtlCol="0" anchor="ctr"/>
+          <a:lstStyle/>
+          <a:p>
+            <a:pPr algn="ctr"/>
+          </a:p>
+        </p:txBody>
+      </p:sp>
+      <p:sp>
+        <p:nvSpPr>
+          <p:cNvPr id="21" name="Rectangle 20"/>
+          <p:cNvSpPr/>
+          <p:nvPr/>
+        </p:nvSpPr>
+        <p:spPr>
+          <a:xfrm>
+            <a:off x="6355080" y="4617720"/>
+            <a:ext cx="640080" cy="1143000"/>
+          </a:xfrm>
+          <a:prstGeom prst="rect">
+            <a:avLst/>
+          </a:prstGeom>
+          <a:solidFill>
+            <a:srgbClr val="1E2761"/>
+          </a:solidFill>
+          <a:ln>
+            <a:noFill/>
+          </a:ln>
+          <a:effectLst/>
+        </p:spPr>
+        <p:style>
+          <a:lnRef idx="1">
+            <a:schemeClr val="accent1"/>
+          </a:lnRef>
+          <a:fillRef idx="3">
+            <a:schemeClr val="accent1"/>
+          </a:fillRef>
+          <a:effectRef idx="2">
+            <a:schemeClr val="accent1"/>
+          </a:effectRef>
+          <a:fontRef idx="minor">
+            <a:schemeClr val="lt1"/>
+          </a:fontRef>
+        </p:style>
+        <p:txBody>
+          <a:bodyPr rtlCol="0" anchor="ctr"/>
+          <a:lstStyle/>
+          <a:p>
+            <a:pPr algn="ctr"/>
+          </a:p>
+        </p:txBody>
+      </p:sp>
+      <p:sp>
+        <p:nvSpPr>
+          <p:cNvPr id="22" name="TextBox 21"/>
+          <p:cNvSpPr txBox="1"/>
+          <p:nvPr/>
+        </p:nvSpPr>
+        <p:spPr>
+          <a:xfrm>
+            <a:off x="6355080" y="4937760"/>
+            <a:ext cx="640080" cy="548640"/>
+          </a:xfrm>
+          <a:prstGeom prst="rect">
+            <a:avLst/>
+          </a:prstGeom>
+          <a:noFill/>
+        </p:spPr>
+        <p:txBody>
+          <a:bodyPr wrap="square">
+            <a:spAutoFit/>
+          </a:bodyPr>
+          <a:lstStyle/>
+          <a:p>
+            <a:pPr algn="ctr"/>
+            <a:r>
+              <a:rPr sz="2200" b="1" i="0">
+                <a:solidFill>
+                  <a:srgbClr val="FFFFFF"/>
+                </a:solidFill>
+                <a:latin typeface="Montserrat"/>
+              </a:rPr>
+              <a:t>D</a:t>
+            </a:r>
+          </a:p>
+        </p:txBody>
+      </p:sp>
+      <p:sp>
+        <p:nvSpPr>
+          <p:cNvPr id="23" name="TextBox 22"/>
+          <p:cNvSpPr txBox="1"/>
+          <p:nvPr/>
+        </p:nvSpPr>
+        <p:spPr>
+          <a:xfrm>
+            <a:off x="7132320" y="4800600"/>
+            <a:ext cx="4114800" cy="868680"/>
+          </a:xfrm>
+          <a:prstGeom prst="rect">
+            <a:avLst/>
+          </a:prstGeom>
+          <a:noFill/>
+        </p:spPr>
+        <p:txBody>
+          <a:bodyPr wrap="square">
+            <a:spAutoFit/>
+          </a:bodyPr>
+          <a:lstStyle/>
+          <a:p>
+            <a:r>
+              <a:rPr sz="1400" b="0" i="0">
+                <a:solidFill>
+                  <a:srgbClr val="1B2330"/>
+                </a:solidFill>
+                <a:latin typeface="Montserrat"/>
+              </a:rPr>
+              <a:t>600 °C</a:t>
             </a:r>
           </a:p>
         </p:txBody>
@@ -11221,6 +13276,2541 @@
   <p:clrMapOvr>
     <a:masterClrMapping/>
   </p:clrMapOvr>
+  <mc:AlternateContent xmlns:mc="http://schemas.openxmlformats.org/markup-compatibility/2006">
+    <mc:Choice xmlns:p14="http://schemas.microsoft.com/office/powerpoint/2010/main" Requires="p14">
+      <p:transition spd="med" p14:dur="700">
+        <p14:cube dir="r"/>
+      </p:transition>
+    </mc:Choice>
+    <mc:Fallback>
+      <p:transition spd="med">
+        <p:push dir="r"/>
+      </p:transition>
+    </mc:Fallback>
+  </mc:AlternateContent>
+</p:sld>
+</file>
+
+<file path=ppt/slides/slide23.xml><?xml version="1.0" encoding="utf-8"?>
+<p:sld xmlns:a="http://schemas.openxmlformats.org/drawingml/2006/main" xmlns:p="http://schemas.openxmlformats.org/presentationml/2006/main" xmlns:r="http://schemas.openxmlformats.org/officeDocument/2006/relationships">
+  <p:cSld>
+    <p:spTree>
+      <p:nvGrpSpPr>
+        <p:cNvPr id="1" name=""/>
+        <p:cNvGrpSpPr/>
+        <p:nvPr/>
+      </p:nvGrpSpPr>
+      <p:grpSpPr/>
+      <p:sp>
+        <p:nvSpPr>
+          <p:cNvPr id="2" name="Rectangle 1"/>
+          <p:cNvSpPr/>
+          <p:nvPr/>
+        </p:nvSpPr>
+        <p:spPr>
+          <a:xfrm>
+            <a:off x="0" y="0"/>
+            <a:ext cx="12191695" cy="6858000"/>
+          </a:xfrm>
+          <a:prstGeom prst="rect">
+            <a:avLst/>
+          </a:prstGeom>
+          <a:solidFill>
+            <a:srgbClr val="FFFFFF"/>
+          </a:solidFill>
+          <a:ln>
+            <a:noFill/>
+          </a:ln>
+          <a:effectLst/>
+        </p:spPr>
+        <p:style>
+          <a:lnRef idx="1">
+            <a:schemeClr val="accent1"/>
+          </a:lnRef>
+          <a:fillRef idx="3">
+            <a:schemeClr val="accent1"/>
+          </a:fillRef>
+          <a:effectRef idx="2">
+            <a:schemeClr val="accent1"/>
+          </a:effectRef>
+          <a:fontRef idx="minor">
+            <a:schemeClr val="lt1"/>
+          </a:fontRef>
+        </p:style>
+        <p:txBody>
+          <a:bodyPr rtlCol="0" anchor="ctr"/>
+          <a:lstStyle/>
+          <a:p>
+            <a:pPr algn="ctr"/>
+          </a:p>
+        </p:txBody>
+      </p:sp>
+      <p:sp>
+        <p:nvSpPr>
+          <p:cNvPr id="3" name="TextBox 2"/>
+          <p:cNvSpPr txBox="1"/>
+          <p:nvPr/>
+        </p:nvSpPr>
+        <p:spPr>
+          <a:xfrm>
+            <a:off x="10607040" y="320040"/>
+            <a:ext cx="1371600" cy="365760"/>
+          </a:xfrm>
+          <a:prstGeom prst="rect">
+            <a:avLst/>
+          </a:prstGeom>
+          <a:noFill/>
+        </p:spPr>
+        <p:txBody>
+          <a:bodyPr wrap="square">
+            <a:spAutoFit/>
+          </a:bodyPr>
+          <a:lstStyle/>
+          <a:p>
+            <a:pPr algn="r"/>
+            <a:r>
+              <a:rPr sz="1000" b="1" i="0">
+                <a:solidFill>
+                  <a:srgbClr val="64748B"/>
+                </a:solidFill>
+                <a:latin typeface="Montserrat"/>
+              </a:rPr>
+              <a:t>023 / 027</a:t>
+            </a:r>
+          </a:p>
+        </p:txBody>
+      </p:sp>
+      <p:sp>
+        <p:nvSpPr>
+          <p:cNvPr id="4" name="TextBox 3"/>
+          <p:cNvSpPr txBox="1"/>
+          <p:nvPr/>
+        </p:nvSpPr>
+        <p:spPr>
+          <a:xfrm>
+            <a:off x="457200" y="6419088"/>
+            <a:ext cx="8229600" cy="365760"/>
+          </a:xfrm>
+          <a:prstGeom prst="rect">
+            <a:avLst/>
+          </a:prstGeom>
+          <a:noFill/>
+        </p:spPr>
+        <p:txBody>
+          <a:bodyPr wrap="square">
+            <a:spAutoFit/>
+          </a:bodyPr>
+          <a:lstStyle/>
+          <a:p>
+            <a:r>
+              <a:rPr sz="900" b="0" i="0">
+                <a:solidFill>
+                  <a:srgbClr val="64748B"/>
+                </a:solidFill>
+                <a:latin typeface="Montserrat"/>
+              </a:rPr>
+              <a:t>Curso Gas B · Tema 09 · UNE 60670-1 y -2</a:t>
+            </a:r>
+          </a:p>
+        </p:txBody>
+      </p:sp>
+      <p:sp>
+        <p:nvSpPr>
+          <p:cNvPr id="5" name="Rectangle 4"/>
+          <p:cNvSpPr/>
+          <p:nvPr/>
+        </p:nvSpPr>
+        <p:spPr>
+          <a:xfrm>
+            <a:off x="0" y="0"/>
+            <a:ext cx="12191695" cy="1143000"/>
+          </a:xfrm>
+          <a:prstGeom prst="rect">
+            <a:avLst/>
+          </a:prstGeom>
+          <a:solidFill>
+            <a:srgbClr val="1E8E4B"/>
+          </a:solidFill>
+          <a:ln>
+            <a:noFill/>
+          </a:ln>
+          <a:effectLst/>
+        </p:spPr>
+        <p:style>
+          <a:lnRef idx="1">
+            <a:schemeClr val="accent1"/>
+          </a:lnRef>
+          <a:fillRef idx="3">
+            <a:schemeClr val="accent1"/>
+          </a:fillRef>
+          <a:effectRef idx="2">
+            <a:schemeClr val="accent1"/>
+          </a:effectRef>
+          <a:fontRef idx="minor">
+            <a:schemeClr val="lt1"/>
+          </a:fontRef>
+        </p:style>
+        <p:txBody>
+          <a:bodyPr rtlCol="0" anchor="ctr"/>
+          <a:lstStyle/>
+          <a:p>
+            <a:pPr algn="ctr"/>
+          </a:p>
+        </p:txBody>
+      </p:sp>
+      <p:sp>
+        <p:nvSpPr>
+          <p:cNvPr id="6" name="TextBox 5"/>
+          <p:cNvSpPr txBox="1"/>
+          <p:nvPr/>
+        </p:nvSpPr>
+        <p:spPr>
+          <a:xfrm>
+            <a:off x="822960" y="274320"/>
+            <a:ext cx="10515600" cy="640080"/>
+          </a:xfrm>
+          <a:prstGeom prst="rect">
+            <a:avLst/>
+          </a:prstGeom>
+          <a:noFill/>
+        </p:spPr>
+        <p:txBody>
+          <a:bodyPr wrap="square">
+            <a:spAutoFit/>
+          </a:bodyPr>
+          <a:lstStyle/>
+          <a:p>
+            <a:r>
+              <a:rPr sz="2400" b="1" i="0">
+                <a:solidFill>
+                  <a:srgbClr val="FFFFFF"/>
+                </a:solidFill>
+                <a:latin typeface="Montserrat"/>
+              </a:rPr>
+              <a:t>✔  RESPUESTA:  C</a:t>
+            </a:r>
+          </a:p>
+        </p:txBody>
+      </p:sp>
+      <p:sp>
+        <p:nvSpPr>
+          <p:cNvPr id="7" name="TextBox 6"/>
+          <p:cNvSpPr txBox="1"/>
+          <p:nvPr/>
+        </p:nvSpPr>
+        <p:spPr>
+          <a:xfrm>
+            <a:off x="822960" y="1417320"/>
+            <a:ext cx="10515600" cy="914400"/>
+          </a:xfrm>
+          <a:prstGeom prst="rect">
+            <a:avLst/>
+          </a:prstGeom>
+          <a:noFill/>
+        </p:spPr>
+        <p:txBody>
+          <a:bodyPr wrap="square">
+            <a:spAutoFit/>
+          </a:bodyPr>
+          <a:lstStyle/>
+          <a:p>
+            <a:r>
+              <a:rPr sz="1800" b="1" i="0">
+                <a:solidFill>
+                  <a:srgbClr val="64748B"/>
+                </a:solidFill>
+                <a:latin typeface="Montserrat"/>
+              </a:rPr>
+              <a:t>¿A partir de qué temperatura de fusión del material de aportación la soldadura es fuerte?</a:t>
+            </a:r>
+          </a:p>
+        </p:txBody>
+      </p:sp>
+      <p:sp>
+        <p:nvSpPr>
+          <p:cNvPr id="8" name="Rounded Rectangle 7"/>
+          <p:cNvSpPr/>
+          <p:nvPr/>
+        </p:nvSpPr>
+        <p:spPr>
+          <a:xfrm>
+            <a:off x="822960" y="2514600"/>
+            <a:ext cx="10515600" cy="914400"/>
+          </a:xfrm>
+          <a:prstGeom prst="roundRect">
+            <a:avLst/>
+          </a:prstGeom>
+          <a:solidFill>
+            <a:srgbClr val="E9F6EE"/>
+          </a:solidFill>
+          <a:ln w="12700">
+            <a:solidFill>
+              <a:srgbClr val="1E8E4B"/>
+            </a:solidFill>
+          </a:ln>
+          <a:effectLst/>
+        </p:spPr>
+        <p:style>
+          <a:lnRef idx="1">
+            <a:schemeClr val="accent1"/>
+          </a:lnRef>
+          <a:fillRef idx="3">
+            <a:schemeClr val="accent1"/>
+          </a:fillRef>
+          <a:effectRef idx="2">
+            <a:schemeClr val="accent1"/>
+          </a:effectRef>
+          <a:fontRef idx="minor">
+            <a:schemeClr val="lt1"/>
+          </a:fontRef>
+        </p:style>
+        <p:txBody>
+          <a:bodyPr rtlCol="0" anchor="ctr"/>
+          <a:lstStyle/>
+          <a:p>
+            <a:pPr algn="ctr"/>
+          </a:p>
+        </p:txBody>
+      </p:sp>
+      <p:sp>
+        <p:nvSpPr>
+          <p:cNvPr id="9" name="TextBox 8"/>
+          <p:cNvSpPr txBox="1"/>
+          <p:nvPr/>
+        </p:nvSpPr>
+        <p:spPr>
+          <a:xfrm>
+            <a:off x="1097280" y="2697480"/>
+            <a:ext cx="10058400" cy="640080"/>
+          </a:xfrm>
+          <a:prstGeom prst="rect">
+            <a:avLst/>
+          </a:prstGeom>
+          <a:noFill/>
+        </p:spPr>
+        <p:txBody>
+          <a:bodyPr wrap="square">
+            <a:spAutoFit/>
+          </a:bodyPr>
+          <a:lstStyle/>
+          <a:p>
+            <a:r>
+              <a:rPr sz="1800" b="1" i="0">
+                <a:solidFill>
+                  <a:srgbClr val="1E8E4B"/>
+                </a:solidFill>
+                <a:latin typeface="Montserrat"/>
+              </a:rPr>
+              <a:t>C.  </a:t>
+            </a:r>
+            <a:r>
+              <a:rPr sz="1800" b="1" i="0">
+                <a:solidFill>
+                  <a:srgbClr val="1E2761"/>
+                </a:solidFill>
+                <a:latin typeface="Montserrat"/>
+              </a:rPr>
+              <a:t>450 °C</a:t>
+            </a:r>
+          </a:p>
+        </p:txBody>
+      </p:sp>
+      <p:sp>
+        <p:nvSpPr>
+          <p:cNvPr id="10" name="TextBox 9"/>
+          <p:cNvSpPr txBox="1"/>
+          <p:nvPr/>
+        </p:nvSpPr>
+        <p:spPr>
+          <a:xfrm>
+            <a:off x="822960" y="3749039"/>
+            <a:ext cx="10515600" cy="2194560"/>
+          </a:xfrm>
+          <a:prstGeom prst="rect">
+            <a:avLst/>
+          </a:prstGeom>
+          <a:noFill/>
+        </p:spPr>
+        <p:txBody>
+          <a:bodyPr wrap="square">
+            <a:spAutoFit/>
+          </a:bodyPr>
+          <a:lstStyle/>
+          <a:p>
+            <a:r>
+              <a:rPr sz="1500" b="1" i="0">
+                <a:solidFill>
+                  <a:srgbClr val="E8801A"/>
+                </a:solidFill>
+                <a:latin typeface="Montserrat"/>
+              </a:rPr>
+              <a:t>Por qué:  </a:t>
+            </a:r>
+            <a:r>
+              <a:rPr sz="1500" b="0" i="0">
+                <a:solidFill>
+                  <a:srgbClr val="1B2330"/>
+                </a:solidFill>
+                <a:latin typeface="Montserrat"/>
+              </a:rPr>
+              <a:t>Si el material de aportación funde a 450 °C o más, la soldadura es fuerte; por debajo, es blanda.</a:t>
+            </a:r>
+          </a:p>
+        </p:txBody>
+      </p:sp>
+    </p:spTree>
+  </p:cSld>
+  <p:clrMapOvr>
+    <a:masterClrMapping/>
+  </p:clrMapOvr>
+  <mc:AlternateContent xmlns:mc="http://schemas.openxmlformats.org/markup-compatibility/2006">
+    <mc:Choice xmlns:p14="http://schemas.microsoft.com/office/powerpoint/2010/main" Requires="p14">
+      <p:transition spd="med" p14:dur="700">
+        <p14:cube dir="l"/>
+      </p:transition>
+    </mc:Choice>
+    <mc:Fallback>
+      <p:transition spd="med">
+        <p:push dir="l"/>
+      </p:transition>
+    </mc:Fallback>
+  </mc:AlternateContent>
+</p:sld>
+</file>
+
+<file path=ppt/slides/slide24.xml><?xml version="1.0" encoding="utf-8"?>
+<p:sld xmlns:a="http://schemas.openxmlformats.org/drawingml/2006/main" xmlns:p="http://schemas.openxmlformats.org/presentationml/2006/main" xmlns:r="http://schemas.openxmlformats.org/officeDocument/2006/relationships">
+  <p:cSld>
+    <p:spTree>
+      <p:nvGrpSpPr>
+        <p:cNvPr id="1" name=""/>
+        <p:cNvGrpSpPr/>
+        <p:nvPr/>
+      </p:nvGrpSpPr>
+      <p:grpSpPr/>
+      <p:sp>
+        <p:nvSpPr>
+          <p:cNvPr id="2" name="Rectangle 1"/>
+          <p:cNvSpPr/>
+          <p:nvPr/>
+        </p:nvSpPr>
+        <p:spPr>
+          <a:xfrm>
+            <a:off x="0" y="0"/>
+            <a:ext cx="12191695" cy="6858000"/>
+          </a:xfrm>
+          <a:prstGeom prst="rect">
+            <a:avLst/>
+          </a:prstGeom>
+          <a:solidFill>
+            <a:srgbClr val="FFFFFF"/>
+          </a:solidFill>
+          <a:ln>
+            <a:noFill/>
+          </a:ln>
+          <a:effectLst/>
+        </p:spPr>
+        <p:style>
+          <a:lnRef idx="1">
+            <a:schemeClr val="accent1"/>
+          </a:lnRef>
+          <a:fillRef idx="3">
+            <a:schemeClr val="accent1"/>
+          </a:fillRef>
+          <a:effectRef idx="2">
+            <a:schemeClr val="accent1"/>
+          </a:effectRef>
+          <a:fontRef idx="minor">
+            <a:schemeClr val="lt1"/>
+          </a:fontRef>
+        </p:style>
+        <p:txBody>
+          <a:bodyPr rtlCol="0" anchor="ctr"/>
+          <a:lstStyle/>
+          <a:p>
+            <a:pPr algn="ctr"/>
+          </a:p>
+        </p:txBody>
+      </p:sp>
+      <p:sp>
+        <p:nvSpPr>
+          <p:cNvPr id="3" name="TextBox 2"/>
+          <p:cNvSpPr txBox="1"/>
+          <p:nvPr/>
+        </p:nvSpPr>
+        <p:spPr>
+          <a:xfrm>
+            <a:off x="10607040" y="320040"/>
+            <a:ext cx="1371600" cy="365760"/>
+          </a:xfrm>
+          <a:prstGeom prst="rect">
+            <a:avLst/>
+          </a:prstGeom>
+          <a:noFill/>
+        </p:spPr>
+        <p:txBody>
+          <a:bodyPr wrap="square">
+            <a:spAutoFit/>
+          </a:bodyPr>
+          <a:lstStyle/>
+          <a:p>
+            <a:pPr algn="r"/>
+            <a:r>
+              <a:rPr sz="1000" b="1" i="0">
+                <a:solidFill>
+                  <a:srgbClr val="64748B"/>
+                </a:solidFill>
+                <a:latin typeface="Montserrat"/>
+              </a:rPr>
+              <a:t>024 / 027</a:t>
+            </a:r>
+          </a:p>
+        </p:txBody>
+      </p:sp>
+      <p:sp>
+        <p:nvSpPr>
+          <p:cNvPr id="4" name="TextBox 3"/>
+          <p:cNvSpPr txBox="1"/>
+          <p:nvPr/>
+        </p:nvSpPr>
+        <p:spPr>
+          <a:xfrm>
+            <a:off x="457200" y="6419088"/>
+            <a:ext cx="8229600" cy="365760"/>
+          </a:xfrm>
+          <a:prstGeom prst="rect">
+            <a:avLst/>
+          </a:prstGeom>
+          <a:noFill/>
+        </p:spPr>
+        <p:txBody>
+          <a:bodyPr wrap="square">
+            <a:spAutoFit/>
+          </a:bodyPr>
+          <a:lstStyle/>
+          <a:p>
+            <a:r>
+              <a:rPr sz="900" b="0" i="0">
+                <a:solidFill>
+                  <a:srgbClr val="64748B"/>
+                </a:solidFill>
+                <a:latin typeface="Montserrat"/>
+              </a:rPr>
+              <a:t>Curso Gas B · Tema 09 · UNE 60670-1 y -2</a:t>
+            </a:r>
+          </a:p>
+        </p:txBody>
+      </p:sp>
+      <p:sp>
+        <p:nvSpPr>
+          <p:cNvPr id="5" name="TextBox 4"/>
+          <p:cNvSpPr txBox="1"/>
+          <p:nvPr/>
+        </p:nvSpPr>
+        <p:spPr>
+          <a:xfrm>
+            <a:off x="822960" y="457200"/>
+            <a:ext cx="10058400" cy="365760"/>
+          </a:xfrm>
+          <a:prstGeom prst="rect">
+            <a:avLst/>
+          </a:prstGeom>
+          <a:noFill/>
+        </p:spPr>
+        <p:txBody>
+          <a:bodyPr wrap="square">
+            <a:spAutoFit/>
+          </a:bodyPr>
+          <a:lstStyle/>
+          <a:p>
+            <a:r>
+              <a:rPr sz="1300" b="1" i="0">
+                <a:solidFill>
+                  <a:srgbClr val="E8801A"/>
+                </a:solidFill>
+                <a:latin typeface="Montserrat"/>
+              </a:rPr>
+              <a:t>TÉRMINOS 3.115 A 3.119</a:t>
+            </a:r>
+          </a:p>
+        </p:txBody>
+      </p:sp>
+      <p:sp>
+        <p:nvSpPr>
+          <p:cNvPr id="6" name="TextBox 5"/>
+          <p:cNvSpPr txBox="1"/>
+          <p:nvPr/>
+        </p:nvSpPr>
+        <p:spPr>
+          <a:xfrm>
+            <a:off x="822960" y="868680"/>
+            <a:ext cx="10515600" cy="914400"/>
+          </a:xfrm>
+          <a:prstGeom prst="rect">
+            <a:avLst/>
+          </a:prstGeom>
+          <a:noFill/>
+        </p:spPr>
+        <p:txBody>
+          <a:bodyPr wrap="square">
+            <a:spAutoFit/>
+          </a:bodyPr>
+          <a:lstStyle/>
+          <a:p>
+            <a:r>
+              <a:rPr sz="2800" b="1" i="0">
+                <a:solidFill>
+                  <a:srgbClr val="1E2761"/>
+                </a:solidFill>
+                <a:latin typeface="Montserrat"/>
+              </a:rPr>
+              <a:t>Válvulas de seguridad</a:t>
+            </a:r>
+          </a:p>
+        </p:txBody>
+      </p:sp>
+      <p:sp>
+        <p:nvSpPr>
+          <p:cNvPr id="7" name="Rectangle 6"/>
+          <p:cNvSpPr/>
+          <p:nvPr/>
+        </p:nvSpPr>
+        <p:spPr>
+          <a:xfrm>
+            <a:off x="868680" y="1627632"/>
+            <a:ext cx="2011680" cy="73152"/>
+          </a:xfrm>
+          <a:prstGeom prst="rect">
+            <a:avLst/>
+          </a:prstGeom>
+          <a:solidFill>
+            <a:srgbClr val="E8801A"/>
+          </a:solidFill>
+          <a:ln>
+            <a:noFill/>
+          </a:ln>
+          <a:effectLst/>
+        </p:spPr>
+        <p:style>
+          <a:lnRef idx="1">
+            <a:schemeClr val="accent1"/>
+          </a:lnRef>
+          <a:fillRef idx="3">
+            <a:schemeClr val="accent1"/>
+          </a:fillRef>
+          <a:effectRef idx="2">
+            <a:schemeClr val="accent1"/>
+          </a:effectRef>
+          <a:fontRef idx="minor">
+            <a:schemeClr val="lt1"/>
+          </a:fontRef>
+        </p:style>
+        <p:txBody>
+          <a:bodyPr rtlCol="0" anchor="ctr"/>
+          <a:lstStyle/>
+          <a:p>
+            <a:pPr algn="ctr"/>
+          </a:p>
+        </p:txBody>
+      </p:sp>
+      <p:sp>
+        <p:nvSpPr>
+          <p:cNvPr id="8" name="TextBox 7"/>
+          <p:cNvSpPr txBox="1"/>
+          <p:nvPr/>
+        </p:nvSpPr>
+        <p:spPr>
+          <a:xfrm>
+            <a:off x="822960" y="1965960"/>
+            <a:ext cx="5029200" cy="4206240"/>
+          </a:xfrm>
+          <a:prstGeom prst="rect">
+            <a:avLst/>
+          </a:prstGeom>
+          <a:noFill/>
+        </p:spPr>
+        <p:txBody>
+          <a:bodyPr wrap="square">
+            <a:spAutoFit/>
+          </a:bodyPr>
+          <a:lstStyle/>
+          <a:p>
+            <a:pPr>
+              <a:spcAft>
+                <a:spcPts val="1100"/>
+              </a:spcAft>
+            </a:pPr>
+            <a:r>
+              <a:rPr sz="1600" b="1" i="0">
+                <a:solidFill>
+                  <a:srgbClr val="E8801A"/>
+                </a:solidFill>
+                <a:latin typeface="Montserrat"/>
+              </a:rPr>
+              <a:t>▸  </a:t>
+            </a:r>
+            <a:r>
+              <a:rPr sz="1600" b="0" i="0">
+                <a:solidFill>
+                  <a:srgbClr val="1B2330"/>
+                </a:solidFill>
+                <a:latin typeface="Montserrat"/>
+              </a:rPr>
+              <a:t>VAS sobrepresión: alivia soltando gas</a:t>
+            </a:r>
+          </a:p>
+          <a:p>
+            <a:pPr>
+              <a:spcAft>
+                <a:spcPts val="1100"/>
+              </a:spcAft>
+            </a:pPr>
+            <a:r>
+              <a:rPr sz="1600" b="1" i="0">
+                <a:solidFill>
+                  <a:srgbClr val="E8801A"/>
+                </a:solidFill>
+                <a:latin typeface="Montserrat"/>
+              </a:rPr>
+              <a:t>▸  </a:t>
+            </a:r>
+            <a:r>
+              <a:rPr sz="1600" b="0" i="0">
+                <a:solidFill>
+                  <a:srgbClr val="1B2330"/>
+                </a:solidFill>
+                <a:latin typeface="Montserrat"/>
+              </a:rPr>
+              <a:t>VISmáx: corta si la presión sube</a:t>
+            </a:r>
+          </a:p>
+          <a:p>
+            <a:pPr>
+              <a:spcAft>
+                <a:spcPts val="1100"/>
+              </a:spcAft>
+            </a:pPr>
+            <a:r>
+              <a:rPr sz="1600" b="1" i="0">
+                <a:solidFill>
+                  <a:srgbClr val="E8801A"/>
+                </a:solidFill>
+                <a:latin typeface="Montserrat"/>
+              </a:rPr>
+              <a:t>▸  </a:t>
+            </a:r>
+            <a:r>
+              <a:rPr sz="1600" b="0" i="0">
+                <a:solidFill>
+                  <a:srgbClr val="1B2330"/>
+                </a:solidFill>
+                <a:latin typeface="Montserrat"/>
+              </a:rPr>
+              <a:t>VISmín: corta si la presión baja</a:t>
+            </a:r>
+          </a:p>
+          <a:p>
+            <a:pPr>
+              <a:spcAft>
+                <a:spcPts val="1100"/>
+              </a:spcAft>
+            </a:pPr>
+            <a:r>
+              <a:rPr sz="1600" b="1" i="0">
+                <a:solidFill>
+                  <a:srgbClr val="E8801A"/>
+                </a:solidFill>
+                <a:latin typeface="Montserrat"/>
+              </a:rPr>
+              <a:t>▸  </a:t>
+            </a:r>
+            <a:r>
+              <a:rPr sz="1600" b="0" i="0">
+                <a:solidFill>
+                  <a:srgbClr val="1B2330"/>
+                </a:solidFill>
+                <a:latin typeface="Montserrat"/>
+              </a:rPr>
+              <a:t>Automática: abre con energía, corta sin ella</a:t>
+            </a:r>
+          </a:p>
+        </p:txBody>
+      </p:sp>
+      <p:sp>
+        <p:nvSpPr>
+          <p:cNvPr id="9" name="imgph" descr="IMGQ:gas safety relief valve on pipeline"/>
+          <p:cNvSpPr/>
+          <p:nvPr/>
+        </p:nvSpPr>
+        <p:spPr>
+          <a:xfrm>
+            <a:off x="6080760" y="1965960"/>
+            <a:ext cx="5303520" cy="4572000"/>
+          </a:xfrm>
+          <a:prstGeom prst="roundRect">
+            <a:avLst/>
+          </a:prstGeom>
+          <a:solidFill>
+            <a:srgbClr val="F3F6FB"/>
+          </a:solidFill>
+          <a:ln w="12700">
+            <a:solidFill>
+              <a:srgbClr val="C7D2E6"/>
+            </a:solidFill>
+          </a:ln>
+          <a:effectLst/>
+        </p:spPr>
+        <p:style>
+          <a:lnRef idx="1">
+            <a:schemeClr val="accent1"/>
+          </a:lnRef>
+          <a:fillRef idx="3">
+            <a:schemeClr val="accent1"/>
+          </a:fillRef>
+          <a:effectRef idx="2">
+            <a:schemeClr val="accent1"/>
+          </a:effectRef>
+          <a:fontRef idx="minor">
+            <a:schemeClr val="lt1"/>
+          </a:fontRef>
+        </p:style>
+        <p:txBody>
+          <a:bodyPr rtlCol="0" anchor="ctr"/>
+          <a:lstStyle/>
+          <a:p>
+            <a:pPr algn="ctr"/>
+          </a:p>
+        </p:txBody>
+      </p:sp>
+      <p:sp>
+        <p:nvSpPr>
+          <p:cNvPr id="10" name="TextBox 9"/>
+          <p:cNvSpPr txBox="1"/>
+          <p:nvPr/>
+        </p:nvSpPr>
+        <p:spPr>
+          <a:xfrm>
+            <a:off x="6355080" y="3611880"/>
+            <a:ext cx="4754880" cy="1280160"/>
+          </a:xfrm>
+          <a:prstGeom prst="rect">
+            <a:avLst/>
+          </a:prstGeom>
+          <a:noFill/>
+        </p:spPr>
+        <p:txBody>
+          <a:bodyPr wrap="square">
+            <a:spAutoFit/>
+          </a:bodyPr>
+          <a:lstStyle/>
+          <a:p>
+            <a:pPr algn="ctr"/>
+            <a:r>
+              <a:rPr sz="1400" b="1" i="0">
+                <a:solidFill>
+                  <a:srgbClr val="64748B"/>
+                </a:solidFill>
+                <a:latin typeface="Montserrat"/>
+              </a:rPr>
+              <a:t>IMAGEN</a:t>
+            </a:r>
+          </a:p>
+          <a:p>
+            <a:pPr algn="ctr"/>
+            <a:r>
+              <a:rPr sz="1100" b="0" i="1">
+                <a:solidFill>
+                  <a:srgbClr val="64748B"/>
+                </a:solidFill>
+                <a:latin typeface="Montserrat"/>
+              </a:rPr>
+              <a:t>gas safety relief valve on pipeline</a:t>
+            </a:r>
+          </a:p>
+        </p:txBody>
+      </p:sp>
+    </p:spTree>
+  </p:cSld>
+  <p:clrMapOvr>
+    <a:masterClrMapping/>
+  </p:clrMapOvr>
+  <mc:AlternateContent xmlns:mc="http://schemas.openxmlformats.org/markup-compatibility/2006">
+    <mc:Choice xmlns:p14="http://schemas.microsoft.com/office/powerpoint/2010/main" Requires="p14">
+      <p:transition spd="med" p14:dur="700">
+        <p14:cube dir="r"/>
+      </p:transition>
+    </mc:Choice>
+    <mc:Fallback>
+      <p:transition spd="med">
+        <p:push dir="r"/>
+      </p:transition>
+    </mc:Fallback>
+  </mc:AlternateContent>
+</p:sld>
+</file>
+
+<file path=ppt/slides/slide25.xml><?xml version="1.0" encoding="utf-8"?>
+<p:sld xmlns:a="http://schemas.openxmlformats.org/drawingml/2006/main" xmlns:p="http://schemas.openxmlformats.org/presentationml/2006/main" xmlns:r="http://schemas.openxmlformats.org/officeDocument/2006/relationships">
+  <p:cSld>
+    <p:spTree>
+      <p:nvGrpSpPr>
+        <p:cNvPr id="1" name=""/>
+        <p:cNvGrpSpPr/>
+        <p:nvPr/>
+      </p:nvGrpSpPr>
+      <p:grpSpPr/>
+      <p:sp>
+        <p:nvSpPr>
+          <p:cNvPr id="2" name="Rectangle 1"/>
+          <p:cNvSpPr/>
+          <p:nvPr/>
+        </p:nvSpPr>
+        <p:spPr>
+          <a:xfrm>
+            <a:off x="0" y="0"/>
+            <a:ext cx="12191695" cy="6858000"/>
+          </a:xfrm>
+          <a:prstGeom prst="rect">
+            <a:avLst/>
+          </a:prstGeom>
+          <a:solidFill>
+            <a:srgbClr val="FFFFFF"/>
+          </a:solidFill>
+          <a:ln>
+            <a:noFill/>
+          </a:ln>
+          <a:effectLst/>
+        </p:spPr>
+        <p:style>
+          <a:lnRef idx="1">
+            <a:schemeClr val="accent1"/>
+          </a:lnRef>
+          <a:fillRef idx="3">
+            <a:schemeClr val="accent1"/>
+          </a:fillRef>
+          <a:effectRef idx="2">
+            <a:schemeClr val="accent1"/>
+          </a:effectRef>
+          <a:fontRef idx="minor">
+            <a:schemeClr val="lt1"/>
+          </a:fontRef>
+        </p:style>
+        <p:txBody>
+          <a:bodyPr rtlCol="0" anchor="ctr"/>
+          <a:lstStyle/>
+          <a:p>
+            <a:pPr algn="ctr"/>
+          </a:p>
+        </p:txBody>
+      </p:sp>
+      <p:sp>
+        <p:nvSpPr>
+          <p:cNvPr id="3" name="TextBox 2"/>
+          <p:cNvSpPr txBox="1"/>
+          <p:nvPr/>
+        </p:nvSpPr>
+        <p:spPr>
+          <a:xfrm>
+            <a:off x="10607040" y="320040"/>
+            <a:ext cx="1371600" cy="365760"/>
+          </a:xfrm>
+          <a:prstGeom prst="rect">
+            <a:avLst/>
+          </a:prstGeom>
+          <a:noFill/>
+        </p:spPr>
+        <p:txBody>
+          <a:bodyPr wrap="square">
+            <a:spAutoFit/>
+          </a:bodyPr>
+          <a:lstStyle/>
+          <a:p>
+            <a:pPr algn="r"/>
+            <a:r>
+              <a:rPr sz="1000" b="1" i="0">
+                <a:solidFill>
+                  <a:srgbClr val="64748B"/>
+                </a:solidFill>
+                <a:latin typeface="Montserrat"/>
+              </a:rPr>
+              <a:t>025 / 027</a:t>
+            </a:r>
+          </a:p>
+        </p:txBody>
+      </p:sp>
+      <p:sp>
+        <p:nvSpPr>
+          <p:cNvPr id="4" name="TextBox 3"/>
+          <p:cNvSpPr txBox="1"/>
+          <p:nvPr/>
+        </p:nvSpPr>
+        <p:spPr>
+          <a:xfrm>
+            <a:off x="457200" y="6419088"/>
+            <a:ext cx="8229600" cy="365760"/>
+          </a:xfrm>
+          <a:prstGeom prst="rect">
+            <a:avLst/>
+          </a:prstGeom>
+          <a:noFill/>
+        </p:spPr>
+        <p:txBody>
+          <a:bodyPr wrap="square">
+            <a:spAutoFit/>
+          </a:bodyPr>
+          <a:lstStyle/>
+          <a:p>
+            <a:r>
+              <a:rPr sz="900" b="0" i="0">
+                <a:solidFill>
+                  <a:srgbClr val="64748B"/>
+                </a:solidFill>
+                <a:latin typeface="Montserrat"/>
+              </a:rPr>
+              <a:t>Curso Gas B · Tema 09 · UNE 60670-1 y -2</a:t>
+            </a:r>
+          </a:p>
+        </p:txBody>
+      </p:sp>
+      <p:sp>
+        <p:nvSpPr>
+          <p:cNvPr id="5" name="Rectangle 4"/>
+          <p:cNvSpPr/>
+          <p:nvPr/>
+        </p:nvSpPr>
+        <p:spPr>
+          <a:xfrm>
+            <a:off x="0" y="0"/>
+            <a:ext cx="12191695" cy="1143000"/>
+          </a:xfrm>
+          <a:prstGeom prst="rect">
+            <a:avLst/>
+          </a:prstGeom>
+          <a:solidFill>
+            <a:srgbClr val="E8801A"/>
+          </a:solidFill>
+          <a:ln>
+            <a:noFill/>
+          </a:ln>
+          <a:effectLst/>
+        </p:spPr>
+        <p:style>
+          <a:lnRef idx="1">
+            <a:schemeClr val="accent1"/>
+          </a:lnRef>
+          <a:fillRef idx="3">
+            <a:schemeClr val="accent1"/>
+          </a:fillRef>
+          <a:effectRef idx="2">
+            <a:schemeClr val="accent1"/>
+          </a:effectRef>
+          <a:fontRef idx="minor">
+            <a:schemeClr val="lt1"/>
+          </a:fontRef>
+        </p:style>
+        <p:txBody>
+          <a:bodyPr rtlCol="0" anchor="ctr"/>
+          <a:lstStyle/>
+          <a:p>
+            <a:pPr algn="ctr"/>
+          </a:p>
+        </p:txBody>
+      </p:sp>
+      <p:sp>
+        <p:nvSpPr>
+          <p:cNvPr id="6" name="TextBox 5"/>
+          <p:cNvSpPr txBox="1"/>
+          <p:nvPr/>
+        </p:nvSpPr>
+        <p:spPr>
+          <a:xfrm>
+            <a:off x="822960" y="274320"/>
+            <a:ext cx="10515600" cy="640080"/>
+          </a:xfrm>
+          <a:prstGeom prst="rect">
+            <a:avLst/>
+          </a:prstGeom>
+          <a:noFill/>
+        </p:spPr>
+        <p:txBody>
+          <a:bodyPr wrap="square">
+            <a:spAutoFit/>
+          </a:bodyPr>
+          <a:lstStyle/>
+          <a:p>
+            <a:r>
+              <a:rPr sz="2400" b="1" i="0">
+                <a:solidFill>
+                  <a:srgbClr val="FFFFFF"/>
+                </a:solidFill>
+                <a:latin typeface="Montserrat"/>
+              </a:rPr>
+              <a:t>⚡  PREGUNTA RÁPIDA</a:t>
+            </a:r>
+          </a:p>
+        </p:txBody>
+      </p:sp>
+      <p:sp>
+        <p:nvSpPr>
+          <p:cNvPr id="7" name="TextBox 6"/>
+          <p:cNvSpPr txBox="1"/>
+          <p:nvPr/>
+        </p:nvSpPr>
+        <p:spPr>
+          <a:xfrm>
+            <a:off x="822960" y="1508760"/>
+            <a:ext cx="10515600" cy="1371600"/>
+          </a:xfrm>
+          <a:prstGeom prst="rect">
+            <a:avLst/>
+          </a:prstGeom>
+          <a:noFill/>
+        </p:spPr>
+        <p:txBody>
+          <a:bodyPr wrap="square">
+            <a:spAutoFit/>
+          </a:bodyPr>
+          <a:lstStyle/>
+          <a:p>
+            <a:r>
+              <a:rPr sz="2400" b="1" i="0">
+                <a:solidFill>
+                  <a:srgbClr val="1E2761"/>
+                </a:solidFill>
+                <a:latin typeface="Montserrat"/>
+              </a:rPr>
+              <a:t>¿Qué hace la válvula de alivio de seguridad (VAS), o de sobrepresión?</a:t>
+            </a:r>
+          </a:p>
+        </p:txBody>
+      </p:sp>
+      <p:sp>
+        <p:nvSpPr>
+          <p:cNvPr id="8" name="Rounded Rectangle 7"/>
+          <p:cNvSpPr/>
+          <p:nvPr/>
+        </p:nvSpPr>
+        <p:spPr>
+          <a:xfrm>
+            <a:off x="822960" y="3291840"/>
+            <a:ext cx="4983480" cy="1143000"/>
+          </a:xfrm>
+          <a:prstGeom prst="roundRect">
+            <a:avLst/>
+          </a:prstGeom>
+          <a:solidFill>
+            <a:srgbClr val="F3F6FB"/>
+          </a:solidFill>
+          <a:ln w="12700">
+            <a:solidFill>
+              <a:srgbClr val="C7D2E6"/>
+            </a:solidFill>
+          </a:ln>
+          <a:effectLst/>
+        </p:spPr>
+        <p:style>
+          <a:lnRef idx="1">
+            <a:schemeClr val="accent1"/>
+          </a:lnRef>
+          <a:fillRef idx="3">
+            <a:schemeClr val="accent1"/>
+          </a:fillRef>
+          <a:effectRef idx="2">
+            <a:schemeClr val="accent1"/>
+          </a:effectRef>
+          <a:fontRef idx="minor">
+            <a:schemeClr val="lt1"/>
+          </a:fontRef>
+        </p:style>
+        <p:txBody>
+          <a:bodyPr rtlCol="0" anchor="ctr"/>
+          <a:lstStyle/>
+          <a:p>
+            <a:pPr algn="ctr"/>
+          </a:p>
+        </p:txBody>
+      </p:sp>
+      <p:sp>
+        <p:nvSpPr>
+          <p:cNvPr id="9" name="Rectangle 8"/>
+          <p:cNvSpPr/>
+          <p:nvPr/>
+        </p:nvSpPr>
+        <p:spPr>
+          <a:xfrm>
+            <a:off x="822960" y="3291840"/>
+            <a:ext cx="640080" cy="1143000"/>
+          </a:xfrm>
+          <a:prstGeom prst="rect">
+            <a:avLst/>
+          </a:prstGeom>
+          <a:solidFill>
+            <a:srgbClr val="1E2761"/>
+          </a:solidFill>
+          <a:ln>
+            <a:noFill/>
+          </a:ln>
+          <a:effectLst/>
+        </p:spPr>
+        <p:style>
+          <a:lnRef idx="1">
+            <a:schemeClr val="accent1"/>
+          </a:lnRef>
+          <a:fillRef idx="3">
+            <a:schemeClr val="accent1"/>
+          </a:fillRef>
+          <a:effectRef idx="2">
+            <a:schemeClr val="accent1"/>
+          </a:effectRef>
+          <a:fontRef idx="minor">
+            <a:schemeClr val="lt1"/>
+          </a:fontRef>
+        </p:style>
+        <p:txBody>
+          <a:bodyPr rtlCol="0" anchor="ctr"/>
+          <a:lstStyle/>
+          <a:p>
+            <a:pPr algn="ctr"/>
+          </a:p>
+        </p:txBody>
+      </p:sp>
+      <p:sp>
+        <p:nvSpPr>
+          <p:cNvPr id="10" name="TextBox 9"/>
+          <p:cNvSpPr txBox="1"/>
+          <p:nvPr/>
+        </p:nvSpPr>
+        <p:spPr>
+          <a:xfrm>
+            <a:off x="822960" y="3611880"/>
+            <a:ext cx="640080" cy="548640"/>
+          </a:xfrm>
+          <a:prstGeom prst="rect">
+            <a:avLst/>
+          </a:prstGeom>
+          <a:noFill/>
+        </p:spPr>
+        <p:txBody>
+          <a:bodyPr wrap="square">
+            <a:spAutoFit/>
+          </a:bodyPr>
+          <a:lstStyle/>
+          <a:p>
+            <a:pPr algn="ctr"/>
+            <a:r>
+              <a:rPr sz="2200" b="1" i="0">
+                <a:solidFill>
+                  <a:srgbClr val="FFFFFF"/>
+                </a:solidFill>
+                <a:latin typeface="Montserrat"/>
+              </a:rPr>
+              <a:t>A</a:t>
+            </a:r>
+          </a:p>
+        </p:txBody>
+      </p:sp>
+      <p:sp>
+        <p:nvSpPr>
+          <p:cNvPr id="11" name="TextBox 10"/>
+          <p:cNvSpPr txBox="1"/>
+          <p:nvPr/>
+        </p:nvSpPr>
+        <p:spPr>
+          <a:xfrm>
+            <a:off x="1600200" y="3474720"/>
+            <a:ext cx="4114800" cy="868680"/>
+          </a:xfrm>
+          <a:prstGeom prst="rect">
+            <a:avLst/>
+          </a:prstGeom>
+          <a:noFill/>
+        </p:spPr>
+        <p:txBody>
+          <a:bodyPr wrap="square">
+            <a:spAutoFit/>
+          </a:bodyPr>
+          <a:lstStyle/>
+          <a:p>
+            <a:r>
+              <a:rPr sz="1400" b="0" i="0">
+                <a:solidFill>
+                  <a:srgbClr val="1B2330"/>
+                </a:solidFill>
+                <a:latin typeface="Montserrat"/>
+              </a:rPr>
+              <a:t>Corta el suministro cuando la presión baja demasiado</a:t>
+            </a:r>
+          </a:p>
+        </p:txBody>
+      </p:sp>
+      <p:sp>
+        <p:nvSpPr>
+          <p:cNvPr id="12" name="Rounded Rectangle 11"/>
+          <p:cNvSpPr/>
+          <p:nvPr/>
+        </p:nvSpPr>
+        <p:spPr>
+          <a:xfrm>
+            <a:off x="6355080" y="3291840"/>
+            <a:ext cx="4983480" cy="1143000"/>
+          </a:xfrm>
+          <a:prstGeom prst="roundRect">
+            <a:avLst/>
+          </a:prstGeom>
+          <a:solidFill>
+            <a:srgbClr val="F3F6FB"/>
+          </a:solidFill>
+          <a:ln w="12700">
+            <a:solidFill>
+              <a:srgbClr val="C7D2E6"/>
+            </a:solidFill>
+          </a:ln>
+          <a:effectLst/>
+        </p:spPr>
+        <p:style>
+          <a:lnRef idx="1">
+            <a:schemeClr val="accent1"/>
+          </a:lnRef>
+          <a:fillRef idx="3">
+            <a:schemeClr val="accent1"/>
+          </a:fillRef>
+          <a:effectRef idx="2">
+            <a:schemeClr val="accent1"/>
+          </a:effectRef>
+          <a:fontRef idx="minor">
+            <a:schemeClr val="lt1"/>
+          </a:fontRef>
+        </p:style>
+        <p:txBody>
+          <a:bodyPr rtlCol="0" anchor="ctr"/>
+          <a:lstStyle/>
+          <a:p>
+            <a:pPr algn="ctr"/>
+          </a:p>
+        </p:txBody>
+      </p:sp>
+      <p:sp>
+        <p:nvSpPr>
+          <p:cNvPr id="13" name="Rectangle 12"/>
+          <p:cNvSpPr/>
+          <p:nvPr/>
+        </p:nvSpPr>
+        <p:spPr>
+          <a:xfrm>
+            <a:off x="6355080" y="3291840"/>
+            <a:ext cx="640080" cy="1143000"/>
+          </a:xfrm>
+          <a:prstGeom prst="rect">
+            <a:avLst/>
+          </a:prstGeom>
+          <a:solidFill>
+            <a:srgbClr val="1E2761"/>
+          </a:solidFill>
+          <a:ln>
+            <a:noFill/>
+          </a:ln>
+          <a:effectLst/>
+        </p:spPr>
+        <p:style>
+          <a:lnRef idx="1">
+            <a:schemeClr val="accent1"/>
+          </a:lnRef>
+          <a:fillRef idx="3">
+            <a:schemeClr val="accent1"/>
+          </a:fillRef>
+          <a:effectRef idx="2">
+            <a:schemeClr val="accent1"/>
+          </a:effectRef>
+          <a:fontRef idx="minor">
+            <a:schemeClr val="lt1"/>
+          </a:fontRef>
+        </p:style>
+        <p:txBody>
+          <a:bodyPr rtlCol="0" anchor="ctr"/>
+          <a:lstStyle/>
+          <a:p>
+            <a:pPr algn="ctr"/>
+          </a:p>
+        </p:txBody>
+      </p:sp>
+      <p:sp>
+        <p:nvSpPr>
+          <p:cNvPr id="14" name="TextBox 13"/>
+          <p:cNvSpPr txBox="1"/>
+          <p:nvPr/>
+        </p:nvSpPr>
+        <p:spPr>
+          <a:xfrm>
+            <a:off x="6355080" y="3611880"/>
+            <a:ext cx="640080" cy="548640"/>
+          </a:xfrm>
+          <a:prstGeom prst="rect">
+            <a:avLst/>
+          </a:prstGeom>
+          <a:noFill/>
+        </p:spPr>
+        <p:txBody>
+          <a:bodyPr wrap="square">
+            <a:spAutoFit/>
+          </a:bodyPr>
+          <a:lstStyle/>
+          <a:p>
+            <a:pPr algn="ctr"/>
+            <a:r>
+              <a:rPr sz="2200" b="1" i="0">
+                <a:solidFill>
+                  <a:srgbClr val="FFFFFF"/>
+                </a:solidFill>
+                <a:latin typeface="Montserrat"/>
+              </a:rPr>
+              <a:t>B</a:t>
+            </a:r>
+          </a:p>
+        </p:txBody>
+      </p:sp>
+      <p:sp>
+        <p:nvSpPr>
+          <p:cNvPr id="15" name="TextBox 14"/>
+          <p:cNvSpPr txBox="1"/>
+          <p:nvPr/>
+        </p:nvSpPr>
+        <p:spPr>
+          <a:xfrm>
+            <a:off x="7132320" y="3474720"/>
+            <a:ext cx="4114800" cy="868680"/>
+          </a:xfrm>
+          <a:prstGeom prst="rect">
+            <a:avLst/>
+          </a:prstGeom>
+          <a:noFill/>
+        </p:spPr>
+        <p:txBody>
+          <a:bodyPr wrap="square">
+            <a:spAutoFit/>
+          </a:bodyPr>
+          <a:lstStyle/>
+          <a:p>
+            <a:r>
+              <a:rPr sz="1400" b="0" i="0">
+                <a:solidFill>
+                  <a:srgbClr val="1B2330"/>
+                </a:solidFill>
+                <a:latin typeface="Montserrat"/>
+              </a:rPr>
+              <a:t>Alivia soltando un poco de gas al exterior para bajar la presión</a:t>
+            </a:r>
+          </a:p>
+        </p:txBody>
+      </p:sp>
+      <p:sp>
+        <p:nvSpPr>
+          <p:cNvPr id="16" name="Rounded Rectangle 15"/>
+          <p:cNvSpPr/>
+          <p:nvPr/>
+        </p:nvSpPr>
+        <p:spPr>
+          <a:xfrm>
+            <a:off x="822960" y="4617720"/>
+            <a:ext cx="4983480" cy="1143000"/>
+          </a:xfrm>
+          <a:prstGeom prst="roundRect">
+            <a:avLst/>
+          </a:prstGeom>
+          <a:solidFill>
+            <a:srgbClr val="F3F6FB"/>
+          </a:solidFill>
+          <a:ln w="12700">
+            <a:solidFill>
+              <a:srgbClr val="C7D2E6"/>
+            </a:solidFill>
+          </a:ln>
+          <a:effectLst/>
+        </p:spPr>
+        <p:style>
+          <a:lnRef idx="1">
+            <a:schemeClr val="accent1"/>
+          </a:lnRef>
+          <a:fillRef idx="3">
+            <a:schemeClr val="accent1"/>
+          </a:fillRef>
+          <a:effectRef idx="2">
+            <a:schemeClr val="accent1"/>
+          </a:effectRef>
+          <a:fontRef idx="minor">
+            <a:schemeClr val="lt1"/>
+          </a:fontRef>
+        </p:style>
+        <p:txBody>
+          <a:bodyPr rtlCol="0" anchor="ctr"/>
+          <a:lstStyle/>
+          <a:p>
+            <a:pPr algn="ctr"/>
+          </a:p>
+        </p:txBody>
+      </p:sp>
+      <p:sp>
+        <p:nvSpPr>
+          <p:cNvPr id="17" name="Rectangle 16"/>
+          <p:cNvSpPr/>
+          <p:nvPr/>
+        </p:nvSpPr>
+        <p:spPr>
+          <a:xfrm>
+            <a:off x="822960" y="4617720"/>
+            <a:ext cx="640080" cy="1143000"/>
+          </a:xfrm>
+          <a:prstGeom prst="rect">
+            <a:avLst/>
+          </a:prstGeom>
+          <a:solidFill>
+            <a:srgbClr val="1E2761"/>
+          </a:solidFill>
+          <a:ln>
+            <a:noFill/>
+          </a:ln>
+          <a:effectLst/>
+        </p:spPr>
+        <p:style>
+          <a:lnRef idx="1">
+            <a:schemeClr val="accent1"/>
+          </a:lnRef>
+          <a:fillRef idx="3">
+            <a:schemeClr val="accent1"/>
+          </a:fillRef>
+          <a:effectRef idx="2">
+            <a:schemeClr val="accent1"/>
+          </a:effectRef>
+          <a:fontRef idx="minor">
+            <a:schemeClr val="lt1"/>
+          </a:fontRef>
+        </p:style>
+        <p:txBody>
+          <a:bodyPr rtlCol="0" anchor="ctr"/>
+          <a:lstStyle/>
+          <a:p>
+            <a:pPr algn="ctr"/>
+          </a:p>
+        </p:txBody>
+      </p:sp>
+      <p:sp>
+        <p:nvSpPr>
+          <p:cNvPr id="18" name="TextBox 17"/>
+          <p:cNvSpPr txBox="1"/>
+          <p:nvPr/>
+        </p:nvSpPr>
+        <p:spPr>
+          <a:xfrm>
+            <a:off x="822960" y="4937760"/>
+            <a:ext cx="640080" cy="548640"/>
+          </a:xfrm>
+          <a:prstGeom prst="rect">
+            <a:avLst/>
+          </a:prstGeom>
+          <a:noFill/>
+        </p:spPr>
+        <p:txBody>
+          <a:bodyPr wrap="square">
+            <a:spAutoFit/>
+          </a:bodyPr>
+          <a:lstStyle/>
+          <a:p>
+            <a:pPr algn="ctr"/>
+            <a:r>
+              <a:rPr sz="2200" b="1" i="0">
+                <a:solidFill>
+                  <a:srgbClr val="FFFFFF"/>
+                </a:solidFill>
+                <a:latin typeface="Montserrat"/>
+              </a:rPr>
+              <a:t>C</a:t>
+            </a:r>
+          </a:p>
+        </p:txBody>
+      </p:sp>
+      <p:sp>
+        <p:nvSpPr>
+          <p:cNvPr id="19" name="TextBox 18"/>
+          <p:cNvSpPr txBox="1"/>
+          <p:nvPr/>
+        </p:nvSpPr>
+        <p:spPr>
+          <a:xfrm>
+            <a:off x="1600200" y="4800600"/>
+            <a:ext cx="4114800" cy="868680"/>
+          </a:xfrm>
+          <a:prstGeom prst="rect">
+            <a:avLst/>
+          </a:prstGeom>
+          <a:noFill/>
+        </p:spPr>
+        <p:txBody>
+          <a:bodyPr wrap="square">
+            <a:spAutoFit/>
+          </a:bodyPr>
+          <a:lstStyle/>
+          <a:p>
+            <a:r>
+              <a:rPr sz="1400" b="0" i="0">
+                <a:solidFill>
+                  <a:srgbClr val="1B2330"/>
+                </a:solidFill>
+                <a:latin typeface="Montserrat"/>
+              </a:rPr>
+              <a:t>Corta el suministro cuando la presión sube demasiado</a:t>
+            </a:r>
+          </a:p>
+        </p:txBody>
+      </p:sp>
+      <p:sp>
+        <p:nvSpPr>
+          <p:cNvPr id="20" name="Rounded Rectangle 19"/>
+          <p:cNvSpPr/>
+          <p:nvPr/>
+        </p:nvSpPr>
+        <p:spPr>
+          <a:xfrm>
+            <a:off x="6355080" y="4617720"/>
+            <a:ext cx="4983480" cy="1143000"/>
+          </a:xfrm>
+          <a:prstGeom prst="roundRect">
+            <a:avLst/>
+          </a:prstGeom>
+          <a:solidFill>
+            <a:srgbClr val="F3F6FB"/>
+          </a:solidFill>
+          <a:ln w="12700">
+            <a:solidFill>
+              <a:srgbClr val="C7D2E6"/>
+            </a:solidFill>
+          </a:ln>
+          <a:effectLst/>
+        </p:spPr>
+        <p:style>
+          <a:lnRef idx="1">
+            <a:schemeClr val="accent1"/>
+          </a:lnRef>
+          <a:fillRef idx="3">
+            <a:schemeClr val="accent1"/>
+          </a:fillRef>
+          <a:effectRef idx="2">
+            <a:schemeClr val="accent1"/>
+          </a:effectRef>
+          <a:fontRef idx="minor">
+            <a:schemeClr val="lt1"/>
+          </a:fontRef>
+        </p:style>
+        <p:txBody>
+          <a:bodyPr rtlCol="0" anchor="ctr"/>
+          <a:lstStyle/>
+          <a:p>
+            <a:pPr algn="ctr"/>
+          </a:p>
+        </p:txBody>
+      </p:sp>
+      <p:sp>
+        <p:nvSpPr>
+          <p:cNvPr id="21" name="Rectangle 20"/>
+          <p:cNvSpPr/>
+          <p:nvPr/>
+        </p:nvSpPr>
+        <p:spPr>
+          <a:xfrm>
+            <a:off x="6355080" y="4617720"/>
+            <a:ext cx="640080" cy="1143000"/>
+          </a:xfrm>
+          <a:prstGeom prst="rect">
+            <a:avLst/>
+          </a:prstGeom>
+          <a:solidFill>
+            <a:srgbClr val="1E2761"/>
+          </a:solidFill>
+          <a:ln>
+            <a:noFill/>
+          </a:ln>
+          <a:effectLst/>
+        </p:spPr>
+        <p:style>
+          <a:lnRef idx="1">
+            <a:schemeClr val="accent1"/>
+          </a:lnRef>
+          <a:fillRef idx="3">
+            <a:schemeClr val="accent1"/>
+          </a:fillRef>
+          <a:effectRef idx="2">
+            <a:schemeClr val="accent1"/>
+          </a:effectRef>
+          <a:fontRef idx="minor">
+            <a:schemeClr val="lt1"/>
+          </a:fontRef>
+        </p:style>
+        <p:txBody>
+          <a:bodyPr rtlCol="0" anchor="ctr"/>
+          <a:lstStyle/>
+          <a:p>
+            <a:pPr algn="ctr"/>
+          </a:p>
+        </p:txBody>
+      </p:sp>
+      <p:sp>
+        <p:nvSpPr>
+          <p:cNvPr id="22" name="TextBox 21"/>
+          <p:cNvSpPr txBox="1"/>
+          <p:nvPr/>
+        </p:nvSpPr>
+        <p:spPr>
+          <a:xfrm>
+            <a:off x="6355080" y="4937760"/>
+            <a:ext cx="640080" cy="548640"/>
+          </a:xfrm>
+          <a:prstGeom prst="rect">
+            <a:avLst/>
+          </a:prstGeom>
+          <a:noFill/>
+        </p:spPr>
+        <p:txBody>
+          <a:bodyPr wrap="square">
+            <a:spAutoFit/>
+          </a:bodyPr>
+          <a:lstStyle/>
+          <a:p>
+            <a:pPr algn="ctr"/>
+            <a:r>
+              <a:rPr sz="2200" b="1" i="0">
+                <a:solidFill>
+                  <a:srgbClr val="FFFFFF"/>
+                </a:solidFill>
+                <a:latin typeface="Montserrat"/>
+              </a:rPr>
+              <a:t>D</a:t>
+            </a:r>
+          </a:p>
+        </p:txBody>
+      </p:sp>
+      <p:sp>
+        <p:nvSpPr>
+          <p:cNvPr id="23" name="TextBox 22"/>
+          <p:cNvSpPr txBox="1"/>
+          <p:nvPr/>
+        </p:nvSpPr>
+        <p:spPr>
+          <a:xfrm>
+            <a:off x="7132320" y="4800600"/>
+            <a:ext cx="4114800" cy="868680"/>
+          </a:xfrm>
+          <a:prstGeom prst="rect">
+            <a:avLst/>
+          </a:prstGeom>
+          <a:noFill/>
+        </p:spPr>
+        <p:txBody>
+          <a:bodyPr wrap="square">
+            <a:spAutoFit/>
+          </a:bodyPr>
+          <a:lstStyle/>
+          <a:p>
+            <a:r>
+              <a:rPr sz="1400" b="0" i="0">
+                <a:solidFill>
+                  <a:srgbClr val="1B2330"/>
+                </a:solidFill>
+                <a:latin typeface="Montserrat"/>
+              </a:rPr>
+              <a:t>Regula la presión aguas abajo de forma continua</a:t>
+            </a:r>
+          </a:p>
+        </p:txBody>
+      </p:sp>
+    </p:spTree>
+  </p:cSld>
+  <p:clrMapOvr>
+    <a:masterClrMapping/>
+  </p:clrMapOvr>
+  <mc:AlternateContent xmlns:mc="http://schemas.openxmlformats.org/markup-compatibility/2006">
+    <mc:Choice xmlns:p14="http://schemas.microsoft.com/office/powerpoint/2010/main" Requires="p14">
+      <p:transition spd="med" p14:dur="700">
+        <p14:cube dir="l"/>
+      </p:transition>
+    </mc:Choice>
+    <mc:Fallback>
+      <p:transition spd="med">
+        <p:push dir="l"/>
+      </p:transition>
+    </mc:Fallback>
+  </mc:AlternateContent>
+</p:sld>
+</file>
+
+<file path=ppt/slides/slide26.xml><?xml version="1.0" encoding="utf-8"?>
+<p:sld xmlns:a="http://schemas.openxmlformats.org/drawingml/2006/main" xmlns:p="http://schemas.openxmlformats.org/presentationml/2006/main" xmlns:r="http://schemas.openxmlformats.org/officeDocument/2006/relationships">
+  <p:cSld>
+    <p:spTree>
+      <p:nvGrpSpPr>
+        <p:cNvPr id="1" name=""/>
+        <p:cNvGrpSpPr/>
+        <p:nvPr/>
+      </p:nvGrpSpPr>
+      <p:grpSpPr/>
+      <p:sp>
+        <p:nvSpPr>
+          <p:cNvPr id="2" name="Rectangle 1"/>
+          <p:cNvSpPr/>
+          <p:nvPr/>
+        </p:nvSpPr>
+        <p:spPr>
+          <a:xfrm>
+            <a:off x="0" y="0"/>
+            <a:ext cx="12191695" cy="6858000"/>
+          </a:xfrm>
+          <a:prstGeom prst="rect">
+            <a:avLst/>
+          </a:prstGeom>
+          <a:solidFill>
+            <a:srgbClr val="FFFFFF"/>
+          </a:solidFill>
+          <a:ln>
+            <a:noFill/>
+          </a:ln>
+          <a:effectLst/>
+        </p:spPr>
+        <p:style>
+          <a:lnRef idx="1">
+            <a:schemeClr val="accent1"/>
+          </a:lnRef>
+          <a:fillRef idx="3">
+            <a:schemeClr val="accent1"/>
+          </a:fillRef>
+          <a:effectRef idx="2">
+            <a:schemeClr val="accent1"/>
+          </a:effectRef>
+          <a:fontRef idx="minor">
+            <a:schemeClr val="lt1"/>
+          </a:fontRef>
+        </p:style>
+        <p:txBody>
+          <a:bodyPr rtlCol="0" anchor="ctr"/>
+          <a:lstStyle/>
+          <a:p>
+            <a:pPr algn="ctr"/>
+          </a:p>
+        </p:txBody>
+      </p:sp>
+      <p:sp>
+        <p:nvSpPr>
+          <p:cNvPr id="3" name="TextBox 2"/>
+          <p:cNvSpPr txBox="1"/>
+          <p:nvPr/>
+        </p:nvSpPr>
+        <p:spPr>
+          <a:xfrm>
+            <a:off x="10607040" y="320040"/>
+            <a:ext cx="1371600" cy="365760"/>
+          </a:xfrm>
+          <a:prstGeom prst="rect">
+            <a:avLst/>
+          </a:prstGeom>
+          <a:noFill/>
+        </p:spPr>
+        <p:txBody>
+          <a:bodyPr wrap="square">
+            <a:spAutoFit/>
+          </a:bodyPr>
+          <a:lstStyle/>
+          <a:p>
+            <a:pPr algn="r"/>
+            <a:r>
+              <a:rPr sz="1000" b="1" i="0">
+                <a:solidFill>
+                  <a:srgbClr val="64748B"/>
+                </a:solidFill>
+                <a:latin typeface="Montserrat"/>
+              </a:rPr>
+              <a:t>026 / 027</a:t>
+            </a:r>
+          </a:p>
+        </p:txBody>
+      </p:sp>
+      <p:sp>
+        <p:nvSpPr>
+          <p:cNvPr id="4" name="TextBox 3"/>
+          <p:cNvSpPr txBox="1"/>
+          <p:nvPr/>
+        </p:nvSpPr>
+        <p:spPr>
+          <a:xfrm>
+            <a:off x="457200" y="6419088"/>
+            <a:ext cx="8229600" cy="365760"/>
+          </a:xfrm>
+          <a:prstGeom prst="rect">
+            <a:avLst/>
+          </a:prstGeom>
+          <a:noFill/>
+        </p:spPr>
+        <p:txBody>
+          <a:bodyPr wrap="square">
+            <a:spAutoFit/>
+          </a:bodyPr>
+          <a:lstStyle/>
+          <a:p>
+            <a:r>
+              <a:rPr sz="900" b="0" i="0">
+                <a:solidFill>
+                  <a:srgbClr val="64748B"/>
+                </a:solidFill>
+                <a:latin typeface="Montserrat"/>
+              </a:rPr>
+              <a:t>Curso Gas B · Tema 09 · UNE 60670-1 y -2</a:t>
+            </a:r>
+          </a:p>
+        </p:txBody>
+      </p:sp>
+      <p:sp>
+        <p:nvSpPr>
+          <p:cNvPr id="5" name="Rectangle 4"/>
+          <p:cNvSpPr/>
+          <p:nvPr/>
+        </p:nvSpPr>
+        <p:spPr>
+          <a:xfrm>
+            <a:off x="0" y="0"/>
+            <a:ext cx="12191695" cy="1143000"/>
+          </a:xfrm>
+          <a:prstGeom prst="rect">
+            <a:avLst/>
+          </a:prstGeom>
+          <a:solidFill>
+            <a:srgbClr val="1E8E4B"/>
+          </a:solidFill>
+          <a:ln>
+            <a:noFill/>
+          </a:ln>
+          <a:effectLst/>
+        </p:spPr>
+        <p:style>
+          <a:lnRef idx="1">
+            <a:schemeClr val="accent1"/>
+          </a:lnRef>
+          <a:fillRef idx="3">
+            <a:schemeClr val="accent1"/>
+          </a:fillRef>
+          <a:effectRef idx="2">
+            <a:schemeClr val="accent1"/>
+          </a:effectRef>
+          <a:fontRef idx="minor">
+            <a:schemeClr val="lt1"/>
+          </a:fontRef>
+        </p:style>
+        <p:txBody>
+          <a:bodyPr rtlCol="0" anchor="ctr"/>
+          <a:lstStyle/>
+          <a:p>
+            <a:pPr algn="ctr"/>
+          </a:p>
+        </p:txBody>
+      </p:sp>
+      <p:sp>
+        <p:nvSpPr>
+          <p:cNvPr id="6" name="TextBox 5"/>
+          <p:cNvSpPr txBox="1"/>
+          <p:nvPr/>
+        </p:nvSpPr>
+        <p:spPr>
+          <a:xfrm>
+            <a:off x="822960" y="274320"/>
+            <a:ext cx="10515600" cy="640080"/>
+          </a:xfrm>
+          <a:prstGeom prst="rect">
+            <a:avLst/>
+          </a:prstGeom>
+          <a:noFill/>
+        </p:spPr>
+        <p:txBody>
+          <a:bodyPr wrap="square">
+            <a:spAutoFit/>
+          </a:bodyPr>
+          <a:lstStyle/>
+          <a:p>
+            <a:r>
+              <a:rPr sz="2400" b="1" i="0">
+                <a:solidFill>
+                  <a:srgbClr val="FFFFFF"/>
+                </a:solidFill>
+                <a:latin typeface="Montserrat"/>
+              </a:rPr>
+              <a:t>✔  RESPUESTA:  B</a:t>
+            </a:r>
+          </a:p>
+        </p:txBody>
+      </p:sp>
+      <p:sp>
+        <p:nvSpPr>
+          <p:cNvPr id="7" name="TextBox 6"/>
+          <p:cNvSpPr txBox="1"/>
+          <p:nvPr/>
+        </p:nvSpPr>
+        <p:spPr>
+          <a:xfrm>
+            <a:off x="822960" y="1417320"/>
+            <a:ext cx="10515600" cy="914400"/>
+          </a:xfrm>
+          <a:prstGeom prst="rect">
+            <a:avLst/>
+          </a:prstGeom>
+          <a:noFill/>
+        </p:spPr>
+        <p:txBody>
+          <a:bodyPr wrap="square">
+            <a:spAutoFit/>
+          </a:bodyPr>
+          <a:lstStyle/>
+          <a:p>
+            <a:r>
+              <a:rPr sz="1800" b="1" i="0">
+                <a:solidFill>
+                  <a:srgbClr val="64748B"/>
+                </a:solidFill>
+                <a:latin typeface="Montserrat"/>
+              </a:rPr>
+              <a:t>¿Qué hace la válvula de alivio de seguridad (VAS), o de sobrepresión?</a:t>
+            </a:r>
+          </a:p>
+        </p:txBody>
+      </p:sp>
+      <p:sp>
+        <p:nvSpPr>
+          <p:cNvPr id="8" name="Rounded Rectangle 7"/>
+          <p:cNvSpPr/>
+          <p:nvPr/>
+        </p:nvSpPr>
+        <p:spPr>
+          <a:xfrm>
+            <a:off x="822960" y="2514600"/>
+            <a:ext cx="10515600" cy="914400"/>
+          </a:xfrm>
+          <a:prstGeom prst="roundRect">
+            <a:avLst/>
+          </a:prstGeom>
+          <a:solidFill>
+            <a:srgbClr val="E9F6EE"/>
+          </a:solidFill>
+          <a:ln w="12700">
+            <a:solidFill>
+              <a:srgbClr val="1E8E4B"/>
+            </a:solidFill>
+          </a:ln>
+          <a:effectLst/>
+        </p:spPr>
+        <p:style>
+          <a:lnRef idx="1">
+            <a:schemeClr val="accent1"/>
+          </a:lnRef>
+          <a:fillRef idx="3">
+            <a:schemeClr val="accent1"/>
+          </a:fillRef>
+          <a:effectRef idx="2">
+            <a:schemeClr val="accent1"/>
+          </a:effectRef>
+          <a:fontRef idx="minor">
+            <a:schemeClr val="lt1"/>
+          </a:fontRef>
+        </p:style>
+        <p:txBody>
+          <a:bodyPr rtlCol="0" anchor="ctr"/>
+          <a:lstStyle/>
+          <a:p>
+            <a:pPr algn="ctr"/>
+          </a:p>
+        </p:txBody>
+      </p:sp>
+      <p:sp>
+        <p:nvSpPr>
+          <p:cNvPr id="9" name="TextBox 8"/>
+          <p:cNvSpPr txBox="1"/>
+          <p:nvPr/>
+        </p:nvSpPr>
+        <p:spPr>
+          <a:xfrm>
+            <a:off x="1097280" y="2697480"/>
+            <a:ext cx="10058400" cy="640080"/>
+          </a:xfrm>
+          <a:prstGeom prst="rect">
+            <a:avLst/>
+          </a:prstGeom>
+          <a:noFill/>
+        </p:spPr>
+        <p:txBody>
+          <a:bodyPr wrap="square">
+            <a:spAutoFit/>
+          </a:bodyPr>
+          <a:lstStyle/>
+          <a:p>
+            <a:r>
+              <a:rPr sz="1800" b="1" i="0">
+                <a:solidFill>
+                  <a:srgbClr val="1E8E4B"/>
+                </a:solidFill>
+                <a:latin typeface="Montserrat"/>
+              </a:rPr>
+              <a:t>B.  </a:t>
+            </a:r>
+            <a:r>
+              <a:rPr sz="1800" b="1" i="0">
+                <a:solidFill>
+                  <a:srgbClr val="1E2761"/>
+                </a:solidFill>
+                <a:latin typeface="Montserrat"/>
+              </a:rPr>
+              <a:t>Alivia soltando un poco de gas al exterior para bajar la presión</a:t>
+            </a:r>
+          </a:p>
+        </p:txBody>
+      </p:sp>
+      <p:sp>
+        <p:nvSpPr>
+          <p:cNvPr id="10" name="TextBox 9"/>
+          <p:cNvSpPr txBox="1"/>
+          <p:nvPr/>
+        </p:nvSpPr>
+        <p:spPr>
+          <a:xfrm>
+            <a:off x="822960" y="3749039"/>
+            <a:ext cx="10515600" cy="2194560"/>
+          </a:xfrm>
+          <a:prstGeom prst="rect">
+            <a:avLst/>
+          </a:prstGeom>
+          <a:noFill/>
+        </p:spPr>
+        <p:txBody>
+          <a:bodyPr wrap="square">
+            <a:spAutoFit/>
+          </a:bodyPr>
+          <a:lstStyle/>
+          <a:p>
+            <a:r>
+              <a:rPr sz="1500" b="1" i="0">
+                <a:solidFill>
+                  <a:srgbClr val="E8801A"/>
+                </a:solidFill>
+                <a:latin typeface="Montserrat"/>
+              </a:rPr>
+              <a:t>Por qué:  </a:t>
+            </a:r>
+            <a:r>
+              <a:rPr sz="1500" b="0" i="0">
+                <a:solidFill>
+                  <a:srgbClr val="1B2330"/>
+                </a:solidFill>
+                <a:latin typeface="Montserrat"/>
+              </a:rPr>
+              <a:t>La VAS alivia: evacúa una pequeña cantidad de gas al exterior para reducir la presión y luego sigue trabajando.</a:t>
+            </a:r>
+          </a:p>
+        </p:txBody>
+      </p:sp>
+    </p:spTree>
+  </p:cSld>
+  <p:clrMapOvr>
+    <a:masterClrMapping/>
+  </p:clrMapOvr>
+  <mc:AlternateContent xmlns:mc="http://schemas.openxmlformats.org/markup-compatibility/2006">
+    <mc:Choice xmlns:p14="http://schemas.microsoft.com/office/powerpoint/2010/main" Requires="p14">
+      <p:transition spd="med" p14:dur="700">
+        <p14:cube dir="r"/>
+      </p:transition>
+    </mc:Choice>
+    <mc:Fallback>
+      <p:transition spd="med">
+        <p:push dir="r"/>
+      </p:transition>
+    </mc:Fallback>
+  </mc:AlternateContent>
+</p:sld>
+</file>
+
+<file path=ppt/slides/slide27.xml><?xml version="1.0" encoding="utf-8"?>
+<p:sld xmlns:a="http://schemas.openxmlformats.org/drawingml/2006/main" xmlns:p="http://schemas.openxmlformats.org/presentationml/2006/main" xmlns:r="http://schemas.openxmlformats.org/officeDocument/2006/relationships">
+  <p:cSld>
+    <p:spTree>
+      <p:nvGrpSpPr>
+        <p:cNvPr id="1" name=""/>
+        <p:cNvGrpSpPr/>
+        <p:nvPr/>
+      </p:nvGrpSpPr>
+      <p:grpSpPr/>
+      <p:sp>
+        <p:nvSpPr>
+          <p:cNvPr id="2" name="Rectangle 1"/>
+          <p:cNvSpPr/>
+          <p:nvPr/>
+        </p:nvSpPr>
+        <p:spPr>
+          <a:xfrm>
+            <a:off x="0" y="0"/>
+            <a:ext cx="12191695" cy="6858000"/>
+          </a:xfrm>
+          <a:prstGeom prst="rect">
+            <a:avLst/>
+          </a:prstGeom>
+          <a:solidFill>
+            <a:srgbClr val="1E2761"/>
+          </a:solidFill>
+          <a:ln>
+            <a:noFill/>
+          </a:ln>
+          <a:effectLst/>
+        </p:spPr>
+        <p:style>
+          <a:lnRef idx="1">
+            <a:schemeClr val="accent1"/>
+          </a:lnRef>
+          <a:fillRef idx="3">
+            <a:schemeClr val="accent1"/>
+          </a:fillRef>
+          <a:effectRef idx="2">
+            <a:schemeClr val="accent1"/>
+          </a:effectRef>
+          <a:fontRef idx="minor">
+            <a:schemeClr val="lt1"/>
+          </a:fontRef>
+        </p:style>
+        <p:txBody>
+          <a:bodyPr rtlCol="0" anchor="ctr"/>
+          <a:lstStyle/>
+          <a:p>
+            <a:pPr algn="ctr"/>
+          </a:p>
+        </p:txBody>
+      </p:sp>
+      <p:sp>
+        <p:nvSpPr>
+          <p:cNvPr id="3" name="TextBox 2"/>
+          <p:cNvSpPr txBox="1"/>
+          <p:nvPr/>
+        </p:nvSpPr>
+        <p:spPr>
+          <a:xfrm>
+            <a:off x="822960" y="640080"/>
+            <a:ext cx="10515600" cy="457200"/>
+          </a:xfrm>
+          <a:prstGeom prst="rect">
+            <a:avLst/>
+          </a:prstGeom>
+          <a:noFill/>
+        </p:spPr>
+        <p:txBody>
+          <a:bodyPr wrap="square">
+            <a:spAutoFit/>
+          </a:bodyPr>
+          <a:lstStyle/>
+          <a:p>
+            <a:r>
+              <a:rPr sz="1400" b="1" i="0">
+                <a:solidFill>
+                  <a:srgbClr val="F4A24C"/>
+                </a:solidFill>
+                <a:latin typeface="Montserrat"/>
+              </a:rPr>
+              <a:t>LO QUE YA DOMINAS</a:t>
+            </a:r>
+          </a:p>
+        </p:txBody>
+      </p:sp>
+      <p:sp>
+        <p:nvSpPr>
+          <p:cNvPr id="4" name="Rectangle 3"/>
+          <p:cNvSpPr/>
+          <p:nvPr/>
+        </p:nvSpPr>
+        <p:spPr>
+          <a:xfrm>
+            <a:off x="868680" y="1051560"/>
+            <a:ext cx="1463040" cy="82296"/>
+          </a:xfrm>
+          <a:prstGeom prst="rect">
+            <a:avLst/>
+          </a:prstGeom>
+          <a:solidFill>
+            <a:srgbClr val="E8801A"/>
+          </a:solidFill>
+          <a:ln>
+            <a:noFill/>
+          </a:ln>
+          <a:effectLst/>
+        </p:spPr>
+        <p:style>
+          <a:lnRef idx="1">
+            <a:schemeClr val="accent1"/>
+          </a:lnRef>
+          <a:fillRef idx="3">
+            <a:schemeClr val="accent1"/>
+          </a:fillRef>
+          <a:effectRef idx="2">
+            <a:schemeClr val="accent1"/>
+          </a:effectRef>
+          <a:fontRef idx="minor">
+            <a:schemeClr val="lt1"/>
+          </a:fontRef>
+        </p:style>
+        <p:txBody>
+          <a:bodyPr rtlCol="0" anchor="ctr"/>
+          <a:lstStyle/>
+          <a:p>
+            <a:pPr algn="ctr"/>
+          </a:p>
+        </p:txBody>
+      </p:sp>
+      <p:sp>
+        <p:nvSpPr>
+          <p:cNvPr id="5" name="TextBox 4"/>
+          <p:cNvSpPr txBox="1"/>
+          <p:nvPr/>
+        </p:nvSpPr>
+        <p:spPr>
+          <a:xfrm>
+            <a:off x="822960" y="1234440"/>
+            <a:ext cx="10515600" cy="1097280"/>
+          </a:xfrm>
+          <a:prstGeom prst="rect">
+            <a:avLst/>
+          </a:prstGeom>
+          <a:noFill/>
+        </p:spPr>
+        <p:txBody>
+          <a:bodyPr wrap="square">
+            <a:spAutoFit/>
+          </a:bodyPr>
+          <a:lstStyle/>
+          <a:p>
+            <a:r>
+              <a:rPr sz="3400" b="1" i="0">
+                <a:solidFill>
+                  <a:srgbClr val="FFFFFF"/>
+                </a:solidFill>
+                <a:latin typeface="Montserrat"/>
+              </a:rPr>
+              <a:t>Ya dominas el diccionario entero</a:t>
+            </a:r>
+          </a:p>
+        </p:txBody>
+      </p:sp>
+      <p:sp>
+        <p:nvSpPr>
+          <p:cNvPr id="6" name="TextBox 5"/>
+          <p:cNvSpPr txBox="1"/>
+          <p:nvPr/>
+        </p:nvSpPr>
+        <p:spPr>
+          <a:xfrm>
+            <a:off x="822960" y="2606040"/>
+            <a:ext cx="10515600" cy="2743200"/>
+          </a:xfrm>
+          <a:prstGeom prst="rect">
+            <a:avLst/>
+          </a:prstGeom>
+          <a:noFill/>
+        </p:spPr>
+        <p:txBody>
+          <a:bodyPr wrap="square">
+            <a:spAutoFit/>
+          </a:bodyPr>
+          <a:lstStyle/>
+          <a:p>
+            <a:pPr>
+              <a:spcAft>
+                <a:spcPts val="1200"/>
+              </a:spcAft>
+            </a:pPr>
+            <a:r>
+              <a:rPr sz="2000" b="1" i="0">
+                <a:solidFill>
+                  <a:srgbClr val="F4A24C"/>
+                </a:solidFill>
+                <a:latin typeface="Montserrat"/>
+              </a:rPr>
+              <a:t>✓  </a:t>
+            </a:r>
+            <a:r>
+              <a:rPr sz="1900" b="0" i="0">
+                <a:solidFill>
+                  <a:srgbClr val="FFFFFF"/>
+                </a:solidFill>
+                <a:latin typeface="Montserrat"/>
+              </a:rPr>
+              <a:t>La familia de presiones: MOP, MIP, TOP, DP, STP, CTP</a:t>
+            </a:r>
+          </a:p>
+          <a:p>
+            <a:pPr>
+              <a:spcAft>
+                <a:spcPts val="1200"/>
+              </a:spcAft>
+            </a:pPr>
+            <a:r>
+              <a:rPr sz="2000" b="1" i="0">
+                <a:solidFill>
+                  <a:srgbClr val="F4A24C"/>
+                </a:solidFill>
+                <a:latin typeface="Montserrat"/>
+              </a:rPr>
+              <a:t>✓  </a:t>
+            </a:r>
+            <a:r>
+              <a:rPr sz="1900" b="0" i="0">
+                <a:solidFill>
+                  <a:srgbClr val="FFFFFF"/>
+                </a:solidFill>
+                <a:latin typeface="Montserrat"/>
+              </a:rPr>
+              <a:t>El árbol de llaves, de la calle al aparato</a:t>
+            </a:r>
+          </a:p>
+          <a:p>
+            <a:pPr>
+              <a:spcAft>
+                <a:spcPts val="1200"/>
+              </a:spcAft>
+            </a:pPr>
+            <a:r>
+              <a:rPr sz="2000" b="1" i="0">
+                <a:solidFill>
+                  <a:srgbClr val="F4A24C"/>
+                </a:solidFill>
+                <a:latin typeface="Montserrat"/>
+              </a:rPr>
+              <a:t>✓  </a:t>
+            </a:r>
+            <a:r>
+              <a:rPr sz="1900" b="0" i="0">
+                <a:solidFill>
+                  <a:srgbClr val="FFFFFF"/>
+                </a:solidFill>
+                <a:latin typeface="Montserrat"/>
+              </a:rPr>
+              <a:t>Tiro y revoco: dónde aparece el CO</a:t>
+            </a:r>
+          </a:p>
+          <a:p>
+            <a:pPr>
+              <a:spcAft>
+                <a:spcPts val="1200"/>
+              </a:spcAft>
+            </a:pPr>
+            <a:r>
+              <a:rPr sz="2000" b="1" i="0">
+                <a:solidFill>
+                  <a:srgbClr val="F4A24C"/>
+                </a:solidFill>
+                <a:latin typeface="Montserrat"/>
+              </a:rPr>
+              <a:t>✓  </a:t>
+            </a:r>
+            <a:r>
+              <a:rPr sz="1900" b="0" i="0">
+                <a:solidFill>
+                  <a:srgbClr val="FFFFFF"/>
+                </a:solidFill>
+                <a:latin typeface="Montserrat"/>
+              </a:rPr>
+              <a:t>70 kW, 450 °C y 60 cm decididos en obra</a:t>
+            </a:r>
+          </a:p>
+        </p:txBody>
+      </p:sp>
+      <p:sp>
+        <p:nvSpPr>
+          <p:cNvPr id="7" name="Rounded Rectangle 6"/>
+          <p:cNvSpPr/>
+          <p:nvPr/>
+        </p:nvSpPr>
+        <p:spPr>
+          <a:xfrm>
+            <a:off x="822960" y="5532120"/>
+            <a:ext cx="10515600" cy="822960"/>
+          </a:xfrm>
+          <a:prstGeom prst="roundRect">
+            <a:avLst/>
+          </a:prstGeom>
+          <a:solidFill>
+            <a:srgbClr val="E8801A"/>
+          </a:solidFill>
+          <a:ln>
+            <a:noFill/>
+          </a:ln>
+          <a:effectLst/>
+        </p:spPr>
+        <p:style>
+          <a:lnRef idx="1">
+            <a:schemeClr val="accent1"/>
+          </a:lnRef>
+          <a:fillRef idx="3">
+            <a:schemeClr val="accent1"/>
+          </a:fillRef>
+          <a:effectRef idx="2">
+            <a:schemeClr val="accent1"/>
+          </a:effectRef>
+          <a:fontRef idx="minor">
+            <a:schemeClr val="lt1"/>
+          </a:fontRef>
+        </p:style>
+        <p:txBody>
+          <a:bodyPr rtlCol="0" anchor="ctr"/>
+          <a:lstStyle/>
+          <a:p>
+            <a:pPr algn="ctr"/>
+          </a:p>
+        </p:txBody>
+      </p:sp>
+      <p:sp>
+        <p:nvSpPr>
+          <p:cNvPr id="8" name="TextBox 7"/>
+          <p:cNvSpPr txBox="1"/>
+          <p:nvPr/>
+        </p:nvSpPr>
+        <p:spPr>
+          <a:xfrm>
+            <a:off x="1051560" y="5623560"/>
+            <a:ext cx="10058400" cy="640080"/>
+          </a:xfrm>
+          <a:prstGeom prst="rect">
+            <a:avLst/>
+          </a:prstGeom>
+          <a:noFill/>
+        </p:spPr>
+        <p:txBody>
+          <a:bodyPr wrap="square">
+            <a:spAutoFit/>
+          </a:bodyPr>
+          <a:lstStyle/>
+          <a:p>
+            <a:r>
+              <a:rPr sz="1500" b="1" i="1">
+                <a:solidFill>
+                  <a:srgbClr val="1E2761"/>
+                </a:solidFill>
+                <a:latin typeface="Montserrat"/>
+              </a:rPr>
+              <a:t>Tema 09 cerrado. Ya piensas y hablas como un gasista de categoría B.</a:t>
+            </a:r>
+          </a:p>
+        </p:txBody>
+      </p:sp>
+    </p:spTree>
+  </p:cSld>
+  <p:clrMapOvr>
+    <a:masterClrMapping/>
+  </p:clrMapOvr>
+  <mc:AlternateContent xmlns:mc="http://schemas.openxmlformats.org/markup-compatibility/2006">
+    <mc:Choice xmlns:p14="http://schemas.microsoft.com/office/powerpoint/2010/main" Requires="p14">
+      <p:transition spd="med" p14:dur="700">
+        <p14:cube dir="l"/>
+      </p:transition>
+    </mc:Choice>
+    <mc:Fallback>
+      <p:transition spd="med">
+        <p:push dir="l"/>
+      </p:transition>
+    </mc:Fallback>
+  </mc:AlternateContent>
 </p:sld>
 </file>
 
@@ -11308,7 +15898,7 @@
                 </a:solidFill>
                 <a:latin typeface="Montserrat"/>
               </a:rPr>
-              <a:t>003 / 021</a:t>
+              <a:t>003 / 027</a:t>
             </a:r>
           </a:p>
         </p:txBody>
@@ -11417,7 +16007,7 @@
       </p:sp>
       <p:sp>
         <p:nvSpPr>
-          <p:cNvPr id="7" name="Rounded Rectangle 6"/>
+          <p:cNvPr id="7" name="Rectangle 6"/>
           <p:cNvSpPr/>
           <p:nvPr/>
         </p:nvSpPr>
@@ -11426,7 +16016,7 @@
             <a:off x="868680" y="1673352"/>
             <a:ext cx="2011680" cy="73152"/>
           </a:xfrm>
-          <a:prstGeom prst="roundRect">
+          <a:prstGeom prst="rect">
             <a:avLst/>
           </a:prstGeom>
           <a:solidFill>
@@ -11712,6 +16302,18 @@
   <p:clrMapOvr>
     <a:masterClrMapping/>
   </p:clrMapOvr>
+  <mc:AlternateContent xmlns:mc="http://schemas.openxmlformats.org/markup-compatibility/2006">
+    <mc:Choice xmlns:p14="http://schemas.microsoft.com/office/powerpoint/2010/main" Requires="p14">
+      <p:transition spd="med" p14:dur="700">
+        <p14:cube dir="l"/>
+      </p:transition>
+    </mc:Choice>
+    <mc:Fallback>
+      <p:transition spd="med">
+        <p:push dir="l"/>
+      </p:transition>
+    </mc:Fallback>
+  </mc:AlternateContent>
 </p:sld>
 </file>
 
@@ -11799,7 +16401,7 @@
                 </a:solidFill>
                 <a:latin typeface="Montserrat"/>
               </a:rPr>
-              <a:t>004 / 021</a:t>
+              <a:t>004 / 027</a:t>
             </a:r>
           </a:p>
         </p:txBody>
@@ -11908,7 +16510,7 @@
       </p:sp>
       <p:sp>
         <p:nvSpPr>
-          <p:cNvPr id="7" name="Rounded Rectangle 6"/>
+          <p:cNvPr id="7" name="Rectangle 6"/>
           <p:cNvSpPr/>
           <p:nvPr/>
         </p:nvSpPr>
@@ -11917,7 +16519,7 @@
             <a:off x="868680" y="1627632"/>
             <a:ext cx="2011680" cy="73152"/>
           </a:xfrm>
-          <a:prstGeom prst="roundRect">
+          <a:prstGeom prst="rect">
             <a:avLst/>
           </a:prstGeom>
           <a:solidFill>
@@ -11959,7 +16561,7 @@
         <p:spPr>
           <a:xfrm>
             <a:off x="822960" y="1965960"/>
-            <a:ext cx="4983480" cy="4206240"/>
+            <a:ext cx="5029200" cy="4206240"/>
           </a:xfrm>
           <a:prstGeom prst="rect">
             <a:avLst/>
@@ -12081,8 +16683,8 @@
         </p:nvSpPr>
         <p:spPr>
           <a:xfrm>
-            <a:off x="5806440" y="1051560"/>
-            <a:ext cx="5298947" cy="4629150"/>
+            <a:off x="6080760" y="1965960"/>
+            <a:ext cx="5303520" cy="4572000"/>
           </a:xfrm>
           <a:prstGeom prst="roundRect">
             <a:avLst/>
@@ -12127,8 +16729,8 @@
         </p:nvSpPr>
         <p:spPr>
           <a:xfrm>
-            <a:off x="6080760" y="2726055"/>
-            <a:ext cx="4750307" cy="1280160"/>
+            <a:off x="6355080" y="3611880"/>
+            <a:ext cx="4754880" cy="1280160"/>
           </a:xfrm>
           <a:prstGeom prst="rect">
             <a:avLst/>
@@ -12149,7 +16751,7 @@
                 </a:solidFill>
                 <a:latin typeface="Montserrat"/>
               </a:rPr>
-              <a:t>IMAGEN REALISTA</a:t>
+              <a:t>IMAGEN</a:t>
             </a:r>
           </a:p>
           <a:p>
@@ -12171,6 +16773,18 @@
   <p:clrMapOvr>
     <a:masterClrMapping/>
   </p:clrMapOvr>
+  <mc:AlternateContent xmlns:mc="http://schemas.openxmlformats.org/markup-compatibility/2006">
+    <mc:Choice xmlns:p14="http://schemas.microsoft.com/office/powerpoint/2010/main" Requires="p14">
+      <p:transition spd="med" p14:dur="700">
+        <p14:cube dir="r"/>
+      </p:transition>
+    </mc:Choice>
+    <mc:Fallback>
+      <p:transition spd="med">
+        <p:push dir="r"/>
+      </p:transition>
+    </mc:Fallback>
+  </mc:AlternateContent>
 </p:sld>
 </file>
 
@@ -12258,7 +16872,7 @@
                 </a:solidFill>
                 <a:latin typeface="Montserrat"/>
               </a:rPr>
-              <a:t>005 / 021</a:t>
+              <a:t>005 / 027</a:t>
             </a:r>
           </a:p>
         </p:txBody>
@@ -12367,7 +16981,7 @@
       </p:sp>
       <p:sp>
         <p:nvSpPr>
-          <p:cNvPr id="7" name="Rounded Rectangle 6"/>
+          <p:cNvPr id="7" name="Rectangle 6"/>
           <p:cNvSpPr/>
           <p:nvPr/>
         </p:nvSpPr>
@@ -12376,7 +16990,7 @@
             <a:off x="868680" y="1627632"/>
             <a:ext cx="2011680" cy="73152"/>
           </a:xfrm>
-          <a:prstGeom prst="roundRect">
+          <a:prstGeom prst="rect">
             <a:avLst/>
           </a:prstGeom>
           <a:solidFill>
@@ -12417,8 +17031,8 @@
         </p:nvSpPr>
         <p:spPr>
           <a:xfrm>
-            <a:off x="822960" y="1965960"/>
-            <a:ext cx="4983480" cy="4206240"/>
+            <a:off x="6355080" y="1965960"/>
+            <a:ext cx="5029200" cy="4206240"/>
           </a:xfrm>
           <a:prstGeom prst="rect">
             <a:avLst/>
@@ -12540,8 +17154,8 @@
         </p:nvSpPr>
         <p:spPr>
           <a:xfrm>
-            <a:off x="5806440" y="1051560"/>
-            <a:ext cx="5298947" cy="4629150"/>
+            <a:off x="822960" y="1965960"/>
+            <a:ext cx="5303520" cy="4572000"/>
           </a:xfrm>
           <a:prstGeom prst="roundRect">
             <a:avLst/>
@@ -12586,8 +17200,8 @@
         </p:nvSpPr>
         <p:spPr>
           <a:xfrm>
-            <a:off x="6080760" y="2726055"/>
-            <a:ext cx="4750307" cy="1280160"/>
+            <a:off x="1097280" y="3611880"/>
+            <a:ext cx="4754880" cy="1280160"/>
           </a:xfrm>
           <a:prstGeom prst="rect">
             <a:avLst/>
@@ -12608,7 +17222,7 @@
                 </a:solidFill>
                 <a:latin typeface="Montserrat"/>
               </a:rPr>
-              <a:t>IMAGEN REALISTA</a:t>
+              <a:t>IMAGEN</a:t>
             </a:r>
           </a:p>
           <a:p>
@@ -12630,6 +17244,18 @@
   <p:clrMapOvr>
     <a:masterClrMapping/>
   </p:clrMapOvr>
+  <mc:AlternateContent xmlns:mc="http://schemas.openxmlformats.org/markup-compatibility/2006">
+    <mc:Choice xmlns:p14="http://schemas.microsoft.com/office/powerpoint/2010/main" Requires="p14">
+      <p:transition spd="med" p14:dur="700">
+        <p14:cube dir="l"/>
+      </p:transition>
+    </mc:Choice>
+    <mc:Fallback>
+      <p:transition spd="med">
+        <p:push dir="l"/>
+      </p:transition>
+    </mc:Fallback>
+  </mc:AlternateContent>
 </p:sld>
 </file>
 
@@ -12717,7 +17343,7 @@
                 </a:solidFill>
                 <a:latin typeface="Montserrat"/>
               </a:rPr>
-              <a:t>006 / 021</a:t>
+              <a:t>006 / 027</a:t>
             </a:r>
           </a:p>
         </p:txBody>
@@ -12826,7 +17452,7 @@
       </p:sp>
       <p:sp>
         <p:nvSpPr>
-          <p:cNvPr id="7" name="Rounded Rectangle 6"/>
+          <p:cNvPr id="7" name="Rectangle 6"/>
           <p:cNvSpPr/>
           <p:nvPr/>
         </p:nvSpPr>
@@ -12835,7 +17461,7 @@
             <a:off x="868680" y="1627632"/>
             <a:ext cx="2011680" cy="73152"/>
           </a:xfrm>
-          <a:prstGeom prst="roundRect">
+          <a:prstGeom prst="rect">
             <a:avLst/>
           </a:prstGeom>
           <a:solidFill>
@@ -12877,7 +17503,7 @@
         <p:spPr>
           <a:xfrm>
             <a:off x="822960" y="1965960"/>
-            <a:ext cx="4983480" cy="4206240"/>
+            <a:ext cx="5029200" cy="4206240"/>
           </a:xfrm>
           <a:prstGeom prst="rect">
             <a:avLst/>
@@ -12999,8 +17625,8 @@
         </p:nvSpPr>
         <p:spPr>
           <a:xfrm>
-            <a:off x="5806440" y="1051560"/>
-            <a:ext cx="5298947" cy="4629150"/>
+            <a:off x="6080760" y="1965960"/>
+            <a:ext cx="5303520" cy="4572000"/>
           </a:xfrm>
           <a:prstGeom prst="roundRect">
             <a:avLst/>
@@ -13045,8 +17671,8 @@
         </p:nvSpPr>
         <p:spPr>
           <a:xfrm>
-            <a:off x="6080760" y="2726055"/>
-            <a:ext cx="4750307" cy="1280160"/>
+            <a:off x="6355080" y="3611880"/>
+            <a:ext cx="4754880" cy="1280160"/>
           </a:xfrm>
           <a:prstGeom prst="rect">
             <a:avLst/>
@@ -13067,7 +17693,7 @@
                 </a:solidFill>
                 <a:latin typeface="Montserrat"/>
               </a:rPr>
-              <a:t>IMAGEN REALISTA</a:t>
+              <a:t>IMAGEN</a:t>
             </a:r>
           </a:p>
           <a:p>
@@ -13089,6 +17715,18 @@
   <p:clrMapOvr>
     <a:masterClrMapping/>
   </p:clrMapOvr>
+  <mc:AlternateContent xmlns:mc="http://schemas.openxmlformats.org/markup-compatibility/2006">
+    <mc:Choice xmlns:p14="http://schemas.microsoft.com/office/powerpoint/2010/main" Requires="p14">
+      <p:transition spd="med" p14:dur="700">
+        <p14:cube dir="r"/>
+      </p:transition>
+    </mc:Choice>
+    <mc:Fallback>
+      <p:transition spd="med">
+        <p:push dir="r"/>
+      </p:transition>
+    </mc:Fallback>
+  </mc:AlternateContent>
 </p:sld>
 </file>
 
@@ -13176,7 +17814,7 @@
                 </a:solidFill>
                 <a:latin typeface="Montserrat"/>
               </a:rPr>
-              <a:t>007 / 021</a:t>
+              <a:t>007 / 027</a:t>
             </a:r>
           </a:p>
         </p:txBody>
@@ -13285,7 +17923,7 @@
       </p:sp>
       <p:sp>
         <p:nvSpPr>
-          <p:cNvPr id="7" name="Rounded Rectangle 6"/>
+          <p:cNvPr id="7" name="Rectangle 6"/>
           <p:cNvSpPr/>
           <p:nvPr/>
         </p:nvSpPr>
@@ -13294,7 +17932,7 @@
             <a:off x="868680" y="1627632"/>
             <a:ext cx="2011680" cy="73152"/>
           </a:xfrm>
-          <a:prstGeom prst="roundRect">
+          <a:prstGeom prst="rect">
             <a:avLst/>
           </a:prstGeom>
           <a:solidFill>
@@ -13335,8 +17973,8 @@
         </p:nvSpPr>
         <p:spPr>
           <a:xfrm>
-            <a:off x="822960" y="1965960"/>
-            <a:ext cx="4983480" cy="4206240"/>
+            <a:off x="6355080" y="1965960"/>
+            <a:ext cx="5029200" cy="4206240"/>
           </a:xfrm>
           <a:prstGeom prst="rect">
             <a:avLst/>
@@ -13458,8 +18096,8 @@
         </p:nvSpPr>
         <p:spPr>
           <a:xfrm>
-            <a:off x="5806440" y="1051560"/>
-            <a:ext cx="5298947" cy="4629150"/>
+            <a:off x="822960" y="1965960"/>
+            <a:ext cx="5303520" cy="4572000"/>
           </a:xfrm>
           <a:prstGeom prst="roundRect">
             <a:avLst/>
@@ -13504,8 +18142,8 @@
         </p:nvSpPr>
         <p:spPr>
           <a:xfrm>
-            <a:off x="6080760" y="2726055"/>
-            <a:ext cx="4750307" cy="1280160"/>
+            <a:off x="1097280" y="3611880"/>
+            <a:ext cx="4754880" cy="1280160"/>
           </a:xfrm>
           <a:prstGeom prst="rect">
             <a:avLst/>
@@ -13526,7 +18164,7 @@
                 </a:solidFill>
                 <a:latin typeface="Montserrat"/>
               </a:rPr>
-              <a:t>IMAGEN REALISTA</a:t>
+              <a:t>IMAGEN</a:t>
             </a:r>
           </a:p>
           <a:p>
@@ -13548,6 +18186,18 @@
   <p:clrMapOvr>
     <a:masterClrMapping/>
   </p:clrMapOvr>
+  <mc:AlternateContent xmlns:mc="http://schemas.openxmlformats.org/markup-compatibility/2006">
+    <mc:Choice xmlns:p14="http://schemas.microsoft.com/office/powerpoint/2010/main" Requires="p14">
+      <p:transition spd="med" p14:dur="700">
+        <p14:cube dir="l"/>
+      </p:transition>
+    </mc:Choice>
+    <mc:Fallback>
+      <p:transition spd="med">
+        <p:push dir="l"/>
+      </p:transition>
+    </mc:Fallback>
+  </mc:AlternateContent>
 </p:sld>
 </file>
 
@@ -13635,7 +18285,7 @@
                 </a:solidFill>
                 <a:latin typeface="Montserrat"/>
               </a:rPr>
-              <a:t>008 / 021</a:t>
+              <a:t>008 / 027</a:t>
             </a:r>
           </a:p>
         </p:txBody>
@@ -13744,7 +18394,7 @@
       </p:sp>
       <p:sp>
         <p:nvSpPr>
-          <p:cNvPr id="7" name="Rounded Rectangle 6"/>
+          <p:cNvPr id="7" name="Rectangle 6"/>
           <p:cNvSpPr/>
           <p:nvPr/>
         </p:nvSpPr>
@@ -13753,7 +18403,7 @@
             <a:off x="868680" y="1627632"/>
             <a:ext cx="2011680" cy="73152"/>
           </a:xfrm>
-          <a:prstGeom prst="roundRect">
+          <a:prstGeom prst="rect">
             <a:avLst/>
           </a:prstGeom>
           <a:solidFill>
@@ -13795,7 +18445,7 @@
         <p:spPr>
           <a:xfrm>
             <a:off x="822960" y="1965960"/>
-            <a:ext cx="4983480" cy="4206240"/>
+            <a:ext cx="5029200" cy="4206240"/>
           </a:xfrm>
           <a:prstGeom prst="rect">
             <a:avLst/>
@@ -13917,8 +18567,8 @@
         </p:nvSpPr>
         <p:spPr>
           <a:xfrm>
-            <a:off x="5806440" y="1051560"/>
-            <a:ext cx="5298947" cy="4629150"/>
+            <a:off x="6080760" y="1965960"/>
+            <a:ext cx="5303520" cy="4572000"/>
           </a:xfrm>
           <a:prstGeom prst="roundRect">
             <a:avLst/>
@@ -13963,8 +18613,8 @@
         </p:nvSpPr>
         <p:spPr>
           <a:xfrm>
-            <a:off x="6080760" y="2726055"/>
-            <a:ext cx="4750307" cy="1280160"/>
+            <a:off x="6355080" y="3611880"/>
+            <a:ext cx="4754880" cy="1280160"/>
           </a:xfrm>
           <a:prstGeom prst="rect">
             <a:avLst/>
@@ -13985,7 +18635,7 @@
                 </a:solidFill>
                 <a:latin typeface="Montserrat"/>
               </a:rPr>
-              <a:t>IMAGEN REALISTA</a:t>
+              <a:t>IMAGEN</a:t>
             </a:r>
           </a:p>
           <a:p>
@@ -14007,6 +18657,18 @@
   <p:clrMapOvr>
     <a:masterClrMapping/>
   </p:clrMapOvr>
+  <mc:AlternateContent xmlns:mc="http://schemas.openxmlformats.org/markup-compatibility/2006">
+    <mc:Choice xmlns:p14="http://schemas.microsoft.com/office/powerpoint/2010/main" Requires="p14">
+      <p:transition spd="med" p14:dur="700">
+        <p14:cube dir="r"/>
+      </p:transition>
+    </mc:Choice>
+    <mc:Fallback>
+      <p:transition spd="med">
+        <p:push dir="r"/>
+      </p:transition>
+    </mc:Fallback>
+  </mc:AlternateContent>
 </p:sld>
 </file>
 
@@ -14094,7 +18756,7 @@
                 </a:solidFill>
                 <a:latin typeface="Montserrat"/>
               </a:rPr>
-              <a:t>009 / 021</a:t>
+              <a:t>009 / 027</a:t>
             </a:r>
           </a:p>
         </p:txBody>
@@ -14203,7 +18865,7 @@
       </p:sp>
       <p:sp>
         <p:nvSpPr>
-          <p:cNvPr id="7" name="Rounded Rectangle 6"/>
+          <p:cNvPr id="7" name="Rectangle 6"/>
           <p:cNvSpPr/>
           <p:nvPr/>
         </p:nvSpPr>
@@ -14212,7 +18874,7 @@
             <a:off x="868680" y="1627632"/>
             <a:ext cx="2011680" cy="73152"/>
           </a:xfrm>
-          <a:prstGeom prst="roundRect">
+          <a:prstGeom prst="rect">
             <a:avLst/>
           </a:prstGeom>
           <a:solidFill>
@@ -14253,8 +18915,8 @@
         </p:nvSpPr>
         <p:spPr>
           <a:xfrm>
-            <a:off x="822960" y="1965960"/>
-            <a:ext cx="4983480" cy="4206240"/>
+            <a:off x="6355080" y="1965960"/>
+            <a:ext cx="5029200" cy="4206240"/>
           </a:xfrm>
           <a:prstGeom prst="rect">
             <a:avLst/>
@@ -14376,8 +19038,8 @@
         </p:nvSpPr>
         <p:spPr>
           <a:xfrm>
-            <a:off x="5806440" y="1051560"/>
-            <a:ext cx="5298947" cy="4629150"/>
+            <a:off x="822960" y="1965960"/>
+            <a:ext cx="5303520" cy="4572000"/>
           </a:xfrm>
           <a:prstGeom prst="roundRect">
             <a:avLst/>
@@ -14422,8 +19084,8 @@
         </p:nvSpPr>
         <p:spPr>
           <a:xfrm>
-            <a:off x="6080760" y="2726055"/>
-            <a:ext cx="4750307" cy="1280160"/>
+            <a:off x="1097280" y="3611880"/>
+            <a:ext cx="4754880" cy="1280160"/>
           </a:xfrm>
           <a:prstGeom prst="rect">
             <a:avLst/>
@@ -14444,7 +19106,7 @@
                 </a:solidFill>
                 <a:latin typeface="Montserrat"/>
               </a:rPr>
-              <a:t>IMAGEN REALISTA</a:t>
+              <a:t>IMAGEN</a:t>
             </a:r>
           </a:p>
           <a:p>
@@ -14466,6 +19128,18 @@
   <p:clrMapOvr>
     <a:masterClrMapping/>
   </p:clrMapOvr>
+  <mc:AlternateContent xmlns:mc="http://schemas.openxmlformats.org/markup-compatibility/2006">
+    <mc:Choice xmlns:p14="http://schemas.microsoft.com/office/powerpoint/2010/main" Requires="p14">
+      <p:transition spd="med" p14:dur="700">
+        <p14:cube dir="l"/>
+      </p:transition>
+    </mc:Choice>
+    <mc:Fallback>
+      <p:transition spd="med">
+        <p:push dir="l"/>
+      </p:transition>
+    </mc:Fallback>
+  </mc:AlternateContent>
 </p:sld>
 </file>
 

--- a/Curso Gas B/09 - UNE 60670 - Generalidades y terminologia/09 - UNE 60670 - Generalidades y terminologia - Vídeo 3.pptx
+++ b/Curso Gas B/09 - UNE 60670 - Generalidades y terminologia/09 - UNE 60670 - Generalidades y terminologia - Vídeo 3.pptx
@@ -828,7 +828,7 @@
           <a:lstStyle/>
           <a:p>
             <a:r>
-              <a:t>N1: Bloque estrella, las siglas de presión: ¿cuál es la máxima continuada?</a:t>
+              <a:t>N1: Primera pregunta, y va del bloque estrella, las siglas de presión. Te la leo entera. ¿Qué presión es la máxima a la que la instalación puede estar sometida de forma continuada? Escucha las cuatro opciones. Opción A: la MIP, eme i pe. Opción B: la TOP, te o pe. Opción C: la OP, o pe. Opción D: la MOP, eme o pe. Piénsalo un momento.</a:t>
             </a:r>
           </a:p>
           <a:p>
@@ -903,12 +903,12 @@
           <a:lstStyle/>
           <a:p>
             <a:r>
-              <a:t>N1: ¿Por qué la MOP?</a:t>
-            </a:r>
-          </a:p>
-          <a:p>
-            <a:r>
-              <a:t>N2: Porque la presión máxima de operación es la más alta a la que la instalación puede estar sometida de forma continuada en condiciones normales. La MIP es la máxima en un incidente breve, la TOP la máxima temporal y la OP la que hay ahora mismo. Truco: eme de MOP igual a mantenida, i de MIP igual a incidente, te de TOP igual a temporal.</a:t>
+              <a:t>N2: La respuesta correcta es la opción D: la MOP. ¿Por qué? Porque la presión máxima de operación es la más alta a la que la instalación puede estar sometida de forma continuada, en condiciones normales. La MIP es la máxima en un incidente breve, la TOP la máxima temporal y la OP la que hay ahora mismo. El truco de las iniciales: eme de MOP igual a mantenida, i de MIP igual a incidente, te de TOP igual a temporal.</a:t>
+            </a:r>
+          </a:p>
+          <a:p>
+            <a:r>
+              <a:t>N1: MOP, la mantenida.</a:t>
             </a:r>
           </a:p>
         </p:txBody>
@@ -1578,7 +1578,7 @@
           <a:lstStyle/>
           <a:p>
             <a:r>
-              <a:t>N1: Un solo número lo decide: ¿desde qué temperatura la soldadura es fuerte?</a:t>
+              <a:t>N1: Segunda pregunta, un solo número lo decide. Te la leo. ¿A partir de qué temperatura de fusión del material de aportación la soldadura es fuerte? Escucha las cuatro opciones. Opción A: doscientos veinte grados. Opción B: trescientos cincuenta grados. Opción C: cuatrocientos cincuenta grados. Opción D: seiscientos grados. Tómate un segundo.</a:t>
             </a:r>
           </a:p>
           <a:p>
@@ -1653,12 +1653,12 @@
           <a:lstStyle/>
           <a:p>
             <a:r>
-              <a:t>N1: ¿Por qué cuatrocientos cincuenta grados?</a:t>
-            </a:r>
-          </a:p>
-          <a:p>
-            <a:r>
-              <a:t>N2: Porque la soldadura fuerte es aquella cuyo material de aportación funde a cuatrocientos cincuenta grados o más; la blanda funde por debajo, a partir de doscientos veinte. La fuerte aguanta más y se exige en los tramos más comprometidos. Truco: un solo número, cuatrocientos cincuenta grados.</a:t>
+              <a:t>N2: La respuesta correcta es la opción C: cuatrocientos cincuenta grados. ¿Por qué? Porque la soldadura fuerte es aquella cuyo material de aportación funde a cuatrocientos cincuenta grados o más; la blanda funde por debajo, a partir de doscientos veinte grados. Los doscientos veinte marcan el arranque de la blanda, no la frontera; y trescientos cincuenta o seiscientos son solo distractores. La fuerte aguanta más y se exige en los tramos más comprometidos. El truco: un solo número, cuatrocientos cincuenta grados.</a:t>
+            </a:r>
+          </a:p>
+          <a:p>
+            <a:r>
+              <a:t>N1: Cuatrocientos cincuenta, blanda abajo, fuerte arriba.</a:t>
             </a:r>
           </a:p>
         </p:txBody>
@@ -1803,12 +1803,12 @@
           <a:lstStyle/>
           <a:p>
             <a:r>
-              <a:t>N1: Tres válvulas, tres papeles: ¿qué hace la de sobrepresión, la VAS?</a:t>
-            </a:r>
-          </a:p>
-          <a:p>
-            <a:r>
-              <a:t>N2: Pista: no corta, respira; suelta algo al exterior y sigue trabajando.</a:t>
+              <a:t>N1: Última pregunta del tema, tres válvulas y tres papeles. Te la leo entera. ¿Qué hace la válvula de alivio de seguridad, la VAS, o de sobrepresión? Escucha las cuatro opciones. Opción A: corta el suministro cuando la presión baja demasiado. Opción B: alivia soltando un poco de gas al exterior para bajar la presión. Opción C: corta el suministro cuando la presión sube demasiado. Opción D: regula la presión aguas abajo de forma continua. Piénsalo un momento.</a:t>
+            </a:r>
+          </a:p>
+          <a:p>
+            <a:r>
+              <a:t>N2: Pista: esta no corta, respira; suelta algo al exterior y sigue trabajando.</a:t>
             </a:r>
           </a:p>
         </p:txBody>
@@ -1878,12 +1878,12 @@
           <a:lstStyle/>
           <a:p>
             <a:r>
-              <a:t>N1: ¿Por qué la B?</a:t>
-            </a:r>
-          </a:p>
-          <a:p>
-            <a:r>
-              <a:t>N2: Porque la válvula de alivio de seguridad, o de sobrepresión, alivia: cuando la presión pasa de un valor suelta al exterior una pequeña cantidad de gas para bajarla, y luego sigue trabajando. La que corta por presión alta es la de máxima presión, y la que corta por presión baja es la de mínima. Regla: la de alivio respira, y las de máxima y mínima cierran.</a:t>
+              <a:t>N2: La respuesta correcta es la opción B: alivia soltando un poco de gas al exterior para bajar la presión. ¿Por qué? Porque la válvula de alivio de seguridad, o de sobrepresión, cuando la presión pasa de un valor suelta al exterior una pequeña cantidad de gas para bajarla, y luego sigue trabajando. La opción C, cortar por presión alta, es la de máxima presión; la opción A, cortar por presión baja, es la de mínima; y regular de forma continua, la opción D, es el regulador, no una válvula de seguridad. La regla: la de alivio respira, y las de máxima y mínima cierran.</a:t>
+            </a:r>
+          </a:p>
+          <a:p>
+            <a:r>
+              <a:t>N1: La VAS respira, las VIS cierran.</a:t>
             </a:r>
           </a:p>
         </p:txBody>
